--- a/outputs/ghostfix-hackathon-pitch.pptx
+++ b/outputs/ghostfix-hackathon-pitch.pptx
@@ -2,20 +2,20 @@
 <file path=ppt/presentation.xml><?xml version="1.0" encoding="utf-8"?>
 <p:presentation xmlns:p="http://schemas.openxmlformats.org/presentationml/2006/main">
   <p:sldMasterIdLst>
-    <p:sldMasterId xmlns:r="http://schemas.openxmlformats.org/officeDocument/2006/relationships" id="2147483648" r:id="Rfada0abc2f134190"/>
+    <p:sldMasterId xmlns:r="http://schemas.openxmlformats.org/officeDocument/2006/relationships" id="2147483648" r:id="R1b63a40dd53246c4"/>
   </p:sldMasterIdLst>
   <p:notesMasterIdLst>
-    <p:notesMasterId xmlns:r="http://schemas.openxmlformats.org/officeDocument/2006/relationships" r:id="R7508b59fd91e4770"/>
+    <p:notesMasterId xmlns:r="http://schemas.openxmlformats.org/officeDocument/2006/relationships" r:id="R2683454c8f884dc9"/>
   </p:notesMasterIdLst>
   <p:sldIdLst>
-    <p:sldId xmlns:r="http://schemas.openxmlformats.org/officeDocument/2006/relationships" id="256" r:id="R8929524445164e11"/>
-    <p:sldId xmlns:r="http://schemas.openxmlformats.org/officeDocument/2006/relationships" id="257" r:id="R0fc5c5d2838d43f5"/>
-    <p:sldId xmlns:r="http://schemas.openxmlformats.org/officeDocument/2006/relationships" id="258" r:id="Rc7d7f579cf0e4511"/>
-    <p:sldId xmlns:r="http://schemas.openxmlformats.org/officeDocument/2006/relationships" id="259" r:id="R916101bb84f244a1"/>
-    <p:sldId xmlns:r="http://schemas.openxmlformats.org/officeDocument/2006/relationships" id="260" r:id="Rc2edddd5378f43ef"/>
-    <p:sldId xmlns:r="http://schemas.openxmlformats.org/officeDocument/2006/relationships" id="261" r:id="R005866ddcd4240ec"/>
-    <p:sldId xmlns:r="http://schemas.openxmlformats.org/officeDocument/2006/relationships" id="262" r:id="R69942345ad9b4738"/>
-    <p:sldId xmlns:r="http://schemas.openxmlformats.org/officeDocument/2006/relationships" id="263" r:id="Rf4aa5d54ad5e4770"/>
+    <p:sldId xmlns:r="http://schemas.openxmlformats.org/officeDocument/2006/relationships" id="256" r:id="R3f03f052ad5c4c99"/>
+    <p:sldId xmlns:r="http://schemas.openxmlformats.org/officeDocument/2006/relationships" id="257" r:id="R9f7610a4ab7247ce"/>
+    <p:sldId xmlns:r="http://schemas.openxmlformats.org/officeDocument/2006/relationships" id="258" r:id="R5c99ce0ec61d409c"/>
+    <p:sldId xmlns:r="http://schemas.openxmlformats.org/officeDocument/2006/relationships" id="259" r:id="R11c504f5dfb94bf7"/>
+    <p:sldId xmlns:r="http://schemas.openxmlformats.org/officeDocument/2006/relationships" id="260" r:id="R41ca038ac76d4347"/>
+    <p:sldId xmlns:r="http://schemas.openxmlformats.org/officeDocument/2006/relationships" id="261" r:id="R112cbddcdbc84976"/>
+    <p:sldId xmlns:r="http://schemas.openxmlformats.org/officeDocument/2006/relationships" id="262" r:id="R05a6881bcf34497c"/>
+    <p:sldId xmlns:r="http://schemas.openxmlformats.org/officeDocument/2006/relationships" id="263" r:id="R760a3744450d4c84"/>
   </p:sldIdLst>
   <p:sldSz cx="12192000" cy="6858000"/>
   <p:notesSz cx="6858000" cy="9144000"/>
@@ -1070,7 +1070,7 @@
   </p:cSld>
   <p:clrMap bg1="lt1" tx1="dk1" bg2="lt2" tx2="dk2" accent1="accent1" accent2="accent2" accent3="accent3" accent4="accent4" accent5="accent5" accent6="accent6" hlink="hlink" folHlink="folHlink"/>
   <p:sldLayoutIdLst>
-    <p:sldLayoutId xmlns:r="http://schemas.openxmlformats.org/officeDocument/2006/relationships" id="2147483649" r:id="Rafcf1bc7346c460f"/>
+    <p:sldLayoutId xmlns:r="http://schemas.openxmlformats.org/officeDocument/2006/relationships" id="2147483649" r:id="Rcb1d40db33b64fe3"/>
   </p:sldLayoutIdLst>
   <p:txStyles>
     <p:titleStyle>
@@ -1621,7 +1621,7 @@
           <p:cNvPr id="1" name="">
             <a:extLst xmlns:a="http://schemas.openxmlformats.org/drawingml/2006/main">
               <a:ext uri="{FF2B5EF4-FFF2-40B4-BE49-F238E27FC236}">
-                <a16:creationId xmlns:a16="http://schemas.microsoft.com/office/drawing/2014/main" id="{0A1DB711-CC7E-4693-8164-00D82B159E98}"/>
+                <a16:creationId xmlns:a16="http://schemas.microsoft.com/office/drawing/2014/main" id="{BB3FB10E-1A2E-444C-98E5-8AAF535BE16E}"/>
               </a:ext>
             </a:extLst>
           </p:cNvPr>
@@ -1671,7 +1671,7 @@
           <p:cNvPr id="2" name="">
             <a:extLst xmlns:a="http://schemas.openxmlformats.org/drawingml/2006/main">
               <a:ext uri="{FF2B5EF4-FFF2-40B4-BE49-F238E27FC236}">
-                <a16:creationId xmlns:a16="http://schemas.microsoft.com/office/drawing/2014/main" id="{80F75963-398F-47FE-BB06-C99154A2F361}"/>
+                <a16:creationId xmlns:a16="http://schemas.microsoft.com/office/drawing/2014/main" id="{EC59CED7-DC96-4B7C-853C-4F2D2AE735CE}"/>
               </a:ext>
             </a:extLst>
           </p:cNvPr>
@@ -1721,7 +1721,7 @@
           <p:cNvPr id="3" name="">
             <a:extLst xmlns:a="http://schemas.openxmlformats.org/drawingml/2006/main">
               <a:ext uri="{FF2B5EF4-FFF2-40B4-BE49-F238E27FC236}">
-                <a16:creationId xmlns:a16="http://schemas.microsoft.com/office/drawing/2014/main" id="{E7E7086C-24E8-42A1-AAEE-BA6216F8639B}"/>
+                <a16:creationId xmlns:a16="http://schemas.microsoft.com/office/drawing/2014/main" id="{39EB6C87-2C76-4A83-BE35-A6BACBEF4CA5}"/>
               </a:ext>
             </a:extLst>
           </p:cNvPr>
@@ -1771,7 +1771,7 @@
           <p:cNvPr id="4" name="">
             <a:extLst xmlns:a="http://schemas.openxmlformats.org/drawingml/2006/main">
               <a:ext uri="{FF2B5EF4-FFF2-40B4-BE49-F238E27FC236}">
-                <a16:creationId xmlns:a16="http://schemas.microsoft.com/office/drawing/2014/main" id="{C0A6B334-E804-4918-A4A9-C056CE7388BB}"/>
+                <a16:creationId xmlns:a16="http://schemas.microsoft.com/office/drawing/2014/main" id="{9872B9E9-0D13-4A3A-97C0-03BC773ECABD}"/>
               </a:ext>
             </a:extLst>
           </p:cNvPr>
@@ -1806,7 +1806,7 @@
           <p:cNvPr id="5" name="">
             <a:extLst xmlns:a="http://schemas.openxmlformats.org/drawingml/2006/main">
               <a:ext uri="{FF2B5EF4-FFF2-40B4-BE49-F238E27FC236}">
-                <a16:creationId xmlns:a16="http://schemas.microsoft.com/office/drawing/2014/main" id="{B4AF91AE-E092-4040-A93C-13B71A509FAC}"/>
+                <a16:creationId xmlns:a16="http://schemas.microsoft.com/office/drawing/2014/main" id="{9D7F02A4-1F57-436B-9B9D-48105DC4738F}"/>
               </a:ext>
             </a:extLst>
           </p:cNvPr>
@@ -1856,7 +1856,7 @@
           <p:cNvPr id="6" name="">
             <a:extLst xmlns:a="http://schemas.openxmlformats.org/drawingml/2006/main">
               <a:ext uri="{FF2B5EF4-FFF2-40B4-BE49-F238E27FC236}">
-                <a16:creationId xmlns:a16="http://schemas.microsoft.com/office/drawing/2014/main" id="{61A120B4-A092-4F62-841F-C2EAEF434776}"/>
+                <a16:creationId xmlns:a16="http://schemas.microsoft.com/office/drawing/2014/main" id="{DBB214E1-8F42-4148-A25C-B912D85DA838}"/>
               </a:ext>
             </a:extLst>
           </p:cNvPr>
@@ -1891,7 +1891,7 @@
           <p:cNvPr id="7" name="">
             <a:extLst xmlns:a="http://schemas.openxmlformats.org/drawingml/2006/main">
               <a:ext uri="{FF2B5EF4-FFF2-40B4-BE49-F238E27FC236}">
-                <a16:creationId xmlns:a16="http://schemas.microsoft.com/office/drawing/2014/main" id="{12DB5B29-6B61-4DC0-A002-F452AABC2C51}"/>
+                <a16:creationId xmlns:a16="http://schemas.microsoft.com/office/drawing/2014/main" id="{B4F61FBD-6400-422D-BBF2-C281600D7664}"/>
               </a:ext>
             </a:extLst>
           </p:cNvPr>
@@ -1926,7 +1926,7 @@
           <p:cNvPr id="8" name="">
             <a:extLst xmlns:a="http://schemas.openxmlformats.org/drawingml/2006/main">
               <a:ext uri="{FF2B5EF4-FFF2-40B4-BE49-F238E27FC236}">
-                <a16:creationId xmlns:a16="http://schemas.microsoft.com/office/drawing/2014/main" id="{B734A80A-0CC9-43E9-8C4A-9E39968455ED}"/>
+                <a16:creationId xmlns:a16="http://schemas.microsoft.com/office/drawing/2014/main" id="{89BF401B-657A-4169-8AE3-1C523EA38558}"/>
               </a:ext>
             </a:extLst>
           </p:cNvPr>
@@ -1961,7 +1961,7 @@
           <p:cNvPr id="9" name="">
             <a:extLst xmlns:a="http://schemas.openxmlformats.org/drawingml/2006/main">
               <a:ext uri="{FF2B5EF4-FFF2-40B4-BE49-F238E27FC236}">
-                <a16:creationId xmlns:a16="http://schemas.microsoft.com/office/drawing/2014/main" id="{F840BD30-0302-45FB-9CB2-3DECF29671C9}"/>
+                <a16:creationId xmlns:a16="http://schemas.microsoft.com/office/drawing/2014/main" id="{057743D7-0C23-4BFA-89F0-35F3A6078D16}"/>
               </a:ext>
             </a:extLst>
           </p:cNvPr>
@@ -1996,7 +1996,7 @@
           <p:cNvPr id="10" name="">
             <a:extLst xmlns:a="http://schemas.openxmlformats.org/drawingml/2006/main">
               <a:ext uri="{FF2B5EF4-FFF2-40B4-BE49-F238E27FC236}">
-                <a16:creationId xmlns:a16="http://schemas.microsoft.com/office/drawing/2014/main" id="{E417DDEB-FCE3-4D60-986C-80B34DB39ACD}"/>
+                <a16:creationId xmlns:a16="http://schemas.microsoft.com/office/drawing/2014/main" id="{90463C9F-36FF-4210-9CC1-BBF2F6159EB3}"/>
               </a:ext>
             </a:extLst>
           </p:cNvPr>
@@ -2031,7 +2031,7 @@
           <p:cNvPr id="11" name="">
             <a:extLst xmlns:a="http://schemas.openxmlformats.org/drawingml/2006/main">
               <a:ext uri="{FF2B5EF4-FFF2-40B4-BE49-F238E27FC236}">
-                <a16:creationId xmlns:a16="http://schemas.microsoft.com/office/drawing/2014/main" id="{FA16D385-0F9B-4845-9E53-D6CB24AD02AB}"/>
+                <a16:creationId xmlns:a16="http://schemas.microsoft.com/office/drawing/2014/main" id="{54BAB38F-F469-4315-8A26-85FE0DAB31B2}"/>
               </a:ext>
             </a:extLst>
           </p:cNvPr>
@@ -2066,7 +2066,7 @@
           <p:cNvPr id="12" name="">
             <a:extLst xmlns:a="http://schemas.openxmlformats.org/drawingml/2006/main">
               <a:ext uri="{FF2B5EF4-FFF2-40B4-BE49-F238E27FC236}">
-                <a16:creationId xmlns:a16="http://schemas.microsoft.com/office/drawing/2014/main" id="{AC50D006-BCEB-4737-BBDD-4B0D07103E17}"/>
+                <a16:creationId xmlns:a16="http://schemas.microsoft.com/office/drawing/2014/main" id="{8D1974FF-116A-426F-B39F-286C36DAFF07}"/>
               </a:ext>
             </a:extLst>
           </p:cNvPr>
@@ -2116,7 +2116,7 @@
           <p:cNvPr id="13" name="">
             <a:extLst xmlns:a="http://schemas.openxmlformats.org/drawingml/2006/main">
               <a:ext uri="{FF2B5EF4-FFF2-40B4-BE49-F238E27FC236}">
-                <a16:creationId xmlns:a16="http://schemas.microsoft.com/office/drawing/2014/main" id="{744D01C6-CF3B-4B99-A630-06CB4D3B4898}"/>
+                <a16:creationId xmlns:a16="http://schemas.microsoft.com/office/drawing/2014/main" id="{A1F22C99-ACA0-4CC1-ACFD-8115ECB56A17}"/>
               </a:ext>
             </a:extLst>
           </p:cNvPr>
@@ -2151,7 +2151,7 @@
           <p:cNvPr id="14" name="">
             <a:extLst xmlns:a="http://schemas.openxmlformats.org/drawingml/2006/main">
               <a:ext uri="{FF2B5EF4-FFF2-40B4-BE49-F238E27FC236}">
-                <a16:creationId xmlns:a16="http://schemas.microsoft.com/office/drawing/2014/main" id="{B3BF27F3-6501-440F-9448-B5D9F1D5C433}"/>
+                <a16:creationId xmlns:a16="http://schemas.microsoft.com/office/drawing/2014/main" id="{919D15CA-A7E2-4011-B379-87ECC9C4C450}"/>
               </a:ext>
             </a:extLst>
           </p:cNvPr>
@@ -2201,7 +2201,7 @@
           <p:cNvPr id="15" name="">
             <a:extLst xmlns:a="http://schemas.openxmlformats.org/drawingml/2006/main">
               <a:ext uri="{FF2B5EF4-FFF2-40B4-BE49-F238E27FC236}">
-                <a16:creationId xmlns:a16="http://schemas.microsoft.com/office/drawing/2014/main" id="{A83802A8-8FD4-4A1B-BF81-B0A4131F3BE3}"/>
+                <a16:creationId xmlns:a16="http://schemas.microsoft.com/office/drawing/2014/main" id="{77E500F8-F49D-4495-8900-D4B975EFA1AB}"/>
               </a:ext>
             </a:extLst>
           </p:cNvPr>
@@ -2251,7 +2251,7 @@
           <p:cNvPr id="16" name="">
             <a:extLst xmlns:a="http://schemas.openxmlformats.org/drawingml/2006/main">
               <a:ext uri="{FF2B5EF4-FFF2-40B4-BE49-F238E27FC236}">
-                <a16:creationId xmlns:a16="http://schemas.microsoft.com/office/drawing/2014/main" id="{1221FADF-879C-44AB-B4C8-43F8FB0D1842}"/>
+                <a16:creationId xmlns:a16="http://schemas.microsoft.com/office/drawing/2014/main" id="{740789FC-4FAE-40E7-9BE2-7C8F861D315A}"/>
               </a:ext>
             </a:extLst>
           </p:cNvPr>
@@ -2301,7 +2301,7 @@
           <p:cNvPr id="17" name="">
             <a:extLst xmlns:a="http://schemas.openxmlformats.org/drawingml/2006/main">
               <a:ext uri="{FF2B5EF4-FFF2-40B4-BE49-F238E27FC236}">
-                <a16:creationId xmlns:a16="http://schemas.microsoft.com/office/drawing/2014/main" id="{C4EA0ADA-3BBF-465B-8751-6C38CDA5266B}"/>
+                <a16:creationId xmlns:a16="http://schemas.microsoft.com/office/drawing/2014/main" id="{FB79BD09-DA70-4CE8-8BD3-BB77AB4238D4}"/>
               </a:ext>
             </a:extLst>
           </p:cNvPr>
@@ -2351,7 +2351,7 @@
           <p:cNvPr id="18" name="">
             <a:extLst xmlns:a="http://schemas.openxmlformats.org/drawingml/2006/main">
               <a:ext uri="{FF2B5EF4-FFF2-40B4-BE49-F238E27FC236}">
-                <a16:creationId xmlns:a16="http://schemas.microsoft.com/office/drawing/2014/main" id="{D60672D1-4048-4C9D-AB0C-FA2B261C2B6F}"/>
+                <a16:creationId xmlns:a16="http://schemas.microsoft.com/office/drawing/2014/main" id="{2502C67D-B54F-4B06-8CE3-B8FC267414F4}"/>
               </a:ext>
             </a:extLst>
           </p:cNvPr>
@@ -2386,7 +2386,7 @@
           <p:cNvPr id="19" name="">
             <a:extLst xmlns:a="http://schemas.openxmlformats.org/drawingml/2006/main">
               <a:ext uri="{FF2B5EF4-FFF2-40B4-BE49-F238E27FC236}">
-                <a16:creationId xmlns:a16="http://schemas.microsoft.com/office/drawing/2014/main" id="{92189828-855A-4E66-BC2B-DC1FB71D7DCA}"/>
+                <a16:creationId xmlns:a16="http://schemas.microsoft.com/office/drawing/2014/main" id="{FEDF66E7-3950-47C0-8729-EAF3CFEB96E3}"/>
               </a:ext>
             </a:extLst>
           </p:cNvPr>
@@ -2436,7 +2436,7 @@
           <p:cNvPr id="20" name="">
             <a:extLst xmlns:a="http://schemas.openxmlformats.org/drawingml/2006/main">
               <a:ext uri="{FF2B5EF4-FFF2-40B4-BE49-F238E27FC236}">
-                <a16:creationId xmlns:a16="http://schemas.microsoft.com/office/drawing/2014/main" id="{C3AC25D3-2D98-4D36-9715-A5EB955587F2}"/>
+                <a16:creationId xmlns:a16="http://schemas.microsoft.com/office/drawing/2014/main" id="{F8D5C4F6-1B4F-41E9-8368-DC5E511537DF}"/>
               </a:ext>
             </a:extLst>
           </p:cNvPr>
@@ -2484,7 +2484,7 @@
     </p:spTree>
     <p:extLst>
       <p:ext uri="{BB962C8B-B14F-4D97-AF65-F5344CB8AC3E}">
-        <p14:creationId xmlns:p14="http://schemas.microsoft.com/office/powerpoint/2010/main" val="2026364828"/>
+        <p14:creationId xmlns:p14="http://schemas.microsoft.com/office/powerpoint/2010/main" val="1351371649"/>
       </p:ext>
     </p:extLst>
   </p:cSld>
@@ -2515,7 +2515,7 @@
           <p:cNvPr id="1" name="">
             <a:extLst xmlns:a="http://schemas.openxmlformats.org/drawingml/2006/main">
               <a:ext uri="{FF2B5EF4-FFF2-40B4-BE49-F238E27FC236}">
-                <a16:creationId xmlns:a16="http://schemas.microsoft.com/office/drawing/2014/main" id="{AE9947CF-7665-439B-A642-0DED1AF8FBC8}"/>
+                <a16:creationId xmlns:a16="http://schemas.microsoft.com/office/drawing/2014/main" id="{80DD0EB7-E1A9-4F07-A2DA-B3A501DC063A}"/>
               </a:ext>
             </a:extLst>
           </p:cNvPr>
@@ -2565,7 +2565,7 @@
           <p:cNvPr id="2" name="">
             <a:extLst xmlns:a="http://schemas.openxmlformats.org/drawingml/2006/main">
               <a:ext uri="{FF2B5EF4-FFF2-40B4-BE49-F238E27FC236}">
-                <a16:creationId xmlns:a16="http://schemas.microsoft.com/office/drawing/2014/main" id="{432DE639-D710-47F9-A43A-F42DB07F33EF}"/>
+                <a16:creationId xmlns:a16="http://schemas.microsoft.com/office/drawing/2014/main" id="{61CCA305-5BA0-49BA-ADD8-040E3F4F32BB}"/>
               </a:ext>
             </a:extLst>
           </p:cNvPr>
@@ -2615,7 +2615,7 @@
           <p:cNvPr id="3" name="">
             <a:extLst xmlns:a="http://schemas.openxmlformats.org/drawingml/2006/main">
               <a:ext uri="{FF2B5EF4-FFF2-40B4-BE49-F238E27FC236}">
-                <a16:creationId xmlns:a16="http://schemas.microsoft.com/office/drawing/2014/main" id="{8159A204-75D2-4D5E-8E27-DF7AFD93E817}"/>
+                <a16:creationId xmlns:a16="http://schemas.microsoft.com/office/drawing/2014/main" id="{F888D0D8-C604-416E-80A8-56AF311FEAEF}"/>
               </a:ext>
             </a:extLst>
           </p:cNvPr>
@@ -2627,7 +2627,7 @@
         <p:spPr>
           <a:xfrm xmlns:a="http://schemas.openxmlformats.org/drawingml/2006/main">
             <a:off x="704850" y="990600"/>
-            <a:ext cx="7239000" cy="933450"/>
+            <a:ext cx="7905750" cy="1123950"/>
           </a:xfrm>
           <a:prstGeom xmlns:a="http://schemas.openxmlformats.org/drawingml/2006/main" prst="rect">
             <a:avLst/>
@@ -2643,14 +2643,14 @@
           <a:lstStyle xmlns:a="http://schemas.openxmlformats.org/drawingml/2006/main"/>
           <a:p xmlns:a="http://schemas.openxmlformats.org/drawingml/2006/main">
             <a:pPr algn="l">
-              <a:defRPr sz="3225" b="1">
+              <a:defRPr sz="3000" b="1">
                 <a:solidFill>
                   <a:srgbClr val="111111"/>
                 </a:solidFill>
               </a:defRPr>
             </a:pPr>
             <a:r>
-              <a:rPr sz="3225" b="1">
+              <a:rPr sz="3000" b="1">
                 <a:solidFill>
                   <a:srgbClr val="111111"/>
                 </a:solidFill>
@@ -2665,19 +2665,19 @@
           <p:cNvPr id="4" name="">
             <a:extLst xmlns:a="http://schemas.openxmlformats.org/drawingml/2006/main">
               <a:ext uri="{FF2B5EF4-FFF2-40B4-BE49-F238E27FC236}">
-                <a16:creationId xmlns:a16="http://schemas.microsoft.com/office/drawing/2014/main" id="{9CB9BC6D-0069-48E9-97D0-D8CD749878FB}"/>
-              </a:ext>
-            </a:extLst>
-          </p:cNvPr>
-          <p:cNvSpPr>
-            <a:spLocks xmlns:a="http://schemas.openxmlformats.org/drawingml/2006/main" noGrp="1"/>
-          </p:cNvSpPr>
-          <p:nvPr/>
-        </p:nvSpPr>
-        <p:spPr>
-          <a:xfrm xmlns:a="http://schemas.openxmlformats.org/drawingml/2006/main">
-            <a:off x="723900" y="1885950"/>
-            <a:ext cx="6667500" cy="590550"/>
+                <a16:creationId xmlns:a16="http://schemas.microsoft.com/office/drawing/2014/main" id="{2EE8C0B3-FB71-4684-8729-36F0DA5B522B}"/>
+              </a:ext>
+            </a:extLst>
+          </p:cNvPr>
+          <p:cNvSpPr>
+            <a:spLocks xmlns:a="http://schemas.openxmlformats.org/drawingml/2006/main" noGrp="1"/>
+          </p:cNvSpPr>
+          <p:nvPr/>
+        </p:nvSpPr>
+        <p:spPr>
+          <a:xfrm xmlns:a="http://schemas.openxmlformats.org/drawingml/2006/main">
+            <a:off x="723900" y="2114550"/>
+            <a:ext cx="7239000" cy="628650"/>
           </a:xfrm>
           <a:prstGeom xmlns:a="http://schemas.openxmlformats.org/drawingml/2006/main" prst="rect">
             <a:avLst/>
@@ -2693,14 +2693,14 @@
           <a:lstStyle xmlns:a="http://schemas.openxmlformats.org/drawingml/2006/main"/>
           <a:p xmlns:a="http://schemas.openxmlformats.org/drawingml/2006/main">
             <a:pPr algn="l">
-              <a:defRPr sz="1575" b="0">
+              <a:defRPr sz="1500" b="0">
                 <a:solidFill>
                   <a:srgbClr val="7A7A7A"/>
                 </a:solidFill>
               </a:defRPr>
             </a:pPr>
             <a:r>
-              <a:rPr sz="1575" b="0">
+              <a:rPr sz="1500" b="0">
                 <a:solidFill>
                   <a:srgbClr val="7A7A7A"/>
                 </a:solidFill>
@@ -2715,7 +2715,7 @@
           <p:cNvPr id="5" name="">
             <a:extLst xmlns:a="http://schemas.openxmlformats.org/drawingml/2006/main">
               <a:ext uri="{FF2B5EF4-FFF2-40B4-BE49-F238E27FC236}">
-                <a16:creationId xmlns:a16="http://schemas.microsoft.com/office/drawing/2014/main" id="{56D5F7DC-B15F-4A1F-9816-8AAAF9403D8B}"/>
+                <a16:creationId xmlns:a16="http://schemas.microsoft.com/office/drawing/2014/main" id="{549FED7A-21DB-4059-AE7B-B0ABF6EDFCEE}"/>
               </a:ext>
             </a:extLst>
           </p:cNvPr>
@@ -2765,7 +2765,7 @@
           <p:cNvPr id="6" name="">
             <a:extLst xmlns:a="http://schemas.openxmlformats.org/drawingml/2006/main">
               <a:ext uri="{FF2B5EF4-FFF2-40B4-BE49-F238E27FC236}">
-                <a16:creationId xmlns:a16="http://schemas.microsoft.com/office/drawing/2014/main" id="{4D328F55-7144-4779-B5A6-184C745F477F}"/>
+                <a16:creationId xmlns:a16="http://schemas.microsoft.com/office/drawing/2014/main" id="{6A883FEF-75EF-4DBB-BBF8-3B85C5A250A3}"/>
               </a:ext>
             </a:extLst>
           </p:cNvPr>
@@ -2800,7 +2800,7 @@
           <p:cNvPr id="7" name="">
             <a:extLst xmlns:a="http://schemas.openxmlformats.org/drawingml/2006/main">
               <a:ext uri="{FF2B5EF4-FFF2-40B4-BE49-F238E27FC236}">
-                <a16:creationId xmlns:a16="http://schemas.microsoft.com/office/drawing/2014/main" id="{2EC40E55-B11A-4CC8-BE90-8C9B9B78079F}"/>
+                <a16:creationId xmlns:a16="http://schemas.microsoft.com/office/drawing/2014/main" id="{1612FA8F-CC2B-4DB7-BFAA-B88E4B88A3B9}"/>
               </a:ext>
             </a:extLst>
           </p:cNvPr>
@@ -2850,7 +2850,7 @@
           <p:cNvPr id="8" name="">
             <a:extLst xmlns:a="http://schemas.openxmlformats.org/drawingml/2006/main">
               <a:ext uri="{FF2B5EF4-FFF2-40B4-BE49-F238E27FC236}">
-                <a16:creationId xmlns:a16="http://schemas.microsoft.com/office/drawing/2014/main" id="{079BE4BB-9760-4B04-AFE2-AC6275F7F3C1}"/>
+                <a16:creationId xmlns:a16="http://schemas.microsoft.com/office/drawing/2014/main" id="{EEA67542-A568-4D82-B5C1-57A1B17A73A9}"/>
               </a:ext>
             </a:extLst>
           </p:cNvPr>
@@ -2934,7 +2934,36 @@
           <p:cNvPr id="9" name="">
             <a:extLst xmlns:a="http://schemas.openxmlformats.org/drawingml/2006/main">
               <a:ext uri="{FF2B5EF4-FFF2-40B4-BE49-F238E27FC236}">
-                <a16:creationId xmlns:a16="http://schemas.microsoft.com/office/drawing/2014/main" id="{8ABE5136-2BD0-4927-B34B-7320922D75C8}"/>
+                <a16:creationId xmlns:a16="http://schemas.microsoft.com/office/drawing/2014/main" id="{96148F1B-9F79-4805-BA9F-91E83AC05ED4}"/>
+              </a:ext>
+            </a:extLst>
+          </p:cNvPr>
+          <p:cNvSpPr>
+            <a:spLocks xmlns:a="http://schemas.openxmlformats.org/drawingml/2006/main" noGrp="1"/>
+          </p:cNvSpPr>
+          <p:nvPr/>
+        </p:nvSpPr>
+        <p:spPr>
+          <a:xfrm xmlns:a="http://schemas.openxmlformats.org/drawingml/2006/main">
+            <a:off x="5057775" y="3781425"/>
+            <a:ext cx="19050" cy="19050"/>
+          </a:xfrm>
+          <a:prstGeom xmlns:a="http://schemas.openxmlformats.org/drawingml/2006/main" prst="rect">
+            <a:avLst/>
+          </a:prstGeom>
+          <a:noFill xmlns:a="http://schemas.openxmlformats.org/drawingml/2006/main"/>
+          <a:ln xmlns:a="http://schemas.openxmlformats.org/drawingml/2006/main" w="0">
+            <a:noFill/>
+            <a:prstDash val="solid"/>
+          </a:ln>
+        </p:spPr>
+      </p:sp>
+      <p:sp>
+        <p:nvSpPr>
+          <p:cNvPr id="10" name="">
+            <a:extLst xmlns:a="http://schemas.openxmlformats.org/drawingml/2006/main">
+              <a:ext uri="{FF2B5EF4-FFF2-40B4-BE49-F238E27FC236}">
+                <a16:creationId xmlns:a16="http://schemas.microsoft.com/office/drawing/2014/main" id="{D4CC3B6C-7A1D-4568-A9D8-EB25F5274038}"/>
               </a:ext>
             </a:extLst>
           </p:cNvPr>
@@ -2946,35 +2975,6 @@
         <p:spPr>
           <a:xfrm xmlns:a="http://schemas.openxmlformats.org/drawingml/2006/main">
             <a:off x="4105275" y="3781425"/>
-            <a:ext cx="19050" cy="19050"/>
-          </a:xfrm>
-          <a:prstGeom xmlns:a="http://schemas.openxmlformats.org/drawingml/2006/main" prst="rect">
-            <a:avLst/>
-          </a:prstGeom>
-          <a:noFill xmlns:a="http://schemas.openxmlformats.org/drawingml/2006/main"/>
-          <a:ln xmlns:a="http://schemas.openxmlformats.org/drawingml/2006/main" w="0">
-            <a:noFill/>
-            <a:prstDash val="solid"/>
-          </a:ln>
-        </p:spPr>
-      </p:sp>
-      <p:sp>
-        <p:nvSpPr>
-          <p:cNvPr id="10" name="">
-            <a:extLst xmlns:a="http://schemas.openxmlformats.org/drawingml/2006/main">
-              <a:ext uri="{FF2B5EF4-FFF2-40B4-BE49-F238E27FC236}">
-                <a16:creationId xmlns:a16="http://schemas.microsoft.com/office/drawing/2014/main" id="{5AADA1EF-F6CE-42BD-B789-0ED5FC6D205C}"/>
-              </a:ext>
-            </a:extLst>
-          </p:cNvPr>
-          <p:cNvSpPr>
-            <a:spLocks xmlns:a="http://schemas.openxmlformats.org/drawingml/2006/main" noGrp="1"/>
-          </p:cNvSpPr>
-          <p:nvPr/>
-        </p:nvSpPr>
-        <p:spPr>
-          <a:xfrm xmlns:a="http://schemas.openxmlformats.org/drawingml/2006/main">
-            <a:off x="5057775" y="3781425"/>
             <a:ext cx="19050" cy="19050"/>
           </a:xfrm>
           <a:prstGeom xmlns:a="http://schemas.openxmlformats.org/drawingml/2006/main" prst="rect">
@@ -2991,13 +2991,13 @@
         <p:nvCxnSpPr>
           <p:cNvPr id="28" name=""/>
           <p:cNvCxnSpPr>
-            <a:stCxn xmlns:a="http://schemas.openxmlformats.org/drawingml/2006/main" id="9" idx="3"/>
-            <a:endCxn xmlns:a="http://schemas.openxmlformats.org/drawingml/2006/main" id="10" idx="1"/>
+            <a:stCxn xmlns:a="http://schemas.openxmlformats.org/drawingml/2006/main" id="9" idx="1"/>
+            <a:endCxn xmlns:a="http://schemas.openxmlformats.org/drawingml/2006/main" id="10" idx="3"/>
           </p:cNvCxnSpPr>
           <p:nvPr/>
         </p:nvCxnSpPr>
         <p:spPr>
-          <a:xfrm xmlns:a="http://schemas.openxmlformats.org/drawingml/2006/main">
+          <a:xfrm xmlns:a="http://schemas.openxmlformats.org/drawingml/2006/main" flipH="1">
             <a:off x="4124325" y="3790950"/>
             <a:ext cx="933450" cy="0"/>
           </a:xfrm>
@@ -3018,7 +3018,7 @@
           <p:cNvPr id="12" name="">
             <a:extLst xmlns:a="http://schemas.openxmlformats.org/drawingml/2006/main">
               <a:ext uri="{FF2B5EF4-FFF2-40B4-BE49-F238E27FC236}">
-                <a16:creationId xmlns:a16="http://schemas.microsoft.com/office/drawing/2014/main" id="{9A10CD38-8367-429A-B886-F65F75F18501}"/>
+                <a16:creationId xmlns:a16="http://schemas.microsoft.com/office/drawing/2014/main" id="{569C7430-E35D-4B7A-8DCE-F2CE45EF44E9}"/>
               </a:ext>
             </a:extLst>
           </p:cNvPr>
@@ -3053,7 +3053,7 @@
           <p:cNvPr id="13" name="">
             <a:extLst xmlns:a="http://schemas.openxmlformats.org/drawingml/2006/main">
               <a:ext uri="{FF2B5EF4-FFF2-40B4-BE49-F238E27FC236}">
-                <a16:creationId xmlns:a16="http://schemas.microsoft.com/office/drawing/2014/main" id="{41022058-C1EA-488F-A009-FA14E911BF88}"/>
+                <a16:creationId xmlns:a16="http://schemas.microsoft.com/office/drawing/2014/main" id="{F71824B9-BEBC-48BE-8E5E-675C7358DCF7}"/>
               </a:ext>
             </a:extLst>
           </p:cNvPr>
@@ -3103,7 +3103,7 @@
           <p:cNvPr id="14" name="">
             <a:extLst xmlns:a="http://schemas.openxmlformats.org/drawingml/2006/main">
               <a:ext uri="{FF2B5EF4-FFF2-40B4-BE49-F238E27FC236}">
-                <a16:creationId xmlns:a16="http://schemas.microsoft.com/office/drawing/2014/main" id="{9FB10F5C-41CD-482C-A4CF-B248FEDD32FD}"/>
+                <a16:creationId xmlns:a16="http://schemas.microsoft.com/office/drawing/2014/main" id="{DDD8623C-6E35-48F2-8547-64DB798D6111}"/>
               </a:ext>
             </a:extLst>
           </p:cNvPr>
@@ -3153,7 +3153,7 @@
           <p:cNvPr id="15" name="">
             <a:extLst xmlns:a="http://schemas.openxmlformats.org/drawingml/2006/main">
               <a:ext uri="{FF2B5EF4-FFF2-40B4-BE49-F238E27FC236}">
-                <a16:creationId xmlns:a16="http://schemas.microsoft.com/office/drawing/2014/main" id="{BC07B776-9EEB-4652-BCFE-0DFEEBC45954}"/>
+                <a16:creationId xmlns:a16="http://schemas.microsoft.com/office/drawing/2014/main" id="{9D578EBB-CD1C-4068-936F-540782653FC8}"/>
               </a:ext>
             </a:extLst>
           </p:cNvPr>
@@ -3237,7 +3237,7 @@
           <p:cNvPr id="16" name="">
             <a:extLst xmlns:a="http://schemas.openxmlformats.org/drawingml/2006/main">
               <a:ext uri="{FF2B5EF4-FFF2-40B4-BE49-F238E27FC236}">
-                <a16:creationId xmlns:a16="http://schemas.microsoft.com/office/drawing/2014/main" id="{5F0AB295-F885-45CE-BE47-A3FBE6EBBB32}"/>
+                <a16:creationId xmlns:a16="http://schemas.microsoft.com/office/drawing/2014/main" id="{74DCD914-9BB9-4038-BD61-214C952D7D1F}"/>
               </a:ext>
             </a:extLst>
           </p:cNvPr>
@@ -3249,11 +3249,11 @@
         <p:spPr>
           <a:xfrm xmlns:a="http://schemas.openxmlformats.org/drawingml/2006/main">
             <a:off x="9124950" y="2876550"/>
-            <a:ext cx="1905000" cy="1828800"/>
+            <a:ext cx="1905000" cy="1962150"/>
           </a:xfrm>
           <a:prstGeom xmlns:a="http://schemas.openxmlformats.org/drawingml/2006/main" prst="roundRect">
             <a:avLst>
-              <a:gd name="adj" fmla="val 8333"/>
+              <a:gd name="adj" fmla="val 8000"/>
             </a:avLst>
           </a:prstGeom>
           <a:solidFill xmlns:a="http://schemas.openxmlformats.org/drawingml/2006/main">
@@ -3272,19 +3272,19 @@
           <p:cNvPr id="17" name="">
             <a:extLst xmlns:a="http://schemas.openxmlformats.org/drawingml/2006/main">
               <a:ext uri="{FF2B5EF4-FFF2-40B4-BE49-F238E27FC236}">
-                <a16:creationId xmlns:a16="http://schemas.microsoft.com/office/drawing/2014/main" id="{055B6069-F2D3-4D8A-9B39-881A87100AD9}"/>
-              </a:ext>
-            </a:extLst>
-          </p:cNvPr>
-          <p:cNvSpPr>
-            <a:spLocks xmlns:a="http://schemas.openxmlformats.org/drawingml/2006/main" noGrp="1"/>
-          </p:cNvSpPr>
-          <p:nvPr/>
-        </p:nvSpPr>
-        <p:spPr>
-          <a:xfrm xmlns:a="http://schemas.openxmlformats.org/drawingml/2006/main">
-            <a:off x="9429750" y="3295650"/>
-            <a:ext cx="1390650" cy="1028700"/>
+                <a16:creationId xmlns:a16="http://schemas.microsoft.com/office/drawing/2014/main" id="{14A162DC-B2D3-4F57-8B82-CF615A49CB75}"/>
+              </a:ext>
+            </a:extLst>
+          </p:cNvPr>
+          <p:cNvSpPr>
+            <a:spLocks xmlns:a="http://schemas.openxmlformats.org/drawingml/2006/main" noGrp="1"/>
+          </p:cNvSpPr>
+          <p:nvPr/>
+        </p:nvSpPr>
+        <p:spPr>
+          <a:xfrm xmlns:a="http://schemas.openxmlformats.org/drawingml/2006/main">
+            <a:off x="9429750" y="3257550"/>
+            <a:ext cx="1390650" cy="1257300"/>
           </a:xfrm>
           <a:prstGeom xmlns:a="http://schemas.openxmlformats.org/drawingml/2006/main" prst="rect">
             <a:avLst/>
@@ -3300,14 +3300,14 @@
           <a:lstStyle xmlns:a="http://schemas.openxmlformats.org/drawingml/2006/main"/>
           <a:p xmlns:a="http://schemas.openxmlformats.org/drawingml/2006/main">
             <a:pPr algn="l">
-              <a:defRPr sz="2325" b="1">
+              <a:defRPr sz="2175" b="1">
                 <a:solidFill>
                   <a:srgbClr val="FFFFFF"/>
                 </a:solidFill>
               </a:defRPr>
             </a:pPr>
             <a:r>
-              <a:rPr sz="2325" b="1">
+              <a:rPr sz="2175" b="1">
                 <a:solidFill>
                   <a:srgbClr val="FFFFFF"/>
                 </a:solidFill>
@@ -3317,14 +3317,14 @@
           </a:p>
           <a:p xmlns:a="http://schemas.openxmlformats.org/drawingml/2006/main">
             <a:pPr algn="l">
-              <a:defRPr sz="2325" b="1">
+              <a:defRPr sz="2175" b="1">
                 <a:solidFill>
                   <a:srgbClr val="FFFFFF"/>
                 </a:solidFill>
               </a:defRPr>
             </a:pPr>
             <a:r>
-              <a:rPr sz="2325" b="1">
+              <a:rPr sz="2175" b="1">
                 <a:solidFill>
                   <a:srgbClr val="FFFFFF"/>
                 </a:solidFill>
@@ -3334,14 +3334,14 @@
           </a:p>
           <a:p xmlns:a="http://schemas.openxmlformats.org/drawingml/2006/main">
             <a:pPr algn="l">
-              <a:defRPr sz="2325" b="1">
+              <a:defRPr sz="2175" b="1">
                 <a:solidFill>
                   <a:srgbClr val="FFFFFF"/>
                 </a:solidFill>
               </a:defRPr>
             </a:pPr>
             <a:r>
-              <a:rPr sz="2325" b="1">
+              <a:rPr sz="2175" b="1">
                 <a:solidFill>
                   <a:srgbClr val="FFFFFF"/>
                 </a:solidFill>
@@ -3354,7 +3354,7 @@
     </p:spTree>
     <p:extLst>
       <p:ext uri="{BB962C8B-B14F-4D97-AF65-F5344CB8AC3E}">
-        <p14:creationId xmlns:p14="http://schemas.microsoft.com/office/powerpoint/2010/main" val="1474649958"/>
+        <p14:creationId xmlns:p14="http://schemas.microsoft.com/office/powerpoint/2010/main" val="799062832"/>
       </p:ext>
     </p:extLst>
   </p:cSld>
@@ -3385,7 +3385,7 @@
           <p:cNvPr id="1" name="">
             <a:extLst xmlns:a="http://schemas.openxmlformats.org/drawingml/2006/main">
               <a:ext uri="{FF2B5EF4-FFF2-40B4-BE49-F238E27FC236}">
-                <a16:creationId xmlns:a16="http://schemas.microsoft.com/office/drawing/2014/main" id="{F846D062-2741-4416-A081-890D8E302F40}"/>
+                <a16:creationId xmlns:a16="http://schemas.microsoft.com/office/drawing/2014/main" id="{5D50ADDB-35BD-4970-99FA-29D6391C1FBF}"/>
               </a:ext>
             </a:extLst>
           </p:cNvPr>
@@ -3435,7 +3435,7 @@
           <p:cNvPr id="2" name="">
             <a:extLst xmlns:a="http://schemas.openxmlformats.org/drawingml/2006/main">
               <a:ext uri="{FF2B5EF4-FFF2-40B4-BE49-F238E27FC236}">
-                <a16:creationId xmlns:a16="http://schemas.microsoft.com/office/drawing/2014/main" id="{5AC45013-B9A1-4A15-A13B-197A32908A13}"/>
+                <a16:creationId xmlns:a16="http://schemas.microsoft.com/office/drawing/2014/main" id="{A0FA42AA-2FDC-4D8B-A6A5-74EB99A45A0B}"/>
               </a:ext>
             </a:extLst>
           </p:cNvPr>
@@ -3485,7 +3485,7 @@
           <p:cNvPr id="3" name="">
             <a:extLst xmlns:a="http://schemas.openxmlformats.org/drawingml/2006/main">
               <a:ext uri="{FF2B5EF4-FFF2-40B4-BE49-F238E27FC236}">
-                <a16:creationId xmlns:a16="http://schemas.microsoft.com/office/drawing/2014/main" id="{14100CD8-4A6A-4EE9-8292-B5364831126D}"/>
+                <a16:creationId xmlns:a16="http://schemas.microsoft.com/office/drawing/2014/main" id="{B51A813F-7D8B-48C8-8048-28A1FCF56B4C}"/>
               </a:ext>
             </a:extLst>
           </p:cNvPr>
@@ -3497,7 +3497,7 @@
         <p:spPr>
           <a:xfrm xmlns:a="http://schemas.openxmlformats.org/drawingml/2006/main">
             <a:off x="704850" y="990600"/>
-            <a:ext cx="7239000" cy="933450"/>
+            <a:ext cx="7905750" cy="1123950"/>
           </a:xfrm>
           <a:prstGeom xmlns:a="http://schemas.openxmlformats.org/drawingml/2006/main" prst="rect">
             <a:avLst/>
@@ -3513,14 +3513,14 @@
           <a:lstStyle xmlns:a="http://schemas.openxmlformats.org/drawingml/2006/main"/>
           <a:p xmlns:a="http://schemas.openxmlformats.org/drawingml/2006/main">
             <a:pPr algn="l">
-              <a:defRPr sz="3225" b="1">
+              <a:defRPr sz="3000" b="1">
                 <a:solidFill>
                   <a:srgbClr val="111111"/>
                 </a:solidFill>
               </a:defRPr>
             </a:pPr>
             <a:r>
-              <a:rPr sz="3225" b="1">
+              <a:rPr sz="3000" b="1">
                 <a:solidFill>
                   <a:srgbClr val="111111"/>
                 </a:solidFill>
@@ -3535,19 +3535,19 @@
           <p:cNvPr id="4" name="">
             <a:extLst xmlns:a="http://schemas.openxmlformats.org/drawingml/2006/main">
               <a:ext uri="{FF2B5EF4-FFF2-40B4-BE49-F238E27FC236}">
-                <a16:creationId xmlns:a16="http://schemas.microsoft.com/office/drawing/2014/main" id="{3AED382F-13E8-42C5-A601-A9D755FDC10E}"/>
-              </a:ext>
-            </a:extLst>
-          </p:cNvPr>
-          <p:cNvSpPr>
-            <a:spLocks xmlns:a="http://schemas.openxmlformats.org/drawingml/2006/main" noGrp="1"/>
-          </p:cNvSpPr>
-          <p:nvPr/>
-        </p:nvSpPr>
-        <p:spPr>
-          <a:xfrm xmlns:a="http://schemas.openxmlformats.org/drawingml/2006/main">
-            <a:off x="723900" y="1885950"/>
-            <a:ext cx="6667500" cy="590550"/>
+                <a16:creationId xmlns:a16="http://schemas.microsoft.com/office/drawing/2014/main" id="{4174070F-6BC2-41A1-9BBD-4B550DD77CE4}"/>
+              </a:ext>
+            </a:extLst>
+          </p:cNvPr>
+          <p:cNvSpPr>
+            <a:spLocks xmlns:a="http://schemas.openxmlformats.org/drawingml/2006/main" noGrp="1"/>
+          </p:cNvSpPr>
+          <p:nvPr/>
+        </p:nvSpPr>
+        <p:spPr>
+          <a:xfrm xmlns:a="http://schemas.openxmlformats.org/drawingml/2006/main">
+            <a:off x="723900" y="2114550"/>
+            <a:ext cx="7239000" cy="628650"/>
           </a:xfrm>
           <a:prstGeom xmlns:a="http://schemas.openxmlformats.org/drawingml/2006/main" prst="rect">
             <a:avLst/>
@@ -3563,14 +3563,14 @@
           <a:lstStyle xmlns:a="http://schemas.openxmlformats.org/drawingml/2006/main"/>
           <a:p xmlns:a="http://schemas.openxmlformats.org/drawingml/2006/main">
             <a:pPr algn="l">
-              <a:defRPr sz="1575" b="0">
+              <a:defRPr sz="1500" b="0">
                 <a:solidFill>
                   <a:srgbClr val="7A7A7A"/>
                 </a:solidFill>
               </a:defRPr>
             </a:pPr>
             <a:r>
-              <a:rPr sz="1575" b="0">
+              <a:rPr sz="1500" b="0">
                 <a:solidFill>
                   <a:srgbClr val="7A7A7A"/>
                 </a:solidFill>
@@ -3585,7 +3585,7 @@
           <p:cNvPr id="5" name="">
             <a:extLst xmlns:a="http://schemas.openxmlformats.org/drawingml/2006/main">
               <a:ext uri="{FF2B5EF4-FFF2-40B4-BE49-F238E27FC236}">
-                <a16:creationId xmlns:a16="http://schemas.microsoft.com/office/drawing/2014/main" id="{333BA13F-025A-4CB0-ACD8-8349D9C528E1}"/>
+                <a16:creationId xmlns:a16="http://schemas.microsoft.com/office/drawing/2014/main" id="{AE7C8E54-3C07-4B41-806B-911B57D647D9}"/>
               </a:ext>
             </a:extLst>
           </p:cNvPr>
@@ -3635,7 +3635,7 @@
           <p:cNvPr id="6" name="">
             <a:extLst xmlns:a="http://schemas.openxmlformats.org/drawingml/2006/main">
               <a:ext uri="{FF2B5EF4-FFF2-40B4-BE49-F238E27FC236}">
-                <a16:creationId xmlns:a16="http://schemas.microsoft.com/office/drawing/2014/main" id="{DD0B1976-D187-44C5-B3E8-57A62A88D448}"/>
+                <a16:creationId xmlns:a16="http://schemas.microsoft.com/office/drawing/2014/main" id="{4FC56A72-F27D-4DEC-8F34-B55C5C6CC7F2}"/>
               </a:ext>
             </a:extLst>
           </p:cNvPr>
@@ -3670,7 +3670,7 @@
           <p:cNvPr id="7" name="">
             <a:extLst xmlns:a="http://schemas.openxmlformats.org/drawingml/2006/main">
               <a:ext uri="{FF2B5EF4-FFF2-40B4-BE49-F238E27FC236}">
-                <a16:creationId xmlns:a16="http://schemas.microsoft.com/office/drawing/2014/main" id="{2A42555B-CBAD-41AC-8751-19A377FE235C}"/>
+                <a16:creationId xmlns:a16="http://schemas.microsoft.com/office/drawing/2014/main" id="{E73FD962-E689-43E2-94A0-F50AC1016CA6}"/>
               </a:ext>
             </a:extLst>
           </p:cNvPr>
@@ -3720,7 +3720,7 @@
           <p:cNvPr id="8" name="">
             <a:extLst xmlns:a="http://schemas.openxmlformats.org/drawingml/2006/main">
               <a:ext uri="{FF2B5EF4-FFF2-40B4-BE49-F238E27FC236}">
-                <a16:creationId xmlns:a16="http://schemas.microsoft.com/office/drawing/2014/main" id="{577543F7-F93D-44A6-B7E1-AFA7FCDC4E8B}"/>
+                <a16:creationId xmlns:a16="http://schemas.microsoft.com/office/drawing/2014/main" id="{F405729F-B4D9-4FB6-A1BF-DF644CC3690A}"/>
               </a:ext>
             </a:extLst>
           </p:cNvPr>
@@ -3770,7 +3770,7 @@
           <p:cNvPr id="9" name="">
             <a:extLst xmlns:a="http://schemas.openxmlformats.org/drawingml/2006/main">
               <a:ext uri="{FF2B5EF4-FFF2-40B4-BE49-F238E27FC236}">
-                <a16:creationId xmlns:a16="http://schemas.microsoft.com/office/drawing/2014/main" id="{EDE6F73F-B53A-431A-AF87-A341CB06FB0E}"/>
+                <a16:creationId xmlns:a16="http://schemas.microsoft.com/office/drawing/2014/main" id="{E9CFB09F-6A18-4F08-953E-40A790370A37}"/>
               </a:ext>
             </a:extLst>
           </p:cNvPr>
@@ -3805,7 +3805,7 @@
           <p:cNvPr id="10" name="">
             <a:extLst xmlns:a="http://schemas.openxmlformats.org/drawingml/2006/main">
               <a:ext uri="{FF2B5EF4-FFF2-40B4-BE49-F238E27FC236}">
-                <a16:creationId xmlns:a16="http://schemas.microsoft.com/office/drawing/2014/main" id="{06E4BE06-66F5-44E5-8094-8B0183882DB2}"/>
+                <a16:creationId xmlns:a16="http://schemas.microsoft.com/office/drawing/2014/main" id="{7A107FBB-A28B-44F7-9F6E-3A6557D402EF}"/>
               </a:ext>
             </a:extLst>
           </p:cNvPr>
@@ -3855,7 +3855,7 @@
           <p:cNvPr id="11" name="">
             <a:extLst xmlns:a="http://schemas.openxmlformats.org/drawingml/2006/main">
               <a:ext uri="{FF2B5EF4-FFF2-40B4-BE49-F238E27FC236}">
-                <a16:creationId xmlns:a16="http://schemas.microsoft.com/office/drawing/2014/main" id="{0FF85DA1-7873-4151-BF8A-F57C623DB62F}"/>
+                <a16:creationId xmlns:a16="http://schemas.microsoft.com/office/drawing/2014/main" id="{39C63379-BFCC-4230-839E-896ABB5B3A54}"/>
               </a:ext>
             </a:extLst>
           </p:cNvPr>
@@ -3905,7 +3905,7 @@
           <p:cNvPr id="12" name="">
             <a:extLst xmlns:a="http://schemas.openxmlformats.org/drawingml/2006/main">
               <a:ext uri="{FF2B5EF4-FFF2-40B4-BE49-F238E27FC236}">
-                <a16:creationId xmlns:a16="http://schemas.microsoft.com/office/drawing/2014/main" id="{2C4B5521-A206-44F9-9808-959DA9B44054}"/>
+                <a16:creationId xmlns:a16="http://schemas.microsoft.com/office/drawing/2014/main" id="{80D450BD-81FC-4649-AE1C-64D4BE2CCD72}"/>
               </a:ext>
             </a:extLst>
           </p:cNvPr>
@@ -3940,7 +3940,7 @@
           <p:cNvPr id="13" name="">
             <a:extLst xmlns:a="http://schemas.openxmlformats.org/drawingml/2006/main">
               <a:ext uri="{FF2B5EF4-FFF2-40B4-BE49-F238E27FC236}">
-                <a16:creationId xmlns:a16="http://schemas.microsoft.com/office/drawing/2014/main" id="{D4490AAA-A6ED-4959-982B-7B7C9FD22FB8}"/>
+                <a16:creationId xmlns:a16="http://schemas.microsoft.com/office/drawing/2014/main" id="{19314A4E-6773-4F1C-9848-A6AA121C739D}"/>
               </a:ext>
             </a:extLst>
           </p:cNvPr>
@@ -3990,7 +3990,7 @@
           <p:cNvPr id="14" name="">
             <a:extLst xmlns:a="http://schemas.openxmlformats.org/drawingml/2006/main">
               <a:ext uri="{FF2B5EF4-FFF2-40B4-BE49-F238E27FC236}">
-                <a16:creationId xmlns:a16="http://schemas.microsoft.com/office/drawing/2014/main" id="{312E7732-9B6A-4862-874C-1BBDCFD61508}"/>
+                <a16:creationId xmlns:a16="http://schemas.microsoft.com/office/drawing/2014/main" id="{EB368F81-475E-41EB-96F5-3DA42FF1814C}"/>
               </a:ext>
             </a:extLst>
           </p:cNvPr>
@@ -4040,7 +4040,7 @@
           <p:cNvPr id="15" name="">
             <a:extLst xmlns:a="http://schemas.openxmlformats.org/drawingml/2006/main">
               <a:ext uri="{FF2B5EF4-FFF2-40B4-BE49-F238E27FC236}">
-                <a16:creationId xmlns:a16="http://schemas.microsoft.com/office/drawing/2014/main" id="{8275A7FA-C84D-4CA6-B37C-F83B29D83959}"/>
+                <a16:creationId xmlns:a16="http://schemas.microsoft.com/office/drawing/2014/main" id="{FC5A2E10-55AD-40F4-96FC-C08EA8E7F2F7}"/>
               </a:ext>
             </a:extLst>
           </p:cNvPr>
@@ -4075,7 +4075,7 @@
           <p:cNvPr id="16" name="">
             <a:extLst xmlns:a="http://schemas.openxmlformats.org/drawingml/2006/main">
               <a:ext uri="{FF2B5EF4-FFF2-40B4-BE49-F238E27FC236}">
-                <a16:creationId xmlns:a16="http://schemas.microsoft.com/office/drawing/2014/main" id="{4D5CACB3-C59C-45CF-B492-5B1F748A1A8A}"/>
+                <a16:creationId xmlns:a16="http://schemas.microsoft.com/office/drawing/2014/main" id="{B4A9570C-9741-4006-AFA1-ABFB5031FF20}"/>
               </a:ext>
             </a:extLst>
           </p:cNvPr>
@@ -4125,7 +4125,7 @@
           <p:cNvPr id="17" name="">
             <a:extLst xmlns:a="http://schemas.openxmlformats.org/drawingml/2006/main">
               <a:ext uri="{FF2B5EF4-FFF2-40B4-BE49-F238E27FC236}">
-                <a16:creationId xmlns:a16="http://schemas.microsoft.com/office/drawing/2014/main" id="{8B929BC5-BC96-4E06-815B-4B2107B4FC60}"/>
+                <a16:creationId xmlns:a16="http://schemas.microsoft.com/office/drawing/2014/main" id="{D158FDA3-A673-45DE-A531-6C32501862F6}"/>
               </a:ext>
             </a:extLst>
           </p:cNvPr>
@@ -4173,7 +4173,7 @@
     </p:spTree>
     <p:extLst>
       <p:ext uri="{BB962C8B-B14F-4D97-AF65-F5344CB8AC3E}">
-        <p14:creationId xmlns:p14="http://schemas.microsoft.com/office/powerpoint/2010/main" val="1214540493"/>
+        <p14:creationId xmlns:p14="http://schemas.microsoft.com/office/powerpoint/2010/main" val="1746579245"/>
       </p:ext>
     </p:extLst>
   </p:cSld>
@@ -4204,7 +4204,7 @@
           <p:cNvPr id="1" name="">
             <a:extLst xmlns:a="http://schemas.openxmlformats.org/drawingml/2006/main">
               <a:ext uri="{FF2B5EF4-FFF2-40B4-BE49-F238E27FC236}">
-                <a16:creationId xmlns:a16="http://schemas.microsoft.com/office/drawing/2014/main" id="{856C7162-5013-4052-A7B6-0E388F4C0F7F}"/>
+                <a16:creationId xmlns:a16="http://schemas.microsoft.com/office/drawing/2014/main" id="{48CDE437-F4D7-440B-9B14-A7C6F723552E}"/>
               </a:ext>
             </a:extLst>
           </p:cNvPr>
@@ -4254,7 +4254,7 @@
           <p:cNvPr id="2" name="">
             <a:extLst xmlns:a="http://schemas.openxmlformats.org/drawingml/2006/main">
               <a:ext uri="{FF2B5EF4-FFF2-40B4-BE49-F238E27FC236}">
-                <a16:creationId xmlns:a16="http://schemas.microsoft.com/office/drawing/2014/main" id="{90CCAD25-4F6C-4494-98A2-C774C2D69CA5}"/>
+                <a16:creationId xmlns:a16="http://schemas.microsoft.com/office/drawing/2014/main" id="{C97E4AA1-FB25-4C8E-B4D8-4A57CA1EDC95}"/>
               </a:ext>
             </a:extLst>
           </p:cNvPr>
@@ -4304,7 +4304,7 @@
           <p:cNvPr id="3" name="">
             <a:extLst xmlns:a="http://schemas.openxmlformats.org/drawingml/2006/main">
               <a:ext uri="{FF2B5EF4-FFF2-40B4-BE49-F238E27FC236}">
-                <a16:creationId xmlns:a16="http://schemas.microsoft.com/office/drawing/2014/main" id="{D6176164-2A28-4DAE-B2EE-262EABB58387}"/>
+                <a16:creationId xmlns:a16="http://schemas.microsoft.com/office/drawing/2014/main" id="{C98EC7D4-0531-4B64-998C-CF2612E78E43}"/>
               </a:ext>
             </a:extLst>
           </p:cNvPr>
@@ -4316,7 +4316,7 @@
         <p:spPr>
           <a:xfrm xmlns:a="http://schemas.openxmlformats.org/drawingml/2006/main">
             <a:off x="704850" y="990600"/>
-            <a:ext cx="7239000" cy="933450"/>
+            <a:ext cx="7905750" cy="1123950"/>
           </a:xfrm>
           <a:prstGeom xmlns:a="http://schemas.openxmlformats.org/drawingml/2006/main" prst="rect">
             <a:avLst/>
@@ -4332,14 +4332,14 @@
           <a:lstStyle xmlns:a="http://schemas.openxmlformats.org/drawingml/2006/main"/>
           <a:p xmlns:a="http://schemas.openxmlformats.org/drawingml/2006/main">
             <a:pPr algn="l">
-              <a:defRPr sz="3225" b="1">
+              <a:defRPr sz="3000" b="1">
                 <a:solidFill>
                   <a:srgbClr val="111111"/>
                 </a:solidFill>
               </a:defRPr>
             </a:pPr>
             <a:r>
-              <a:rPr sz="3225" b="1">
+              <a:rPr sz="3000" b="1">
                 <a:solidFill>
                   <a:srgbClr val="111111"/>
                 </a:solidFill>
@@ -4354,19 +4354,19 @@
           <p:cNvPr id="4" name="">
             <a:extLst xmlns:a="http://schemas.openxmlformats.org/drawingml/2006/main">
               <a:ext uri="{FF2B5EF4-FFF2-40B4-BE49-F238E27FC236}">
-                <a16:creationId xmlns:a16="http://schemas.microsoft.com/office/drawing/2014/main" id="{42F2ADBA-A0E7-47A6-BACA-F6B996D1CB19}"/>
-              </a:ext>
-            </a:extLst>
-          </p:cNvPr>
-          <p:cNvSpPr>
-            <a:spLocks xmlns:a="http://schemas.openxmlformats.org/drawingml/2006/main" noGrp="1"/>
-          </p:cNvSpPr>
-          <p:nvPr/>
-        </p:nvSpPr>
-        <p:spPr>
-          <a:xfrm xmlns:a="http://schemas.openxmlformats.org/drawingml/2006/main">
-            <a:off x="723900" y="1885950"/>
-            <a:ext cx="6667500" cy="590550"/>
+                <a16:creationId xmlns:a16="http://schemas.microsoft.com/office/drawing/2014/main" id="{A7D8B3BE-FD43-4C0C-8375-DB8790CCED1B}"/>
+              </a:ext>
+            </a:extLst>
+          </p:cNvPr>
+          <p:cNvSpPr>
+            <a:spLocks xmlns:a="http://schemas.openxmlformats.org/drawingml/2006/main" noGrp="1"/>
+          </p:cNvSpPr>
+          <p:nvPr/>
+        </p:nvSpPr>
+        <p:spPr>
+          <a:xfrm xmlns:a="http://schemas.openxmlformats.org/drawingml/2006/main">
+            <a:off x="723900" y="2114550"/>
+            <a:ext cx="7239000" cy="628650"/>
           </a:xfrm>
           <a:prstGeom xmlns:a="http://schemas.openxmlformats.org/drawingml/2006/main" prst="rect">
             <a:avLst/>
@@ -4382,14 +4382,14 @@
           <a:lstStyle xmlns:a="http://schemas.openxmlformats.org/drawingml/2006/main"/>
           <a:p xmlns:a="http://schemas.openxmlformats.org/drawingml/2006/main">
             <a:pPr algn="l">
-              <a:defRPr sz="1575" b="0">
+              <a:defRPr sz="1500" b="0">
                 <a:solidFill>
                   <a:srgbClr val="7A7A7A"/>
                 </a:solidFill>
               </a:defRPr>
             </a:pPr>
             <a:r>
-              <a:rPr sz="1575" b="0">
+              <a:rPr sz="1500" b="0">
                 <a:solidFill>
                   <a:srgbClr val="7A7A7A"/>
                 </a:solidFill>
@@ -4404,7 +4404,7 @@
           <p:cNvPr id="5" name="">
             <a:extLst xmlns:a="http://schemas.openxmlformats.org/drawingml/2006/main">
               <a:ext uri="{FF2B5EF4-FFF2-40B4-BE49-F238E27FC236}">
-                <a16:creationId xmlns:a16="http://schemas.microsoft.com/office/drawing/2014/main" id="{3A91E791-100E-49B8-965A-2FD360794440}"/>
+                <a16:creationId xmlns:a16="http://schemas.microsoft.com/office/drawing/2014/main" id="{D30D35BA-B271-4272-8CD8-A9B01DA9FB05}"/>
               </a:ext>
             </a:extLst>
           </p:cNvPr>
@@ -4454,7 +4454,7 @@
           <p:cNvPr id="6" name="">
             <a:extLst xmlns:a="http://schemas.openxmlformats.org/drawingml/2006/main">
               <a:ext uri="{FF2B5EF4-FFF2-40B4-BE49-F238E27FC236}">
-                <a16:creationId xmlns:a16="http://schemas.microsoft.com/office/drawing/2014/main" id="{428B1A5C-3041-43AD-AA30-25C0B48CDBA3}"/>
+                <a16:creationId xmlns:a16="http://schemas.microsoft.com/office/drawing/2014/main" id="{F5BDD595-7569-4D52-84C6-397C012BE1BF}"/>
               </a:ext>
             </a:extLst>
           </p:cNvPr>
@@ -4489,7 +4489,7 @@
           <p:cNvPr id="7" name="">
             <a:extLst xmlns:a="http://schemas.openxmlformats.org/drawingml/2006/main">
               <a:ext uri="{FF2B5EF4-FFF2-40B4-BE49-F238E27FC236}">
-                <a16:creationId xmlns:a16="http://schemas.microsoft.com/office/drawing/2014/main" id="{0B44EEBD-A6B5-4361-B277-450F1B45C605}"/>
+                <a16:creationId xmlns:a16="http://schemas.microsoft.com/office/drawing/2014/main" id="{6F28195B-DEE4-4FBD-A292-460B8659B26E}"/>
               </a:ext>
             </a:extLst>
           </p:cNvPr>
@@ -4524,7 +4524,7 @@
           <p:cNvPr id="8" name="">
             <a:extLst xmlns:a="http://schemas.openxmlformats.org/drawingml/2006/main">
               <a:ext uri="{FF2B5EF4-FFF2-40B4-BE49-F238E27FC236}">
-                <a16:creationId xmlns:a16="http://schemas.microsoft.com/office/drawing/2014/main" id="{A2CF0F24-920C-47B8-A128-4E9559AC9307}"/>
+                <a16:creationId xmlns:a16="http://schemas.microsoft.com/office/drawing/2014/main" id="{3FD034FB-5599-44D2-8B2E-D761DBC3A629}"/>
               </a:ext>
             </a:extLst>
           </p:cNvPr>
@@ -4574,7 +4574,7 @@
           <p:cNvPr id="9" name="">
             <a:extLst xmlns:a="http://schemas.openxmlformats.org/drawingml/2006/main">
               <a:ext uri="{FF2B5EF4-FFF2-40B4-BE49-F238E27FC236}">
-                <a16:creationId xmlns:a16="http://schemas.microsoft.com/office/drawing/2014/main" id="{C04C0C1A-0413-44FC-BF59-03CF8B6B35BA}"/>
+                <a16:creationId xmlns:a16="http://schemas.microsoft.com/office/drawing/2014/main" id="{3E30A13B-8562-41BE-97B8-8637DFE5DDAB}"/>
               </a:ext>
             </a:extLst>
           </p:cNvPr>
@@ -4624,7 +4624,7 @@
           <p:cNvPr id="10" name="">
             <a:extLst xmlns:a="http://schemas.openxmlformats.org/drawingml/2006/main">
               <a:ext uri="{FF2B5EF4-FFF2-40B4-BE49-F238E27FC236}">
-                <a16:creationId xmlns:a16="http://schemas.microsoft.com/office/drawing/2014/main" id="{CC35F4FE-74D1-4AE3-A976-D611C33FE8CE}"/>
+                <a16:creationId xmlns:a16="http://schemas.microsoft.com/office/drawing/2014/main" id="{7249A1B2-2800-4204-9336-6842AF5A117A}"/>
               </a:ext>
             </a:extLst>
           </p:cNvPr>
@@ -4674,7 +4674,7 @@
           <p:cNvPr id="11" name="">
             <a:extLst xmlns:a="http://schemas.openxmlformats.org/drawingml/2006/main">
               <a:ext uri="{FF2B5EF4-FFF2-40B4-BE49-F238E27FC236}">
-                <a16:creationId xmlns:a16="http://schemas.microsoft.com/office/drawing/2014/main" id="{4983D2E4-2809-4967-9C02-D25A73077FC8}"/>
+                <a16:creationId xmlns:a16="http://schemas.microsoft.com/office/drawing/2014/main" id="{3433B1E5-DF94-45C6-92BA-54362BFC08D6}"/>
               </a:ext>
             </a:extLst>
           </p:cNvPr>
@@ -4709,7 +4709,7 @@
           <p:cNvPr id="12" name="">
             <a:extLst xmlns:a="http://schemas.openxmlformats.org/drawingml/2006/main">
               <a:ext uri="{FF2B5EF4-FFF2-40B4-BE49-F238E27FC236}">
-                <a16:creationId xmlns:a16="http://schemas.microsoft.com/office/drawing/2014/main" id="{7DE50C43-2E7A-44B0-8F51-95137A97124A}"/>
+                <a16:creationId xmlns:a16="http://schemas.microsoft.com/office/drawing/2014/main" id="{FA807BE4-388C-4C74-BF73-937BDB1D847D}"/>
               </a:ext>
             </a:extLst>
           </p:cNvPr>
@@ -4744,7 +4744,7 @@
           <p:cNvPr id="13" name="">
             <a:extLst xmlns:a="http://schemas.openxmlformats.org/drawingml/2006/main">
               <a:ext uri="{FF2B5EF4-FFF2-40B4-BE49-F238E27FC236}">
-                <a16:creationId xmlns:a16="http://schemas.microsoft.com/office/drawing/2014/main" id="{0CD9DFAF-E2FD-45D2-8DEB-19DE65B2B074}"/>
+                <a16:creationId xmlns:a16="http://schemas.microsoft.com/office/drawing/2014/main" id="{5232569C-5286-4B29-B790-624538EE2EAA}"/>
               </a:ext>
             </a:extLst>
           </p:cNvPr>
@@ -4794,7 +4794,7 @@
           <p:cNvPr id="14" name="">
             <a:extLst xmlns:a="http://schemas.openxmlformats.org/drawingml/2006/main">
               <a:ext uri="{FF2B5EF4-FFF2-40B4-BE49-F238E27FC236}">
-                <a16:creationId xmlns:a16="http://schemas.microsoft.com/office/drawing/2014/main" id="{AB360FA1-CC13-47E3-AE5D-26248E6F16AC}"/>
+                <a16:creationId xmlns:a16="http://schemas.microsoft.com/office/drawing/2014/main" id="{DBF83C39-FE26-4315-B19D-CEB7C0873EA1}"/>
               </a:ext>
             </a:extLst>
           </p:cNvPr>
@@ -4844,7 +4844,7 @@
           <p:cNvPr id="15" name="">
             <a:extLst xmlns:a="http://schemas.openxmlformats.org/drawingml/2006/main">
               <a:ext uri="{FF2B5EF4-FFF2-40B4-BE49-F238E27FC236}">
-                <a16:creationId xmlns:a16="http://schemas.microsoft.com/office/drawing/2014/main" id="{477A5E50-A6D5-42E8-9ACD-90287D46B597}"/>
+                <a16:creationId xmlns:a16="http://schemas.microsoft.com/office/drawing/2014/main" id="{A22AFB03-D6A5-4B22-A34B-FAC8AA7D8AA6}"/>
               </a:ext>
             </a:extLst>
           </p:cNvPr>
@@ -4892,7 +4892,7 @@
     </p:spTree>
     <p:extLst>
       <p:ext uri="{BB962C8B-B14F-4D97-AF65-F5344CB8AC3E}">
-        <p14:creationId xmlns:p14="http://schemas.microsoft.com/office/powerpoint/2010/main" val="422680589"/>
+        <p14:creationId xmlns:p14="http://schemas.microsoft.com/office/powerpoint/2010/main" val="1526012729"/>
       </p:ext>
     </p:extLst>
   </p:cSld>
@@ -4923,7 +4923,7 @@
           <p:cNvPr id="1" name="">
             <a:extLst xmlns:a="http://schemas.openxmlformats.org/drawingml/2006/main">
               <a:ext uri="{FF2B5EF4-FFF2-40B4-BE49-F238E27FC236}">
-                <a16:creationId xmlns:a16="http://schemas.microsoft.com/office/drawing/2014/main" id="{7DEEA939-FC23-4D0E-8D50-C8D8143E8C52}"/>
+                <a16:creationId xmlns:a16="http://schemas.microsoft.com/office/drawing/2014/main" id="{0FF1F2B6-9AAC-46D8-B294-364994CCD76D}"/>
               </a:ext>
             </a:extLst>
           </p:cNvPr>
@@ -4973,7 +4973,7 @@
           <p:cNvPr id="2" name="">
             <a:extLst xmlns:a="http://schemas.openxmlformats.org/drawingml/2006/main">
               <a:ext uri="{FF2B5EF4-FFF2-40B4-BE49-F238E27FC236}">
-                <a16:creationId xmlns:a16="http://schemas.microsoft.com/office/drawing/2014/main" id="{D19B2905-9F23-4DED-BABE-8530DF80485B}"/>
+                <a16:creationId xmlns:a16="http://schemas.microsoft.com/office/drawing/2014/main" id="{341C6B46-87D5-4AD3-958F-AAE0DFDF93D7}"/>
               </a:ext>
             </a:extLst>
           </p:cNvPr>
@@ -5023,7 +5023,7 @@
           <p:cNvPr id="3" name="">
             <a:extLst xmlns:a="http://schemas.openxmlformats.org/drawingml/2006/main">
               <a:ext uri="{FF2B5EF4-FFF2-40B4-BE49-F238E27FC236}">
-                <a16:creationId xmlns:a16="http://schemas.microsoft.com/office/drawing/2014/main" id="{5277DC7A-D180-485F-A67E-A80756794DD4}"/>
+                <a16:creationId xmlns:a16="http://schemas.microsoft.com/office/drawing/2014/main" id="{ACACA71A-DE80-47A7-8EF6-6F36D6660071}"/>
               </a:ext>
             </a:extLst>
           </p:cNvPr>
@@ -5035,7 +5035,7 @@
         <p:spPr>
           <a:xfrm xmlns:a="http://schemas.openxmlformats.org/drawingml/2006/main">
             <a:off x="704850" y="990600"/>
-            <a:ext cx="7239000" cy="933450"/>
+            <a:ext cx="7905750" cy="1123950"/>
           </a:xfrm>
           <a:prstGeom xmlns:a="http://schemas.openxmlformats.org/drawingml/2006/main" prst="rect">
             <a:avLst/>
@@ -5051,19 +5051,19 @@
           <a:lstStyle xmlns:a="http://schemas.openxmlformats.org/drawingml/2006/main"/>
           <a:p xmlns:a="http://schemas.openxmlformats.org/drawingml/2006/main">
             <a:pPr algn="l">
-              <a:defRPr sz="3225" b="1">
+              <a:defRPr sz="3000" b="1">
                 <a:solidFill>
                   <a:srgbClr val="111111"/>
                 </a:solidFill>
               </a:defRPr>
             </a:pPr>
             <a:r>
-              <a:rPr sz="3225" b="1">
+              <a:rPr sz="3000" b="1">
                 <a:solidFill>
                   <a:srgbClr val="111111"/>
                 </a:solidFill>
               </a:rPr>
-              <a:t>Observe → Explain → Recommend → Approve → Deploy</a:t>
+              <a:t>The GhostFix loop</a:t>
             </a:r>
           </a:p>
         </p:txBody>
@@ -5073,19 +5073,19 @@
           <p:cNvPr id="4" name="">
             <a:extLst xmlns:a="http://schemas.openxmlformats.org/drawingml/2006/main">
               <a:ext uri="{FF2B5EF4-FFF2-40B4-BE49-F238E27FC236}">
-                <a16:creationId xmlns:a16="http://schemas.microsoft.com/office/drawing/2014/main" id="{2D3867DB-7CC1-478E-88C3-BC70661B5906}"/>
-              </a:ext>
-            </a:extLst>
-          </p:cNvPr>
-          <p:cNvSpPr>
-            <a:spLocks xmlns:a="http://schemas.openxmlformats.org/drawingml/2006/main" noGrp="1"/>
-          </p:cNvSpPr>
-          <p:nvPr/>
-        </p:nvSpPr>
-        <p:spPr>
-          <a:xfrm xmlns:a="http://schemas.openxmlformats.org/drawingml/2006/main">
-            <a:off x="723900" y="1885950"/>
-            <a:ext cx="6667500" cy="590550"/>
+                <a16:creationId xmlns:a16="http://schemas.microsoft.com/office/drawing/2014/main" id="{9EC66638-675A-4FDF-81F3-29D241B2930A}"/>
+              </a:ext>
+            </a:extLst>
+          </p:cNvPr>
+          <p:cNvSpPr>
+            <a:spLocks xmlns:a="http://schemas.openxmlformats.org/drawingml/2006/main" noGrp="1"/>
+          </p:cNvSpPr>
+          <p:nvPr/>
+        </p:nvSpPr>
+        <p:spPr>
+          <a:xfrm xmlns:a="http://schemas.openxmlformats.org/drawingml/2006/main">
+            <a:off x="723900" y="2114550"/>
+            <a:ext cx="7239000" cy="628650"/>
           </a:xfrm>
           <a:prstGeom xmlns:a="http://schemas.openxmlformats.org/drawingml/2006/main" prst="rect">
             <a:avLst/>
@@ -5101,19 +5101,19 @@
           <a:lstStyle xmlns:a="http://schemas.openxmlformats.org/drawingml/2006/main"/>
           <a:p xmlns:a="http://schemas.openxmlformats.org/drawingml/2006/main">
             <a:pPr algn="l">
-              <a:defRPr sz="1575" b="0">
+              <a:defRPr sz="1500" b="0">
                 <a:solidFill>
                   <a:srgbClr val="7A7A7A"/>
                 </a:solidFill>
               </a:defRPr>
             </a:pPr>
             <a:r>
-              <a:rPr sz="1575" b="0">
+              <a:rPr sz="1500" b="0">
                 <a:solidFill>
                   <a:srgbClr val="7A7A7A"/>
                 </a:solidFill>
               </a:rPr>
-              <a:t>A practical loop for AI answer optimization, built around review and control.</a:t>
+              <a:t>Observe → Explain → Recommend → Approve → Deploy, with review and control built in.</a:t>
             </a:r>
           </a:p>
         </p:txBody>
@@ -5123,7 +5123,7 @@
           <p:cNvPr id="5" name="">
             <a:extLst xmlns:a="http://schemas.openxmlformats.org/drawingml/2006/main">
               <a:ext uri="{FF2B5EF4-FFF2-40B4-BE49-F238E27FC236}">
-                <a16:creationId xmlns:a16="http://schemas.microsoft.com/office/drawing/2014/main" id="{48C73954-F7F1-4FA7-B040-0402E2CDE158}"/>
+                <a16:creationId xmlns:a16="http://schemas.microsoft.com/office/drawing/2014/main" id="{1B8E167A-8D37-4911-BA71-E32DF5CABDBA}"/>
               </a:ext>
             </a:extLst>
           </p:cNvPr>
@@ -5173,7 +5173,7 @@
           <p:cNvPr id="6" name="">
             <a:extLst xmlns:a="http://schemas.openxmlformats.org/drawingml/2006/main">
               <a:ext uri="{FF2B5EF4-FFF2-40B4-BE49-F238E27FC236}">
-                <a16:creationId xmlns:a16="http://schemas.microsoft.com/office/drawing/2014/main" id="{B5333D1E-820C-4902-AFFB-3AC6417033C3}"/>
+                <a16:creationId xmlns:a16="http://schemas.microsoft.com/office/drawing/2014/main" id="{B71FBC9C-2132-45E4-B9FD-C681B77BDC69}"/>
               </a:ext>
             </a:extLst>
           </p:cNvPr>
@@ -5185,11 +5185,11 @@
         <p:spPr>
           <a:xfrm xmlns:a="http://schemas.openxmlformats.org/drawingml/2006/main">
             <a:off x="704850" y="3162300"/>
-            <a:ext cx="1695450" cy="1428750"/>
+            <a:ext cx="1790700" cy="1485900"/>
           </a:xfrm>
           <a:prstGeom xmlns:a="http://schemas.openxmlformats.org/drawingml/2006/main" prst="roundRect">
             <a:avLst>
-              <a:gd name="adj" fmla="val 10667"/>
+              <a:gd name="adj" fmla="val 10256"/>
             </a:avLst>
           </a:prstGeom>
           <a:solidFill xmlns:a="http://schemas.openxmlformats.org/drawingml/2006/main">
@@ -5208,7 +5208,7 @@
           <p:cNvPr id="7" name="">
             <a:extLst xmlns:a="http://schemas.openxmlformats.org/drawingml/2006/main">
               <a:ext uri="{FF2B5EF4-FFF2-40B4-BE49-F238E27FC236}">
-                <a16:creationId xmlns:a16="http://schemas.microsoft.com/office/drawing/2014/main" id="{DEBDDF0F-707E-4AC1-8A58-BA9C1ADE9236}"/>
+                <a16:creationId xmlns:a16="http://schemas.microsoft.com/office/drawing/2014/main" id="{4ED55AE2-DD39-401B-849E-69E876CA4177}"/>
               </a:ext>
             </a:extLst>
           </p:cNvPr>
@@ -5258,19 +5258,19 @@
           <p:cNvPr id="8" name="">
             <a:extLst xmlns:a="http://schemas.openxmlformats.org/drawingml/2006/main">
               <a:ext uri="{FF2B5EF4-FFF2-40B4-BE49-F238E27FC236}">
-                <a16:creationId xmlns:a16="http://schemas.microsoft.com/office/drawing/2014/main" id="{56ADB646-A299-4169-9315-600F9AE672E9}"/>
-              </a:ext>
-            </a:extLst>
-          </p:cNvPr>
-          <p:cNvSpPr>
-            <a:spLocks xmlns:a="http://schemas.openxmlformats.org/drawingml/2006/main" noGrp="1"/>
-          </p:cNvSpPr>
-          <p:nvPr/>
-        </p:nvSpPr>
-        <p:spPr>
-          <a:xfrm xmlns:a="http://schemas.openxmlformats.org/drawingml/2006/main">
-            <a:off x="933450" y="3714750"/>
-            <a:ext cx="1238250" cy="285750"/>
+                <a16:creationId xmlns:a16="http://schemas.microsoft.com/office/drawing/2014/main" id="{B0E7B3B7-9CC7-4305-9F6F-338FA65111A2}"/>
+              </a:ext>
+            </a:extLst>
+          </p:cNvPr>
+          <p:cNvSpPr>
+            <a:spLocks xmlns:a="http://schemas.openxmlformats.org/drawingml/2006/main" noGrp="1"/>
+          </p:cNvSpPr>
+          <p:nvPr/>
+        </p:nvSpPr>
+        <p:spPr>
+          <a:xfrm xmlns:a="http://schemas.openxmlformats.org/drawingml/2006/main">
+            <a:off x="895350" y="3714750"/>
+            <a:ext cx="1466850" cy="323850"/>
           </a:xfrm>
           <a:prstGeom xmlns:a="http://schemas.openxmlformats.org/drawingml/2006/main" prst="rect">
             <a:avLst/>
@@ -5286,14 +5286,14 @@
           <a:lstStyle xmlns:a="http://schemas.openxmlformats.org/drawingml/2006/main"/>
           <a:p xmlns:a="http://schemas.openxmlformats.org/drawingml/2006/main">
             <a:pPr algn="l">
-              <a:defRPr sz="1875" b="1">
+              <a:defRPr sz="1725" b="1">
                 <a:solidFill>
                   <a:srgbClr val="111111"/>
                 </a:solidFill>
               </a:defRPr>
             </a:pPr>
             <a:r>
-              <a:rPr sz="1875" b="1">
+              <a:rPr sz="1725" b="1">
                 <a:solidFill>
                   <a:srgbClr val="111111"/>
                 </a:solidFill>
@@ -5308,19 +5308,19 @@
           <p:cNvPr id="9" name="">
             <a:extLst xmlns:a="http://schemas.openxmlformats.org/drawingml/2006/main">
               <a:ext uri="{FF2B5EF4-FFF2-40B4-BE49-F238E27FC236}">
-                <a16:creationId xmlns:a16="http://schemas.microsoft.com/office/drawing/2014/main" id="{339EC3BD-A796-4A32-BC3D-C169CD842137}"/>
-              </a:ext>
-            </a:extLst>
-          </p:cNvPr>
-          <p:cNvSpPr>
-            <a:spLocks xmlns:a="http://schemas.openxmlformats.org/drawingml/2006/main" noGrp="1"/>
-          </p:cNvSpPr>
-          <p:nvPr/>
-        </p:nvSpPr>
-        <p:spPr>
-          <a:xfrm xmlns:a="http://schemas.openxmlformats.org/drawingml/2006/main">
-            <a:off x="933450" y="4133850"/>
-            <a:ext cx="1200150" cy="400050"/>
+                <a16:creationId xmlns:a16="http://schemas.microsoft.com/office/drawing/2014/main" id="{7D59210A-DF58-40C0-955C-AE1DB7512975}"/>
+              </a:ext>
+            </a:extLst>
+          </p:cNvPr>
+          <p:cNvSpPr>
+            <a:spLocks xmlns:a="http://schemas.openxmlformats.org/drawingml/2006/main" noGrp="1"/>
+          </p:cNvSpPr>
+          <p:nvPr/>
+        </p:nvSpPr>
+        <p:spPr>
+          <a:xfrm xmlns:a="http://schemas.openxmlformats.org/drawingml/2006/main">
+            <a:off x="933450" y="4171950"/>
+            <a:ext cx="1295400" cy="419100"/>
           </a:xfrm>
           <a:prstGeom xmlns:a="http://schemas.openxmlformats.org/drawingml/2006/main" prst="rect">
             <a:avLst/>
@@ -5336,14 +5336,14 @@
           <a:lstStyle xmlns:a="http://schemas.openxmlformats.org/drawingml/2006/main"/>
           <a:p xmlns:a="http://schemas.openxmlformats.org/drawingml/2006/main">
             <a:pPr algn="l">
-              <a:defRPr sz="1125" b="0">
+              <a:defRPr sz="1050" b="0">
                 <a:solidFill>
                   <a:srgbClr val="7A7A7A"/>
                 </a:solidFill>
               </a:defRPr>
             </a:pPr>
             <a:r>
-              <a:rPr sz="1125" b="0">
+              <a:rPr sz="1050" b="0">
                 <a:solidFill>
                   <a:srgbClr val="7A7A7A"/>
                 </a:solidFill>
@@ -5358,18 +5358,18 @@
           <p:cNvPr id="10" name="">
             <a:extLst xmlns:a="http://schemas.openxmlformats.org/drawingml/2006/main">
               <a:ext uri="{FF2B5EF4-FFF2-40B4-BE49-F238E27FC236}">
-                <a16:creationId xmlns:a16="http://schemas.microsoft.com/office/drawing/2014/main" id="{56B420A6-D92E-4D41-82D4-53F283C48E56}"/>
-              </a:ext>
-            </a:extLst>
-          </p:cNvPr>
-          <p:cNvSpPr>
-            <a:spLocks xmlns:a="http://schemas.openxmlformats.org/drawingml/2006/main" noGrp="1"/>
-          </p:cNvSpPr>
-          <p:nvPr/>
-        </p:nvSpPr>
-        <p:spPr>
-          <a:xfrm xmlns:a="http://schemas.openxmlformats.org/drawingml/2006/main">
-            <a:off x="2390775" y="3876675"/>
+                <a16:creationId xmlns:a16="http://schemas.microsoft.com/office/drawing/2014/main" id="{7BF50227-9AE0-4CB1-A67D-208FEEEBE32E}"/>
+              </a:ext>
+            </a:extLst>
+          </p:cNvPr>
+          <p:cNvSpPr>
+            <a:spLocks xmlns:a="http://schemas.openxmlformats.org/drawingml/2006/main" noGrp="1"/>
+          </p:cNvSpPr>
+          <p:nvPr/>
+        </p:nvSpPr>
+        <p:spPr>
+          <a:xfrm xmlns:a="http://schemas.openxmlformats.org/drawingml/2006/main">
+            <a:off x="2809875" y="3895725"/>
             <a:ext cx="19050" cy="19050"/>
           </a:xfrm>
           <a:prstGeom xmlns:a="http://schemas.openxmlformats.org/drawingml/2006/main" prst="rect">
@@ -5387,18 +5387,18 @@
           <p:cNvPr id="11" name="">
             <a:extLst xmlns:a="http://schemas.openxmlformats.org/drawingml/2006/main">
               <a:ext uri="{FF2B5EF4-FFF2-40B4-BE49-F238E27FC236}">
-                <a16:creationId xmlns:a16="http://schemas.microsoft.com/office/drawing/2014/main" id="{0A8228E9-6D5E-4542-A796-CAB6A39E155F}"/>
-              </a:ext>
-            </a:extLst>
-          </p:cNvPr>
-          <p:cNvSpPr>
-            <a:spLocks xmlns:a="http://schemas.openxmlformats.org/drawingml/2006/main" noGrp="1"/>
-          </p:cNvSpPr>
-          <p:nvPr/>
-        </p:nvSpPr>
-        <p:spPr>
-          <a:xfrm xmlns:a="http://schemas.openxmlformats.org/drawingml/2006/main">
-            <a:off x="2790825" y="3876675"/>
+                <a16:creationId xmlns:a16="http://schemas.microsoft.com/office/drawing/2014/main" id="{CD22CDDF-174E-4B9B-B3C5-8394565DA6D2}"/>
+              </a:ext>
+            </a:extLst>
+          </p:cNvPr>
+          <p:cNvSpPr>
+            <a:spLocks xmlns:a="http://schemas.openxmlformats.org/drawingml/2006/main" noGrp="1"/>
+          </p:cNvSpPr>
+          <p:nvPr/>
+        </p:nvSpPr>
+        <p:spPr>
+          <a:xfrm xmlns:a="http://schemas.openxmlformats.org/drawingml/2006/main">
+            <a:off x="2486025" y="3895725"/>
             <a:ext cx="19050" cy="19050"/>
           </a:xfrm>
           <a:prstGeom xmlns:a="http://schemas.openxmlformats.org/drawingml/2006/main" prst="rect">
@@ -5415,15 +5415,15 @@
         <p:nvCxnSpPr>
           <p:cNvPr id="49" name=""/>
           <p:cNvCxnSpPr>
-            <a:stCxn xmlns:a="http://schemas.openxmlformats.org/drawingml/2006/main" id="10" idx="3"/>
-            <a:endCxn xmlns:a="http://schemas.openxmlformats.org/drawingml/2006/main" id="11" idx="1"/>
+            <a:stCxn xmlns:a="http://schemas.openxmlformats.org/drawingml/2006/main" id="10" idx="1"/>
+            <a:endCxn xmlns:a="http://schemas.openxmlformats.org/drawingml/2006/main" id="11" idx="3"/>
           </p:cNvCxnSpPr>
           <p:nvPr/>
         </p:nvCxnSpPr>
         <p:spPr>
-          <a:xfrm xmlns:a="http://schemas.openxmlformats.org/drawingml/2006/main">
-            <a:off x="2409825" y="3886200"/>
-            <a:ext cx="381000" cy="0"/>
+          <a:xfrm xmlns:a="http://schemas.openxmlformats.org/drawingml/2006/main" flipH="1">
+            <a:off x="2505075" y="3905250"/>
+            <a:ext cx="304800" cy="0"/>
           </a:xfrm>
           <a:prstGeom xmlns:a="http://schemas.openxmlformats.org/drawingml/2006/main" prst="straightConnector1">
             <a:avLst/>
@@ -5442,23 +5442,23 @@
           <p:cNvPr id="13" name="">
             <a:extLst xmlns:a="http://schemas.openxmlformats.org/drawingml/2006/main">
               <a:ext uri="{FF2B5EF4-FFF2-40B4-BE49-F238E27FC236}">
-                <a16:creationId xmlns:a16="http://schemas.microsoft.com/office/drawing/2014/main" id="{1AC853B6-0F53-4E56-92DC-2C8901355A22}"/>
-              </a:ext>
-            </a:extLst>
-          </p:cNvPr>
-          <p:cNvSpPr>
-            <a:spLocks xmlns:a="http://schemas.openxmlformats.org/drawingml/2006/main" noGrp="1"/>
-          </p:cNvSpPr>
-          <p:nvPr/>
-        </p:nvSpPr>
-        <p:spPr>
-          <a:xfrm xmlns:a="http://schemas.openxmlformats.org/drawingml/2006/main">
-            <a:off x="2895600" y="3162300"/>
-            <a:ext cx="1695450" cy="1428750"/>
+                <a16:creationId xmlns:a16="http://schemas.microsoft.com/office/drawing/2014/main" id="{CA7AFBC7-6010-46C1-B554-BEC31BDB3D6F}"/>
+              </a:ext>
+            </a:extLst>
+          </p:cNvPr>
+          <p:cNvSpPr>
+            <a:spLocks xmlns:a="http://schemas.openxmlformats.org/drawingml/2006/main" noGrp="1"/>
+          </p:cNvSpPr>
+          <p:nvPr/>
+        </p:nvSpPr>
+        <p:spPr>
+          <a:xfrm xmlns:a="http://schemas.openxmlformats.org/drawingml/2006/main">
+            <a:off x="2838450" y="3162300"/>
+            <a:ext cx="1790700" cy="1485900"/>
           </a:xfrm>
           <a:prstGeom xmlns:a="http://schemas.openxmlformats.org/drawingml/2006/main" prst="roundRect">
             <a:avLst>
-              <a:gd name="adj" fmla="val 10667"/>
+              <a:gd name="adj" fmla="val 10256"/>
             </a:avLst>
           </a:prstGeom>
           <a:solidFill xmlns:a="http://schemas.openxmlformats.org/drawingml/2006/main">
@@ -5477,18 +5477,18 @@
           <p:cNvPr id="14" name="">
             <a:extLst xmlns:a="http://schemas.openxmlformats.org/drawingml/2006/main">
               <a:ext uri="{FF2B5EF4-FFF2-40B4-BE49-F238E27FC236}">
-                <a16:creationId xmlns:a16="http://schemas.microsoft.com/office/drawing/2014/main" id="{6E1B1F40-1877-456D-8E88-B34B2A2E9701}"/>
-              </a:ext>
-            </a:extLst>
-          </p:cNvPr>
-          <p:cNvSpPr>
-            <a:spLocks xmlns:a="http://schemas.openxmlformats.org/drawingml/2006/main" noGrp="1"/>
-          </p:cNvSpPr>
-          <p:nvPr/>
-        </p:nvSpPr>
-        <p:spPr>
-          <a:xfrm xmlns:a="http://schemas.openxmlformats.org/drawingml/2006/main">
-            <a:off x="3124200" y="3409950"/>
+                <a16:creationId xmlns:a16="http://schemas.microsoft.com/office/drawing/2014/main" id="{4C69C8BD-44C5-46B0-9C22-12A8E749AF03}"/>
+              </a:ext>
+            </a:extLst>
+          </p:cNvPr>
+          <p:cNvSpPr>
+            <a:spLocks xmlns:a="http://schemas.openxmlformats.org/drawingml/2006/main" noGrp="1"/>
+          </p:cNvSpPr>
+          <p:nvPr/>
+        </p:nvSpPr>
+        <p:spPr>
+          <a:xfrm xmlns:a="http://schemas.openxmlformats.org/drawingml/2006/main">
+            <a:off x="3067050" y="3409950"/>
             <a:ext cx="381000" cy="190500"/>
           </a:xfrm>
           <a:prstGeom xmlns:a="http://schemas.openxmlformats.org/drawingml/2006/main" prst="rect">
@@ -5527,19 +5527,19 @@
           <p:cNvPr id="15" name="">
             <a:extLst xmlns:a="http://schemas.openxmlformats.org/drawingml/2006/main">
               <a:ext uri="{FF2B5EF4-FFF2-40B4-BE49-F238E27FC236}">
-                <a16:creationId xmlns:a16="http://schemas.microsoft.com/office/drawing/2014/main" id="{CB3C37A2-FF3E-4B7C-9594-B5DA85BD2B14}"/>
-              </a:ext>
-            </a:extLst>
-          </p:cNvPr>
-          <p:cNvSpPr>
-            <a:spLocks xmlns:a="http://schemas.openxmlformats.org/drawingml/2006/main" noGrp="1"/>
-          </p:cNvSpPr>
-          <p:nvPr/>
-        </p:nvSpPr>
-        <p:spPr>
-          <a:xfrm xmlns:a="http://schemas.openxmlformats.org/drawingml/2006/main">
-            <a:off x="3124200" y="3714750"/>
-            <a:ext cx="1238250" cy="285750"/>
+                <a16:creationId xmlns:a16="http://schemas.microsoft.com/office/drawing/2014/main" id="{E1E61237-FD67-47F8-B46E-755A0FA8AF71}"/>
+              </a:ext>
+            </a:extLst>
+          </p:cNvPr>
+          <p:cNvSpPr>
+            <a:spLocks xmlns:a="http://schemas.openxmlformats.org/drawingml/2006/main" noGrp="1"/>
+          </p:cNvSpPr>
+          <p:nvPr/>
+        </p:nvSpPr>
+        <p:spPr>
+          <a:xfrm xmlns:a="http://schemas.openxmlformats.org/drawingml/2006/main">
+            <a:off x="3028950" y="3714750"/>
+            <a:ext cx="1466850" cy="323850"/>
           </a:xfrm>
           <a:prstGeom xmlns:a="http://schemas.openxmlformats.org/drawingml/2006/main" prst="rect">
             <a:avLst/>
@@ -5555,14 +5555,14 @@
           <a:lstStyle xmlns:a="http://schemas.openxmlformats.org/drawingml/2006/main"/>
           <a:p xmlns:a="http://schemas.openxmlformats.org/drawingml/2006/main">
             <a:pPr algn="l">
-              <a:defRPr sz="1875" b="1">
+              <a:defRPr sz="1725" b="1">
                 <a:solidFill>
                   <a:srgbClr val="111111"/>
                 </a:solidFill>
               </a:defRPr>
             </a:pPr>
             <a:r>
-              <a:rPr sz="1875" b="1">
+              <a:rPr sz="1725" b="1">
                 <a:solidFill>
                   <a:srgbClr val="111111"/>
                 </a:solidFill>
@@ -5577,19 +5577,19 @@
           <p:cNvPr id="16" name="">
             <a:extLst xmlns:a="http://schemas.openxmlformats.org/drawingml/2006/main">
               <a:ext uri="{FF2B5EF4-FFF2-40B4-BE49-F238E27FC236}">
-                <a16:creationId xmlns:a16="http://schemas.microsoft.com/office/drawing/2014/main" id="{59999696-3BFC-4C5B-83D2-681C1FC30EDB}"/>
-              </a:ext>
-            </a:extLst>
-          </p:cNvPr>
-          <p:cNvSpPr>
-            <a:spLocks xmlns:a="http://schemas.openxmlformats.org/drawingml/2006/main" noGrp="1"/>
-          </p:cNvSpPr>
-          <p:nvPr/>
-        </p:nvSpPr>
-        <p:spPr>
-          <a:xfrm xmlns:a="http://schemas.openxmlformats.org/drawingml/2006/main">
-            <a:off x="3124200" y="4133850"/>
-            <a:ext cx="1200150" cy="400050"/>
+                <a16:creationId xmlns:a16="http://schemas.microsoft.com/office/drawing/2014/main" id="{28E50310-701C-4BDE-8AF4-CB23D936E25B}"/>
+              </a:ext>
+            </a:extLst>
+          </p:cNvPr>
+          <p:cNvSpPr>
+            <a:spLocks xmlns:a="http://schemas.openxmlformats.org/drawingml/2006/main" noGrp="1"/>
+          </p:cNvSpPr>
+          <p:nvPr/>
+        </p:nvSpPr>
+        <p:spPr>
+          <a:xfrm xmlns:a="http://schemas.openxmlformats.org/drawingml/2006/main">
+            <a:off x="3067050" y="4171950"/>
+            <a:ext cx="1295400" cy="419100"/>
           </a:xfrm>
           <a:prstGeom xmlns:a="http://schemas.openxmlformats.org/drawingml/2006/main" prst="rect">
             <a:avLst/>
@@ -5605,14 +5605,14 @@
           <a:lstStyle xmlns:a="http://schemas.openxmlformats.org/drawingml/2006/main"/>
           <a:p xmlns:a="http://schemas.openxmlformats.org/drawingml/2006/main">
             <a:pPr algn="l">
-              <a:defRPr sz="1125" b="0">
+              <a:defRPr sz="1050" b="0">
                 <a:solidFill>
                   <a:srgbClr val="7A7A7A"/>
                 </a:solidFill>
               </a:defRPr>
             </a:pPr>
             <a:r>
-              <a:rPr sz="1125" b="0">
+              <a:rPr sz="1050" b="0">
                 <a:solidFill>
                   <a:srgbClr val="7A7A7A"/>
                 </a:solidFill>
@@ -5627,18 +5627,18 @@
           <p:cNvPr id="17" name="">
             <a:extLst xmlns:a="http://schemas.openxmlformats.org/drawingml/2006/main">
               <a:ext uri="{FF2B5EF4-FFF2-40B4-BE49-F238E27FC236}">
-                <a16:creationId xmlns:a16="http://schemas.microsoft.com/office/drawing/2014/main" id="{4309B883-0C53-4A14-ABC9-E5CF7FDA7176}"/>
-              </a:ext>
-            </a:extLst>
-          </p:cNvPr>
-          <p:cNvSpPr>
-            <a:spLocks xmlns:a="http://schemas.openxmlformats.org/drawingml/2006/main" noGrp="1"/>
-          </p:cNvSpPr>
-          <p:nvPr/>
-        </p:nvSpPr>
-        <p:spPr>
-          <a:xfrm xmlns:a="http://schemas.openxmlformats.org/drawingml/2006/main">
-            <a:off x="4581525" y="3876675"/>
+                <a16:creationId xmlns:a16="http://schemas.microsoft.com/office/drawing/2014/main" id="{73EBDF44-2471-4B68-AA5E-EF53FFA48587}"/>
+              </a:ext>
+            </a:extLst>
+          </p:cNvPr>
+          <p:cNvSpPr>
+            <a:spLocks xmlns:a="http://schemas.openxmlformats.org/drawingml/2006/main" noGrp="1"/>
+          </p:cNvSpPr>
+          <p:nvPr/>
+        </p:nvSpPr>
+        <p:spPr>
+          <a:xfrm xmlns:a="http://schemas.openxmlformats.org/drawingml/2006/main">
+            <a:off x="4943475" y="3895725"/>
             <a:ext cx="19050" cy="19050"/>
           </a:xfrm>
           <a:prstGeom xmlns:a="http://schemas.openxmlformats.org/drawingml/2006/main" prst="rect">
@@ -5656,18 +5656,18 @@
           <p:cNvPr id="18" name="">
             <a:extLst xmlns:a="http://schemas.openxmlformats.org/drawingml/2006/main">
               <a:ext uri="{FF2B5EF4-FFF2-40B4-BE49-F238E27FC236}">
-                <a16:creationId xmlns:a16="http://schemas.microsoft.com/office/drawing/2014/main" id="{41BFEF24-BF5D-436D-85DE-8B037455169C}"/>
-              </a:ext>
-            </a:extLst>
-          </p:cNvPr>
-          <p:cNvSpPr>
-            <a:spLocks xmlns:a="http://schemas.openxmlformats.org/drawingml/2006/main" noGrp="1"/>
-          </p:cNvSpPr>
-          <p:nvPr/>
-        </p:nvSpPr>
-        <p:spPr>
-          <a:xfrm xmlns:a="http://schemas.openxmlformats.org/drawingml/2006/main">
-            <a:off x="4981575" y="3876675"/>
+                <a16:creationId xmlns:a16="http://schemas.microsoft.com/office/drawing/2014/main" id="{CBB91264-9A8D-4998-830B-E8785E0E3187}"/>
+              </a:ext>
+            </a:extLst>
+          </p:cNvPr>
+          <p:cNvSpPr>
+            <a:spLocks xmlns:a="http://schemas.openxmlformats.org/drawingml/2006/main" noGrp="1"/>
+          </p:cNvSpPr>
+          <p:nvPr/>
+        </p:nvSpPr>
+        <p:spPr>
+          <a:xfrm xmlns:a="http://schemas.openxmlformats.org/drawingml/2006/main">
+            <a:off x="4619625" y="3895725"/>
             <a:ext cx="19050" cy="19050"/>
           </a:xfrm>
           <a:prstGeom xmlns:a="http://schemas.openxmlformats.org/drawingml/2006/main" prst="rect">
@@ -5684,15 +5684,15 @@
         <p:nvCxnSpPr>
           <p:cNvPr id="56" name=""/>
           <p:cNvCxnSpPr>
-            <a:stCxn xmlns:a="http://schemas.openxmlformats.org/drawingml/2006/main" id="17" idx="3"/>
-            <a:endCxn xmlns:a="http://schemas.openxmlformats.org/drawingml/2006/main" id="18" idx="1"/>
+            <a:stCxn xmlns:a="http://schemas.openxmlformats.org/drawingml/2006/main" id="17" idx="1"/>
+            <a:endCxn xmlns:a="http://schemas.openxmlformats.org/drawingml/2006/main" id="18" idx="3"/>
           </p:cNvCxnSpPr>
           <p:nvPr/>
         </p:nvCxnSpPr>
         <p:spPr>
-          <a:xfrm xmlns:a="http://schemas.openxmlformats.org/drawingml/2006/main">
-            <a:off x="4600575" y="3886200"/>
-            <a:ext cx="381000" cy="0"/>
+          <a:xfrm xmlns:a="http://schemas.openxmlformats.org/drawingml/2006/main" flipH="1">
+            <a:off x="4638675" y="3905250"/>
+            <a:ext cx="304800" cy="0"/>
           </a:xfrm>
           <a:prstGeom xmlns:a="http://schemas.openxmlformats.org/drawingml/2006/main" prst="straightConnector1">
             <a:avLst/>
@@ -5711,23 +5711,23 @@
           <p:cNvPr id="20" name="">
             <a:extLst xmlns:a="http://schemas.openxmlformats.org/drawingml/2006/main">
               <a:ext uri="{FF2B5EF4-FFF2-40B4-BE49-F238E27FC236}">
-                <a16:creationId xmlns:a16="http://schemas.microsoft.com/office/drawing/2014/main" id="{02F911BF-CE72-4983-87B6-53C53B525E8A}"/>
-              </a:ext>
-            </a:extLst>
-          </p:cNvPr>
-          <p:cNvSpPr>
-            <a:spLocks xmlns:a="http://schemas.openxmlformats.org/drawingml/2006/main" noGrp="1"/>
-          </p:cNvSpPr>
-          <p:nvPr/>
-        </p:nvSpPr>
-        <p:spPr>
-          <a:xfrm xmlns:a="http://schemas.openxmlformats.org/drawingml/2006/main">
-            <a:off x="5086350" y="3162300"/>
-            <a:ext cx="1695450" cy="1428750"/>
+                <a16:creationId xmlns:a16="http://schemas.microsoft.com/office/drawing/2014/main" id="{46B004FB-65D4-4847-AF21-AF96F382FC90}"/>
+              </a:ext>
+            </a:extLst>
+          </p:cNvPr>
+          <p:cNvSpPr>
+            <a:spLocks xmlns:a="http://schemas.openxmlformats.org/drawingml/2006/main" noGrp="1"/>
+          </p:cNvSpPr>
+          <p:nvPr/>
+        </p:nvSpPr>
+        <p:spPr>
+          <a:xfrm xmlns:a="http://schemas.openxmlformats.org/drawingml/2006/main">
+            <a:off x="4972050" y="3162300"/>
+            <a:ext cx="1790700" cy="1485900"/>
           </a:xfrm>
           <a:prstGeom xmlns:a="http://schemas.openxmlformats.org/drawingml/2006/main" prst="roundRect">
             <a:avLst>
-              <a:gd name="adj" fmla="val 10667"/>
+              <a:gd name="adj" fmla="val 10256"/>
             </a:avLst>
           </a:prstGeom>
           <a:solidFill xmlns:a="http://schemas.openxmlformats.org/drawingml/2006/main">
@@ -5746,18 +5746,18 @@
           <p:cNvPr id="21" name="">
             <a:extLst xmlns:a="http://schemas.openxmlformats.org/drawingml/2006/main">
               <a:ext uri="{FF2B5EF4-FFF2-40B4-BE49-F238E27FC236}">
-                <a16:creationId xmlns:a16="http://schemas.microsoft.com/office/drawing/2014/main" id="{F962821B-3B7F-4DF8-82B2-8E0A60A75FA2}"/>
-              </a:ext>
-            </a:extLst>
-          </p:cNvPr>
-          <p:cNvSpPr>
-            <a:spLocks xmlns:a="http://schemas.openxmlformats.org/drawingml/2006/main" noGrp="1"/>
-          </p:cNvSpPr>
-          <p:nvPr/>
-        </p:nvSpPr>
-        <p:spPr>
-          <a:xfrm xmlns:a="http://schemas.openxmlformats.org/drawingml/2006/main">
-            <a:off x="5314950" y="3409950"/>
+                <a16:creationId xmlns:a16="http://schemas.microsoft.com/office/drawing/2014/main" id="{15CEE482-049F-40BE-8DFB-F36B90755701}"/>
+              </a:ext>
+            </a:extLst>
+          </p:cNvPr>
+          <p:cNvSpPr>
+            <a:spLocks xmlns:a="http://schemas.openxmlformats.org/drawingml/2006/main" noGrp="1"/>
+          </p:cNvSpPr>
+          <p:nvPr/>
+        </p:nvSpPr>
+        <p:spPr>
+          <a:xfrm xmlns:a="http://schemas.openxmlformats.org/drawingml/2006/main">
+            <a:off x="5200650" y="3409950"/>
             <a:ext cx="381000" cy="190500"/>
           </a:xfrm>
           <a:prstGeom xmlns:a="http://schemas.openxmlformats.org/drawingml/2006/main" prst="rect">
@@ -5796,19 +5796,19 @@
           <p:cNvPr id="22" name="">
             <a:extLst xmlns:a="http://schemas.openxmlformats.org/drawingml/2006/main">
               <a:ext uri="{FF2B5EF4-FFF2-40B4-BE49-F238E27FC236}">
-                <a16:creationId xmlns:a16="http://schemas.microsoft.com/office/drawing/2014/main" id="{D6A3F9E1-EC95-485F-A18C-86EFA2790986}"/>
-              </a:ext>
-            </a:extLst>
-          </p:cNvPr>
-          <p:cNvSpPr>
-            <a:spLocks xmlns:a="http://schemas.openxmlformats.org/drawingml/2006/main" noGrp="1"/>
-          </p:cNvSpPr>
-          <p:nvPr/>
-        </p:nvSpPr>
-        <p:spPr>
-          <a:xfrm xmlns:a="http://schemas.openxmlformats.org/drawingml/2006/main">
-            <a:off x="5314950" y="3714750"/>
-            <a:ext cx="1238250" cy="285750"/>
+                <a16:creationId xmlns:a16="http://schemas.microsoft.com/office/drawing/2014/main" id="{B77B52D4-4662-4F75-94E5-08CC0FB21D6D}"/>
+              </a:ext>
+            </a:extLst>
+          </p:cNvPr>
+          <p:cNvSpPr>
+            <a:spLocks xmlns:a="http://schemas.openxmlformats.org/drawingml/2006/main" noGrp="1"/>
+          </p:cNvSpPr>
+          <p:nvPr/>
+        </p:nvSpPr>
+        <p:spPr>
+          <a:xfrm xmlns:a="http://schemas.openxmlformats.org/drawingml/2006/main">
+            <a:off x="5162550" y="3714750"/>
+            <a:ext cx="1466850" cy="323850"/>
           </a:xfrm>
           <a:prstGeom xmlns:a="http://schemas.openxmlformats.org/drawingml/2006/main" prst="rect">
             <a:avLst/>
@@ -5824,14 +5824,14 @@
           <a:lstStyle xmlns:a="http://schemas.openxmlformats.org/drawingml/2006/main"/>
           <a:p xmlns:a="http://schemas.openxmlformats.org/drawingml/2006/main">
             <a:pPr algn="l">
-              <a:defRPr sz="1875" b="1">
+              <a:defRPr sz="1425" b="1">
                 <a:solidFill>
                   <a:srgbClr val="111111"/>
                 </a:solidFill>
               </a:defRPr>
             </a:pPr>
             <a:r>
-              <a:rPr sz="1875" b="1">
+              <a:rPr sz="1425" b="1">
                 <a:solidFill>
                   <a:srgbClr val="111111"/>
                 </a:solidFill>
@@ -5846,19 +5846,19 @@
           <p:cNvPr id="23" name="">
             <a:extLst xmlns:a="http://schemas.openxmlformats.org/drawingml/2006/main">
               <a:ext uri="{FF2B5EF4-FFF2-40B4-BE49-F238E27FC236}">
-                <a16:creationId xmlns:a16="http://schemas.microsoft.com/office/drawing/2014/main" id="{44A84EC8-5D98-4197-831F-42FF7DDFB961}"/>
-              </a:ext>
-            </a:extLst>
-          </p:cNvPr>
-          <p:cNvSpPr>
-            <a:spLocks xmlns:a="http://schemas.openxmlformats.org/drawingml/2006/main" noGrp="1"/>
-          </p:cNvSpPr>
-          <p:nvPr/>
-        </p:nvSpPr>
-        <p:spPr>
-          <a:xfrm xmlns:a="http://schemas.openxmlformats.org/drawingml/2006/main">
-            <a:off x="5314950" y="4133850"/>
-            <a:ext cx="1200150" cy="400050"/>
+                <a16:creationId xmlns:a16="http://schemas.microsoft.com/office/drawing/2014/main" id="{F075A2FC-77AC-489E-A2DD-BE609505CC58}"/>
+              </a:ext>
+            </a:extLst>
+          </p:cNvPr>
+          <p:cNvSpPr>
+            <a:spLocks xmlns:a="http://schemas.openxmlformats.org/drawingml/2006/main" noGrp="1"/>
+          </p:cNvSpPr>
+          <p:nvPr/>
+        </p:nvSpPr>
+        <p:spPr>
+          <a:xfrm xmlns:a="http://schemas.openxmlformats.org/drawingml/2006/main">
+            <a:off x="5200650" y="4171950"/>
+            <a:ext cx="1295400" cy="419100"/>
           </a:xfrm>
           <a:prstGeom xmlns:a="http://schemas.openxmlformats.org/drawingml/2006/main" prst="rect">
             <a:avLst/>
@@ -5874,14 +5874,14 @@
           <a:lstStyle xmlns:a="http://schemas.openxmlformats.org/drawingml/2006/main"/>
           <a:p xmlns:a="http://schemas.openxmlformats.org/drawingml/2006/main">
             <a:pPr algn="l">
-              <a:defRPr sz="1125" b="0">
+              <a:defRPr sz="1050" b="0">
                 <a:solidFill>
                   <a:srgbClr val="7A7A7A"/>
                 </a:solidFill>
               </a:defRPr>
             </a:pPr>
             <a:r>
-              <a:rPr sz="1125" b="0">
+              <a:rPr sz="1050" b="0">
                 <a:solidFill>
                   <a:srgbClr val="7A7A7A"/>
                 </a:solidFill>
@@ -5896,18 +5896,18 @@
           <p:cNvPr id="24" name="">
             <a:extLst xmlns:a="http://schemas.openxmlformats.org/drawingml/2006/main">
               <a:ext uri="{FF2B5EF4-FFF2-40B4-BE49-F238E27FC236}">
-                <a16:creationId xmlns:a16="http://schemas.microsoft.com/office/drawing/2014/main" id="{62C546C1-0E91-46DC-81D2-2786F42DDE78}"/>
-              </a:ext>
-            </a:extLst>
-          </p:cNvPr>
-          <p:cNvSpPr>
-            <a:spLocks xmlns:a="http://schemas.openxmlformats.org/drawingml/2006/main" noGrp="1"/>
-          </p:cNvSpPr>
-          <p:nvPr/>
-        </p:nvSpPr>
-        <p:spPr>
-          <a:xfrm xmlns:a="http://schemas.openxmlformats.org/drawingml/2006/main">
-            <a:off x="6772275" y="3876675"/>
+                <a16:creationId xmlns:a16="http://schemas.microsoft.com/office/drawing/2014/main" id="{273A1509-A202-4299-847A-58C7DB70439A}"/>
+              </a:ext>
+            </a:extLst>
+          </p:cNvPr>
+          <p:cNvSpPr>
+            <a:spLocks xmlns:a="http://schemas.openxmlformats.org/drawingml/2006/main" noGrp="1"/>
+          </p:cNvSpPr>
+          <p:nvPr/>
+        </p:nvSpPr>
+        <p:spPr>
+          <a:xfrm xmlns:a="http://schemas.openxmlformats.org/drawingml/2006/main">
+            <a:off x="7077075" y="3895725"/>
             <a:ext cx="19050" cy="19050"/>
           </a:xfrm>
           <a:prstGeom xmlns:a="http://schemas.openxmlformats.org/drawingml/2006/main" prst="rect">
@@ -5925,18 +5925,18 @@
           <p:cNvPr id="25" name="">
             <a:extLst xmlns:a="http://schemas.openxmlformats.org/drawingml/2006/main">
               <a:ext uri="{FF2B5EF4-FFF2-40B4-BE49-F238E27FC236}">
-                <a16:creationId xmlns:a16="http://schemas.microsoft.com/office/drawing/2014/main" id="{172B044C-8B78-4402-87BD-5CBD305FFD7F}"/>
-              </a:ext>
-            </a:extLst>
-          </p:cNvPr>
-          <p:cNvSpPr>
-            <a:spLocks xmlns:a="http://schemas.openxmlformats.org/drawingml/2006/main" noGrp="1"/>
-          </p:cNvSpPr>
-          <p:nvPr/>
-        </p:nvSpPr>
-        <p:spPr>
-          <a:xfrm xmlns:a="http://schemas.openxmlformats.org/drawingml/2006/main">
-            <a:off x="7172325" y="3876675"/>
+                <a16:creationId xmlns:a16="http://schemas.microsoft.com/office/drawing/2014/main" id="{CCE84533-C828-4998-8570-B1B157EC8979}"/>
+              </a:ext>
+            </a:extLst>
+          </p:cNvPr>
+          <p:cNvSpPr>
+            <a:spLocks xmlns:a="http://schemas.openxmlformats.org/drawingml/2006/main" noGrp="1"/>
+          </p:cNvSpPr>
+          <p:nvPr/>
+        </p:nvSpPr>
+        <p:spPr>
+          <a:xfrm xmlns:a="http://schemas.openxmlformats.org/drawingml/2006/main">
+            <a:off x="6753225" y="3895725"/>
             <a:ext cx="19050" cy="19050"/>
           </a:xfrm>
           <a:prstGeom xmlns:a="http://schemas.openxmlformats.org/drawingml/2006/main" prst="rect">
@@ -5953,15 +5953,15 @@
         <p:nvCxnSpPr>
           <p:cNvPr id="63" name=""/>
           <p:cNvCxnSpPr>
-            <a:stCxn xmlns:a="http://schemas.openxmlformats.org/drawingml/2006/main" id="24" idx="3"/>
-            <a:endCxn xmlns:a="http://schemas.openxmlformats.org/drawingml/2006/main" id="25" idx="1"/>
+            <a:stCxn xmlns:a="http://schemas.openxmlformats.org/drawingml/2006/main" id="24" idx="1"/>
+            <a:endCxn xmlns:a="http://schemas.openxmlformats.org/drawingml/2006/main" id="25" idx="3"/>
           </p:cNvCxnSpPr>
           <p:nvPr/>
         </p:nvCxnSpPr>
         <p:spPr>
-          <a:xfrm xmlns:a="http://schemas.openxmlformats.org/drawingml/2006/main">
-            <a:off x="6791325" y="3886200"/>
-            <a:ext cx="381000" cy="0"/>
+          <a:xfrm xmlns:a="http://schemas.openxmlformats.org/drawingml/2006/main" flipH="1">
+            <a:off x="6772275" y="3905250"/>
+            <a:ext cx="304800" cy="0"/>
           </a:xfrm>
           <a:prstGeom xmlns:a="http://schemas.openxmlformats.org/drawingml/2006/main" prst="straightConnector1">
             <a:avLst/>
@@ -5980,23 +5980,23 @@
           <p:cNvPr id="27" name="">
             <a:extLst xmlns:a="http://schemas.openxmlformats.org/drawingml/2006/main">
               <a:ext uri="{FF2B5EF4-FFF2-40B4-BE49-F238E27FC236}">
-                <a16:creationId xmlns:a16="http://schemas.microsoft.com/office/drawing/2014/main" id="{5D75A605-82E7-41BA-BB81-D6B3E148F1B9}"/>
-              </a:ext>
-            </a:extLst>
-          </p:cNvPr>
-          <p:cNvSpPr>
-            <a:spLocks xmlns:a="http://schemas.openxmlformats.org/drawingml/2006/main" noGrp="1"/>
-          </p:cNvSpPr>
-          <p:nvPr/>
-        </p:nvSpPr>
-        <p:spPr>
-          <a:xfrm xmlns:a="http://schemas.openxmlformats.org/drawingml/2006/main">
-            <a:off x="7277100" y="3162300"/>
-            <a:ext cx="1695450" cy="1428750"/>
+                <a16:creationId xmlns:a16="http://schemas.microsoft.com/office/drawing/2014/main" id="{5C1282A5-4EAA-4ABD-B610-07F23399AF12}"/>
+              </a:ext>
+            </a:extLst>
+          </p:cNvPr>
+          <p:cNvSpPr>
+            <a:spLocks xmlns:a="http://schemas.openxmlformats.org/drawingml/2006/main" noGrp="1"/>
+          </p:cNvSpPr>
+          <p:nvPr/>
+        </p:nvSpPr>
+        <p:spPr>
+          <a:xfrm xmlns:a="http://schemas.openxmlformats.org/drawingml/2006/main">
+            <a:off x="7105650" y="3162300"/>
+            <a:ext cx="1790700" cy="1485900"/>
           </a:xfrm>
           <a:prstGeom xmlns:a="http://schemas.openxmlformats.org/drawingml/2006/main" prst="roundRect">
             <a:avLst>
-              <a:gd name="adj" fmla="val 10667"/>
+              <a:gd name="adj" fmla="val 10256"/>
             </a:avLst>
           </a:prstGeom>
           <a:solidFill xmlns:a="http://schemas.openxmlformats.org/drawingml/2006/main">
@@ -6015,18 +6015,18 @@
           <p:cNvPr id="28" name="">
             <a:extLst xmlns:a="http://schemas.openxmlformats.org/drawingml/2006/main">
               <a:ext uri="{FF2B5EF4-FFF2-40B4-BE49-F238E27FC236}">
-                <a16:creationId xmlns:a16="http://schemas.microsoft.com/office/drawing/2014/main" id="{0C976807-0FC7-4151-8533-4E1D68D684F8}"/>
-              </a:ext>
-            </a:extLst>
-          </p:cNvPr>
-          <p:cNvSpPr>
-            <a:spLocks xmlns:a="http://schemas.openxmlformats.org/drawingml/2006/main" noGrp="1"/>
-          </p:cNvSpPr>
-          <p:nvPr/>
-        </p:nvSpPr>
-        <p:spPr>
-          <a:xfrm xmlns:a="http://schemas.openxmlformats.org/drawingml/2006/main">
-            <a:off x="7505700" y="3409950"/>
+                <a16:creationId xmlns:a16="http://schemas.microsoft.com/office/drawing/2014/main" id="{65262DEE-1934-45FC-8302-B11DA6BFCF1C}"/>
+              </a:ext>
+            </a:extLst>
+          </p:cNvPr>
+          <p:cNvSpPr>
+            <a:spLocks xmlns:a="http://schemas.openxmlformats.org/drawingml/2006/main" noGrp="1"/>
+          </p:cNvSpPr>
+          <p:nvPr/>
+        </p:nvSpPr>
+        <p:spPr>
+          <a:xfrm xmlns:a="http://schemas.openxmlformats.org/drawingml/2006/main">
+            <a:off x="7334250" y="3409950"/>
             <a:ext cx="381000" cy="190500"/>
           </a:xfrm>
           <a:prstGeom xmlns:a="http://schemas.openxmlformats.org/drawingml/2006/main" prst="rect">
@@ -6065,19 +6065,19 @@
           <p:cNvPr id="29" name="">
             <a:extLst xmlns:a="http://schemas.openxmlformats.org/drawingml/2006/main">
               <a:ext uri="{FF2B5EF4-FFF2-40B4-BE49-F238E27FC236}">
-                <a16:creationId xmlns:a16="http://schemas.microsoft.com/office/drawing/2014/main" id="{965A5AE8-F452-46E0-8EC5-2D929A48A28B}"/>
-              </a:ext>
-            </a:extLst>
-          </p:cNvPr>
-          <p:cNvSpPr>
-            <a:spLocks xmlns:a="http://schemas.openxmlformats.org/drawingml/2006/main" noGrp="1"/>
-          </p:cNvSpPr>
-          <p:nvPr/>
-        </p:nvSpPr>
-        <p:spPr>
-          <a:xfrm xmlns:a="http://schemas.openxmlformats.org/drawingml/2006/main">
-            <a:off x="7505700" y="3714750"/>
-            <a:ext cx="1238250" cy="285750"/>
+                <a16:creationId xmlns:a16="http://schemas.microsoft.com/office/drawing/2014/main" id="{1A5C4D56-50B3-4A40-9DCF-3FA1BF4A4480}"/>
+              </a:ext>
+            </a:extLst>
+          </p:cNvPr>
+          <p:cNvSpPr>
+            <a:spLocks xmlns:a="http://schemas.openxmlformats.org/drawingml/2006/main" noGrp="1"/>
+          </p:cNvSpPr>
+          <p:nvPr/>
+        </p:nvSpPr>
+        <p:spPr>
+          <a:xfrm xmlns:a="http://schemas.openxmlformats.org/drawingml/2006/main">
+            <a:off x="7296150" y="3714750"/>
+            <a:ext cx="1466850" cy="323850"/>
           </a:xfrm>
           <a:prstGeom xmlns:a="http://schemas.openxmlformats.org/drawingml/2006/main" prst="rect">
             <a:avLst/>
@@ -6093,14 +6093,14 @@
           <a:lstStyle xmlns:a="http://schemas.openxmlformats.org/drawingml/2006/main"/>
           <a:p xmlns:a="http://schemas.openxmlformats.org/drawingml/2006/main">
             <a:pPr algn="l">
-              <a:defRPr sz="1875" b="1">
+              <a:defRPr sz="1725" b="1">
                 <a:solidFill>
                   <a:srgbClr val="111111"/>
                 </a:solidFill>
               </a:defRPr>
             </a:pPr>
             <a:r>
-              <a:rPr sz="1875" b="1">
+              <a:rPr sz="1725" b="1">
                 <a:solidFill>
                   <a:srgbClr val="111111"/>
                 </a:solidFill>
@@ -6115,19 +6115,19 @@
           <p:cNvPr id="30" name="">
             <a:extLst xmlns:a="http://schemas.openxmlformats.org/drawingml/2006/main">
               <a:ext uri="{FF2B5EF4-FFF2-40B4-BE49-F238E27FC236}">
-                <a16:creationId xmlns:a16="http://schemas.microsoft.com/office/drawing/2014/main" id="{B08E7209-643E-4DC2-AE4C-301284BE7AEE}"/>
-              </a:ext>
-            </a:extLst>
-          </p:cNvPr>
-          <p:cNvSpPr>
-            <a:spLocks xmlns:a="http://schemas.openxmlformats.org/drawingml/2006/main" noGrp="1"/>
-          </p:cNvSpPr>
-          <p:nvPr/>
-        </p:nvSpPr>
-        <p:spPr>
-          <a:xfrm xmlns:a="http://schemas.openxmlformats.org/drawingml/2006/main">
-            <a:off x="7505700" y="4133850"/>
-            <a:ext cx="1200150" cy="400050"/>
+                <a16:creationId xmlns:a16="http://schemas.microsoft.com/office/drawing/2014/main" id="{A9E86F51-6A02-44EE-9D90-E232BED34137}"/>
+              </a:ext>
+            </a:extLst>
+          </p:cNvPr>
+          <p:cNvSpPr>
+            <a:spLocks xmlns:a="http://schemas.openxmlformats.org/drawingml/2006/main" noGrp="1"/>
+          </p:cNvSpPr>
+          <p:nvPr/>
+        </p:nvSpPr>
+        <p:spPr>
+          <a:xfrm xmlns:a="http://schemas.openxmlformats.org/drawingml/2006/main">
+            <a:off x="7334250" y="4171950"/>
+            <a:ext cx="1295400" cy="419100"/>
           </a:xfrm>
           <a:prstGeom xmlns:a="http://schemas.openxmlformats.org/drawingml/2006/main" prst="rect">
             <a:avLst/>
@@ -6143,14 +6143,14 @@
           <a:lstStyle xmlns:a="http://schemas.openxmlformats.org/drawingml/2006/main"/>
           <a:p xmlns:a="http://schemas.openxmlformats.org/drawingml/2006/main">
             <a:pPr algn="l">
-              <a:defRPr sz="1125" b="0">
+              <a:defRPr sz="1050" b="0">
                 <a:solidFill>
                   <a:srgbClr val="7A7A7A"/>
                 </a:solidFill>
               </a:defRPr>
             </a:pPr>
             <a:r>
-              <a:rPr sz="1125" b="0">
+              <a:rPr sz="1050" b="0">
                 <a:solidFill>
                   <a:srgbClr val="7A7A7A"/>
                 </a:solidFill>
@@ -6165,18 +6165,18 @@
           <p:cNvPr id="31" name="">
             <a:extLst xmlns:a="http://schemas.openxmlformats.org/drawingml/2006/main">
               <a:ext uri="{FF2B5EF4-FFF2-40B4-BE49-F238E27FC236}">
-                <a16:creationId xmlns:a16="http://schemas.microsoft.com/office/drawing/2014/main" id="{D4452495-A936-4F0A-B23F-B1294ED22AAB}"/>
-              </a:ext>
-            </a:extLst>
-          </p:cNvPr>
-          <p:cNvSpPr>
-            <a:spLocks xmlns:a="http://schemas.openxmlformats.org/drawingml/2006/main" noGrp="1"/>
-          </p:cNvSpPr>
-          <p:nvPr/>
-        </p:nvSpPr>
-        <p:spPr>
-          <a:xfrm xmlns:a="http://schemas.openxmlformats.org/drawingml/2006/main">
-            <a:off x="8963025" y="3876675"/>
+                <a16:creationId xmlns:a16="http://schemas.microsoft.com/office/drawing/2014/main" id="{1D37DB14-01DA-4671-9840-A67C78C05352}"/>
+              </a:ext>
+            </a:extLst>
+          </p:cNvPr>
+          <p:cNvSpPr>
+            <a:spLocks xmlns:a="http://schemas.openxmlformats.org/drawingml/2006/main" noGrp="1"/>
+          </p:cNvSpPr>
+          <p:nvPr/>
+        </p:nvSpPr>
+        <p:spPr>
+          <a:xfrm xmlns:a="http://schemas.openxmlformats.org/drawingml/2006/main">
+            <a:off x="9210675" y="3895725"/>
             <a:ext cx="19050" cy="19050"/>
           </a:xfrm>
           <a:prstGeom xmlns:a="http://schemas.openxmlformats.org/drawingml/2006/main" prst="rect">
@@ -6194,18 +6194,18 @@
           <p:cNvPr id="32" name="">
             <a:extLst xmlns:a="http://schemas.openxmlformats.org/drawingml/2006/main">
               <a:ext uri="{FF2B5EF4-FFF2-40B4-BE49-F238E27FC236}">
-                <a16:creationId xmlns:a16="http://schemas.microsoft.com/office/drawing/2014/main" id="{B4E237E4-2FE0-4BF5-A361-D97CFDAD49D5}"/>
-              </a:ext>
-            </a:extLst>
-          </p:cNvPr>
-          <p:cNvSpPr>
-            <a:spLocks xmlns:a="http://schemas.openxmlformats.org/drawingml/2006/main" noGrp="1"/>
-          </p:cNvSpPr>
-          <p:nvPr/>
-        </p:nvSpPr>
-        <p:spPr>
-          <a:xfrm xmlns:a="http://schemas.openxmlformats.org/drawingml/2006/main">
-            <a:off x="9363075" y="3876675"/>
+                <a16:creationId xmlns:a16="http://schemas.microsoft.com/office/drawing/2014/main" id="{65AB44C4-175C-4D67-A753-7B4A958B261B}"/>
+              </a:ext>
+            </a:extLst>
+          </p:cNvPr>
+          <p:cNvSpPr>
+            <a:spLocks xmlns:a="http://schemas.openxmlformats.org/drawingml/2006/main" noGrp="1"/>
+          </p:cNvSpPr>
+          <p:nvPr/>
+        </p:nvSpPr>
+        <p:spPr>
+          <a:xfrm xmlns:a="http://schemas.openxmlformats.org/drawingml/2006/main">
+            <a:off x="8886825" y="3895725"/>
             <a:ext cx="19050" cy="19050"/>
           </a:xfrm>
           <a:prstGeom xmlns:a="http://schemas.openxmlformats.org/drawingml/2006/main" prst="rect">
@@ -6222,15 +6222,15 @@
         <p:nvCxnSpPr>
           <p:cNvPr id="70" name=""/>
           <p:cNvCxnSpPr>
-            <a:stCxn xmlns:a="http://schemas.openxmlformats.org/drawingml/2006/main" id="31" idx="3"/>
-            <a:endCxn xmlns:a="http://schemas.openxmlformats.org/drawingml/2006/main" id="32" idx="1"/>
+            <a:stCxn xmlns:a="http://schemas.openxmlformats.org/drawingml/2006/main" id="31" idx="1"/>
+            <a:endCxn xmlns:a="http://schemas.openxmlformats.org/drawingml/2006/main" id="32" idx="3"/>
           </p:cNvCxnSpPr>
           <p:nvPr/>
         </p:nvCxnSpPr>
         <p:spPr>
-          <a:xfrm xmlns:a="http://schemas.openxmlformats.org/drawingml/2006/main">
-            <a:off x="8982075" y="3886200"/>
-            <a:ext cx="381000" cy="0"/>
+          <a:xfrm xmlns:a="http://schemas.openxmlformats.org/drawingml/2006/main" flipH="1">
+            <a:off x="8905875" y="3905250"/>
+            <a:ext cx="304800" cy="0"/>
           </a:xfrm>
           <a:prstGeom xmlns:a="http://schemas.openxmlformats.org/drawingml/2006/main" prst="straightConnector1">
             <a:avLst/>
@@ -6249,23 +6249,23 @@
           <p:cNvPr id="34" name="">
             <a:extLst xmlns:a="http://schemas.openxmlformats.org/drawingml/2006/main">
               <a:ext uri="{FF2B5EF4-FFF2-40B4-BE49-F238E27FC236}">
-                <a16:creationId xmlns:a16="http://schemas.microsoft.com/office/drawing/2014/main" id="{73D798E5-AF1B-42BB-95E6-0465A3E09E18}"/>
-              </a:ext>
-            </a:extLst>
-          </p:cNvPr>
-          <p:cNvSpPr>
-            <a:spLocks xmlns:a="http://schemas.openxmlformats.org/drawingml/2006/main" noGrp="1"/>
-          </p:cNvSpPr>
-          <p:nvPr/>
-        </p:nvSpPr>
-        <p:spPr>
-          <a:xfrm xmlns:a="http://schemas.openxmlformats.org/drawingml/2006/main">
-            <a:off x="9467850" y="3162300"/>
-            <a:ext cx="1695450" cy="1428750"/>
+                <a16:creationId xmlns:a16="http://schemas.microsoft.com/office/drawing/2014/main" id="{60F0C87D-A182-493B-854B-E451A73FA683}"/>
+              </a:ext>
+            </a:extLst>
+          </p:cNvPr>
+          <p:cNvSpPr>
+            <a:spLocks xmlns:a="http://schemas.openxmlformats.org/drawingml/2006/main" noGrp="1"/>
+          </p:cNvSpPr>
+          <p:nvPr/>
+        </p:nvSpPr>
+        <p:spPr>
+          <a:xfrm xmlns:a="http://schemas.openxmlformats.org/drawingml/2006/main">
+            <a:off x="9239250" y="3162300"/>
+            <a:ext cx="1790700" cy="1485900"/>
           </a:xfrm>
           <a:prstGeom xmlns:a="http://schemas.openxmlformats.org/drawingml/2006/main" prst="roundRect">
             <a:avLst>
-              <a:gd name="adj" fmla="val 10667"/>
+              <a:gd name="adj" fmla="val 10256"/>
             </a:avLst>
           </a:prstGeom>
           <a:solidFill xmlns:a="http://schemas.openxmlformats.org/drawingml/2006/main">
@@ -6284,18 +6284,18 @@
           <p:cNvPr id="35" name="">
             <a:extLst xmlns:a="http://schemas.openxmlformats.org/drawingml/2006/main">
               <a:ext uri="{FF2B5EF4-FFF2-40B4-BE49-F238E27FC236}">
-                <a16:creationId xmlns:a16="http://schemas.microsoft.com/office/drawing/2014/main" id="{9D7F3F15-A8B3-4B1C-9628-004F025FC635}"/>
-              </a:ext>
-            </a:extLst>
-          </p:cNvPr>
-          <p:cNvSpPr>
-            <a:spLocks xmlns:a="http://schemas.openxmlformats.org/drawingml/2006/main" noGrp="1"/>
-          </p:cNvSpPr>
-          <p:nvPr/>
-        </p:nvSpPr>
-        <p:spPr>
-          <a:xfrm xmlns:a="http://schemas.openxmlformats.org/drawingml/2006/main">
-            <a:off x="9696450" y="3409950"/>
+                <a16:creationId xmlns:a16="http://schemas.microsoft.com/office/drawing/2014/main" id="{6549C0A4-54D9-4920-B10C-D5B7EA24C555}"/>
+              </a:ext>
+            </a:extLst>
+          </p:cNvPr>
+          <p:cNvSpPr>
+            <a:spLocks xmlns:a="http://schemas.openxmlformats.org/drawingml/2006/main" noGrp="1"/>
+          </p:cNvSpPr>
+          <p:nvPr/>
+        </p:nvSpPr>
+        <p:spPr>
+          <a:xfrm xmlns:a="http://schemas.openxmlformats.org/drawingml/2006/main">
+            <a:off x="9467850" y="3409950"/>
             <a:ext cx="381000" cy="190500"/>
           </a:xfrm>
           <a:prstGeom xmlns:a="http://schemas.openxmlformats.org/drawingml/2006/main" prst="rect">
@@ -6334,19 +6334,19 @@
           <p:cNvPr id="36" name="">
             <a:extLst xmlns:a="http://schemas.openxmlformats.org/drawingml/2006/main">
               <a:ext uri="{FF2B5EF4-FFF2-40B4-BE49-F238E27FC236}">
-                <a16:creationId xmlns:a16="http://schemas.microsoft.com/office/drawing/2014/main" id="{BC33DD8E-6FDE-4213-BC5E-D6E6769BCDFC}"/>
-              </a:ext>
-            </a:extLst>
-          </p:cNvPr>
-          <p:cNvSpPr>
-            <a:spLocks xmlns:a="http://schemas.openxmlformats.org/drawingml/2006/main" noGrp="1"/>
-          </p:cNvSpPr>
-          <p:nvPr/>
-        </p:nvSpPr>
-        <p:spPr>
-          <a:xfrm xmlns:a="http://schemas.openxmlformats.org/drawingml/2006/main">
-            <a:off x="9696450" y="3714750"/>
-            <a:ext cx="1238250" cy="285750"/>
+                <a16:creationId xmlns:a16="http://schemas.microsoft.com/office/drawing/2014/main" id="{25E45EB5-7597-4804-A864-00C850DCD464}"/>
+              </a:ext>
+            </a:extLst>
+          </p:cNvPr>
+          <p:cNvSpPr>
+            <a:spLocks xmlns:a="http://schemas.openxmlformats.org/drawingml/2006/main" noGrp="1"/>
+          </p:cNvSpPr>
+          <p:nvPr/>
+        </p:nvSpPr>
+        <p:spPr>
+          <a:xfrm xmlns:a="http://schemas.openxmlformats.org/drawingml/2006/main">
+            <a:off x="9429750" y="3714750"/>
+            <a:ext cx="1466850" cy="323850"/>
           </a:xfrm>
           <a:prstGeom xmlns:a="http://schemas.openxmlformats.org/drawingml/2006/main" prst="rect">
             <a:avLst/>
@@ -6362,14 +6362,14 @@
           <a:lstStyle xmlns:a="http://schemas.openxmlformats.org/drawingml/2006/main"/>
           <a:p xmlns:a="http://schemas.openxmlformats.org/drawingml/2006/main">
             <a:pPr algn="l">
-              <a:defRPr sz="1875" b="1">
+              <a:defRPr sz="1725" b="1">
                 <a:solidFill>
                   <a:srgbClr val="111111"/>
                 </a:solidFill>
               </a:defRPr>
             </a:pPr>
             <a:r>
-              <a:rPr sz="1875" b="1">
+              <a:rPr sz="1725" b="1">
                 <a:solidFill>
                   <a:srgbClr val="111111"/>
                 </a:solidFill>
@@ -6384,19 +6384,19 @@
           <p:cNvPr id="37" name="">
             <a:extLst xmlns:a="http://schemas.openxmlformats.org/drawingml/2006/main">
               <a:ext uri="{FF2B5EF4-FFF2-40B4-BE49-F238E27FC236}">
-                <a16:creationId xmlns:a16="http://schemas.microsoft.com/office/drawing/2014/main" id="{A8A22CA1-BE6A-4B95-8BA2-61D430590E6D}"/>
-              </a:ext>
-            </a:extLst>
-          </p:cNvPr>
-          <p:cNvSpPr>
-            <a:spLocks xmlns:a="http://schemas.openxmlformats.org/drawingml/2006/main" noGrp="1"/>
-          </p:cNvSpPr>
-          <p:nvPr/>
-        </p:nvSpPr>
-        <p:spPr>
-          <a:xfrm xmlns:a="http://schemas.openxmlformats.org/drawingml/2006/main">
-            <a:off x="9696450" y="4133850"/>
-            <a:ext cx="1200150" cy="400050"/>
+                <a16:creationId xmlns:a16="http://schemas.microsoft.com/office/drawing/2014/main" id="{CE6E5FD1-6CC1-406B-86AF-20C973EBE7D4}"/>
+              </a:ext>
+            </a:extLst>
+          </p:cNvPr>
+          <p:cNvSpPr>
+            <a:spLocks xmlns:a="http://schemas.openxmlformats.org/drawingml/2006/main" noGrp="1"/>
+          </p:cNvSpPr>
+          <p:nvPr/>
+        </p:nvSpPr>
+        <p:spPr>
+          <a:xfrm xmlns:a="http://schemas.openxmlformats.org/drawingml/2006/main">
+            <a:off x="9467850" y="4171950"/>
+            <a:ext cx="1295400" cy="419100"/>
           </a:xfrm>
           <a:prstGeom xmlns:a="http://schemas.openxmlformats.org/drawingml/2006/main" prst="rect">
             <a:avLst/>
@@ -6412,14 +6412,14 @@
           <a:lstStyle xmlns:a="http://schemas.openxmlformats.org/drawingml/2006/main"/>
           <a:p xmlns:a="http://schemas.openxmlformats.org/drawingml/2006/main">
             <a:pPr algn="l">
-              <a:defRPr sz="1125" b="0">
+              <a:defRPr sz="1050" b="0">
                 <a:solidFill>
                   <a:srgbClr val="7A7A7A"/>
                 </a:solidFill>
               </a:defRPr>
             </a:pPr>
             <a:r>
-              <a:rPr sz="1125" b="0">
+              <a:rPr sz="1050" b="0">
                 <a:solidFill>
                   <a:srgbClr val="7A7A7A"/>
                 </a:solidFill>
@@ -6432,7 +6432,7 @@
     </p:spTree>
     <p:extLst>
       <p:ext uri="{BB962C8B-B14F-4D97-AF65-F5344CB8AC3E}">
-        <p14:creationId xmlns:p14="http://schemas.microsoft.com/office/powerpoint/2010/main" val="1822838139"/>
+        <p14:creationId xmlns:p14="http://schemas.microsoft.com/office/powerpoint/2010/main" val="2045525909"/>
       </p:ext>
     </p:extLst>
   </p:cSld>
@@ -6463,7 +6463,7 @@
           <p:cNvPr id="1" name="">
             <a:extLst xmlns:a="http://schemas.openxmlformats.org/drawingml/2006/main">
               <a:ext uri="{FF2B5EF4-FFF2-40B4-BE49-F238E27FC236}">
-                <a16:creationId xmlns:a16="http://schemas.microsoft.com/office/drawing/2014/main" id="{6B93B1DD-EE01-4EE1-BD00-627E88D3A6FA}"/>
+                <a16:creationId xmlns:a16="http://schemas.microsoft.com/office/drawing/2014/main" id="{BFC0E37B-301A-4AF6-92E7-89A2C3B8FACA}"/>
               </a:ext>
             </a:extLst>
           </p:cNvPr>
@@ -6513,7 +6513,7 @@
           <p:cNvPr id="2" name="">
             <a:extLst xmlns:a="http://schemas.openxmlformats.org/drawingml/2006/main">
               <a:ext uri="{FF2B5EF4-FFF2-40B4-BE49-F238E27FC236}">
-                <a16:creationId xmlns:a16="http://schemas.microsoft.com/office/drawing/2014/main" id="{59F001A1-3BB8-497F-9423-D25008BE59E6}"/>
+                <a16:creationId xmlns:a16="http://schemas.microsoft.com/office/drawing/2014/main" id="{E3518D00-E1B6-4D6C-BC94-CC094731FDF4}"/>
               </a:ext>
             </a:extLst>
           </p:cNvPr>
@@ -6563,7 +6563,7 @@
           <p:cNvPr id="3" name="">
             <a:extLst xmlns:a="http://schemas.openxmlformats.org/drawingml/2006/main">
               <a:ext uri="{FF2B5EF4-FFF2-40B4-BE49-F238E27FC236}">
-                <a16:creationId xmlns:a16="http://schemas.microsoft.com/office/drawing/2014/main" id="{CF860375-2ACC-46C4-88D3-0EDF449A72EA}"/>
+                <a16:creationId xmlns:a16="http://schemas.microsoft.com/office/drawing/2014/main" id="{34820325-91DC-4071-8EFD-4E331A369D8F}"/>
               </a:ext>
             </a:extLst>
           </p:cNvPr>
@@ -6575,7 +6575,7 @@
         <p:spPr>
           <a:xfrm xmlns:a="http://schemas.openxmlformats.org/drawingml/2006/main">
             <a:off x="704850" y="990600"/>
-            <a:ext cx="7239000" cy="933450"/>
+            <a:ext cx="7905750" cy="1123950"/>
           </a:xfrm>
           <a:prstGeom xmlns:a="http://schemas.openxmlformats.org/drawingml/2006/main" prst="rect">
             <a:avLst/>
@@ -6591,14 +6591,14 @@
           <a:lstStyle xmlns:a="http://schemas.openxmlformats.org/drawingml/2006/main"/>
           <a:p xmlns:a="http://schemas.openxmlformats.org/drawingml/2006/main">
             <a:pPr algn="l">
-              <a:defRPr sz="3225" b="1">
+              <a:defRPr sz="3000" b="1">
                 <a:solidFill>
                   <a:srgbClr val="111111"/>
                 </a:solidFill>
               </a:defRPr>
             </a:pPr>
             <a:r>
-              <a:rPr sz="3225" b="1">
+              <a:rPr sz="3000" b="1">
                 <a:solidFill>
                   <a:srgbClr val="111111"/>
                 </a:solidFill>
@@ -6613,19 +6613,19 @@
           <p:cNvPr id="4" name="">
             <a:extLst xmlns:a="http://schemas.openxmlformats.org/drawingml/2006/main">
               <a:ext uri="{FF2B5EF4-FFF2-40B4-BE49-F238E27FC236}">
-                <a16:creationId xmlns:a16="http://schemas.microsoft.com/office/drawing/2014/main" id="{E2428F13-582B-406B-B2BC-E77F7F619615}"/>
-              </a:ext>
-            </a:extLst>
-          </p:cNvPr>
-          <p:cNvSpPr>
-            <a:spLocks xmlns:a="http://schemas.openxmlformats.org/drawingml/2006/main" noGrp="1"/>
-          </p:cNvSpPr>
-          <p:nvPr/>
-        </p:nvSpPr>
-        <p:spPr>
-          <a:xfrm xmlns:a="http://schemas.openxmlformats.org/drawingml/2006/main">
-            <a:off x="723900" y="1885950"/>
-            <a:ext cx="6667500" cy="590550"/>
+                <a16:creationId xmlns:a16="http://schemas.microsoft.com/office/drawing/2014/main" id="{F8CCC8FD-6B8E-4522-8885-18DCA350E3BA}"/>
+              </a:ext>
+            </a:extLst>
+          </p:cNvPr>
+          <p:cNvSpPr>
+            <a:spLocks xmlns:a="http://schemas.openxmlformats.org/drawingml/2006/main" noGrp="1"/>
+          </p:cNvSpPr>
+          <p:nvPr/>
+        </p:nvSpPr>
+        <p:spPr>
+          <a:xfrm xmlns:a="http://schemas.openxmlformats.org/drawingml/2006/main">
+            <a:off x="723900" y="2114550"/>
+            <a:ext cx="7239000" cy="628650"/>
           </a:xfrm>
           <a:prstGeom xmlns:a="http://schemas.openxmlformats.org/drawingml/2006/main" prst="rect">
             <a:avLst/>
@@ -6641,14 +6641,14 @@
           <a:lstStyle xmlns:a="http://schemas.openxmlformats.org/drawingml/2006/main"/>
           <a:p xmlns:a="http://schemas.openxmlformats.org/drawingml/2006/main">
             <a:pPr algn="l">
-              <a:defRPr sz="1575" b="0">
+              <a:defRPr sz="1500" b="0">
                 <a:solidFill>
                   <a:srgbClr val="7A7A7A"/>
                 </a:solidFill>
               </a:defRPr>
             </a:pPr>
             <a:r>
-              <a:rPr sz="1575" b="0">
+              <a:rPr sz="1500" b="0">
                 <a:solidFill>
                   <a:srgbClr val="7A7A7A"/>
                 </a:solidFill>
@@ -6663,7 +6663,7 @@
           <p:cNvPr id="5" name="">
             <a:extLst xmlns:a="http://schemas.openxmlformats.org/drawingml/2006/main">
               <a:ext uri="{FF2B5EF4-FFF2-40B4-BE49-F238E27FC236}">
-                <a16:creationId xmlns:a16="http://schemas.microsoft.com/office/drawing/2014/main" id="{5546CE99-F6FC-4B09-B496-CEDDA8E7B826}"/>
+                <a16:creationId xmlns:a16="http://schemas.microsoft.com/office/drawing/2014/main" id="{1578E58B-6F4C-43FA-9660-64D92B9DC26E}"/>
               </a:ext>
             </a:extLst>
           </p:cNvPr>
@@ -6713,7 +6713,7 @@
           <p:cNvPr id="6" name="">
             <a:extLst xmlns:a="http://schemas.openxmlformats.org/drawingml/2006/main">
               <a:ext uri="{FF2B5EF4-FFF2-40B4-BE49-F238E27FC236}">
-                <a16:creationId xmlns:a16="http://schemas.microsoft.com/office/drawing/2014/main" id="{7E683A9A-B278-4FB0-9D1B-7A7BB4536B94}"/>
+                <a16:creationId xmlns:a16="http://schemas.microsoft.com/office/drawing/2014/main" id="{8A300299-BED9-46F7-8A74-D9C04CE17F84}"/>
               </a:ext>
             </a:extLst>
           </p:cNvPr>
@@ -6748,7 +6748,7 @@
           <p:cNvPr id="7" name="">
             <a:extLst xmlns:a="http://schemas.openxmlformats.org/drawingml/2006/main">
               <a:ext uri="{FF2B5EF4-FFF2-40B4-BE49-F238E27FC236}">
-                <a16:creationId xmlns:a16="http://schemas.microsoft.com/office/drawing/2014/main" id="{78364F3B-CB21-437B-9081-9BB737D3066C}"/>
+                <a16:creationId xmlns:a16="http://schemas.microsoft.com/office/drawing/2014/main" id="{AA43B235-51BD-406B-AB34-F8E2BFA153B2}"/>
               </a:ext>
             </a:extLst>
           </p:cNvPr>
@@ -6798,7 +6798,7 @@
           <p:cNvPr id="8" name="">
             <a:extLst xmlns:a="http://schemas.openxmlformats.org/drawingml/2006/main">
               <a:ext uri="{FF2B5EF4-FFF2-40B4-BE49-F238E27FC236}">
-                <a16:creationId xmlns:a16="http://schemas.microsoft.com/office/drawing/2014/main" id="{C55123D8-2EF4-45C9-B284-7FE463739898}"/>
+                <a16:creationId xmlns:a16="http://schemas.microsoft.com/office/drawing/2014/main" id="{9DBBEFAD-6D6A-4AAB-9691-2E0412D261DB}"/>
               </a:ext>
             </a:extLst>
           </p:cNvPr>
@@ -6848,7 +6848,7 @@
           <p:cNvPr id="9" name="">
             <a:extLst xmlns:a="http://schemas.openxmlformats.org/drawingml/2006/main">
               <a:ext uri="{FF2B5EF4-FFF2-40B4-BE49-F238E27FC236}">
-                <a16:creationId xmlns:a16="http://schemas.microsoft.com/office/drawing/2014/main" id="{9A9DDDA8-B9A1-45DE-8A11-8065F5BF9746}"/>
+                <a16:creationId xmlns:a16="http://schemas.microsoft.com/office/drawing/2014/main" id="{1E0389F3-E108-4606-9143-CEB97CEBF3BD}"/>
               </a:ext>
             </a:extLst>
           </p:cNvPr>
@@ -6883,7 +6883,7 @@
           <p:cNvPr id="10" name="">
             <a:extLst xmlns:a="http://schemas.openxmlformats.org/drawingml/2006/main">
               <a:ext uri="{FF2B5EF4-FFF2-40B4-BE49-F238E27FC236}">
-                <a16:creationId xmlns:a16="http://schemas.microsoft.com/office/drawing/2014/main" id="{A6BECF15-1F7F-49BF-9A79-8EB027E6C4CC}"/>
+                <a16:creationId xmlns:a16="http://schemas.microsoft.com/office/drawing/2014/main" id="{3D522095-B304-4288-86B6-981EA2F3BAFB}"/>
               </a:ext>
             </a:extLst>
           </p:cNvPr>
@@ -6933,7 +6933,7 @@
           <p:cNvPr id="11" name="">
             <a:extLst xmlns:a="http://schemas.openxmlformats.org/drawingml/2006/main">
               <a:ext uri="{FF2B5EF4-FFF2-40B4-BE49-F238E27FC236}">
-                <a16:creationId xmlns:a16="http://schemas.microsoft.com/office/drawing/2014/main" id="{6A6FB229-118D-4793-A02B-40CB6C63437D}"/>
+                <a16:creationId xmlns:a16="http://schemas.microsoft.com/office/drawing/2014/main" id="{295F2E7E-ACD3-4578-8934-72ADC6A38D5D}"/>
               </a:ext>
             </a:extLst>
           </p:cNvPr>
@@ -6983,7 +6983,7 @@
           <p:cNvPr id="12" name="">
             <a:extLst xmlns:a="http://schemas.openxmlformats.org/drawingml/2006/main">
               <a:ext uri="{FF2B5EF4-FFF2-40B4-BE49-F238E27FC236}">
-                <a16:creationId xmlns:a16="http://schemas.microsoft.com/office/drawing/2014/main" id="{66601A10-82D3-4DD5-A9E8-278EA5C91CD5}"/>
+                <a16:creationId xmlns:a16="http://schemas.microsoft.com/office/drawing/2014/main" id="{470E8E0D-7AF1-475E-A184-43582D43DCF7}"/>
               </a:ext>
             </a:extLst>
           </p:cNvPr>
@@ -7018,7 +7018,7 @@
           <p:cNvPr id="13" name="">
             <a:extLst xmlns:a="http://schemas.openxmlformats.org/drawingml/2006/main">
               <a:ext uri="{FF2B5EF4-FFF2-40B4-BE49-F238E27FC236}">
-                <a16:creationId xmlns:a16="http://schemas.microsoft.com/office/drawing/2014/main" id="{E302E474-D06A-4F4D-B48D-8702AEC816CF}"/>
+                <a16:creationId xmlns:a16="http://schemas.microsoft.com/office/drawing/2014/main" id="{79E8A3ED-59C7-478D-B745-42D4B7980580}"/>
               </a:ext>
             </a:extLst>
           </p:cNvPr>
@@ -7068,7 +7068,7 @@
           <p:cNvPr id="14" name="">
             <a:extLst xmlns:a="http://schemas.openxmlformats.org/drawingml/2006/main">
               <a:ext uri="{FF2B5EF4-FFF2-40B4-BE49-F238E27FC236}">
-                <a16:creationId xmlns:a16="http://schemas.microsoft.com/office/drawing/2014/main" id="{88C704B1-A9BD-424B-BFB5-1862B9756BF9}"/>
+                <a16:creationId xmlns:a16="http://schemas.microsoft.com/office/drawing/2014/main" id="{4705AC71-1C4C-4C19-B603-A9FCC720A4D7}"/>
               </a:ext>
             </a:extLst>
           </p:cNvPr>
@@ -7118,7 +7118,7 @@
           <p:cNvPr id="15" name="">
             <a:extLst xmlns:a="http://schemas.openxmlformats.org/drawingml/2006/main">
               <a:ext uri="{FF2B5EF4-FFF2-40B4-BE49-F238E27FC236}">
-                <a16:creationId xmlns:a16="http://schemas.microsoft.com/office/drawing/2014/main" id="{FE03B433-6A79-427B-850C-CA0AC436E895}"/>
+                <a16:creationId xmlns:a16="http://schemas.microsoft.com/office/drawing/2014/main" id="{B0CC2962-CFF8-422A-9819-1971C093CA9C}"/>
               </a:ext>
             </a:extLst>
           </p:cNvPr>
@@ -7130,6 +7130,276 @@
         <p:spPr>
           <a:xfrm xmlns:a="http://schemas.openxmlformats.org/drawingml/2006/main">
             <a:off x="685800" y="4324350"/>
+            <a:ext cx="3028950" cy="876300"/>
+          </a:xfrm>
+          <a:prstGeom xmlns:a="http://schemas.openxmlformats.org/drawingml/2006/main" prst="roundRect">
+            <a:avLst>
+              <a:gd name="adj" fmla="val 17391"/>
+            </a:avLst>
+          </a:prstGeom>
+          <a:solidFill xmlns:a="http://schemas.openxmlformats.org/drawingml/2006/main">
+            <a:srgbClr val="FFFFFF"/>
+          </a:solidFill>
+          <a:ln xmlns:a="http://schemas.openxmlformats.org/drawingml/2006/main" w="13335">
+            <a:solidFill>
+              <a:srgbClr val="FCE8F1"/>
+            </a:solidFill>
+            <a:prstDash val="solid"/>
+          </a:ln>
+        </p:spPr>
+      </p:sp>
+      <p:sp>
+        <p:nvSpPr>
+          <p:cNvPr id="16" name="">
+            <a:extLst xmlns:a="http://schemas.openxmlformats.org/drawingml/2006/main">
+              <a:ext uri="{FF2B5EF4-FFF2-40B4-BE49-F238E27FC236}">
+                <a16:creationId xmlns:a16="http://schemas.microsoft.com/office/drawing/2014/main" id="{00A97059-2641-4AD6-9457-FF63A7771C25}"/>
+              </a:ext>
+            </a:extLst>
+          </p:cNvPr>
+          <p:cNvSpPr>
+            <a:spLocks xmlns:a="http://schemas.openxmlformats.org/drawingml/2006/main" noGrp="1"/>
+          </p:cNvSpPr>
+          <p:nvPr/>
+        </p:nvSpPr>
+        <p:spPr>
+          <a:xfrm xmlns:a="http://schemas.openxmlformats.org/drawingml/2006/main">
+            <a:off x="914400" y="4495800"/>
+            <a:ext cx="2095500" cy="266700"/>
+          </a:xfrm>
+          <a:prstGeom xmlns:a="http://schemas.openxmlformats.org/drawingml/2006/main" prst="rect">
+            <a:avLst/>
+          </a:prstGeom>
+          <a:noFill xmlns:a="http://schemas.openxmlformats.org/drawingml/2006/main"/>
+          <a:ln xmlns:a="http://schemas.openxmlformats.org/drawingml/2006/main" w="0">
+            <a:noFill/>
+            <a:prstDash val="solid"/>
+          </a:ln>
+        </p:spPr>
+        <p:txBody>
+          <a:bodyPr xmlns:a="http://schemas.openxmlformats.org/drawingml/2006/main"/>
+          <a:lstStyle xmlns:a="http://schemas.openxmlformats.org/drawingml/2006/main"/>
+          <a:p xmlns:a="http://schemas.openxmlformats.org/drawingml/2006/main">
+            <a:pPr algn="l">
+              <a:defRPr sz="1800" b="1">
+                <a:solidFill>
+                  <a:srgbClr val="111111"/>
+                </a:solidFill>
+              </a:defRPr>
+            </a:pPr>
+            <a:r>
+              <a:rPr sz="1800" b="1">
+                <a:solidFill>
+                  <a:srgbClr val="111111"/>
+                </a:solidFill>
+              </a:rPr>
+              <a:t>GitHub PR</a:t>
+            </a:r>
+          </a:p>
+        </p:txBody>
+      </p:sp>
+      <p:sp>
+        <p:nvSpPr>
+          <p:cNvPr id="17" name="">
+            <a:extLst xmlns:a="http://schemas.openxmlformats.org/drawingml/2006/main">
+              <a:ext uri="{FF2B5EF4-FFF2-40B4-BE49-F238E27FC236}">
+                <a16:creationId xmlns:a16="http://schemas.microsoft.com/office/drawing/2014/main" id="{56559554-BFB5-4970-AAD7-8E0F714EBB6D}"/>
+              </a:ext>
+            </a:extLst>
+          </p:cNvPr>
+          <p:cNvSpPr>
+            <a:spLocks xmlns:a="http://schemas.openxmlformats.org/drawingml/2006/main" noGrp="1"/>
+          </p:cNvSpPr>
+          <p:nvPr/>
+        </p:nvSpPr>
+        <p:spPr>
+          <a:xfrm xmlns:a="http://schemas.openxmlformats.org/drawingml/2006/main">
+            <a:off x="914400" y="4819650"/>
+            <a:ext cx="2400300" cy="190500"/>
+          </a:xfrm>
+          <a:prstGeom xmlns:a="http://schemas.openxmlformats.org/drawingml/2006/main" prst="rect">
+            <a:avLst/>
+          </a:prstGeom>
+          <a:noFill xmlns:a="http://schemas.openxmlformats.org/drawingml/2006/main"/>
+          <a:ln xmlns:a="http://schemas.openxmlformats.org/drawingml/2006/main" w="0">
+            <a:noFill/>
+            <a:prstDash val="solid"/>
+          </a:ln>
+        </p:spPr>
+        <p:txBody>
+          <a:bodyPr xmlns:a="http://schemas.openxmlformats.org/drawingml/2006/main"/>
+          <a:lstStyle xmlns:a="http://schemas.openxmlformats.org/drawingml/2006/main"/>
+          <a:p xmlns:a="http://schemas.openxmlformats.org/drawingml/2006/main">
+            <a:pPr algn="l">
+              <a:defRPr sz="1125" b="0">
+                <a:solidFill>
+                  <a:srgbClr val="7A7A7A"/>
+                </a:solidFill>
+              </a:defRPr>
+            </a:pPr>
+            <a:r>
+              <a:rPr sz="1125" b="0">
+                <a:solidFill>
+                  <a:srgbClr val="7A7A7A"/>
+                </a:solidFill>
+              </a:rPr>
+              <a:t>Review-gated deploy</a:t>
+            </a:r>
+          </a:p>
+        </p:txBody>
+      </p:sp>
+      <p:sp>
+        <p:nvSpPr>
+          <p:cNvPr id="18" name="">
+            <a:extLst xmlns:a="http://schemas.openxmlformats.org/drawingml/2006/main">
+              <a:ext uri="{FF2B5EF4-FFF2-40B4-BE49-F238E27FC236}">
+                <a16:creationId xmlns:a16="http://schemas.microsoft.com/office/drawing/2014/main" id="{F5062AF1-BFCE-4F90-8563-C86AFFBDFC2E}"/>
+              </a:ext>
+            </a:extLst>
+          </p:cNvPr>
+          <p:cNvSpPr>
+            <a:spLocks xmlns:a="http://schemas.openxmlformats.org/drawingml/2006/main" noGrp="1"/>
+          </p:cNvSpPr>
+          <p:nvPr/>
+        </p:nvSpPr>
+        <p:spPr>
+          <a:xfrm xmlns:a="http://schemas.openxmlformats.org/drawingml/2006/main">
+            <a:off x="4362450" y="4324350"/>
+            <a:ext cx="3028950" cy="876300"/>
+          </a:xfrm>
+          <a:prstGeom xmlns:a="http://schemas.openxmlformats.org/drawingml/2006/main" prst="roundRect">
+            <a:avLst>
+              <a:gd name="adj" fmla="val 17391"/>
+            </a:avLst>
+          </a:prstGeom>
+          <a:solidFill xmlns:a="http://schemas.openxmlformats.org/drawingml/2006/main">
+            <a:srgbClr val="FFFFFF"/>
+          </a:solidFill>
+          <a:ln xmlns:a="http://schemas.openxmlformats.org/drawingml/2006/main" w="13335">
+            <a:solidFill>
+              <a:srgbClr val="FCE8F1"/>
+            </a:solidFill>
+            <a:prstDash val="solid"/>
+          </a:ln>
+        </p:spPr>
+      </p:sp>
+      <p:sp>
+        <p:nvSpPr>
+          <p:cNvPr id="19" name="">
+            <a:extLst xmlns:a="http://schemas.openxmlformats.org/drawingml/2006/main">
+              <a:ext uri="{FF2B5EF4-FFF2-40B4-BE49-F238E27FC236}">
+                <a16:creationId xmlns:a16="http://schemas.microsoft.com/office/drawing/2014/main" id="{C7ECACCB-85D5-4188-9DD9-8B4472BCF0DA}"/>
+              </a:ext>
+            </a:extLst>
+          </p:cNvPr>
+          <p:cNvSpPr>
+            <a:spLocks xmlns:a="http://schemas.openxmlformats.org/drawingml/2006/main" noGrp="1"/>
+          </p:cNvSpPr>
+          <p:nvPr/>
+        </p:nvSpPr>
+        <p:spPr>
+          <a:xfrm xmlns:a="http://schemas.openxmlformats.org/drawingml/2006/main">
+            <a:off x="4591050" y="4495800"/>
+            <a:ext cx="2095500" cy="266700"/>
+          </a:xfrm>
+          <a:prstGeom xmlns:a="http://schemas.openxmlformats.org/drawingml/2006/main" prst="rect">
+            <a:avLst/>
+          </a:prstGeom>
+          <a:noFill xmlns:a="http://schemas.openxmlformats.org/drawingml/2006/main"/>
+          <a:ln xmlns:a="http://schemas.openxmlformats.org/drawingml/2006/main" w="0">
+            <a:noFill/>
+            <a:prstDash val="solid"/>
+          </a:ln>
+        </p:spPr>
+        <p:txBody>
+          <a:bodyPr xmlns:a="http://schemas.openxmlformats.org/drawingml/2006/main"/>
+          <a:lstStyle xmlns:a="http://schemas.openxmlformats.org/drawingml/2006/main"/>
+          <a:p xmlns:a="http://schemas.openxmlformats.org/drawingml/2006/main">
+            <a:pPr algn="l">
+              <a:defRPr sz="1800" b="1">
+                <a:solidFill>
+                  <a:srgbClr val="111111"/>
+                </a:solidFill>
+              </a:defRPr>
+            </a:pPr>
+            <a:r>
+              <a:rPr sz="1800" b="1">
+                <a:solidFill>
+                  <a:srgbClr val="111111"/>
+                </a:solidFill>
+              </a:rPr>
+              <a:t>Repair agent</a:t>
+            </a:r>
+          </a:p>
+        </p:txBody>
+      </p:sp>
+      <p:sp>
+        <p:nvSpPr>
+          <p:cNvPr id="20" name="">
+            <a:extLst xmlns:a="http://schemas.openxmlformats.org/drawingml/2006/main">
+              <a:ext uri="{FF2B5EF4-FFF2-40B4-BE49-F238E27FC236}">
+                <a16:creationId xmlns:a16="http://schemas.microsoft.com/office/drawing/2014/main" id="{4B731B5D-7E81-446F-B0A4-BE5F22A9915A}"/>
+              </a:ext>
+            </a:extLst>
+          </p:cNvPr>
+          <p:cNvSpPr>
+            <a:spLocks xmlns:a="http://schemas.openxmlformats.org/drawingml/2006/main" noGrp="1"/>
+          </p:cNvSpPr>
+          <p:nvPr/>
+        </p:nvSpPr>
+        <p:spPr>
+          <a:xfrm xmlns:a="http://schemas.openxmlformats.org/drawingml/2006/main">
+            <a:off x="4591050" y="4819650"/>
+            <a:ext cx="2400300" cy="190500"/>
+          </a:xfrm>
+          <a:prstGeom xmlns:a="http://schemas.openxmlformats.org/drawingml/2006/main" prst="rect">
+            <a:avLst/>
+          </a:prstGeom>
+          <a:noFill xmlns:a="http://schemas.openxmlformats.org/drawingml/2006/main"/>
+          <a:ln xmlns:a="http://schemas.openxmlformats.org/drawingml/2006/main" w="0">
+            <a:noFill/>
+            <a:prstDash val="solid"/>
+          </a:ln>
+        </p:spPr>
+        <p:txBody>
+          <a:bodyPr xmlns:a="http://schemas.openxmlformats.org/drawingml/2006/main"/>
+          <a:lstStyle xmlns:a="http://schemas.openxmlformats.org/drawingml/2006/main"/>
+          <a:p xmlns:a="http://schemas.openxmlformats.org/drawingml/2006/main">
+            <a:pPr algn="l">
+              <a:defRPr sz="1125" b="0">
+                <a:solidFill>
+                  <a:srgbClr val="7A7A7A"/>
+                </a:solidFill>
+              </a:defRPr>
+            </a:pPr>
+            <a:r>
+              <a:rPr sz="1125" b="0">
+                <a:solidFill>
+                  <a:srgbClr val="7A7A7A"/>
+                </a:solidFill>
+              </a:rPr>
+              <a:t>FAQ, comparison, schema</a:t>
+            </a:r>
+          </a:p>
+        </p:txBody>
+      </p:sp>
+      <p:sp>
+        <p:nvSpPr>
+          <p:cNvPr id="21" name="">
+            <a:extLst xmlns:a="http://schemas.openxmlformats.org/drawingml/2006/main">
+              <a:ext uri="{FF2B5EF4-FFF2-40B4-BE49-F238E27FC236}">
+                <a16:creationId xmlns:a16="http://schemas.microsoft.com/office/drawing/2014/main" id="{7A4D2F83-9366-41EB-90E0-7E3A0DC19B07}"/>
+              </a:ext>
+            </a:extLst>
+          </p:cNvPr>
+          <p:cNvSpPr>
+            <a:spLocks xmlns:a="http://schemas.openxmlformats.org/drawingml/2006/main" noGrp="1"/>
+          </p:cNvSpPr>
+          <p:nvPr/>
+        </p:nvSpPr>
+        <p:spPr>
+          <a:xfrm xmlns:a="http://schemas.openxmlformats.org/drawingml/2006/main">
+            <a:off x="8039100" y="4324350"/>
             <a:ext cx="3028950" cy="876300"/>
           </a:xfrm>
           <a:prstGeom xmlns:a="http://schemas.openxmlformats.org/drawingml/2006/main" prst="roundRect">
@@ -7150,21 +7420,21 @@
       </p:sp>
       <p:sp>
         <p:nvSpPr>
-          <p:cNvPr id="16" name="">
-            <a:extLst xmlns:a="http://schemas.openxmlformats.org/drawingml/2006/main">
-              <a:ext uri="{FF2B5EF4-FFF2-40B4-BE49-F238E27FC236}">
-                <a16:creationId xmlns:a16="http://schemas.microsoft.com/office/drawing/2014/main" id="{38B0FCED-C3F9-4D33-A347-57EFE56925DF}"/>
-              </a:ext>
-            </a:extLst>
-          </p:cNvPr>
-          <p:cNvSpPr>
-            <a:spLocks xmlns:a="http://schemas.openxmlformats.org/drawingml/2006/main" noGrp="1"/>
-          </p:cNvSpPr>
-          <p:nvPr/>
-        </p:nvSpPr>
-        <p:spPr>
-          <a:xfrm xmlns:a="http://schemas.openxmlformats.org/drawingml/2006/main">
-            <a:off x="914400" y="4495800"/>
+          <p:cNvPr id="22" name="">
+            <a:extLst xmlns:a="http://schemas.openxmlformats.org/drawingml/2006/main">
+              <a:ext uri="{FF2B5EF4-FFF2-40B4-BE49-F238E27FC236}">
+                <a16:creationId xmlns:a16="http://schemas.microsoft.com/office/drawing/2014/main" id="{8491A363-583B-4097-9899-45BA5D621C34}"/>
+              </a:ext>
+            </a:extLst>
+          </p:cNvPr>
+          <p:cNvSpPr>
+            <a:spLocks xmlns:a="http://schemas.openxmlformats.org/drawingml/2006/main" noGrp="1"/>
+          </p:cNvSpPr>
+          <p:nvPr/>
+        </p:nvSpPr>
+        <p:spPr>
+          <a:xfrm xmlns:a="http://schemas.openxmlformats.org/drawingml/2006/main">
+            <a:off x="8267700" y="4495800"/>
             <a:ext cx="2095500" cy="266700"/>
           </a:xfrm>
           <a:prstGeom xmlns:a="http://schemas.openxmlformats.org/drawingml/2006/main" prst="rect">
@@ -7200,21 +7470,21 @@
       </p:sp>
       <p:sp>
         <p:nvSpPr>
-          <p:cNvPr id="17" name="">
-            <a:extLst xmlns:a="http://schemas.openxmlformats.org/drawingml/2006/main">
-              <a:ext uri="{FF2B5EF4-FFF2-40B4-BE49-F238E27FC236}">
-                <a16:creationId xmlns:a16="http://schemas.microsoft.com/office/drawing/2014/main" id="{DDE69FDE-D29B-410A-8C4E-31E827286D8E}"/>
-              </a:ext>
-            </a:extLst>
-          </p:cNvPr>
-          <p:cNvSpPr>
-            <a:spLocks xmlns:a="http://schemas.openxmlformats.org/drawingml/2006/main" noGrp="1"/>
-          </p:cNvSpPr>
-          <p:nvPr/>
-        </p:nvSpPr>
-        <p:spPr>
-          <a:xfrm xmlns:a="http://schemas.openxmlformats.org/drawingml/2006/main">
-            <a:off x="914400" y="4819650"/>
+          <p:cNvPr id="23" name="">
+            <a:extLst xmlns:a="http://schemas.openxmlformats.org/drawingml/2006/main">
+              <a:ext uri="{FF2B5EF4-FFF2-40B4-BE49-F238E27FC236}">
+                <a16:creationId xmlns:a16="http://schemas.microsoft.com/office/drawing/2014/main" id="{53459412-86DE-40BF-818F-FC3C07F0D071}"/>
+              </a:ext>
+            </a:extLst>
+          </p:cNvPr>
+          <p:cNvSpPr>
+            <a:spLocks xmlns:a="http://schemas.openxmlformats.org/drawingml/2006/main" noGrp="1"/>
+          </p:cNvSpPr>
+          <p:nvPr/>
+        </p:nvSpPr>
+        <p:spPr>
+          <a:xfrm xmlns:a="http://schemas.openxmlformats.org/drawingml/2006/main">
+            <a:off x="8267700" y="4819650"/>
             <a:ext cx="2400300" cy="190500"/>
           </a:xfrm>
           <a:prstGeom xmlns:a="http://schemas.openxmlformats.org/drawingml/2006/main" prst="rect">
@@ -7250,280 +7520,39 @@
       </p:sp>
       <p:sp>
         <p:nvSpPr>
-          <p:cNvPr id="18" name="">
-            <a:extLst xmlns:a="http://schemas.openxmlformats.org/drawingml/2006/main">
-              <a:ext uri="{FF2B5EF4-FFF2-40B4-BE49-F238E27FC236}">
-                <a16:creationId xmlns:a16="http://schemas.microsoft.com/office/drawing/2014/main" id="{3663EEF0-2DC2-4B58-B0B8-F826EB49B2AB}"/>
-              </a:ext>
-            </a:extLst>
-          </p:cNvPr>
-          <p:cNvSpPr>
-            <a:spLocks xmlns:a="http://schemas.openxmlformats.org/drawingml/2006/main" noGrp="1"/>
-          </p:cNvSpPr>
-          <p:nvPr/>
-        </p:nvSpPr>
-        <p:spPr>
-          <a:xfrm xmlns:a="http://schemas.openxmlformats.org/drawingml/2006/main">
-            <a:off x="4362450" y="4324350"/>
-            <a:ext cx="3028950" cy="876300"/>
-          </a:xfrm>
-          <a:prstGeom xmlns:a="http://schemas.openxmlformats.org/drawingml/2006/main" prst="roundRect">
-            <a:avLst>
-              <a:gd name="adj" fmla="val 17391"/>
-            </a:avLst>
-          </a:prstGeom>
-          <a:solidFill xmlns:a="http://schemas.openxmlformats.org/drawingml/2006/main">
-            <a:srgbClr val="FFFFFF"/>
-          </a:solidFill>
-          <a:ln xmlns:a="http://schemas.openxmlformats.org/drawingml/2006/main" w="13335">
-            <a:solidFill>
-              <a:srgbClr val="FCE8F1"/>
-            </a:solidFill>
-            <a:prstDash val="solid"/>
-          </a:ln>
-        </p:spPr>
-      </p:sp>
-      <p:sp>
-        <p:nvSpPr>
-          <p:cNvPr id="19" name="">
-            <a:extLst xmlns:a="http://schemas.openxmlformats.org/drawingml/2006/main">
-              <a:ext uri="{FF2B5EF4-FFF2-40B4-BE49-F238E27FC236}">
-                <a16:creationId xmlns:a16="http://schemas.microsoft.com/office/drawing/2014/main" id="{3B5F7DE3-75B8-4A53-B23C-2A3BD544FA70}"/>
-              </a:ext>
-            </a:extLst>
-          </p:cNvPr>
-          <p:cNvSpPr>
-            <a:spLocks xmlns:a="http://schemas.openxmlformats.org/drawingml/2006/main" noGrp="1"/>
-          </p:cNvSpPr>
-          <p:nvPr/>
-        </p:nvSpPr>
-        <p:spPr>
-          <a:xfrm xmlns:a="http://schemas.openxmlformats.org/drawingml/2006/main">
-            <a:off x="4591050" y="4495800"/>
-            <a:ext cx="2095500" cy="266700"/>
-          </a:xfrm>
-          <a:prstGeom xmlns:a="http://schemas.openxmlformats.org/drawingml/2006/main" prst="rect">
-            <a:avLst/>
-          </a:prstGeom>
-          <a:noFill xmlns:a="http://schemas.openxmlformats.org/drawingml/2006/main"/>
-          <a:ln xmlns:a="http://schemas.openxmlformats.org/drawingml/2006/main" w="0">
-            <a:noFill/>
-            <a:prstDash val="solid"/>
-          </a:ln>
-        </p:spPr>
-        <p:txBody>
-          <a:bodyPr xmlns:a="http://schemas.openxmlformats.org/drawingml/2006/main"/>
-          <a:lstStyle xmlns:a="http://schemas.openxmlformats.org/drawingml/2006/main"/>
-          <a:p xmlns:a="http://schemas.openxmlformats.org/drawingml/2006/main">
-            <a:pPr algn="l">
-              <a:defRPr sz="1800" b="1">
-                <a:solidFill>
-                  <a:srgbClr val="111111"/>
-                </a:solidFill>
-              </a:defRPr>
-            </a:pPr>
-            <a:r>
-              <a:rPr sz="1800" b="1">
-                <a:solidFill>
-                  <a:srgbClr val="111111"/>
-                </a:solidFill>
-              </a:rPr>
-              <a:t>Repair agent</a:t>
-            </a:r>
-          </a:p>
-        </p:txBody>
-      </p:sp>
-      <p:sp>
-        <p:nvSpPr>
-          <p:cNvPr id="20" name="">
-            <a:extLst xmlns:a="http://schemas.openxmlformats.org/drawingml/2006/main">
-              <a:ext uri="{FF2B5EF4-FFF2-40B4-BE49-F238E27FC236}">
-                <a16:creationId xmlns:a16="http://schemas.microsoft.com/office/drawing/2014/main" id="{574BFD4A-0B32-4ED4-9A90-58C35252E8FD}"/>
-              </a:ext>
-            </a:extLst>
-          </p:cNvPr>
-          <p:cNvSpPr>
-            <a:spLocks xmlns:a="http://schemas.openxmlformats.org/drawingml/2006/main" noGrp="1"/>
-          </p:cNvSpPr>
-          <p:nvPr/>
-        </p:nvSpPr>
-        <p:spPr>
-          <a:xfrm xmlns:a="http://schemas.openxmlformats.org/drawingml/2006/main">
-            <a:off x="4591050" y="4819650"/>
-            <a:ext cx="2400300" cy="190500"/>
-          </a:xfrm>
-          <a:prstGeom xmlns:a="http://schemas.openxmlformats.org/drawingml/2006/main" prst="rect">
-            <a:avLst/>
-          </a:prstGeom>
-          <a:noFill xmlns:a="http://schemas.openxmlformats.org/drawingml/2006/main"/>
-          <a:ln xmlns:a="http://schemas.openxmlformats.org/drawingml/2006/main" w="0">
-            <a:noFill/>
-            <a:prstDash val="solid"/>
-          </a:ln>
-        </p:spPr>
-        <p:txBody>
-          <a:bodyPr xmlns:a="http://schemas.openxmlformats.org/drawingml/2006/main"/>
-          <a:lstStyle xmlns:a="http://schemas.openxmlformats.org/drawingml/2006/main"/>
-          <a:p xmlns:a="http://schemas.openxmlformats.org/drawingml/2006/main">
-            <a:pPr algn="l">
-              <a:defRPr sz="1125" b="0">
-                <a:solidFill>
-                  <a:srgbClr val="7A7A7A"/>
-                </a:solidFill>
-              </a:defRPr>
-            </a:pPr>
-            <a:r>
-              <a:rPr sz="1125" b="0">
-                <a:solidFill>
-                  <a:srgbClr val="7A7A7A"/>
-                </a:solidFill>
-              </a:rPr>
-              <a:t>FAQ, comparison, schema</a:t>
-            </a:r>
-          </a:p>
-        </p:txBody>
-      </p:sp>
-      <p:sp>
-        <p:nvSpPr>
-          <p:cNvPr id="21" name="">
-            <a:extLst xmlns:a="http://schemas.openxmlformats.org/drawingml/2006/main">
-              <a:ext uri="{FF2B5EF4-FFF2-40B4-BE49-F238E27FC236}">
-                <a16:creationId xmlns:a16="http://schemas.microsoft.com/office/drawing/2014/main" id="{923828B5-0890-4260-AB08-630DE2A26869}"/>
-              </a:ext>
-            </a:extLst>
-          </p:cNvPr>
-          <p:cNvSpPr>
-            <a:spLocks xmlns:a="http://schemas.openxmlformats.org/drawingml/2006/main" noGrp="1"/>
-          </p:cNvSpPr>
-          <p:nvPr/>
-        </p:nvSpPr>
-        <p:spPr>
-          <a:xfrm xmlns:a="http://schemas.openxmlformats.org/drawingml/2006/main">
-            <a:off x="8039100" y="4324350"/>
-            <a:ext cx="3028950" cy="876300"/>
-          </a:xfrm>
-          <a:prstGeom xmlns:a="http://schemas.openxmlformats.org/drawingml/2006/main" prst="roundRect">
-            <a:avLst>
-              <a:gd name="adj" fmla="val 17391"/>
-            </a:avLst>
-          </a:prstGeom>
-          <a:solidFill xmlns:a="http://schemas.openxmlformats.org/drawingml/2006/main">
-            <a:srgbClr val="FFFFFF"/>
-          </a:solidFill>
-          <a:ln xmlns:a="http://schemas.openxmlformats.org/drawingml/2006/main" w="13335">
-            <a:solidFill>
-              <a:srgbClr val="FCE8F1"/>
-            </a:solidFill>
-            <a:prstDash val="solid"/>
-          </a:ln>
-        </p:spPr>
-      </p:sp>
-      <p:sp>
-        <p:nvSpPr>
-          <p:cNvPr id="22" name="">
-            <a:extLst xmlns:a="http://schemas.openxmlformats.org/drawingml/2006/main">
-              <a:ext uri="{FF2B5EF4-FFF2-40B4-BE49-F238E27FC236}">
-                <a16:creationId xmlns:a16="http://schemas.microsoft.com/office/drawing/2014/main" id="{BCA1963C-78A8-420B-8B36-C51EB6458E3A}"/>
-              </a:ext>
-            </a:extLst>
-          </p:cNvPr>
-          <p:cNvSpPr>
-            <a:spLocks xmlns:a="http://schemas.openxmlformats.org/drawingml/2006/main" noGrp="1"/>
-          </p:cNvSpPr>
-          <p:nvPr/>
-        </p:nvSpPr>
-        <p:spPr>
-          <a:xfrm xmlns:a="http://schemas.openxmlformats.org/drawingml/2006/main">
-            <a:off x="8267700" y="4495800"/>
-            <a:ext cx="2095500" cy="266700"/>
-          </a:xfrm>
-          <a:prstGeom xmlns:a="http://schemas.openxmlformats.org/drawingml/2006/main" prst="rect">
-            <a:avLst/>
-          </a:prstGeom>
-          <a:noFill xmlns:a="http://schemas.openxmlformats.org/drawingml/2006/main"/>
-          <a:ln xmlns:a="http://schemas.openxmlformats.org/drawingml/2006/main" w="0">
-            <a:noFill/>
-            <a:prstDash val="solid"/>
-          </a:ln>
-        </p:spPr>
-        <p:txBody>
-          <a:bodyPr xmlns:a="http://schemas.openxmlformats.org/drawingml/2006/main"/>
-          <a:lstStyle xmlns:a="http://schemas.openxmlformats.org/drawingml/2006/main"/>
-          <a:p xmlns:a="http://schemas.openxmlformats.org/drawingml/2006/main">
-            <a:pPr algn="l">
-              <a:defRPr sz="1800" b="1">
-                <a:solidFill>
-                  <a:srgbClr val="111111"/>
-                </a:solidFill>
-              </a:defRPr>
-            </a:pPr>
-            <a:r>
-              <a:rPr sz="1800" b="1">
-                <a:solidFill>
-                  <a:srgbClr val="111111"/>
-                </a:solidFill>
-              </a:rPr>
-              <a:t>GitHub PR</a:t>
-            </a:r>
-          </a:p>
-        </p:txBody>
-      </p:sp>
-      <p:sp>
-        <p:nvSpPr>
-          <p:cNvPr id="23" name="">
-            <a:extLst xmlns:a="http://schemas.openxmlformats.org/drawingml/2006/main">
-              <a:ext uri="{FF2B5EF4-FFF2-40B4-BE49-F238E27FC236}">
-                <a16:creationId xmlns:a16="http://schemas.microsoft.com/office/drawing/2014/main" id="{679BDFDE-3030-4E83-86D0-60DA2D980A55}"/>
-              </a:ext>
-            </a:extLst>
-          </p:cNvPr>
-          <p:cNvSpPr>
-            <a:spLocks xmlns:a="http://schemas.openxmlformats.org/drawingml/2006/main" noGrp="1"/>
-          </p:cNvSpPr>
-          <p:nvPr/>
-        </p:nvSpPr>
-        <p:spPr>
-          <a:xfrm xmlns:a="http://schemas.openxmlformats.org/drawingml/2006/main">
-            <a:off x="8267700" y="4819650"/>
-            <a:ext cx="2400300" cy="190500"/>
-          </a:xfrm>
-          <a:prstGeom xmlns:a="http://schemas.openxmlformats.org/drawingml/2006/main" prst="rect">
-            <a:avLst/>
-          </a:prstGeom>
-          <a:noFill xmlns:a="http://schemas.openxmlformats.org/drawingml/2006/main"/>
-          <a:ln xmlns:a="http://schemas.openxmlformats.org/drawingml/2006/main" w="0">
-            <a:noFill/>
-            <a:prstDash val="solid"/>
-          </a:ln>
-        </p:spPr>
-        <p:txBody>
-          <a:bodyPr xmlns:a="http://schemas.openxmlformats.org/drawingml/2006/main"/>
-          <a:lstStyle xmlns:a="http://schemas.openxmlformats.org/drawingml/2006/main"/>
-          <a:p xmlns:a="http://schemas.openxmlformats.org/drawingml/2006/main">
-            <a:pPr algn="l">
-              <a:defRPr sz="1125" b="0">
-                <a:solidFill>
-                  <a:srgbClr val="7A7A7A"/>
-                </a:solidFill>
-              </a:defRPr>
-            </a:pPr>
-            <a:r>
-              <a:rPr sz="1125" b="0">
-                <a:solidFill>
-                  <a:srgbClr val="7A7A7A"/>
-                </a:solidFill>
-              </a:rPr>
-              <a:t>Review-gated deploy</a:t>
-            </a:r>
-          </a:p>
-        </p:txBody>
-      </p:sp>
-      <p:sp>
-        <p:nvSpPr>
           <p:cNvPr id="24" name="">
             <a:extLst xmlns:a="http://schemas.openxmlformats.org/drawingml/2006/main">
               <a:ext uri="{FF2B5EF4-FFF2-40B4-BE49-F238E27FC236}">
-                <a16:creationId xmlns:a16="http://schemas.microsoft.com/office/drawing/2014/main" id="{6916A8CF-1B92-4D69-BD47-0C8AE7A4838F}"/>
+                <a16:creationId xmlns:a16="http://schemas.microsoft.com/office/drawing/2014/main" id="{2447B409-CFF1-4707-B39C-BDA708AB1A72}"/>
+              </a:ext>
+            </a:extLst>
+          </p:cNvPr>
+          <p:cNvSpPr>
+            <a:spLocks xmlns:a="http://schemas.openxmlformats.org/drawingml/2006/main" noGrp="1"/>
+          </p:cNvSpPr>
+          <p:nvPr/>
+        </p:nvSpPr>
+        <p:spPr>
+          <a:xfrm xmlns:a="http://schemas.openxmlformats.org/drawingml/2006/main">
+            <a:off x="4352925" y="3324225"/>
+            <a:ext cx="19050" cy="19050"/>
+          </a:xfrm>
+          <a:prstGeom xmlns:a="http://schemas.openxmlformats.org/drawingml/2006/main" prst="rect">
+            <a:avLst/>
+          </a:prstGeom>
+          <a:noFill xmlns:a="http://schemas.openxmlformats.org/drawingml/2006/main"/>
+          <a:ln xmlns:a="http://schemas.openxmlformats.org/drawingml/2006/main" w="0">
+            <a:noFill/>
+            <a:prstDash val="solid"/>
+          </a:ln>
+        </p:spPr>
+      </p:sp>
+      <p:sp>
+        <p:nvSpPr>
+          <p:cNvPr id="25" name="">
+            <a:extLst xmlns:a="http://schemas.openxmlformats.org/drawingml/2006/main">
+              <a:ext uri="{FF2B5EF4-FFF2-40B4-BE49-F238E27FC236}">
+                <a16:creationId xmlns:a16="http://schemas.microsoft.com/office/drawing/2014/main" id="{52B49492-A448-4F3A-869A-44353C47D01A}"/>
               </a:ext>
             </a:extLst>
           </p:cNvPr>
@@ -7535,35 +7564,6 @@
         <p:spPr>
           <a:xfrm xmlns:a="http://schemas.openxmlformats.org/drawingml/2006/main">
             <a:off x="3705225" y="3324225"/>
-            <a:ext cx="19050" cy="19050"/>
-          </a:xfrm>
-          <a:prstGeom xmlns:a="http://schemas.openxmlformats.org/drawingml/2006/main" prst="rect">
-            <a:avLst/>
-          </a:prstGeom>
-          <a:noFill xmlns:a="http://schemas.openxmlformats.org/drawingml/2006/main"/>
-          <a:ln xmlns:a="http://schemas.openxmlformats.org/drawingml/2006/main" w="0">
-            <a:noFill/>
-            <a:prstDash val="solid"/>
-          </a:ln>
-        </p:spPr>
-      </p:sp>
-      <p:sp>
-        <p:nvSpPr>
-          <p:cNvPr id="25" name="">
-            <a:extLst xmlns:a="http://schemas.openxmlformats.org/drawingml/2006/main">
-              <a:ext uri="{FF2B5EF4-FFF2-40B4-BE49-F238E27FC236}">
-                <a16:creationId xmlns:a16="http://schemas.microsoft.com/office/drawing/2014/main" id="{C9ECF1EC-31E4-4909-B9E0-BB464286B526}"/>
-              </a:ext>
-            </a:extLst>
-          </p:cNvPr>
-          <p:cNvSpPr>
-            <a:spLocks xmlns:a="http://schemas.openxmlformats.org/drawingml/2006/main" noGrp="1"/>
-          </p:cNvSpPr>
-          <p:nvPr/>
-        </p:nvSpPr>
-        <p:spPr>
-          <a:xfrm xmlns:a="http://schemas.openxmlformats.org/drawingml/2006/main">
-            <a:off x="4352925" y="3324225"/>
             <a:ext cx="19050" cy="19050"/>
           </a:xfrm>
           <a:prstGeom xmlns:a="http://schemas.openxmlformats.org/drawingml/2006/main" prst="rect">
@@ -7580,13 +7580,13 @@
         <p:nvCxnSpPr>
           <p:cNvPr id="64" name=""/>
           <p:cNvCxnSpPr>
-            <a:stCxn xmlns:a="http://schemas.openxmlformats.org/drawingml/2006/main" id="24" idx="3"/>
-            <a:endCxn xmlns:a="http://schemas.openxmlformats.org/drawingml/2006/main" id="25" idx="1"/>
+            <a:stCxn xmlns:a="http://schemas.openxmlformats.org/drawingml/2006/main" id="24" idx="1"/>
+            <a:endCxn xmlns:a="http://schemas.openxmlformats.org/drawingml/2006/main" id="25" idx="3"/>
           </p:cNvCxnSpPr>
           <p:nvPr/>
         </p:nvCxnSpPr>
         <p:spPr>
-          <a:xfrm xmlns:a="http://schemas.openxmlformats.org/drawingml/2006/main">
+          <a:xfrm xmlns:a="http://schemas.openxmlformats.org/drawingml/2006/main" flipH="1">
             <a:off x="3724275" y="3333750"/>
             <a:ext cx="628650" cy="0"/>
           </a:xfrm>
@@ -7607,7 +7607,36 @@
           <p:cNvPr id="27" name="">
             <a:extLst xmlns:a="http://schemas.openxmlformats.org/drawingml/2006/main">
               <a:ext uri="{FF2B5EF4-FFF2-40B4-BE49-F238E27FC236}">
-                <a16:creationId xmlns:a16="http://schemas.microsoft.com/office/drawing/2014/main" id="{92FE51C5-9825-486E-8A1A-35A8997EE008}"/>
+                <a16:creationId xmlns:a16="http://schemas.microsoft.com/office/drawing/2014/main" id="{EB298897-1423-4049-910B-BB7F0C92A2E7}"/>
+              </a:ext>
+            </a:extLst>
+          </p:cNvPr>
+          <p:cNvSpPr>
+            <a:spLocks xmlns:a="http://schemas.openxmlformats.org/drawingml/2006/main" noGrp="1"/>
+          </p:cNvSpPr>
+          <p:nvPr/>
+        </p:nvSpPr>
+        <p:spPr>
+          <a:xfrm xmlns:a="http://schemas.openxmlformats.org/drawingml/2006/main">
+            <a:off x="8029575" y="3324225"/>
+            <a:ext cx="19050" cy="19050"/>
+          </a:xfrm>
+          <a:prstGeom xmlns:a="http://schemas.openxmlformats.org/drawingml/2006/main" prst="rect">
+            <a:avLst/>
+          </a:prstGeom>
+          <a:noFill xmlns:a="http://schemas.openxmlformats.org/drawingml/2006/main"/>
+          <a:ln xmlns:a="http://schemas.openxmlformats.org/drawingml/2006/main" w="0">
+            <a:noFill/>
+            <a:prstDash val="solid"/>
+          </a:ln>
+        </p:spPr>
+      </p:sp>
+      <p:sp>
+        <p:nvSpPr>
+          <p:cNvPr id="28" name="">
+            <a:extLst xmlns:a="http://schemas.openxmlformats.org/drawingml/2006/main">
+              <a:ext uri="{FF2B5EF4-FFF2-40B4-BE49-F238E27FC236}">
+                <a16:creationId xmlns:a16="http://schemas.microsoft.com/office/drawing/2014/main" id="{891B061C-B06C-4E07-A46C-5B1EC9F17EBE}"/>
               </a:ext>
             </a:extLst>
           </p:cNvPr>
@@ -7619,35 +7648,6 @@
         <p:spPr>
           <a:xfrm xmlns:a="http://schemas.openxmlformats.org/drawingml/2006/main">
             <a:off x="7381875" y="3324225"/>
-            <a:ext cx="19050" cy="19050"/>
-          </a:xfrm>
-          <a:prstGeom xmlns:a="http://schemas.openxmlformats.org/drawingml/2006/main" prst="rect">
-            <a:avLst/>
-          </a:prstGeom>
-          <a:noFill xmlns:a="http://schemas.openxmlformats.org/drawingml/2006/main"/>
-          <a:ln xmlns:a="http://schemas.openxmlformats.org/drawingml/2006/main" w="0">
-            <a:noFill/>
-            <a:prstDash val="solid"/>
-          </a:ln>
-        </p:spPr>
-      </p:sp>
-      <p:sp>
-        <p:nvSpPr>
-          <p:cNvPr id="28" name="">
-            <a:extLst xmlns:a="http://schemas.openxmlformats.org/drawingml/2006/main">
-              <a:ext uri="{FF2B5EF4-FFF2-40B4-BE49-F238E27FC236}">
-                <a16:creationId xmlns:a16="http://schemas.microsoft.com/office/drawing/2014/main" id="{870AF589-598A-4B09-A5FD-842E70E42C11}"/>
-              </a:ext>
-            </a:extLst>
-          </p:cNvPr>
-          <p:cNvSpPr>
-            <a:spLocks xmlns:a="http://schemas.openxmlformats.org/drawingml/2006/main" noGrp="1"/>
-          </p:cNvSpPr>
-          <p:nvPr/>
-        </p:nvSpPr>
-        <p:spPr>
-          <a:xfrm xmlns:a="http://schemas.openxmlformats.org/drawingml/2006/main">
-            <a:off x="8029575" y="3324225"/>
             <a:ext cx="19050" cy="19050"/>
           </a:xfrm>
           <a:prstGeom xmlns:a="http://schemas.openxmlformats.org/drawingml/2006/main" prst="rect">
@@ -7664,13 +7664,13 @@
         <p:nvCxnSpPr>
           <p:cNvPr id="67" name=""/>
           <p:cNvCxnSpPr>
-            <a:stCxn xmlns:a="http://schemas.openxmlformats.org/drawingml/2006/main" id="27" idx="3"/>
-            <a:endCxn xmlns:a="http://schemas.openxmlformats.org/drawingml/2006/main" id="28" idx="1"/>
+            <a:stCxn xmlns:a="http://schemas.openxmlformats.org/drawingml/2006/main" id="27" idx="1"/>
+            <a:endCxn xmlns:a="http://schemas.openxmlformats.org/drawingml/2006/main" id="28" idx="3"/>
           </p:cNvCxnSpPr>
           <p:nvPr/>
         </p:nvCxnSpPr>
         <p:spPr>
-          <a:xfrm xmlns:a="http://schemas.openxmlformats.org/drawingml/2006/main">
+          <a:xfrm xmlns:a="http://schemas.openxmlformats.org/drawingml/2006/main" flipH="1">
             <a:off x="7400925" y="3333750"/>
             <a:ext cx="628650" cy="0"/>
           </a:xfrm>
@@ -7691,7 +7691,36 @@
           <p:cNvPr id="30" name="">
             <a:extLst xmlns:a="http://schemas.openxmlformats.org/drawingml/2006/main">
               <a:ext uri="{FF2B5EF4-FFF2-40B4-BE49-F238E27FC236}">
-                <a16:creationId xmlns:a16="http://schemas.microsoft.com/office/drawing/2014/main" id="{DC909C8B-8322-4EBC-8104-EEA4E7EC370A}"/>
+                <a16:creationId xmlns:a16="http://schemas.microsoft.com/office/drawing/2014/main" id="{7CE4DBDC-E7ED-4A7E-A8B0-2663D750C393}"/>
+              </a:ext>
+            </a:extLst>
+          </p:cNvPr>
+          <p:cNvSpPr>
+            <a:spLocks xmlns:a="http://schemas.openxmlformats.org/drawingml/2006/main" noGrp="1"/>
+          </p:cNvSpPr>
+          <p:nvPr/>
+        </p:nvSpPr>
+        <p:spPr>
+          <a:xfrm xmlns:a="http://schemas.openxmlformats.org/drawingml/2006/main">
+            <a:off x="9553575" y="4314825"/>
+            <a:ext cx="19050" cy="19050"/>
+          </a:xfrm>
+          <a:prstGeom xmlns:a="http://schemas.openxmlformats.org/drawingml/2006/main" prst="rect">
+            <a:avLst/>
+          </a:prstGeom>
+          <a:noFill xmlns:a="http://schemas.openxmlformats.org/drawingml/2006/main"/>
+          <a:ln xmlns:a="http://schemas.openxmlformats.org/drawingml/2006/main" w="0">
+            <a:noFill/>
+            <a:prstDash val="solid"/>
+          </a:ln>
+        </p:spPr>
+      </p:sp>
+      <p:sp>
+        <p:nvSpPr>
+          <p:cNvPr id="31" name="">
+            <a:extLst xmlns:a="http://schemas.openxmlformats.org/drawingml/2006/main">
+              <a:ext uri="{FF2B5EF4-FFF2-40B4-BE49-F238E27FC236}">
+                <a16:creationId xmlns:a16="http://schemas.microsoft.com/office/drawing/2014/main" id="{8976BBB1-693A-424E-A026-04EE64606B0F}"/>
               </a:ext>
             </a:extLst>
           </p:cNvPr>
@@ -7703,35 +7732,6 @@
         <p:spPr>
           <a:xfrm xmlns:a="http://schemas.openxmlformats.org/drawingml/2006/main">
             <a:off x="9553575" y="3762375"/>
-            <a:ext cx="19050" cy="19050"/>
-          </a:xfrm>
-          <a:prstGeom xmlns:a="http://schemas.openxmlformats.org/drawingml/2006/main" prst="rect">
-            <a:avLst/>
-          </a:prstGeom>
-          <a:noFill xmlns:a="http://schemas.openxmlformats.org/drawingml/2006/main"/>
-          <a:ln xmlns:a="http://schemas.openxmlformats.org/drawingml/2006/main" w="0">
-            <a:noFill/>
-            <a:prstDash val="solid"/>
-          </a:ln>
-        </p:spPr>
-      </p:sp>
-      <p:sp>
-        <p:nvSpPr>
-          <p:cNvPr id="31" name="">
-            <a:extLst xmlns:a="http://schemas.openxmlformats.org/drawingml/2006/main">
-              <a:ext uri="{FF2B5EF4-FFF2-40B4-BE49-F238E27FC236}">
-                <a16:creationId xmlns:a16="http://schemas.microsoft.com/office/drawing/2014/main" id="{C59827BA-C8F3-44C6-A29C-CF45B10DF04C}"/>
-              </a:ext>
-            </a:extLst>
-          </p:cNvPr>
-          <p:cNvSpPr>
-            <a:spLocks xmlns:a="http://schemas.openxmlformats.org/drawingml/2006/main" noGrp="1"/>
-          </p:cNvSpPr>
-          <p:nvPr/>
-        </p:nvSpPr>
-        <p:spPr>
-          <a:xfrm xmlns:a="http://schemas.openxmlformats.org/drawingml/2006/main">
-            <a:off x="9553575" y="4314825"/>
             <a:ext cx="19050" cy="19050"/>
           </a:xfrm>
           <a:prstGeom xmlns:a="http://schemas.openxmlformats.org/drawingml/2006/main" prst="rect">
@@ -7748,13 +7748,13 @@
         <p:nvCxnSpPr>
           <p:cNvPr id="70" name=""/>
           <p:cNvCxnSpPr>
-            <a:stCxn xmlns:a="http://schemas.openxmlformats.org/drawingml/2006/main" id="30" idx="2"/>
-            <a:endCxn xmlns:a="http://schemas.openxmlformats.org/drawingml/2006/main" id="31" idx="0"/>
+            <a:stCxn xmlns:a="http://schemas.openxmlformats.org/drawingml/2006/main" id="30" idx="0"/>
+            <a:endCxn xmlns:a="http://schemas.openxmlformats.org/drawingml/2006/main" id="31" idx="2"/>
           </p:cNvCxnSpPr>
           <p:nvPr/>
         </p:nvCxnSpPr>
         <p:spPr>
-          <a:xfrm xmlns:a="http://schemas.openxmlformats.org/drawingml/2006/main">
+          <a:xfrm xmlns:a="http://schemas.openxmlformats.org/drawingml/2006/main" flipV="1">
             <a:off x="9563100" y="3781425"/>
             <a:ext cx="0" cy="533400"/>
           </a:xfrm>
@@ -7775,7 +7775,36 @@
           <p:cNvPr id="33" name="">
             <a:extLst xmlns:a="http://schemas.openxmlformats.org/drawingml/2006/main">
               <a:ext uri="{FF2B5EF4-FFF2-40B4-BE49-F238E27FC236}">
-                <a16:creationId xmlns:a16="http://schemas.microsoft.com/office/drawing/2014/main" id="{AA848C73-3609-4DF7-9271-681A547B3066}"/>
+                <a16:creationId xmlns:a16="http://schemas.microsoft.com/office/drawing/2014/main" id="{8122CBC4-776C-4DAF-90C8-D4E31802DF2E}"/>
+              </a:ext>
+            </a:extLst>
+          </p:cNvPr>
+          <p:cNvSpPr>
+            <a:spLocks xmlns:a="http://schemas.openxmlformats.org/drawingml/2006/main" noGrp="1"/>
+          </p:cNvSpPr>
+          <p:nvPr/>
+        </p:nvSpPr>
+        <p:spPr>
+          <a:xfrm xmlns:a="http://schemas.openxmlformats.org/drawingml/2006/main">
+            <a:off x="7381875" y="4752975"/>
+            <a:ext cx="19050" cy="19050"/>
+          </a:xfrm>
+          <a:prstGeom xmlns:a="http://schemas.openxmlformats.org/drawingml/2006/main" prst="rect">
+            <a:avLst/>
+          </a:prstGeom>
+          <a:noFill xmlns:a="http://schemas.openxmlformats.org/drawingml/2006/main"/>
+          <a:ln xmlns:a="http://schemas.openxmlformats.org/drawingml/2006/main" w="0">
+            <a:noFill/>
+            <a:prstDash val="solid"/>
+          </a:ln>
+        </p:spPr>
+      </p:sp>
+      <p:sp>
+        <p:nvSpPr>
+          <p:cNvPr id="34" name="">
+            <a:extLst xmlns:a="http://schemas.openxmlformats.org/drawingml/2006/main">
+              <a:ext uri="{FF2B5EF4-FFF2-40B4-BE49-F238E27FC236}">
+                <a16:creationId xmlns:a16="http://schemas.microsoft.com/office/drawing/2014/main" id="{21FF5913-AFC3-470B-833F-85D7C755992F}"/>
               </a:ext>
             </a:extLst>
           </p:cNvPr>
@@ -7787,35 +7816,6 @@
         <p:spPr>
           <a:xfrm xmlns:a="http://schemas.openxmlformats.org/drawingml/2006/main">
             <a:off x="8029575" y="4752975"/>
-            <a:ext cx="19050" cy="19050"/>
-          </a:xfrm>
-          <a:prstGeom xmlns:a="http://schemas.openxmlformats.org/drawingml/2006/main" prst="rect">
-            <a:avLst/>
-          </a:prstGeom>
-          <a:noFill xmlns:a="http://schemas.openxmlformats.org/drawingml/2006/main"/>
-          <a:ln xmlns:a="http://schemas.openxmlformats.org/drawingml/2006/main" w="0">
-            <a:noFill/>
-            <a:prstDash val="solid"/>
-          </a:ln>
-        </p:spPr>
-      </p:sp>
-      <p:sp>
-        <p:nvSpPr>
-          <p:cNvPr id="34" name="">
-            <a:extLst xmlns:a="http://schemas.openxmlformats.org/drawingml/2006/main">
-              <a:ext uri="{FF2B5EF4-FFF2-40B4-BE49-F238E27FC236}">
-                <a16:creationId xmlns:a16="http://schemas.microsoft.com/office/drawing/2014/main" id="{076CA3D6-9610-482D-975C-74D8941549E4}"/>
-              </a:ext>
-            </a:extLst>
-          </p:cNvPr>
-          <p:cNvSpPr>
-            <a:spLocks xmlns:a="http://schemas.openxmlformats.org/drawingml/2006/main" noGrp="1"/>
-          </p:cNvSpPr>
-          <p:nvPr/>
-        </p:nvSpPr>
-        <p:spPr>
-          <a:xfrm xmlns:a="http://schemas.openxmlformats.org/drawingml/2006/main">
-            <a:off x="7381875" y="4752975"/>
             <a:ext cx="19050" cy="19050"/>
           </a:xfrm>
           <a:prstGeom xmlns:a="http://schemas.openxmlformats.org/drawingml/2006/main" prst="rect">
@@ -7832,13 +7832,13 @@
         <p:nvCxnSpPr>
           <p:cNvPr id="73" name=""/>
           <p:cNvCxnSpPr>
-            <a:stCxn xmlns:a="http://schemas.openxmlformats.org/drawingml/2006/main" id="33" idx="1"/>
-            <a:endCxn xmlns:a="http://schemas.openxmlformats.org/drawingml/2006/main" id="34" idx="3"/>
+            <a:stCxn xmlns:a="http://schemas.openxmlformats.org/drawingml/2006/main" id="33" idx="3"/>
+            <a:endCxn xmlns:a="http://schemas.openxmlformats.org/drawingml/2006/main" id="34" idx="1"/>
           </p:cNvCxnSpPr>
           <p:nvPr/>
         </p:nvCxnSpPr>
         <p:spPr>
-          <a:xfrm xmlns:a="http://schemas.openxmlformats.org/drawingml/2006/main" flipH="1">
+          <a:xfrm xmlns:a="http://schemas.openxmlformats.org/drawingml/2006/main">
             <a:off x="7400925" y="4762500"/>
             <a:ext cx="628650" cy="0"/>
           </a:xfrm>
@@ -7859,7 +7859,36 @@
           <p:cNvPr id="36" name="">
             <a:extLst xmlns:a="http://schemas.openxmlformats.org/drawingml/2006/main">
               <a:ext uri="{FF2B5EF4-FFF2-40B4-BE49-F238E27FC236}">
-                <a16:creationId xmlns:a16="http://schemas.microsoft.com/office/drawing/2014/main" id="{7DD7E767-0DE9-4E36-8D08-7B5DBDBA708D}"/>
+                <a16:creationId xmlns:a16="http://schemas.microsoft.com/office/drawing/2014/main" id="{3A6060F9-D083-462A-90E7-32150207A706}"/>
+              </a:ext>
+            </a:extLst>
+          </p:cNvPr>
+          <p:cNvSpPr>
+            <a:spLocks xmlns:a="http://schemas.openxmlformats.org/drawingml/2006/main" noGrp="1"/>
+          </p:cNvSpPr>
+          <p:nvPr/>
+        </p:nvSpPr>
+        <p:spPr>
+          <a:xfrm xmlns:a="http://schemas.openxmlformats.org/drawingml/2006/main">
+            <a:off x="3705225" y="4752975"/>
+            <a:ext cx="19050" cy="19050"/>
+          </a:xfrm>
+          <a:prstGeom xmlns:a="http://schemas.openxmlformats.org/drawingml/2006/main" prst="rect">
+            <a:avLst/>
+          </a:prstGeom>
+          <a:noFill xmlns:a="http://schemas.openxmlformats.org/drawingml/2006/main"/>
+          <a:ln xmlns:a="http://schemas.openxmlformats.org/drawingml/2006/main" w="0">
+            <a:noFill/>
+            <a:prstDash val="solid"/>
+          </a:ln>
+        </p:spPr>
+      </p:sp>
+      <p:sp>
+        <p:nvSpPr>
+          <p:cNvPr id="37" name="">
+            <a:extLst xmlns:a="http://schemas.openxmlformats.org/drawingml/2006/main">
+              <a:ext uri="{FF2B5EF4-FFF2-40B4-BE49-F238E27FC236}">
+                <a16:creationId xmlns:a16="http://schemas.microsoft.com/office/drawing/2014/main" id="{EDFA8447-EF55-4714-BF07-207E02473475}"/>
               </a:ext>
             </a:extLst>
           </p:cNvPr>
@@ -7871,35 +7900,6 @@
         <p:spPr>
           <a:xfrm xmlns:a="http://schemas.openxmlformats.org/drawingml/2006/main">
             <a:off x="4352925" y="4752975"/>
-            <a:ext cx="19050" cy="19050"/>
-          </a:xfrm>
-          <a:prstGeom xmlns:a="http://schemas.openxmlformats.org/drawingml/2006/main" prst="rect">
-            <a:avLst/>
-          </a:prstGeom>
-          <a:noFill xmlns:a="http://schemas.openxmlformats.org/drawingml/2006/main"/>
-          <a:ln xmlns:a="http://schemas.openxmlformats.org/drawingml/2006/main" w="0">
-            <a:noFill/>
-            <a:prstDash val="solid"/>
-          </a:ln>
-        </p:spPr>
-      </p:sp>
-      <p:sp>
-        <p:nvSpPr>
-          <p:cNvPr id="37" name="">
-            <a:extLst xmlns:a="http://schemas.openxmlformats.org/drawingml/2006/main">
-              <a:ext uri="{FF2B5EF4-FFF2-40B4-BE49-F238E27FC236}">
-                <a16:creationId xmlns:a16="http://schemas.microsoft.com/office/drawing/2014/main" id="{7ABC46E0-5B25-4E0E-9D66-92D742554C75}"/>
-              </a:ext>
-            </a:extLst>
-          </p:cNvPr>
-          <p:cNvSpPr>
-            <a:spLocks xmlns:a="http://schemas.openxmlformats.org/drawingml/2006/main" noGrp="1"/>
-          </p:cNvSpPr>
-          <p:nvPr/>
-        </p:nvSpPr>
-        <p:spPr>
-          <a:xfrm xmlns:a="http://schemas.openxmlformats.org/drawingml/2006/main">
-            <a:off x="3705225" y="4752975"/>
             <a:ext cx="19050" cy="19050"/>
           </a:xfrm>
           <a:prstGeom xmlns:a="http://schemas.openxmlformats.org/drawingml/2006/main" prst="rect">
@@ -7916,13 +7916,13 @@
         <p:nvCxnSpPr>
           <p:cNvPr id="76" name=""/>
           <p:cNvCxnSpPr>
-            <a:stCxn xmlns:a="http://schemas.openxmlformats.org/drawingml/2006/main" id="36" idx="1"/>
-            <a:endCxn xmlns:a="http://schemas.openxmlformats.org/drawingml/2006/main" id="37" idx="3"/>
+            <a:stCxn xmlns:a="http://schemas.openxmlformats.org/drawingml/2006/main" id="36" idx="3"/>
+            <a:endCxn xmlns:a="http://schemas.openxmlformats.org/drawingml/2006/main" id="37" idx="1"/>
           </p:cNvCxnSpPr>
           <p:nvPr/>
         </p:nvCxnSpPr>
         <p:spPr>
-          <a:xfrm xmlns:a="http://schemas.openxmlformats.org/drawingml/2006/main" flipH="1">
+          <a:xfrm xmlns:a="http://schemas.openxmlformats.org/drawingml/2006/main">
             <a:off x="3724275" y="4762500"/>
             <a:ext cx="628650" cy="0"/>
           </a:xfrm>
@@ -7941,7 +7941,7 @@
     </p:spTree>
     <p:extLst>
       <p:ext uri="{BB962C8B-B14F-4D97-AF65-F5344CB8AC3E}">
-        <p14:creationId xmlns:p14="http://schemas.microsoft.com/office/powerpoint/2010/main" val="187915005"/>
+        <p14:creationId xmlns:p14="http://schemas.microsoft.com/office/powerpoint/2010/main" val="167961426"/>
       </p:ext>
     </p:extLst>
   </p:cSld>
@@ -7972,7 +7972,7 @@
           <p:cNvPr id="1" name="">
             <a:extLst xmlns:a="http://schemas.openxmlformats.org/drawingml/2006/main">
               <a:ext uri="{FF2B5EF4-FFF2-40B4-BE49-F238E27FC236}">
-                <a16:creationId xmlns:a16="http://schemas.microsoft.com/office/drawing/2014/main" id="{D030AFBE-E8DE-4A6F-94F4-4F05DCA04055}"/>
+                <a16:creationId xmlns:a16="http://schemas.microsoft.com/office/drawing/2014/main" id="{177F55D0-B986-4C8A-A50B-107812ACE2BC}"/>
               </a:ext>
             </a:extLst>
           </p:cNvPr>
@@ -8022,7 +8022,7 @@
           <p:cNvPr id="2" name="">
             <a:extLst xmlns:a="http://schemas.openxmlformats.org/drawingml/2006/main">
               <a:ext uri="{FF2B5EF4-FFF2-40B4-BE49-F238E27FC236}">
-                <a16:creationId xmlns:a16="http://schemas.microsoft.com/office/drawing/2014/main" id="{3013BD90-5452-4E98-98F3-46ED3513DF4D}"/>
+                <a16:creationId xmlns:a16="http://schemas.microsoft.com/office/drawing/2014/main" id="{5F4BA5F2-2DF9-4240-B8B5-654480F34D97}"/>
               </a:ext>
             </a:extLst>
           </p:cNvPr>
@@ -8072,7 +8072,7 @@
           <p:cNvPr id="3" name="">
             <a:extLst xmlns:a="http://schemas.openxmlformats.org/drawingml/2006/main">
               <a:ext uri="{FF2B5EF4-FFF2-40B4-BE49-F238E27FC236}">
-                <a16:creationId xmlns:a16="http://schemas.microsoft.com/office/drawing/2014/main" id="{7CD03079-D7E3-40E7-8AFD-C07790584B86}"/>
+                <a16:creationId xmlns:a16="http://schemas.microsoft.com/office/drawing/2014/main" id="{16CBE6A2-52B9-48F9-98A8-043441451BF4}"/>
               </a:ext>
             </a:extLst>
           </p:cNvPr>
@@ -8084,7 +8084,7 @@
         <p:spPr>
           <a:xfrm xmlns:a="http://schemas.openxmlformats.org/drawingml/2006/main">
             <a:off x="704850" y="990600"/>
-            <a:ext cx="7239000" cy="933450"/>
+            <a:ext cx="7905750" cy="1123950"/>
           </a:xfrm>
           <a:prstGeom xmlns:a="http://schemas.openxmlformats.org/drawingml/2006/main" prst="rect">
             <a:avLst/>
@@ -8100,19 +8100,19 @@
           <a:lstStyle xmlns:a="http://schemas.openxmlformats.org/drawingml/2006/main"/>
           <a:p xmlns:a="http://schemas.openxmlformats.org/drawingml/2006/main">
             <a:pPr algn="l">
-              <a:defRPr sz="3225" b="1">
+              <a:defRPr sz="3000" b="1">
                 <a:solidFill>
                   <a:srgbClr val="111111"/>
                 </a:solidFill>
               </a:defRPr>
             </a:pPr>
             <a:r>
-              <a:rPr sz="3225" b="1">
+              <a:rPr sz="3000" b="1">
                 <a:solidFill>
                   <a:srgbClr val="111111"/>
                 </a:solidFill>
               </a:rPr>
-              <a:t>Subscription software for teams that depend on inbound discovery.</a:t>
+              <a:t>Business model</a:t>
             </a:r>
           </a:p>
         </p:txBody>
@@ -8122,19 +8122,19 @@
           <p:cNvPr id="4" name="">
             <a:extLst xmlns:a="http://schemas.openxmlformats.org/drawingml/2006/main">
               <a:ext uri="{FF2B5EF4-FFF2-40B4-BE49-F238E27FC236}">
-                <a16:creationId xmlns:a16="http://schemas.microsoft.com/office/drawing/2014/main" id="{1E9F2C73-EF81-41C1-B5B9-0E0D4C892053}"/>
-              </a:ext>
-            </a:extLst>
-          </p:cNvPr>
-          <p:cNvSpPr>
-            <a:spLocks xmlns:a="http://schemas.openxmlformats.org/drawingml/2006/main" noGrp="1"/>
-          </p:cNvSpPr>
-          <p:nvPr/>
-        </p:nvSpPr>
-        <p:spPr>
-          <a:xfrm xmlns:a="http://schemas.openxmlformats.org/drawingml/2006/main">
-            <a:off x="723900" y="1885950"/>
-            <a:ext cx="6667500" cy="590550"/>
+                <a16:creationId xmlns:a16="http://schemas.microsoft.com/office/drawing/2014/main" id="{382DF4B4-322F-4CE4-9D63-70E6039334C6}"/>
+              </a:ext>
+            </a:extLst>
+          </p:cNvPr>
+          <p:cNvSpPr>
+            <a:spLocks xmlns:a="http://schemas.openxmlformats.org/drawingml/2006/main" noGrp="1"/>
+          </p:cNvSpPr>
+          <p:nvPr/>
+        </p:nvSpPr>
+        <p:spPr>
+          <a:xfrm xmlns:a="http://schemas.openxmlformats.org/drawingml/2006/main">
+            <a:off x="723900" y="2114550"/>
+            <a:ext cx="7239000" cy="628650"/>
           </a:xfrm>
           <a:prstGeom xmlns:a="http://schemas.openxmlformats.org/drawingml/2006/main" prst="rect">
             <a:avLst/>
@@ -8150,19 +8150,19 @@
           <a:lstStyle xmlns:a="http://schemas.openxmlformats.org/drawingml/2006/main"/>
           <a:p xmlns:a="http://schemas.openxmlformats.org/drawingml/2006/main">
             <a:pPr algn="l">
-              <a:defRPr sz="1575" b="0">
+              <a:defRPr sz="1500" b="0">
                 <a:solidFill>
                   <a:srgbClr val="7A7A7A"/>
                 </a:solidFill>
               </a:defRPr>
             </a:pPr>
             <a:r>
-              <a:rPr sz="1575" b="0">
+              <a:rPr sz="1500" b="0">
                 <a:solidFill>
                   <a:srgbClr val="7A7A7A"/>
                 </a:solidFill>
               </a:rPr>
-              <a:t>Target customers are already paying for SEO, content, and performance marketing, but lack AI-answer visibility.</a:t>
+              <a:t>Subscription software for teams already paying for SEO, content, and performance marketing, but lacking AI-answer visibility.</a:t>
             </a:r>
           </a:p>
         </p:txBody>
@@ -8172,7 +8172,7 @@
           <p:cNvPr id="5" name="">
             <a:extLst xmlns:a="http://schemas.openxmlformats.org/drawingml/2006/main">
               <a:ext uri="{FF2B5EF4-FFF2-40B4-BE49-F238E27FC236}">
-                <a16:creationId xmlns:a16="http://schemas.microsoft.com/office/drawing/2014/main" id="{545889BD-05F9-429E-8E6D-5B66FF40074C}"/>
+                <a16:creationId xmlns:a16="http://schemas.microsoft.com/office/drawing/2014/main" id="{D86A6EDC-3D2F-4224-8CE7-2797E8B44321}"/>
               </a:ext>
             </a:extLst>
           </p:cNvPr>
@@ -8222,23 +8222,23 @@
           <p:cNvPr id="6" name="">
             <a:extLst xmlns:a="http://schemas.openxmlformats.org/drawingml/2006/main">
               <a:ext uri="{FF2B5EF4-FFF2-40B4-BE49-F238E27FC236}">
-                <a16:creationId xmlns:a16="http://schemas.microsoft.com/office/drawing/2014/main" id="{EFD95D8E-385B-4EF4-9175-F3EC479B3124}"/>
-              </a:ext>
-            </a:extLst>
-          </p:cNvPr>
-          <p:cNvSpPr>
-            <a:spLocks xmlns:a="http://schemas.openxmlformats.org/drawingml/2006/main" noGrp="1"/>
-          </p:cNvSpPr>
-          <p:nvPr/>
-        </p:nvSpPr>
-        <p:spPr>
-          <a:xfrm xmlns:a="http://schemas.openxmlformats.org/drawingml/2006/main">
-            <a:off x="819150" y="2914650"/>
-            <a:ext cx="3200400" cy="2076450"/>
+                <a16:creationId xmlns:a16="http://schemas.microsoft.com/office/drawing/2014/main" id="{C9E40364-4687-4D96-987E-5DA38BAD0AA5}"/>
+              </a:ext>
+            </a:extLst>
+          </p:cNvPr>
+          <p:cNvSpPr>
+            <a:spLocks xmlns:a="http://schemas.openxmlformats.org/drawingml/2006/main" noGrp="1"/>
+          </p:cNvSpPr>
+          <p:nvPr/>
+        </p:nvSpPr>
+        <p:spPr>
+          <a:xfrm xmlns:a="http://schemas.openxmlformats.org/drawingml/2006/main">
+            <a:off x="819150" y="3028950"/>
+            <a:ext cx="3200400" cy="2133600"/>
           </a:xfrm>
           <a:prstGeom xmlns:a="http://schemas.openxmlformats.org/drawingml/2006/main" prst="roundRect">
             <a:avLst>
-              <a:gd name="adj" fmla="val 7339"/>
+              <a:gd name="adj" fmla="val 7143"/>
             </a:avLst>
           </a:prstGeom>
           <a:solidFill xmlns:a="http://schemas.openxmlformats.org/drawingml/2006/main">
@@ -8257,18 +8257,18 @@
           <p:cNvPr id="7" name="">
             <a:extLst xmlns:a="http://schemas.openxmlformats.org/drawingml/2006/main">
               <a:ext uri="{FF2B5EF4-FFF2-40B4-BE49-F238E27FC236}">
-                <a16:creationId xmlns:a16="http://schemas.microsoft.com/office/drawing/2014/main" id="{D7E7041A-AECD-49F7-BD59-61853471646A}"/>
-              </a:ext>
-            </a:extLst>
-          </p:cNvPr>
-          <p:cNvSpPr>
-            <a:spLocks xmlns:a="http://schemas.openxmlformats.org/drawingml/2006/main" noGrp="1"/>
-          </p:cNvSpPr>
-          <p:nvPr/>
-        </p:nvSpPr>
-        <p:spPr>
-          <a:xfrm xmlns:a="http://schemas.openxmlformats.org/drawingml/2006/main">
-            <a:off x="1123950" y="3219450"/>
+                <a16:creationId xmlns:a16="http://schemas.microsoft.com/office/drawing/2014/main" id="{5D15FB9D-8D29-4364-9A98-60EA71529D02}"/>
+              </a:ext>
+            </a:extLst>
+          </p:cNvPr>
+          <p:cNvSpPr>
+            <a:spLocks xmlns:a="http://schemas.openxmlformats.org/drawingml/2006/main" noGrp="1"/>
+          </p:cNvSpPr>
+          <p:nvPr/>
+        </p:nvSpPr>
+        <p:spPr>
+          <a:xfrm xmlns:a="http://schemas.openxmlformats.org/drawingml/2006/main">
+            <a:off x="1123950" y="3333750"/>
             <a:ext cx="2286000" cy="266700"/>
           </a:xfrm>
           <a:prstGeom xmlns:a="http://schemas.openxmlformats.org/drawingml/2006/main" prst="rect">
@@ -8307,18 +8307,18 @@
           <p:cNvPr id="8" name="">
             <a:extLst xmlns:a="http://schemas.openxmlformats.org/drawingml/2006/main">
               <a:ext uri="{FF2B5EF4-FFF2-40B4-BE49-F238E27FC236}">
-                <a16:creationId xmlns:a16="http://schemas.microsoft.com/office/drawing/2014/main" id="{AC17874E-945E-4756-80A4-0ED0A0DC1CC9}"/>
-              </a:ext>
-            </a:extLst>
-          </p:cNvPr>
-          <p:cNvSpPr>
-            <a:spLocks xmlns:a="http://schemas.openxmlformats.org/drawingml/2006/main" noGrp="1"/>
-          </p:cNvSpPr>
-          <p:nvPr/>
-        </p:nvSpPr>
-        <p:spPr>
-          <a:xfrm xmlns:a="http://schemas.openxmlformats.org/drawingml/2006/main">
-            <a:off x="1123950" y="3714750"/>
+                <a16:creationId xmlns:a16="http://schemas.microsoft.com/office/drawing/2014/main" id="{FFDBBB01-F702-4B2A-9B42-D89355EE1417}"/>
+              </a:ext>
+            </a:extLst>
+          </p:cNvPr>
+          <p:cNvSpPr>
+            <a:spLocks xmlns:a="http://schemas.openxmlformats.org/drawingml/2006/main" noGrp="1"/>
+          </p:cNvSpPr>
+          <p:nvPr/>
+        </p:nvSpPr>
+        <p:spPr>
+          <a:xfrm xmlns:a="http://schemas.openxmlformats.org/drawingml/2006/main">
+            <a:off x="1123950" y="3829050"/>
             <a:ext cx="2190750" cy="914400"/>
           </a:xfrm>
           <a:prstGeom xmlns:a="http://schemas.openxmlformats.org/drawingml/2006/main" prst="rect">
@@ -8408,23 +8408,23 @@
           <p:cNvPr id="9" name="">
             <a:extLst xmlns:a="http://schemas.openxmlformats.org/drawingml/2006/main">
               <a:ext uri="{FF2B5EF4-FFF2-40B4-BE49-F238E27FC236}">
-                <a16:creationId xmlns:a16="http://schemas.microsoft.com/office/drawing/2014/main" id="{D2C67612-CFB8-42E7-98FD-3605F69E8269}"/>
-              </a:ext>
-            </a:extLst>
-          </p:cNvPr>
-          <p:cNvSpPr>
-            <a:spLocks xmlns:a="http://schemas.openxmlformats.org/drawingml/2006/main" noGrp="1"/>
-          </p:cNvSpPr>
-          <p:nvPr/>
-        </p:nvSpPr>
-        <p:spPr>
-          <a:xfrm xmlns:a="http://schemas.openxmlformats.org/drawingml/2006/main">
-            <a:off x="4495800" y="2914650"/>
-            <a:ext cx="3200400" cy="2076450"/>
+                <a16:creationId xmlns:a16="http://schemas.microsoft.com/office/drawing/2014/main" id="{717BE5E3-7965-4DA9-AA38-32A90D0272C0}"/>
+              </a:ext>
+            </a:extLst>
+          </p:cNvPr>
+          <p:cNvSpPr>
+            <a:spLocks xmlns:a="http://schemas.openxmlformats.org/drawingml/2006/main" noGrp="1"/>
+          </p:cNvSpPr>
+          <p:nvPr/>
+        </p:nvSpPr>
+        <p:spPr>
+          <a:xfrm xmlns:a="http://schemas.openxmlformats.org/drawingml/2006/main">
+            <a:off x="4495800" y="3028950"/>
+            <a:ext cx="3200400" cy="2133600"/>
           </a:xfrm>
           <a:prstGeom xmlns:a="http://schemas.openxmlformats.org/drawingml/2006/main" prst="roundRect">
             <a:avLst>
-              <a:gd name="adj" fmla="val 7339"/>
+              <a:gd name="adj" fmla="val 7143"/>
             </a:avLst>
           </a:prstGeom>
           <a:solidFill xmlns:a="http://schemas.openxmlformats.org/drawingml/2006/main">
@@ -8443,18 +8443,18 @@
           <p:cNvPr id="10" name="">
             <a:extLst xmlns:a="http://schemas.openxmlformats.org/drawingml/2006/main">
               <a:ext uri="{FF2B5EF4-FFF2-40B4-BE49-F238E27FC236}">
-                <a16:creationId xmlns:a16="http://schemas.microsoft.com/office/drawing/2014/main" id="{BA712F65-5C8F-49D9-9397-755F6003372A}"/>
-              </a:ext>
-            </a:extLst>
-          </p:cNvPr>
-          <p:cNvSpPr>
-            <a:spLocks xmlns:a="http://schemas.openxmlformats.org/drawingml/2006/main" noGrp="1"/>
-          </p:cNvSpPr>
-          <p:nvPr/>
-        </p:nvSpPr>
-        <p:spPr>
-          <a:xfrm xmlns:a="http://schemas.openxmlformats.org/drawingml/2006/main">
-            <a:off x="4800600" y="3219450"/>
+                <a16:creationId xmlns:a16="http://schemas.microsoft.com/office/drawing/2014/main" id="{DA23DC49-E257-44B6-9C6D-3BF49D2A0ABA}"/>
+              </a:ext>
+            </a:extLst>
+          </p:cNvPr>
+          <p:cNvSpPr>
+            <a:spLocks xmlns:a="http://schemas.openxmlformats.org/drawingml/2006/main" noGrp="1"/>
+          </p:cNvSpPr>
+          <p:nvPr/>
+        </p:nvSpPr>
+        <p:spPr>
+          <a:xfrm xmlns:a="http://schemas.openxmlformats.org/drawingml/2006/main">
+            <a:off x="4800600" y="3333750"/>
             <a:ext cx="2095500" cy="266700"/>
           </a:xfrm>
           <a:prstGeom xmlns:a="http://schemas.openxmlformats.org/drawingml/2006/main" prst="rect">
@@ -8493,19 +8493,19 @@
           <p:cNvPr id="11" name="">
             <a:extLst xmlns:a="http://schemas.openxmlformats.org/drawingml/2006/main">
               <a:ext uri="{FF2B5EF4-FFF2-40B4-BE49-F238E27FC236}">
-                <a16:creationId xmlns:a16="http://schemas.microsoft.com/office/drawing/2014/main" id="{9565849D-665E-44C7-9FED-1A2ED31089F2}"/>
-              </a:ext>
-            </a:extLst>
-          </p:cNvPr>
-          <p:cNvSpPr>
-            <a:spLocks xmlns:a="http://schemas.openxmlformats.org/drawingml/2006/main" noGrp="1"/>
-          </p:cNvSpPr>
-          <p:nvPr/>
-        </p:nvSpPr>
-        <p:spPr>
-          <a:xfrm xmlns:a="http://schemas.openxmlformats.org/drawingml/2006/main">
-            <a:off x="4800600" y="3733800"/>
-            <a:ext cx="2190750" cy="838200"/>
+                <a16:creationId xmlns:a16="http://schemas.microsoft.com/office/drawing/2014/main" id="{49DFD54F-11AA-499B-987F-A559D6C82746}"/>
+              </a:ext>
+            </a:extLst>
+          </p:cNvPr>
+          <p:cNvSpPr>
+            <a:spLocks xmlns:a="http://schemas.openxmlformats.org/drawingml/2006/main" noGrp="1"/>
+          </p:cNvSpPr>
+          <p:nvPr/>
+        </p:nvSpPr>
+        <p:spPr>
+          <a:xfrm xmlns:a="http://schemas.openxmlformats.org/drawingml/2006/main">
+            <a:off x="4800600" y="3848100"/>
+            <a:ext cx="2286000" cy="838200"/>
           </a:xfrm>
           <a:prstGeom xmlns:a="http://schemas.openxmlformats.org/drawingml/2006/main" prst="rect">
             <a:avLst/>
@@ -8521,14 +8521,14 @@
           <a:lstStyle xmlns:a="http://schemas.openxmlformats.org/drawingml/2006/main"/>
           <a:p xmlns:a="http://schemas.openxmlformats.org/drawingml/2006/main">
             <a:pPr algn="l">
-              <a:defRPr sz="1650" b="0">
+              <a:defRPr sz="1575" b="0">
                 <a:solidFill>
                   <a:srgbClr val="3D3D3D"/>
                 </a:solidFill>
               </a:defRPr>
             </a:pPr>
             <a:r>
-              <a:rPr sz="1650" b="0">
+              <a:rPr sz="1575" b="0">
                 <a:solidFill>
                   <a:srgbClr val="3D3D3D"/>
                 </a:solidFill>
@@ -8538,14 +8538,14 @@
           </a:p>
           <a:p xmlns:a="http://schemas.openxmlformats.org/drawingml/2006/main">
             <a:pPr algn="l">
-              <a:defRPr sz="1650" b="0">
+              <a:defRPr sz="1575" b="0">
                 <a:solidFill>
                   <a:srgbClr val="3D3D3D"/>
                 </a:solidFill>
               </a:defRPr>
             </a:pPr>
             <a:r>
-              <a:rPr sz="1650" b="0">
+              <a:rPr sz="1575" b="0">
                 <a:solidFill>
                   <a:srgbClr val="3D3D3D"/>
                 </a:solidFill>
@@ -8555,19 +8555,19 @@
           </a:p>
           <a:p xmlns:a="http://schemas.openxmlformats.org/drawingml/2006/main">
             <a:pPr algn="l">
-              <a:defRPr sz="1650" b="0">
+              <a:defRPr sz="1575" b="0">
                 <a:solidFill>
                   <a:srgbClr val="3D3D3D"/>
                 </a:solidFill>
               </a:defRPr>
             </a:pPr>
             <a:r>
-              <a:rPr sz="1650" b="0">
+              <a:rPr sz="1575" b="0">
                 <a:solidFill>
                   <a:srgbClr val="3D3D3D"/>
                 </a:solidFill>
               </a:rPr>
-              <a:t>prompts, and PR repairs.</a:t>
+              <a:t>prompts, and repairs.</a:t>
             </a:r>
           </a:p>
         </p:txBody>
@@ -8577,23 +8577,23 @@
           <p:cNvPr id="12" name="">
             <a:extLst xmlns:a="http://schemas.openxmlformats.org/drawingml/2006/main">
               <a:ext uri="{FF2B5EF4-FFF2-40B4-BE49-F238E27FC236}">
-                <a16:creationId xmlns:a16="http://schemas.microsoft.com/office/drawing/2014/main" id="{D22F616A-3A1C-41EB-81BF-92FCC76DB2D2}"/>
-              </a:ext>
-            </a:extLst>
-          </p:cNvPr>
-          <p:cNvSpPr>
-            <a:spLocks xmlns:a="http://schemas.openxmlformats.org/drawingml/2006/main" noGrp="1"/>
-          </p:cNvSpPr>
-          <p:nvPr/>
-        </p:nvSpPr>
-        <p:spPr>
-          <a:xfrm xmlns:a="http://schemas.openxmlformats.org/drawingml/2006/main">
-            <a:off x="8172450" y="2914650"/>
-            <a:ext cx="3200400" cy="2076450"/>
+                <a16:creationId xmlns:a16="http://schemas.microsoft.com/office/drawing/2014/main" id="{5B56C4C9-B3AB-4DF8-A997-7A0CB6E81C6E}"/>
+              </a:ext>
+            </a:extLst>
+          </p:cNvPr>
+          <p:cNvSpPr>
+            <a:spLocks xmlns:a="http://schemas.openxmlformats.org/drawingml/2006/main" noGrp="1"/>
+          </p:cNvSpPr>
+          <p:nvPr/>
+        </p:nvSpPr>
+        <p:spPr>
+          <a:xfrm xmlns:a="http://schemas.openxmlformats.org/drawingml/2006/main">
+            <a:off x="8172450" y="3028950"/>
+            <a:ext cx="3200400" cy="2133600"/>
           </a:xfrm>
           <a:prstGeom xmlns:a="http://schemas.openxmlformats.org/drawingml/2006/main" prst="roundRect">
             <a:avLst>
-              <a:gd name="adj" fmla="val 7339"/>
+              <a:gd name="adj" fmla="val 7143"/>
             </a:avLst>
           </a:prstGeom>
           <a:solidFill xmlns:a="http://schemas.openxmlformats.org/drawingml/2006/main">
@@ -8612,18 +8612,18 @@
           <p:cNvPr id="13" name="">
             <a:extLst xmlns:a="http://schemas.openxmlformats.org/drawingml/2006/main">
               <a:ext uri="{FF2B5EF4-FFF2-40B4-BE49-F238E27FC236}">
-                <a16:creationId xmlns:a16="http://schemas.microsoft.com/office/drawing/2014/main" id="{1D8DB6F4-8DAF-4431-ACAD-5CD10C43EA78}"/>
-              </a:ext>
-            </a:extLst>
-          </p:cNvPr>
-          <p:cNvSpPr>
-            <a:spLocks xmlns:a="http://schemas.openxmlformats.org/drawingml/2006/main" noGrp="1"/>
-          </p:cNvSpPr>
-          <p:nvPr/>
-        </p:nvSpPr>
-        <p:spPr>
-          <a:xfrm xmlns:a="http://schemas.openxmlformats.org/drawingml/2006/main">
-            <a:off x="8477250" y="3219450"/>
+                <a16:creationId xmlns:a16="http://schemas.microsoft.com/office/drawing/2014/main" id="{65969BC4-5828-4440-88F0-D01886412BAD}"/>
+              </a:ext>
+            </a:extLst>
+          </p:cNvPr>
+          <p:cNvSpPr>
+            <a:spLocks xmlns:a="http://schemas.openxmlformats.org/drawingml/2006/main" noGrp="1"/>
+          </p:cNvSpPr>
+          <p:nvPr/>
+        </p:nvSpPr>
+        <p:spPr>
+          <a:xfrm xmlns:a="http://schemas.openxmlformats.org/drawingml/2006/main">
+            <a:off x="8477250" y="3333750"/>
             <a:ext cx="2095500" cy="266700"/>
           </a:xfrm>
           <a:prstGeom xmlns:a="http://schemas.openxmlformats.org/drawingml/2006/main" prst="rect">
@@ -8662,18 +8662,18 @@
           <p:cNvPr id="14" name="">
             <a:extLst xmlns:a="http://schemas.openxmlformats.org/drawingml/2006/main">
               <a:ext uri="{FF2B5EF4-FFF2-40B4-BE49-F238E27FC236}">
-                <a16:creationId xmlns:a16="http://schemas.microsoft.com/office/drawing/2014/main" id="{39A4ABD4-3485-4B98-8C36-3C8768032EE3}"/>
-              </a:ext>
-            </a:extLst>
-          </p:cNvPr>
-          <p:cNvSpPr>
-            <a:spLocks xmlns:a="http://schemas.openxmlformats.org/drawingml/2006/main" noGrp="1"/>
-          </p:cNvSpPr>
-          <p:nvPr/>
-        </p:nvSpPr>
-        <p:spPr>
-          <a:xfrm xmlns:a="http://schemas.openxmlformats.org/drawingml/2006/main">
-            <a:off x="8477250" y="3752850"/>
+                <a16:creationId xmlns:a16="http://schemas.microsoft.com/office/drawing/2014/main" id="{89C577C5-BC82-4832-8054-EE900B3EAE79}"/>
+              </a:ext>
+            </a:extLst>
+          </p:cNvPr>
+          <p:cNvSpPr>
+            <a:spLocks xmlns:a="http://schemas.openxmlformats.org/drawingml/2006/main" noGrp="1"/>
+          </p:cNvSpPr>
+          <p:nvPr/>
+        </p:nvSpPr>
+        <p:spPr>
+          <a:xfrm xmlns:a="http://schemas.openxmlformats.org/drawingml/2006/main">
+            <a:off x="8477250" y="3867150"/>
             <a:ext cx="2190750" cy="781050"/>
           </a:xfrm>
           <a:prstGeom xmlns:a="http://schemas.openxmlformats.org/drawingml/2006/main" prst="rect">
@@ -8690,14 +8690,14 @@
           <a:lstStyle xmlns:a="http://schemas.openxmlformats.org/drawingml/2006/main"/>
           <a:p xmlns:a="http://schemas.openxmlformats.org/drawingml/2006/main">
             <a:pPr algn="l">
-              <a:defRPr sz="1650" b="0">
+              <a:defRPr sz="1575" b="0">
                 <a:solidFill>
                   <a:srgbClr val="F9D0E3"/>
                 </a:solidFill>
               </a:defRPr>
             </a:pPr>
             <a:r>
-              <a:rPr sz="1650" b="0">
+              <a:rPr sz="1575" b="0">
                 <a:solidFill>
                   <a:srgbClr val="F9D0E3"/>
                 </a:solidFill>
@@ -8707,14 +8707,14 @@
           </a:p>
           <a:p xmlns:a="http://schemas.openxmlformats.org/drawingml/2006/main">
             <a:pPr algn="l">
-              <a:defRPr sz="1650" b="0">
+              <a:defRPr sz="1575" b="0">
                 <a:solidFill>
                   <a:srgbClr val="F9D0E3"/>
                 </a:solidFill>
               </a:defRPr>
             </a:pPr>
             <a:r>
-              <a:rPr sz="1650" b="0">
+              <a:rPr sz="1575" b="0">
                 <a:solidFill>
                   <a:srgbClr val="F9D0E3"/>
                 </a:solidFill>
@@ -8724,14 +8724,14 @@
           </a:p>
           <a:p xmlns:a="http://schemas.openxmlformats.org/drawingml/2006/main">
             <a:pPr algn="l">
-              <a:defRPr sz="1650" b="0">
+              <a:defRPr sz="1575" b="0">
                 <a:solidFill>
                   <a:srgbClr val="F9D0E3"/>
                 </a:solidFill>
               </a:defRPr>
             </a:pPr>
             <a:r>
-              <a:rPr sz="1650" b="0">
+              <a:rPr sz="1575" b="0">
                 <a:solidFill>
                   <a:srgbClr val="F9D0E3"/>
                 </a:solidFill>
@@ -8744,7 +8744,7 @@
     </p:spTree>
     <p:extLst>
       <p:ext uri="{BB962C8B-B14F-4D97-AF65-F5344CB8AC3E}">
-        <p14:creationId xmlns:p14="http://schemas.microsoft.com/office/powerpoint/2010/main" val="384999138"/>
+        <p14:creationId xmlns:p14="http://schemas.microsoft.com/office/powerpoint/2010/main" val="563179940"/>
       </p:ext>
     </p:extLst>
   </p:cSld>
@@ -8775,7 +8775,7 @@
           <p:cNvPr id="1" name="">
             <a:extLst xmlns:a="http://schemas.openxmlformats.org/drawingml/2006/main">
               <a:ext uri="{FF2B5EF4-FFF2-40B4-BE49-F238E27FC236}">
-                <a16:creationId xmlns:a16="http://schemas.microsoft.com/office/drawing/2014/main" id="{775ACD17-6CBB-4FDD-8AE9-E3FF7E241890}"/>
+                <a16:creationId xmlns:a16="http://schemas.microsoft.com/office/drawing/2014/main" id="{59AE184B-6E7E-411C-9BB0-1CBA2DD1FD10}"/>
               </a:ext>
             </a:extLst>
           </p:cNvPr>
@@ -8825,7 +8825,7 @@
           <p:cNvPr id="2" name="">
             <a:extLst xmlns:a="http://schemas.openxmlformats.org/drawingml/2006/main">
               <a:ext uri="{FF2B5EF4-FFF2-40B4-BE49-F238E27FC236}">
-                <a16:creationId xmlns:a16="http://schemas.microsoft.com/office/drawing/2014/main" id="{016D93DB-A093-4459-B54A-688E1E96267D}"/>
+                <a16:creationId xmlns:a16="http://schemas.microsoft.com/office/drawing/2014/main" id="{24CE5669-2488-4560-BEFA-F3786CACAF2B}"/>
               </a:ext>
             </a:extLst>
           </p:cNvPr>
@@ -8875,7 +8875,7 @@
           <p:cNvPr id="3" name="">
             <a:extLst xmlns:a="http://schemas.openxmlformats.org/drawingml/2006/main">
               <a:ext uri="{FF2B5EF4-FFF2-40B4-BE49-F238E27FC236}">
-                <a16:creationId xmlns:a16="http://schemas.microsoft.com/office/drawing/2014/main" id="{E572B414-95A1-418A-B9B7-CAEDCEE33D45}"/>
+                <a16:creationId xmlns:a16="http://schemas.microsoft.com/office/drawing/2014/main" id="{3D275871-BC8A-4652-A217-78A1667D12D4}"/>
               </a:ext>
             </a:extLst>
           </p:cNvPr>
@@ -8887,7 +8887,7 @@
         <p:spPr>
           <a:xfrm xmlns:a="http://schemas.openxmlformats.org/drawingml/2006/main">
             <a:off x="704850" y="990600"/>
-            <a:ext cx="7239000" cy="933450"/>
+            <a:ext cx="7905750" cy="1123950"/>
           </a:xfrm>
           <a:prstGeom xmlns:a="http://schemas.openxmlformats.org/drawingml/2006/main" prst="rect">
             <a:avLst/>
@@ -8903,14 +8903,14 @@
           <a:lstStyle xmlns:a="http://schemas.openxmlformats.org/drawingml/2006/main"/>
           <a:p xmlns:a="http://schemas.openxmlformats.org/drawingml/2006/main">
             <a:pPr algn="l">
-              <a:defRPr sz="3225" b="1">
+              <a:defRPr sz="3000" b="1">
                 <a:solidFill>
                   <a:srgbClr val="111111"/>
                 </a:solidFill>
               </a:defRPr>
             </a:pPr>
             <a:r>
-              <a:rPr sz="3225" b="1">
+              <a:rPr sz="3000" b="1">
                 <a:solidFill>
                   <a:srgbClr val="111111"/>
                 </a:solidFill>
@@ -8925,19 +8925,19 @@
           <p:cNvPr id="4" name="">
             <a:extLst xmlns:a="http://schemas.openxmlformats.org/drawingml/2006/main">
               <a:ext uri="{FF2B5EF4-FFF2-40B4-BE49-F238E27FC236}">
-                <a16:creationId xmlns:a16="http://schemas.microsoft.com/office/drawing/2014/main" id="{E831BE14-29C9-4F07-9B00-AE5390D085BF}"/>
-              </a:ext>
-            </a:extLst>
-          </p:cNvPr>
-          <p:cNvSpPr>
-            <a:spLocks xmlns:a="http://schemas.openxmlformats.org/drawingml/2006/main" noGrp="1"/>
-          </p:cNvSpPr>
-          <p:nvPr/>
-        </p:nvSpPr>
-        <p:spPr>
-          <a:xfrm xmlns:a="http://schemas.openxmlformats.org/drawingml/2006/main">
-            <a:off x="723900" y="1885950"/>
-            <a:ext cx="6667500" cy="590550"/>
+                <a16:creationId xmlns:a16="http://schemas.microsoft.com/office/drawing/2014/main" id="{BD893BB3-3E50-4646-921F-482B5267CD8F}"/>
+              </a:ext>
+            </a:extLst>
+          </p:cNvPr>
+          <p:cNvSpPr>
+            <a:spLocks xmlns:a="http://schemas.openxmlformats.org/drawingml/2006/main" noGrp="1"/>
+          </p:cNvSpPr>
+          <p:nvPr/>
+        </p:nvSpPr>
+        <p:spPr>
+          <a:xfrm xmlns:a="http://schemas.openxmlformats.org/drawingml/2006/main">
+            <a:off x="723900" y="2114550"/>
+            <a:ext cx="7239000" cy="628650"/>
           </a:xfrm>
           <a:prstGeom xmlns:a="http://schemas.openxmlformats.org/drawingml/2006/main" prst="rect">
             <a:avLst/>
@@ -8953,14 +8953,14 @@
           <a:lstStyle xmlns:a="http://schemas.openxmlformats.org/drawingml/2006/main"/>
           <a:p xmlns:a="http://schemas.openxmlformats.org/drawingml/2006/main">
             <a:pPr algn="l">
-              <a:defRPr sz="1575" b="0">
+              <a:defRPr sz="1500" b="0">
                 <a:solidFill>
                   <a:srgbClr val="7A7A7A"/>
                 </a:solidFill>
               </a:defRPr>
             </a:pPr>
             <a:r>
-              <a:rPr sz="1575" b="0">
+              <a:rPr sz="1500" b="0">
                 <a:solidFill>
                   <a:srgbClr val="7A7A7A"/>
                 </a:solidFill>
@@ -8975,7 +8975,7 @@
           <p:cNvPr id="5" name="">
             <a:extLst xmlns:a="http://schemas.openxmlformats.org/drawingml/2006/main">
               <a:ext uri="{FF2B5EF4-FFF2-40B4-BE49-F238E27FC236}">
-                <a16:creationId xmlns:a16="http://schemas.microsoft.com/office/drawing/2014/main" id="{C45E43BD-6868-4A6E-BF5C-A4D19E548859}"/>
+                <a16:creationId xmlns:a16="http://schemas.microsoft.com/office/drawing/2014/main" id="{7F6EA44F-2F81-4510-8CEF-E24B000E6728}"/>
               </a:ext>
             </a:extLst>
           </p:cNvPr>
@@ -9025,7 +9025,7 @@
           <p:cNvPr id="6" name="">
             <a:extLst xmlns:a="http://schemas.openxmlformats.org/drawingml/2006/main">
               <a:ext uri="{FF2B5EF4-FFF2-40B4-BE49-F238E27FC236}">
-                <a16:creationId xmlns:a16="http://schemas.microsoft.com/office/drawing/2014/main" id="{1B703DF9-DBC5-43D5-A91D-DEEAF7004AEB}"/>
+                <a16:creationId xmlns:a16="http://schemas.microsoft.com/office/drawing/2014/main" id="{AE5E298A-F3CC-4984-8808-D93A313589CF}"/>
               </a:ext>
             </a:extLst>
           </p:cNvPr>
@@ -9060,7 +9060,7 @@
           <p:cNvPr id="7" name="">
             <a:extLst xmlns:a="http://schemas.openxmlformats.org/drawingml/2006/main">
               <a:ext uri="{FF2B5EF4-FFF2-40B4-BE49-F238E27FC236}">
-                <a16:creationId xmlns:a16="http://schemas.microsoft.com/office/drawing/2014/main" id="{69DDF2BF-189F-442A-915D-910BCC296C14}"/>
+                <a16:creationId xmlns:a16="http://schemas.microsoft.com/office/drawing/2014/main" id="{AAACC1DB-0BF8-425F-9EA2-9BB2FB898DB6}"/>
               </a:ext>
             </a:extLst>
           </p:cNvPr>
@@ -9095,7 +9095,7 @@
           <p:cNvPr id="8" name="">
             <a:extLst xmlns:a="http://schemas.openxmlformats.org/drawingml/2006/main">
               <a:ext uri="{FF2B5EF4-FFF2-40B4-BE49-F238E27FC236}">
-                <a16:creationId xmlns:a16="http://schemas.microsoft.com/office/drawing/2014/main" id="{D6AEB681-09A2-4D0B-95B9-5F7C7F238757}"/>
+                <a16:creationId xmlns:a16="http://schemas.microsoft.com/office/drawing/2014/main" id="{3139ED99-B73F-45D9-8297-E943FF86BA47}"/>
               </a:ext>
             </a:extLst>
           </p:cNvPr>
@@ -9130,7 +9130,7 @@
           <p:cNvPr id="9" name="">
             <a:extLst xmlns:a="http://schemas.openxmlformats.org/drawingml/2006/main">
               <a:ext uri="{FF2B5EF4-FFF2-40B4-BE49-F238E27FC236}">
-                <a16:creationId xmlns:a16="http://schemas.microsoft.com/office/drawing/2014/main" id="{F2C916B2-77B4-48E3-8F80-9498AA7BC967}"/>
+                <a16:creationId xmlns:a16="http://schemas.microsoft.com/office/drawing/2014/main" id="{11EA5B97-D7C1-4481-B97F-42898968D9C3}"/>
               </a:ext>
             </a:extLst>
           </p:cNvPr>
@@ -9165,7 +9165,7 @@
           <p:cNvPr id="10" name="">
             <a:extLst xmlns:a="http://schemas.openxmlformats.org/drawingml/2006/main">
               <a:ext uri="{FF2B5EF4-FFF2-40B4-BE49-F238E27FC236}">
-                <a16:creationId xmlns:a16="http://schemas.microsoft.com/office/drawing/2014/main" id="{FC9AFAB2-157A-40EA-B5C4-78C2C5843EAE}"/>
+                <a16:creationId xmlns:a16="http://schemas.microsoft.com/office/drawing/2014/main" id="{FDA152F7-0097-4937-A239-F972043CA514}"/>
               </a:ext>
             </a:extLst>
           </p:cNvPr>
@@ -9200,7 +9200,7 @@
           <p:cNvPr id="11" name="">
             <a:extLst xmlns:a="http://schemas.openxmlformats.org/drawingml/2006/main">
               <a:ext uri="{FF2B5EF4-FFF2-40B4-BE49-F238E27FC236}">
-                <a16:creationId xmlns:a16="http://schemas.microsoft.com/office/drawing/2014/main" id="{0FAC70B3-2CFA-4B77-B9AA-BFDF02384DB0}"/>
+                <a16:creationId xmlns:a16="http://schemas.microsoft.com/office/drawing/2014/main" id="{44EC8409-11E2-4111-AE11-3E1D9756AD8B}"/>
               </a:ext>
             </a:extLst>
           </p:cNvPr>
@@ -9235,7 +9235,7 @@
           <p:cNvPr id="12" name="">
             <a:extLst xmlns:a="http://schemas.openxmlformats.org/drawingml/2006/main">
               <a:ext uri="{FF2B5EF4-FFF2-40B4-BE49-F238E27FC236}">
-                <a16:creationId xmlns:a16="http://schemas.microsoft.com/office/drawing/2014/main" id="{17373DDE-2801-4BE4-AA1E-529CD1B89329}"/>
+                <a16:creationId xmlns:a16="http://schemas.microsoft.com/office/drawing/2014/main" id="{80267742-2D17-4E55-BBFA-A73D4F508F72}"/>
               </a:ext>
             </a:extLst>
           </p:cNvPr>
@@ -9285,7 +9285,7 @@
           <p:cNvPr id="13" name="">
             <a:extLst xmlns:a="http://schemas.openxmlformats.org/drawingml/2006/main">
               <a:ext uri="{FF2B5EF4-FFF2-40B4-BE49-F238E27FC236}">
-                <a16:creationId xmlns:a16="http://schemas.microsoft.com/office/drawing/2014/main" id="{14FE246B-9811-48A1-AE80-35D2D5392B74}"/>
+                <a16:creationId xmlns:a16="http://schemas.microsoft.com/office/drawing/2014/main" id="{BE20E20F-7711-42E2-9D94-57A2DC79A3A6}"/>
               </a:ext>
             </a:extLst>
           </p:cNvPr>
@@ -9320,7 +9320,7 @@
           <p:cNvPr id="14" name="">
             <a:extLst xmlns:a="http://schemas.openxmlformats.org/drawingml/2006/main">
               <a:ext uri="{FF2B5EF4-FFF2-40B4-BE49-F238E27FC236}">
-                <a16:creationId xmlns:a16="http://schemas.microsoft.com/office/drawing/2014/main" id="{9FC0D657-83B0-4168-BABB-D21A73BAC1AD}"/>
+                <a16:creationId xmlns:a16="http://schemas.microsoft.com/office/drawing/2014/main" id="{EE418D9E-98FB-4BBE-AB96-27C68507F328}"/>
               </a:ext>
             </a:extLst>
           </p:cNvPr>
@@ -9355,7 +9355,7 @@
           <p:cNvPr id="15" name="">
             <a:extLst xmlns:a="http://schemas.openxmlformats.org/drawingml/2006/main">
               <a:ext uri="{FF2B5EF4-FFF2-40B4-BE49-F238E27FC236}">
-                <a16:creationId xmlns:a16="http://schemas.microsoft.com/office/drawing/2014/main" id="{DB0DEB4A-730E-4261-8C17-78953149C41C}"/>
+                <a16:creationId xmlns:a16="http://schemas.microsoft.com/office/drawing/2014/main" id="{A51C635D-C010-4E18-961B-414952DA9376}"/>
               </a:ext>
             </a:extLst>
           </p:cNvPr>
@@ -9405,7 +9405,7 @@
           <p:cNvPr id="16" name="">
             <a:extLst xmlns:a="http://schemas.openxmlformats.org/drawingml/2006/main">
               <a:ext uri="{FF2B5EF4-FFF2-40B4-BE49-F238E27FC236}">
-                <a16:creationId xmlns:a16="http://schemas.microsoft.com/office/drawing/2014/main" id="{5841FEE0-7041-4929-A689-EC407C5F6946}"/>
+                <a16:creationId xmlns:a16="http://schemas.microsoft.com/office/drawing/2014/main" id="{A0E3A001-7002-4ED1-A8F8-9EC8B30AD76D}"/>
               </a:ext>
             </a:extLst>
           </p:cNvPr>
@@ -9455,7 +9455,7 @@
           <p:cNvPr id="17" name="">
             <a:extLst xmlns:a="http://schemas.openxmlformats.org/drawingml/2006/main">
               <a:ext uri="{FF2B5EF4-FFF2-40B4-BE49-F238E27FC236}">
-                <a16:creationId xmlns:a16="http://schemas.microsoft.com/office/drawing/2014/main" id="{C5A58F0C-AFBA-4E18-933A-561F9CB7C51D}"/>
+                <a16:creationId xmlns:a16="http://schemas.microsoft.com/office/drawing/2014/main" id="{9C5824D5-E53C-429B-833F-D2F1A06C5C66}"/>
               </a:ext>
             </a:extLst>
           </p:cNvPr>
@@ -9505,7 +9505,7 @@
           <p:cNvPr id="18" name="">
             <a:extLst xmlns:a="http://schemas.openxmlformats.org/drawingml/2006/main">
               <a:ext uri="{FF2B5EF4-FFF2-40B4-BE49-F238E27FC236}">
-                <a16:creationId xmlns:a16="http://schemas.microsoft.com/office/drawing/2014/main" id="{1B023520-19D1-4A61-B7A9-9860043463D8}"/>
+                <a16:creationId xmlns:a16="http://schemas.microsoft.com/office/drawing/2014/main" id="{0B64DBCC-3644-4014-91E2-FBF4BFE92EA2}"/>
               </a:ext>
             </a:extLst>
           </p:cNvPr>
@@ -9540,7 +9540,7 @@
           <p:cNvPr id="19" name="">
             <a:extLst xmlns:a="http://schemas.openxmlformats.org/drawingml/2006/main">
               <a:ext uri="{FF2B5EF4-FFF2-40B4-BE49-F238E27FC236}">
-                <a16:creationId xmlns:a16="http://schemas.microsoft.com/office/drawing/2014/main" id="{85EBBB04-C757-467D-886B-EC6B6997C896}"/>
+                <a16:creationId xmlns:a16="http://schemas.microsoft.com/office/drawing/2014/main" id="{06D5B334-89E1-4CFF-B037-9AD92404E708}"/>
               </a:ext>
             </a:extLst>
           </p:cNvPr>
@@ -9575,7 +9575,7 @@
           <p:cNvPr id="20" name="">
             <a:extLst xmlns:a="http://schemas.openxmlformats.org/drawingml/2006/main">
               <a:ext uri="{FF2B5EF4-FFF2-40B4-BE49-F238E27FC236}">
-                <a16:creationId xmlns:a16="http://schemas.microsoft.com/office/drawing/2014/main" id="{A09F0B7D-B713-4C56-9811-2F4024E4C126}"/>
+                <a16:creationId xmlns:a16="http://schemas.microsoft.com/office/drawing/2014/main" id="{49EC073B-F959-4F7B-9E7F-CFF41FAD2EF3}"/>
               </a:ext>
             </a:extLst>
           </p:cNvPr>
@@ -9625,7 +9625,7 @@
           <p:cNvPr id="21" name="">
             <a:extLst xmlns:a="http://schemas.openxmlformats.org/drawingml/2006/main">
               <a:ext uri="{FF2B5EF4-FFF2-40B4-BE49-F238E27FC236}">
-                <a16:creationId xmlns:a16="http://schemas.microsoft.com/office/drawing/2014/main" id="{566F3454-79AD-4148-BF0A-6861FCAD67BF}"/>
+                <a16:creationId xmlns:a16="http://schemas.microsoft.com/office/drawing/2014/main" id="{ED8B779A-A6D7-43CC-B34F-9CFB585D840F}"/>
               </a:ext>
             </a:extLst>
           </p:cNvPr>
@@ -9675,7 +9675,7 @@
           <p:cNvPr id="22" name="">
             <a:extLst xmlns:a="http://schemas.openxmlformats.org/drawingml/2006/main">
               <a:ext uri="{FF2B5EF4-FFF2-40B4-BE49-F238E27FC236}">
-                <a16:creationId xmlns:a16="http://schemas.microsoft.com/office/drawing/2014/main" id="{3970003F-697B-439E-A115-B8F6799D9DDA}"/>
+                <a16:creationId xmlns:a16="http://schemas.microsoft.com/office/drawing/2014/main" id="{50A1B4F2-70EF-4D52-A63D-8AA13449DE55}"/>
               </a:ext>
             </a:extLst>
           </p:cNvPr>
@@ -9725,7 +9725,7 @@
           <p:cNvPr id="23" name="">
             <a:extLst xmlns:a="http://schemas.openxmlformats.org/drawingml/2006/main">
               <a:ext uri="{FF2B5EF4-FFF2-40B4-BE49-F238E27FC236}">
-                <a16:creationId xmlns:a16="http://schemas.microsoft.com/office/drawing/2014/main" id="{9141F79D-CB58-4A95-81EF-B878BD709920}"/>
+                <a16:creationId xmlns:a16="http://schemas.microsoft.com/office/drawing/2014/main" id="{7715BCBC-2A62-4AB3-AE3C-E4A5ACEE3986}"/>
               </a:ext>
             </a:extLst>
           </p:cNvPr>
@@ -9760,7 +9760,7 @@
           <p:cNvPr id="24" name="">
             <a:extLst xmlns:a="http://schemas.openxmlformats.org/drawingml/2006/main">
               <a:ext uri="{FF2B5EF4-FFF2-40B4-BE49-F238E27FC236}">
-                <a16:creationId xmlns:a16="http://schemas.microsoft.com/office/drawing/2014/main" id="{DA12E3B0-8D22-4D6A-BBF8-4EA1F5100922}"/>
+                <a16:creationId xmlns:a16="http://schemas.microsoft.com/office/drawing/2014/main" id="{EB9EE573-4760-49A0-BD37-CC593F2A9C57}"/>
               </a:ext>
             </a:extLst>
           </p:cNvPr>
@@ -9795,7 +9795,7 @@
           <p:cNvPr id="25" name="">
             <a:extLst xmlns:a="http://schemas.openxmlformats.org/drawingml/2006/main">
               <a:ext uri="{FF2B5EF4-FFF2-40B4-BE49-F238E27FC236}">
-                <a16:creationId xmlns:a16="http://schemas.microsoft.com/office/drawing/2014/main" id="{570953CD-DF7A-45E0-A6FA-A666C58B4990}"/>
+                <a16:creationId xmlns:a16="http://schemas.microsoft.com/office/drawing/2014/main" id="{7BF9859E-D8DA-4AB3-BE20-D60B0C23077E}"/>
               </a:ext>
             </a:extLst>
           </p:cNvPr>
@@ -9845,7 +9845,7 @@
           <p:cNvPr id="26" name="">
             <a:extLst xmlns:a="http://schemas.openxmlformats.org/drawingml/2006/main">
               <a:ext uri="{FF2B5EF4-FFF2-40B4-BE49-F238E27FC236}">
-                <a16:creationId xmlns:a16="http://schemas.microsoft.com/office/drawing/2014/main" id="{3C246A74-84CF-415E-BB9A-EC240ACCB692}"/>
+                <a16:creationId xmlns:a16="http://schemas.microsoft.com/office/drawing/2014/main" id="{EB0CB0D7-8B10-4556-BA49-A462AEF3E3D0}"/>
               </a:ext>
             </a:extLst>
           </p:cNvPr>
@@ -9895,7 +9895,7 @@
           <p:cNvPr id="27" name="">
             <a:extLst xmlns:a="http://schemas.openxmlformats.org/drawingml/2006/main">
               <a:ext uri="{FF2B5EF4-FFF2-40B4-BE49-F238E27FC236}">
-                <a16:creationId xmlns:a16="http://schemas.microsoft.com/office/drawing/2014/main" id="{983BA04E-BF79-4AAE-ABF9-73CE6D6037B2}"/>
+                <a16:creationId xmlns:a16="http://schemas.microsoft.com/office/drawing/2014/main" id="{62334F37-24C0-4399-931C-EF01925B4F79}"/>
               </a:ext>
             </a:extLst>
           </p:cNvPr>
@@ -9945,7 +9945,7 @@
           <p:cNvPr id="28" name="">
             <a:extLst xmlns:a="http://schemas.openxmlformats.org/drawingml/2006/main">
               <a:ext uri="{FF2B5EF4-FFF2-40B4-BE49-F238E27FC236}">
-                <a16:creationId xmlns:a16="http://schemas.microsoft.com/office/drawing/2014/main" id="{61BDA75F-0D44-4C3E-BA91-EFBDA419DDDC}"/>
+                <a16:creationId xmlns:a16="http://schemas.microsoft.com/office/drawing/2014/main" id="{75DC38D8-401F-4953-B583-0444D5B604EC}"/>
               </a:ext>
             </a:extLst>
           </p:cNvPr>
@@ -9980,7 +9980,7 @@
           <p:cNvPr id="29" name="">
             <a:extLst xmlns:a="http://schemas.openxmlformats.org/drawingml/2006/main">
               <a:ext uri="{FF2B5EF4-FFF2-40B4-BE49-F238E27FC236}">
-                <a16:creationId xmlns:a16="http://schemas.microsoft.com/office/drawing/2014/main" id="{285DEDA0-F835-4156-847A-428495BD5F6B}"/>
+                <a16:creationId xmlns:a16="http://schemas.microsoft.com/office/drawing/2014/main" id="{5093E4B8-21F7-4D05-930B-29BE096500C7}"/>
               </a:ext>
             </a:extLst>
           </p:cNvPr>
@@ -10015,7 +10015,7 @@
           <p:cNvPr id="30" name="">
             <a:extLst xmlns:a="http://schemas.openxmlformats.org/drawingml/2006/main">
               <a:ext uri="{FF2B5EF4-FFF2-40B4-BE49-F238E27FC236}">
-                <a16:creationId xmlns:a16="http://schemas.microsoft.com/office/drawing/2014/main" id="{AEAC6E0C-E70A-45A5-9EF9-D9AC2A1F1EBC}"/>
+                <a16:creationId xmlns:a16="http://schemas.microsoft.com/office/drawing/2014/main" id="{23641BC4-1C3B-459B-8A28-AE0B7E46C905}"/>
               </a:ext>
             </a:extLst>
           </p:cNvPr>
@@ -10065,7 +10065,7 @@
           <p:cNvPr id="31" name="">
             <a:extLst xmlns:a="http://schemas.openxmlformats.org/drawingml/2006/main">
               <a:ext uri="{FF2B5EF4-FFF2-40B4-BE49-F238E27FC236}">
-                <a16:creationId xmlns:a16="http://schemas.microsoft.com/office/drawing/2014/main" id="{C1ECD6C4-EC55-4CAD-927C-2D0EDFC505B7}"/>
+                <a16:creationId xmlns:a16="http://schemas.microsoft.com/office/drawing/2014/main" id="{82C98DC6-7A0D-4DE9-A836-1AC85BB0B644}"/>
               </a:ext>
             </a:extLst>
           </p:cNvPr>
@@ -10115,7 +10115,7 @@
           <p:cNvPr id="32" name="">
             <a:extLst xmlns:a="http://schemas.openxmlformats.org/drawingml/2006/main">
               <a:ext uri="{FF2B5EF4-FFF2-40B4-BE49-F238E27FC236}">
-                <a16:creationId xmlns:a16="http://schemas.microsoft.com/office/drawing/2014/main" id="{410AF854-939E-4FE6-950E-F547D14A2A77}"/>
+                <a16:creationId xmlns:a16="http://schemas.microsoft.com/office/drawing/2014/main" id="{F92515B7-A497-4772-A1A4-0485E93F2FA0}"/>
               </a:ext>
             </a:extLst>
           </p:cNvPr>
@@ -10165,7 +10165,7 @@
           <p:cNvPr id="33" name="">
             <a:extLst xmlns:a="http://schemas.openxmlformats.org/drawingml/2006/main">
               <a:ext uri="{FF2B5EF4-FFF2-40B4-BE49-F238E27FC236}">
-                <a16:creationId xmlns:a16="http://schemas.microsoft.com/office/drawing/2014/main" id="{F7417875-6E40-4CE5-9710-AA3431DDECA5}"/>
+                <a16:creationId xmlns:a16="http://schemas.microsoft.com/office/drawing/2014/main" id="{3EC8FAB1-B45A-4977-84FC-8377431E9FF3}"/>
               </a:ext>
             </a:extLst>
           </p:cNvPr>
@@ -10213,7 +10213,7 @@
     </p:spTree>
     <p:extLst>
       <p:ext uri="{BB962C8B-B14F-4D97-AF65-F5344CB8AC3E}">
-        <p14:creationId xmlns:p14="http://schemas.microsoft.com/office/powerpoint/2010/main" val="787294309"/>
+        <p14:creationId xmlns:p14="http://schemas.microsoft.com/office/powerpoint/2010/main" val="993715744"/>
       </p:ext>
     </p:extLst>
   </p:cSld>

--- a/outputs/ghostfix-hackathon-pitch.pptx
+++ b/outputs/ghostfix-hackathon-pitch.pptx
@@ -2,20 +2,21 @@
 <file path=ppt/presentation.xml><?xml version="1.0" encoding="utf-8"?>
 <p:presentation xmlns:p="http://schemas.openxmlformats.org/presentationml/2006/main">
   <p:sldMasterIdLst>
-    <p:sldMasterId xmlns:r="http://schemas.openxmlformats.org/officeDocument/2006/relationships" id="2147483648" r:id="R1b63a40dd53246c4"/>
+    <p:sldMasterId xmlns:r="http://schemas.openxmlformats.org/officeDocument/2006/relationships" id="2147483648" r:id="R4257e0e025e84903"/>
   </p:sldMasterIdLst>
   <p:notesMasterIdLst>
-    <p:notesMasterId xmlns:r="http://schemas.openxmlformats.org/officeDocument/2006/relationships" r:id="R2683454c8f884dc9"/>
+    <p:notesMasterId xmlns:r="http://schemas.openxmlformats.org/officeDocument/2006/relationships" r:id="Rb5befbe82065474a"/>
   </p:notesMasterIdLst>
   <p:sldIdLst>
-    <p:sldId xmlns:r="http://schemas.openxmlformats.org/officeDocument/2006/relationships" id="256" r:id="R3f03f052ad5c4c99"/>
-    <p:sldId xmlns:r="http://schemas.openxmlformats.org/officeDocument/2006/relationships" id="257" r:id="R9f7610a4ab7247ce"/>
-    <p:sldId xmlns:r="http://schemas.openxmlformats.org/officeDocument/2006/relationships" id="258" r:id="R5c99ce0ec61d409c"/>
-    <p:sldId xmlns:r="http://schemas.openxmlformats.org/officeDocument/2006/relationships" id="259" r:id="R11c504f5dfb94bf7"/>
-    <p:sldId xmlns:r="http://schemas.openxmlformats.org/officeDocument/2006/relationships" id="260" r:id="R41ca038ac76d4347"/>
-    <p:sldId xmlns:r="http://schemas.openxmlformats.org/officeDocument/2006/relationships" id="261" r:id="R112cbddcdbc84976"/>
-    <p:sldId xmlns:r="http://schemas.openxmlformats.org/officeDocument/2006/relationships" id="262" r:id="R05a6881bcf34497c"/>
-    <p:sldId xmlns:r="http://schemas.openxmlformats.org/officeDocument/2006/relationships" id="263" r:id="R760a3744450d4c84"/>
+    <p:sldId xmlns:r="http://schemas.openxmlformats.org/officeDocument/2006/relationships" id="256" r:id="R4493a3f09ba34a72"/>
+    <p:sldId xmlns:r="http://schemas.openxmlformats.org/officeDocument/2006/relationships" id="257" r:id="R554763fb55224ff9"/>
+    <p:sldId xmlns:r="http://schemas.openxmlformats.org/officeDocument/2006/relationships" id="258" r:id="Rb561ca399f354326"/>
+    <p:sldId xmlns:r="http://schemas.openxmlformats.org/officeDocument/2006/relationships" id="259" r:id="Rad2b812153d54b11"/>
+    <p:sldId xmlns:r="http://schemas.openxmlformats.org/officeDocument/2006/relationships" id="260" r:id="Rb64c35e8e131482d"/>
+    <p:sldId xmlns:r="http://schemas.openxmlformats.org/officeDocument/2006/relationships" id="261" r:id="Rbe4a658b120c4dc6"/>
+    <p:sldId xmlns:r="http://schemas.openxmlformats.org/officeDocument/2006/relationships" id="262" r:id="R285df798ebc54077"/>
+    <p:sldId xmlns:r="http://schemas.openxmlformats.org/officeDocument/2006/relationships" id="263" r:id="R9c1dc9faa09f4cd7"/>
+    <p:sldId xmlns:r="http://schemas.openxmlformats.org/officeDocument/2006/relationships" id="264" r:id="Rba0973c6b1704e96"/>
   </p:sldIdLst>
   <p:sldSz cx="12192000" cy="6858000"/>
   <p:notesSz cx="6858000" cy="9144000"/>
@@ -1032,6 +1033,72 @@
 </p:notes>
 </file>
 
+<file path=ppt/notesSlides/notesSlide9.xml><?xml version="1.0" encoding="utf-8"?>
+<p:notes xmlns:p="http://schemas.openxmlformats.org/presentationml/2006/main">
+  <p:cSld>
+    <p:spTree>
+      <p:nvGrpSpPr>
+        <p:cNvPr id="1" name=""/>
+        <p:cNvGrpSpPr/>
+        <p:nvPr/>
+      </p:nvGrpSpPr>
+      <p:grpSpPr>
+        <a:xfrm xmlns:a="http://schemas.openxmlformats.org/drawingml/2006/main"/>
+      </p:grpSpPr>
+      <p:sp>
+        <p:nvSpPr>
+          <p:cNvPr id="2" name="Slide Image Placeholder 1"/>
+          <p:cNvSpPr>
+            <a:spLocks xmlns:a="http://schemas.openxmlformats.org/drawingml/2006/main" noGrp="1"/>
+          </p:cNvSpPr>
+          <p:nvPr>
+            <p:ph type="sldImg" idx="0"/>
+          </p:nvPr>
+        </p:nvSpPr>
+        <p:spPr/>
+      </p:sp>
+      <p:sp>
+        <p:nvSpPr>
+          <p:cNvPr id="3" name="Notes Placeholder 2"/>
+          <p:cNvSpPr>
+            <a:spLocks xmlns:a="http://schemas.openxmlformats.org/drawingml/2006/main" noGrp="1"/>
+          </p:cNvSpPr>
+          <p:nvPr>
+            <p:ph type="body" idx="1"/>
+          </p:nvPr>
+        </p:nvSpPr>
+        <p:spPr/>
+        <p:txBody>
+          <a:bodyPr xmlns:a="http://schemas.openxmlformats.org/drawingml/2006/main"/>
+          <a:lstStyle xmlns:a="http://schemas.openxmlformats.org/drawingml/2006/main"/>
+          <a:p xmlns:a="http://schemas.openxmlformats.org/drawingml/2006/main"/>
+        </p:txBody>
+      </p:sp>
+      <p:sp>
+        <p:nvSpPr>
+          <p:cNvPr id="4" name="Slide Number Placeholder 3"/>
+          <p:cNvSpPr>
+            <a:spLocks xmlns:a="http://schemas.openxmlformats.org/drawingml/2006/main" noGrp="1"/>
+          </p:cNvSpPr>
+          <p:nvPr>
+            <p:ph type="sldNum" idx="5"/>
+          </p:nvPr>
+        </p:nvSpPr>
+        <p:spPr/>
+        <p:txBody>
+          <a:bodyPr xmlns:a="http://schemas.openxmlformats.org/drawingml/2006/main"/>
+          <a:lstStyle xmlns:a="http://schemas.openxmlformats.org/drawingml/2006/main"/>
+          <a:p xmlns:a="http://schemas.openxmlformats.org/drawingml/2006/main"/>
+        </p:txBody>
+      </p:sp>
+    </p:spTree>
+  </p:cSld>
+  <p:clrMapOvr>
+    <a:masterClrMapping xmlns:a="http://schemas.openxmlformats.org/drawingml/2006/main"/>
+  </p:clrMapOvr>
+</p:notes>
+</file>
+
 <file path=ppt/slideLayouts/slideLayout1.xml><?xml version="1.0" encoding="utf-8"?>
 <p:sldLayout xmlns:p="http://schemas.openxmlformats.org/presentationml/2006/main" type="title">
   <p:cSld name="Title Slide">
@@ -1070,7 +1137,7 @@
   </p:cSld>
   <p:clrMap bg1="lt1" tx1="dk1" bg2="lt2" tx2="dk2" accent1="accent1" accent2="accent2" accent3="accent3" accent4="accent4" accent5="accent5" accent6="accent6" hlink="hlink" folHlink="folHlink"/>
   <p:sldLayoutIdLst>
-    <p:sldLayoutId xmlns:r="http://schemas.openxmlformats.org/officeDocument/2006/relationships" id="2147483649" r:id="Rcb1d40db33b64fe3"/>
+    <p:sldLayoutId xmlns:r="http://schemas.openxmlformats.org/officeDocument/2006/relationships" id="2147483649" r:id="R1a5e433fd6be4632"/>
   </p:sldLayoutIdLst>
   <p:txStyles>
     <p:titleStyle>
@@ -1621,7 +1688,7 @@
           <p:cNvPr id="1" name="">
             <a:extLst xmlns:a="http://schemas.openxmlformats.org/drawingml/2006/main">
               <a:ext uri="{FF2B5EF4-FFF2-40B4-BE49-F238E27FC236}">
-                <a16:creationId xmlns:a16="http://schemas.microsoft.com/office/drawing/2014/main" id="{BB3FB10E-1A2E-444C-98E5-8AAF535BE16E}"/>
+                <a16:creationId xmlns:a16="http://schemas.microsoft.com/office/drawing/2014/main" id="{49483610-C3B9-4C57-832F-FB1AC0135FCA}"/>
               </a:ext>
             </a:extLst>
           </p:cNvPr>
@@ -1671,7 +1738,7 @@
           <p:cNvPr id="2" name="">
             <a:extLst xmlns:a="http://schemas.openxmlformats.org/drawingml/2006/main">
               <a:ext uri="{FF2B5EF4-FFF2-40B4-BE49-F238E27FC236}">
-                <a16:creationId xmlns:a16="http://schemas.microsoft.com/office/drawing/2014/main" id="{EC59CED7-DC96-4B7C-853C-4F2D2AE735CE}"/>
+                <a16:creationId xmlns:a16="http://schemas.microsoft.com/office/drawing/2014/main" id="{E5BB5C1B-FFCD-4D1B-A656-BBA15BB4D8B0}"/>
               </a:ext>
             </a:extLst>
           </p:cNvPr>
@@ -1721,7 +1788,7 @@
           <p:cNvPr id="3" name="">
             <a:extLst xmlns:a="http://schemas.openxmlformats.org/drawingml/2006/main">
               <a:ext uri="{FF2B5EF4-FFF2-40B4-BE49-F238E27FC236}">
-                <a16:creationId xmlns:a16="http://schemas.microsoft.com/office/drawing/2014/main" id="{39EB6C87-2C76-4A83-BE35-A6BACBEF4CA5}"/>
+                <a16:creationId xmlns:a16="http://schemas.microsoft.com/office/drawing/2014/main" id="{23EB4F15-F1F0-4B88-92DA-AD97F7C87DCC}"/>
               </a:ext>
             </a:extLst>
           </p:cNvPr>
@@ -1771,7 +1838,7 @@
           <p:cNvPr id="4" name="">
             <a:extLst xmlns:a="http://schemas.openxmlformats.org/drawingml/2006/main">
               <a:ext uri="{FF2B5EF4-FFF2-40B4-BE49-F238E27FC236}">
-                <a16:creationId xmlns:a16="http://schemas.microsoft.com/office/drawing/2014/main" id="{9872B9E9-0D13-4A3A-97C0-03BC773ECABD}"/>
+                <a16:creationId xmlns:a16="http://schemas.microsoft.com/office/drawing/2014/main" id="{B5166BEF-1E92-48F0-84F6-5FE50D25E2FD}"/>
               </a:ext>
             </a:extLst>
           </p:cNvPr>
@@ -1806,7 +1873,7 @@
           <p:cNvPr id="5" name="">
             <a:extLst xmlns:a="http://schemas.openxmlformats.org/drawingml/2006/main">
               <a:ext uri="{FF2B5EF4-FFF2-40B4-BE49-F238E27FC236}">
-                <a16:creationId xmlns:a16="http://schemas.microsoft.com/office/drawing/2014/main" id="{9D7F02A4-1F57-436B-9B9D-48105DC4738F}"/>
+                <a16:creationId xmlns:a16="http://schemas.microsoft.com/office/drawing/2014/main" id="{8E0B9ABF-8671-46C9-B925-0CF952A752AF}"/>
               </a:ext>
             </a:extLst>
           </p:cNvPr>
@@ -1856,7 +1923,7 @@
           <p:cNvPr id="6" name="">
             <a:extLst xmlns:a="http://schemas.openxmlformats.org/drawingml/2006/main">
               <a:ext uri="{FF2B5EF4-FFF2-40B4-BE49-F238E27FC236}">
-                <a16:creationId xmlns:a16="http://schemas.microsoft.com/office/drawing/2014/main" id="{DBB214E1-8F42-4148-A25C-B912D85DA838}"/>
+                <a16:creationId xmlns:a16="http://schemas.microsoft.com/office/drawing/2014/main" id="{26614779-9FC3-4C5C-A086-527D9DA08AA3}"/>
               </a:ext>
             </a:extLst>
           </p:cNvPr>
@@ -1891,7 +1958,7 @@
           <p:cNvPr id="7" name="">
             <a:extLst xmlns:a="http://schemas.openxmlformats.org/drawingml/2006/main">
               <a:ext uri="{FF2B5EF4-FFF2-40B4-BE49-F238E27FC236}">
-                <a16:creationId xmlns:a16="http://schemas.microsoft.com/office/drawing/2014/main" id="{B4F61FBD-6400-422D-BBF2-C281600D7664}"/>
+                <a16:creationId xmlns:a16="http://schemas.microsoft.com/office/drawing/2014/main" id="{33F2EC2E-1604-4671-89AF-4C19CFB7390A}"/>
               </a:ext>
             </a:extLst>
           </p:cNvPr>
@@ -1926,7 +1993,7 @@
           <p:cNvPr id="8" name="">
             <a:extLst xmlns:a="http://schemas.openxmlformats.org/drawingml/2006/main">
               <a:ext uri="{FF2B5EF4-FFF2-40B4-BE49-F238E27FC236}">
-                <a16:creationId xmlns:a16="http://schemas.microsoft.com/office/drawing/2014/main" id="{89BF401B-657A-4169-8AE3-1C523EA38558}"/>
+                <a16:creationId xmlns:a16="http://schemas.microsoft.com/office/drawing/2014/main" id="{11F4CF04-6992-47B4-92D7-4E811F07C8D6}"/>
               </a:ext>
             </a:extLst>
           </p:cNvPr>
@@ -1961,7 +2028,7 @@
           <p:cNvPr id="9" name="">
             <a:extLst xmlns:a="http://schemas.openxmlformats.org/drawingml/2006/main">
               <a:ext uri="{FF2B5EF4-FFF2-40B4-BE49-F238E27FC236}">
-                <a16:creationId xmlns:a16="http://schemas.microsoft.com/office/drawing/2014/main" id="{057743D7-0C23-4BFA-89F0-35F3A6078D16}"/>
+                <a16:creationId xmlns:a16="http://schemas.microsoft.com/office/drawing/2014/main" id="{908980F9-2D63-49C3-8A7D-17E584B3D6F4}"/>
               </a:ext>
             </a:extLst>
           </p:cNvPr>
@@ -1996,7 +2063,7 @@
           <p:cNvPr id="10" name="">
             <a:extLst xmlns:a="http://schemas.openxmlformats.org/drawingml/2006/main">
               <a:ext uri="{FF2B5EF4-FFF2-40B4-BE49-F238E27FC236}">
-                <a16:creationId xmlns:a16="http://schemas.microsoft.com/office/drawing/2014/main" id="{90463C9F-36FF-4210-9CC1-BBF2F6159EB3}"/>
+                <a16:creationId xmlns:a16="http://schemas.microsoft.com/office/drawing/2014/main" id="{A3C5B62B-E817-4F5B-B12A-017BB4E71DC2}"/>
               </a:ext>
             </a:extLst>
           </p:cNvPr>
@@ -2031,7 +2098,7 @@
           <p:cNvPr id="11" name="">
             <a:extLst xmlns:a="http://schemas.openxmlformats.org/drawingml/2006/main">
               <a:ext uri="{FF2B5EF4-FFF2-40B4-BE49-F238E27FC236}">
-                <a16:creationId xmlns:a16="http://schemas.microsoft.com/office/drawing/2014/main" id="{54BAB38F-F469-4315-8A26-85FE0DAB31B2}"/>
+                <a16:creationId xmlns:a16="http://schemas.microsoft.com/office/drawing/2014/main" id="{F780105B-BD5E-495B-BE9E-D4429004ED4A}"/>
               </a:ext>
             </a:extLst>
           </p:cNvPr>
@@ -2066,7 +2133,7 @@
           <p:cNvPr id="12" name="">
             <a:extLst xmlns:a="http://schemas.openxmlformats.org/drawingml/2006/main">
               <a:ext uri="{FF2B5EF4-FFF2-40B4-BE49-F238E27FC236}">
-                <a16:creationId xmlns:a16="http://schemas.microsoft.com/office/drawing/2014/main" id="{8D1974FF-116A-426F-B39F-286C36DAFF07}"/>
+                <a16:creationId xmlns:a16="http://schemas.microsoft.com/office/drawing/2014/main" id="{4E0A2142-56C6-4E9F-8DF0-9DA8A2CA42A2}"/>
               </a:ext>
             </a:extLst>
           </p:cNvPr>
@@ -2116,7 +2183,7 @@
           <p:cNvPr id="13" name="">
             <a:extLst xmlns:a="http://schemas.openxmlformats.org/drawingml/2006/main">
               <a:ext uri="{FF2B5EF4-FFF2-40B4-BE49-F238E27FC236}">
-                <a16:creationId xmlns:a16="http://schemas.microsoft.com/office/drawing/2014/main" id="{A1F22C99-ACA0-4CC1-ACFD-8115ECB56A17}"/>
+                <a16:creationId xmlns:a16="http://schemas.microsoft.com/office/drawing/2014/main" id="{7C8A6167-8183-429B-ADB9-EADC1BEC6909}"/>
               </a:ext>
             </a:extLst>
           </p:cNvPr>
@@ -2151,7 +2218,7 @@
           <p:cNvPr id="14" name="">
             <a:extLst xmlns:a="http://schemas.openxmlformats.org/drawingml/2006/main">
               <a:ext uri="{FF2B5EF4-FFF2-40B4-BE49-F238E27FC236}">
-                <a16:creationId xmlns:a16="http://schemas.microsoft.com/office/drawing/2014/main" id="{919D15CA-A7E2-4011-B379-87ECC9C4C450}"/>
+                <a16:creationId xmlns:a16="http://schemas.microsoft.com/office/drawing/2014/main" id="{585C6ED5-FAC5-4E9B-ABA3-0E9238681E5C}"/>
               </a:ext>
             </a:extLst>
           </p:cNvPr>
@@ -2201,7 +2268,7 @@
           <p:cNvPr id="15" name="">
             <a:extLst xmlns:a="http://schemas.openxmlformats.org/drawingml/2006/main">
               <a:ext uri="{FF2B5EF4-FFF2-40B4-BE49-F238E27FC236}">
-                <a16:creationId xmlns:a16="http://schemas.microsoft.com/office/drawing/2014/main" id="{77E500F8-F49D-4495-8900-D4B975EFA1AB}"/>
+                <a16:creationId xmlns:a16="http://schemas.microsoft.com/office/drawing/2014/main" id="{2E0AE072-B6BF-4357-B670-D0E191562B70}"/>
               </a:ext>
             </a:extLst>
           </p:cNvPr>
@@ -2251,7 +2318,7 @@
           <p:cNvPr id="16" name="">
             <a:extLst xmlns:a="http://schemas.openxmlformats.org/drawingml/2006/main">
               <a:ext uri="{FF2B5EF4-FFF2-40B4-BE49-F238E27FC236}">
-                <a16:creationId xmlns:a16="http://schemas.microsoft.com/office/drawing/2014/main" id="{740789FC-4FAE-40E7-9BE2-7C8F861D315A}"/>
+                <a16:creationId xmlns:a16="http://schemas.microsoft.com/office/drawing/2014/main" id="{0AC1F089-6637-4982-9E86-D3670AE573C6}"/>
               </a:ext>
             </a:extLst>
           </p:cNvPr>
@@ -2301,7 +2368,7 @@
           <p:cNvPr id="17" name="">
             <a:extLst xmlns:a="http://schemas.openxmlformats.org/drawingml/2006/main">
               <a:ext uri="{FF2B5EF4-FFF2-40B4-BE49-F238E27FC236}">
-                <a16:creationId xmlns:a16="http://schemas.microsoft.com/office/drawing/2014/main" id="{FB79BD09-DA70-4CE8-8BD3-BB77AB4238D4}"/>
+                <a16:creationId xmlns:a16="http://schemas.microsoft.com/office/drawing/2014/main" id="{AAE5906D-6D05-4D05-868F-3F397D44E721}"/>
               </a:ext>
             </a:extLst>
           </p:cNvPr>
@@ -2351,7 +2418,7 @@
           <p:cNvPr id="18" name="">
             <a:extLst xmlns:a="http://schemas.openxmlformats.org/drawingml/2006/main">
               <a:ext uri="{FF2B5EF4-FFF2-40B4-BE49-F238E27FC236}">
-                <a16:creationId xmlns:a16="http://schemas.microsoft.com/office/drawing/2014/main" id="{2502C67D-B54F-4B06-8CE3-B8FC267414F4}"/>
+                <a16:creationId xmlns:a16="http://schemas.microsoft.com/office/drawing/2014/main" id="{DCB2F9C8-FD49-4B5C-B00D-669AE4D78141}"/>
               </a:ext>
             </a:extLst>
           </p:cNvPr>
@@ -2386,7 +2453,7 @@
           <p:cNvPr id="19" name="">
             <a:extLst xmlns:a="http://schemas.openxmlformats.org/drawingml/2006/main">
               <a:ext uri="{FF2B5EF4-FFF2-40B4-BE49-F238E27FC236}">
-                <a16:creationId xmlns:a16="http://schemas.microsoft.com/office/drawing/2014/main" id="{FEDF66E7-3950-47C0-8729-EAF3CFEB96E3}"/>
+                <a16:creationId xmlns:a16="http://schemas.microsoft.com/office/drawing/2014/main" id="{1CC8F16E-A57C-4BD8-8434-6B9DACD465A0}"/>
               </a:ext>
             </a:extLst>
           </p:cNvPr>
@@ -2436,7 +2503,7 @@
           <p:cNvPr id="20" name="">
             <a:extLst xmlns:a="http://schemas.openxmlformats.org/drawingml/2006/main">
               <a:ext uri="{FF2B5EF4-FFF2-40B4-BE49-F238E27FC236}">
-                <a16:creationId xmlns:a16="http://schemas.microsoft.com/office/drawing/2014/main" id="{F8D5C4F6-1B4F-41E9-8368-DC5E511537DF}"/>
+                <a16:creationId xmlns:a16="http://schemas.microsoft.com/office/drawing/2014/main" id="{FF401A2B-476E-4A62-8837-6DE4F88D67EB}"/>
               </a:ext>
             </a:extLst>
           </p:cNvPr>
@@ -2484,7 +2551,7 @@
     </p:spTree>
     <p:extLst>
       <p:ext uri="{BB962C8B-B14F-4D97-AF65-F5344CB8AC3E}">
-        <p14:creationId xmlns:p14="http://schemas.microsoft.com/office/powerpoint/2010/main" val="1351371649"/>
+        <p14:creationId xmlns:p14="http://schemas.microsoft.com/office/powerpoint/2010/main" val="1244549005"/>
       </p:ext>
     </p:extLst>
   </p:cSld>
@@ -2515,7 +2582,7 @@
           <p:cNvPr id="1" name="">
             <a:extLst xmlns:a="http://schemas.openxmlformats.org/drawingml/2006/main">
               <a:ext uri="{FF2B5EF4-FFF2-40B4-BE49-F238E27FC236}">
-                <a16:creationId xmlns:a16="http://schemas.microsoft.com/office/drawing/2014/main" id="{80DD0EB7-E1A9-4F07-A2DA-B3A501DC063A}"/>
+                <a16:creationId xmlns:a16="http://schemas.microsoft.com/office/drawing/2014/main" id="{3CBE5547-A4D3-451D-BA7A-982095A9B6A7}"/>
               </a:ext>
             </a:extLst>
           </p:cNvPr>
@@ -2565,7 +2632,7 @@
           <p:cNvPr id="2" name="">
             <a:extLst xmlns:a="http://schemas.openxmlformats.org/drawingml/2006/main">
               <a:ext uri="{FF2B5EF4-FFF2-40B4-BE49-F238E27FC236}">
-                <a16:creationId xmlns:a16="http://schemas.microsoft.com/office/drawing/2014/main" id="{61CCA305-5BA0-49BA-ADD8-040E3F4F32BB}"/>
+                <a16:creationId xmlns:a16="http://schemas.microsoft.com/office/drawing/2014/main" id="{8F291F88-580B-42F5-B6C4-B23282A98F40}"/>
               </a:ext>
             </a:extLst>
           </p:cNvPr>
@@ -2615,7 +2682,7 @@
           <p:cNvPr id="3" name="">
             <a:extLst xmlns:a="http://schemas.openxmlformats.org/drawingml/2006/main">
               <a:ext uri="{FF2B5EF4-FFF2-40B4-BE49-F238E27FC236}">
-                <a16:creationId xmlns:a16="http://schemas.microsoft.com/office/drawing/2014/main" id="{F888D0D8-C604-416E-80A8-56AF311FEAEF}"/>
+                <a16:creationId xmlns:a16="http://schemas.microsoft.com/office/drawing/2014/main" id="{37A6CC05-E3FC-4548-90B2-8742291F1487}"/>
               </a:ext>
             </a:extLst>
           </p:cNvPr>
@@ -2665,7 +2732,7 @@
           <p:cNvPr id="4" name="">
             <a:extLst xmlns:a="http://schemas.openxmlformats.org/drawingml/2006/main">
               <a:ext uri="{FF2B5EF4-FFF2-40B4-BE49-F238E27FC236}">
-                <a16:creationId xmlns:a16="http://schemas.microsoft.com/office/drawing/2014/main" id="{2EE8C0B3-FB71-4684-8729-36F0DA5B522B}"/>
+                <a16:creationId xmlns:a16="http://schemas.microsoft.com/office/drawing/2014/main" id="{2362F7B5-EB66-4292-9C3E-74211660C9F2}"/>
               </a:ext>
             </a:extLst>
           </p:cNvPr>
@@ -2715,7 +2782,7 @@
           <p:cNvPr id="5" name="">
             <a:extLst xmlns:a="http://schemas.openxmlformats.org/drawingml/2006/main">
               <a:ext uri="{FF2B5EF4-FFF2-40B4-BE49-F238E27FC236}">
-                <a16:creationId xmlns:a16="http://schemas.microsoft.com/office/drawing/2014/main" id="{549FED7A-21DB-4059-AE7B-B0ABF6EDFCEE}"/>
+                <a16:creationId xmlns:a16="http://schemas.microsoft.com/office/drawing/2014/main" id="{59D7126C-B38E-499B-9C66-E3B776B181C1}"/>
               </a:ext>
             </a:extLst>
           </p:cNvPr>
@@ -2765,7 +2832,7 @@
           <p:cNvPr id="6" name="">
             <a:extLst xmlns:a="http://schemas.openxmlformats.org/drawingml/2006/main">
               <a:ext uri="{FF2B5EF4-FFF2-40B4-BE49-F238E27FC236}">
-                <a16:creationId xmlns:a16="http://schemas.microsoft.com/office/drawing/2014/main" id="{6A883FEF-75EF-4DBB-BBF8-3B85C5A250A3}"/>
+                <a16:creationId xmlns:a16="http://schemas.microsoft.com/office/drawing/2014/main" id="{863ECB13-2D8F-45ED-BEAC-19090B6172DE}"/>
               </a:ext>
             </a:extLst>
           </p:cNvPr>
@@ -2800,7 +2867,7 @@
           <p:cNvPr id="7" name="">
             <a:extLst xmlns:a="http://schemas.openxmlformats.org/drawingml/2006/main">
               <a:ext uri="{FF2B5EF4-FFF2-40B4-BE49-F238E27FC236}">
-                <a16:creationId xmlns:a16="http://schemas.microsoft.com/office/drawing/2014/main" id="{1612FA8F-CC2B-4DB7-BFAA-B88E4B88A3B9}"/>
+                <a16:creationId xmlns:a16="http://schemas.microsoft.com/office/drawing/2014/main" id="{867BF916-A30A-4694-B30E-E4D30DCAE1AA}"/>
               </a:ext>
             </a:extLst>
           </p:cNvPr>
@@ -2850,7 +2917,7 @@
           <p:cNvPr id="8" name="">
             <a:extLst xmlns:a="http://schemas.openxmlformats.org/drawingml/2006/main">
               <a:ext uri="{FF2B5EF4-FFF2-40B4-BE49-F238E27FC236}">
-                <a16:creationId xmlns:a16="http://schemas.microsoft.com/office/drawing/2014/main" id="{EEA67542-A568-4D82-B5C1-57A1B17A73A9}"/>
+                <a16:creationId xmlns:a16="http://schemas.microsoft.com/office/drawing/2014/main" id="{02D54C3A-FE28-4963-9825-97FEC44E1B33}"/>
               </a:ext>
             </a:extLst>
           </p:cNvPr>
@@ -2934,7 +3001,7 @@
           <p:cNvPr id="9" name="">
             <a:extLst xmlns:a="http://schemas.openxmlformats.org/drawingml/2006/main">
               <a:ext uri="{FF2B5EF4-FFF2-40B4-BE49-F238E27FC236}">
-                <a16:creationId xmlns:a16="http://schemas.microsoft.com/office/drawing/2014/main" id="{96148F1B-9F79-4805-BA9F-91E83AC05ED4}"/>
+                <a16:creationId xmlns:a16="http://schemas.microsoft.com/office/drawing/2014/main" id="{910060C2-98F5-4465-8797-E42C8FE9A7CB}"/>
               </a:ext>
             </a:extLst>
           </p:cNvPr>
@@ -2963,7 +3030,7 @@
           <p:cNvPr id="10" name="">
             <a:extLst xmlns:a="http://schemas.openxmlformats.org/drawingml/2006/main">
               <a:ext uri="{FF2B5EF4-FFF2-40B4-BE49-F238E27FC236}">
-                <a16:creationId xmlns:a16="http://schemas.microsoft.com/office/drawing/2014/main" id="{D4CC3B6C-7A1D-4568-A9D8-EB25F5274038}"/>
+                <a16:creationId xmlns:a16="http://schemas.microsoft.com/office/drawing/2014/main" id="{14E0BCAE-9A27-45F2-B57F-5FEBD5DE9855}"/>
               </a:ext>
             </a:extLst>
           </p:cNvPr>
@@ -3018,7 +3085,7 @@
           <p:cNvPr id="12" name="">
             <a:extLst xmlns:a="http://schemas.openxmlformats.org/drawingml/2006/main">
               <a:ext uri="{FF2B5EF4-FFF2-40B4-BE49-F238E27FC236}">
-                <a16:creationId xmlns:a16="http://schemas.microsoft.com/office/drawing/2014/main" id="{569C7430-E35D-4B7A-8DCE-F2CE45EF44E9}"/>
+                <a16:creationId xmlns:a16="http://schemas.microsoft.com/office/drawing/2014/main" id="{191E70EA-9BF9-496B-874D-028220735A4E}"/>
               </a:ext>
             </a:extLst>
           </p:cNvPr>
@@ -3053,7 +3120,7 @@
           <p:cNvPr id="13" name="">
             <a:extLst xmlns:a="http://schemas.openxmlformats.org/drawingml/2006/main">
               <a:ext uri="{FF2B5EF4-FFF2-40B4-BE49-F238E27FC236}">
-                <a16:creationId xmlns:a16="http://schemas.microsoft.com/office/drawing/2014/main" id="{F71824B9-BEBC-48BE-8E5E-675C7358DCF7}"/>
+                <a16:creationId xmlns:a16="http://schemas.microsoft.com/office/drawing/2014/main" id="{6464C9A2-FEA3-4C4B-B171-DE1C2DD7ADFD}"/>
               </a:ext>
             </a:extLst>
           </p:cNvPr>
@@ -3103,7 +3170,7 @@
           <p:cNvPr id="14" name="">
             <a:extLst xmlns:a="http://schemas.openxmlformats.org/drawingml/2006/main">
               <a:ext uri="{FF2B5EF4-FFF2-40B4-BE49-F238E27FC236}">
-                <a16:creationId xmlns:a16="http://schemas.microsoft.com/office/drawing/2014/main" id="{DDD8623C-6E35-48F2-8547-64DB798D6111}"/>
+                <a16:creationId xmlns:a16="http://schemas.microsoft.com/office/drawing/2014/main" id="{3AB73EE9-551C-4FF4-AEC1-045D8E84C9D3}"/>
               </a:ext>
             </a:extLst>
           </p:cNvPr>
@@ -3153,7 +3220,7 @@
           <p:cNvPr id="15" name="">
             <a:extLst xmlns:a="http://schemas.openxmlformats.org/drawingml/2006/main">
               <a:ext uri="{FF2B5EF4-FFF2-40B4-BE49-F238E27FC236}">
-                <a16:creationId xmlns:a16="http://schemas.microsoft.com/office/drawing/2014/main" id="{9D578EBB-CD1C-4068-936F-540782653FC8}"/>
+                <a16:creationId xmlns:a16="http://schemas.microsoft.com/office/drawing/2014/main" id="{B1188EB8-EEB4-4761-9861-BEE35A353D45}"/>
               </a:ext>
             </a:extLst>
           </p:cNvPr>
@@ -3237,7 +3304,7 @@
           <p:cNvPr id="16" name="">
             <a:extLst xmlns:a="http://schemas.openxmlformats.org/drawingml/2006/main">
               <a:ext uri="{FF2B5EF4-FFF2-40B4-BE49-F238E27FC236}">
-                <a16:creationId xmlns:a16="http://schemas.microsoft.com/office/drawing/2014/main" id="{74DCD914-9BB9-4038-BD61-214C952D7D1F}"/>
+                <a16:creationId xmlns:a16="http://schemas.microsoft.com/office/drawing/2014/main" id="{61C25CE1-AE36-4E81-B1B3-2A2919C3146B}"/>
               </a:ext>
             </a:extLst>
           </p:cNvPr>
@@ -3272,7 +3339,7 @@
           <p:cNvPr id="17" name="">
             <a:extLst xmlns:a="http://schemas.openxmlformats.org/drawingml/2006/main">
               <a:ext uri="{FF2B5EF4-FFF2-40B4-BE49-F238E27FC236}">
-                <a16:creationId xmlns:a16="http://schemas.microsoft.com/office/drawing/2014/main" id="{14A162DC-B2D3-4F57-8B82-CF615A49CB75}"/>
+                <a16:creationId xmlns:a16="http://schemas.microsoft.com/office/drawing/2014/main" id="{0CF4FA8A-21FF-4DBB-AD04-895434646669}"/>
               </a:ext>
             </a:extLst>
           </p:cNvPr>
@@ -3354,7 +3421,7 @@
     </p:spTree>
     <p:extLst>
       <p:ext uri="{BB962C8B-B14F-4D97-AF65-F5344CB8AC3E}">
-        <p14:creationId xmlns:p14="http://schemas.microsoft.com/office/powerpoint/2010/main" val="799062832"/>
+        <p14:creationId xmlns:p14="http://schemas.microsoft.com/office/powerpoint/2010/main" val="1872547814"/>
       </p:ext>
     </p:extLst>
   </p:cSld>
@@ -3385,7 +3452,7 @@
           <p:cNvPr id="1" name="">
             <a:extLst xmlns:a="http://schemas.openxmlformats.org/drawingml/2006/main">
               <a:ext uri="{FF2B5EF4-FFF2-40B4-BE49-F238E27FC236}">
-                <a16:creationId xmlns:a16="http://schemas.microsoft.com/office/drawing/2014/main" id="{5D50ADDB-35BD-4970-99FA-29D6391C1FBF}"/>
+                <a16:creationId xmlns:a16="http://schemas.microsoft.com/office/drawing/2014/main" id="{88B3BA03-B79C-4574-B5EE-7388A21D9C50}"/>
               </a:ext>
             </a:extLst>
           </p:cNvPr>
@@ -3435,7 +3502,7 @@
           <p:cNvPr id="2" name="">
             <a:extLst xmlns:a="http://schemas.openxmlformats.org/drawingml/2006/main">
               <a:ext uri="{FF2B5EF4-FFF2-40B4-BE49-F238E27FC236}">
-                <a16:creationId xmlns:a16="http://schemas.microsoft.com/office/drawing/2014/main" id="{A0FA42AA-2FDC-4D8B-A6A5-74EB99A45A0B}"/>
+                <a16:creationId xmlns:a16="http://schemas.microsoft.com/office/drawing/2014/main" id="{363B6815-BB26-4AA6-B2E9-0B9EB551DA75}"/>
               </a:ext>
             </a:extLst>
           </p:cNvPr>
@@ -3485,7 +3552,7 @@
           <p:cNvPr id="3" name="">
             <a:extLst xmlns:a="http://schemas.openxmlformats.org/drawingml/2006/main">
               <a:ext uri="{FF2B5EF4-FFF2-40B4-BE49-F238E27FC236}">
-                <a16:creationId xmlns:a16="http://schemas.microsoft.com/office/drawing/2014/main" id="{B51A813F-7D8B-48C8-8048-28A1FCF56B4C}"/>
+                <a16:creationId xmlns:a16="http://schemas.microsoft.com/office/drawing/2014/main" id="{52F1F7D0-18F3-4A4A-82B1-29E27C905912}"/>
               </a:ext>
             </a:extLst>
           </p:cNvPr>
@@ -3535,7 +3602,7 @@
           <p:cNvPr id="4" name="">
             <a:extLst xmlns:a="http://schemas.openxmlformats.org/drawingml/2006/main">
               <a:ext uri="{FF2B5EF4-FFF2-40B4-BE49-F238E27FC236}">
-                <a16:creationId xmlns:a16="http://schemas.microsoft.com/office/drawing/2014/main" id="{4174070F-6BC2-41A1-9BBD-4B550DD77CE4}"/>
+                <a16:creationId xmlns:a16="http://schemas.microsoft.com/office/drawing/2014/main" id="{79ABF5FD-B0E1-4B75-9CEB-1B0CA32C16C7}"/>
               </a:ext>
             </a:extLst>
           </p:cNvPr>
@@ -3585,7 +3652,7 @@
           <p:cNvPr id="5" name="">
             <a:extLst xmlns:a="http://schemas.openxmlformats.org/drawingml/2006/main">
               <a:ext uri="{FF2B5EF4-FFF2-40B4-BE49-F238E27FC236}">
-                <a16:creationId xmlns:a16="http://schemas.microsoft.com/office/drawing/2014/main" id="{AE7C8E54-3C07-4B41-806B-911B57D647D9}"/>
+                <a16:creationId xmlns:a16="http://schemas.microsoft.com/office/drawing/2014/main" id="{C6D7A43A-2CBD-4D63-A5A5-0B7E7689CCAE}"/>
               </a:ext>
             </a:extLst>
           </p:cNvPr>
@@ -3635,7 +3702,7 @@
           <p:cNvPr id="6" name="">
             <a:extLst xmlns:a="http://schemas.openxmlformats.org/drawingml/2006/main">
               <a:ext uri="{FF2B5EF4-FFF2-40B4-BE49-F238E27FC236}">
-                <a16:creationId xmlns:a16="http://schemas.microsoft.com/office/drawing/2014/main" id="{4FC56A72-F27D-4DEC-8F34-B55C5C6CC7F2}"/>
+                <a16:creationId xmlns:a16="http://schemas.microsoft.com/office/drawing/2014/main" id="{5C4AB929-D03F-4C73-8D56-D740B633F32A}"/>
               </a:ext>
             </a:extLst>
           </p:cNvPr>
@@ -3670,7 +3737,7 @@
           <p:cNvPr id="7" name="">
             <a:extLst xmlns:a="http://schemas.openxmlformats.org/drawingml/2006/main">
               <a:ext uri="{FF2B5EF4-FFF2-40B4-BE49-F238E27FC236}">
-                <a16:creationId xmlns:a16="http://schemas.microsoft.com/office/drawing/2014/main" id="{E73FD962-E689-43E2-94A0-F50AC1016CA6}"/>
+                <a16:creationId xmlns:a16="http://schemas.microsoft.com/office/drawing/2014/main" id="{F31795C8-04D6-4983-9ED4-DF09D3487572}"/>
               </a:ext>
             </a:extLst>
           </p:cNvPr>
@@ -3720,7 +3787,7 @@
           <p:cNvPr id="8" name="">
             <a:extLst xmlns:a="http://schemas.openxmlformats.org/drawingml/2006/main">
               <a:ext uri="{FF2B5EF4-FFF2-40B4-BE49-F238E27FC236}">
-                <a16:creationId xmlns:a16="http://schemas.microsoft.com/office/drawing/2014/main" id="{F405729F-B4D9-4FB6-A1BF-DF644CC3690A}"/>
+                <a16:creationId xmlns:a16="http://schemas.microsoft.com/office/drawing/2014/main" id="{51F638F2-DA9A-43CD-933B-379364AE298F}"/>
               </a:ext>
             </a:extLst>
           </p:cNvPr>
@@ -3770,7 +3837,7 @@
           <p:cNvPr id="9" name="">
             <a:extLst xmlns:a="http://schemas.openxmlformats.org/drawingml/2006/main">
               <a:ext uri="{FF2B5EF4-FFF2-40B4-BE49-F238E27FC236}">
-                <a16:creationId xmlns:a16="http://schemas.microsoft.com/office/drawing/2014/main" id="{E9CFB09F-6A18-4F08-953E-40A790370A37}"/>
+                <a16:creationId xmlns:a16="http://schemas.microsoft.com/office/drawing/2014/main" id="{04A35829-078E-4034-BAD6-2D768B6FBEEC}"/>
               </a:ext>
             </a:extLst>
           </p:cNvPr>
@@ -3805,7 +3872,7 @@
           <p:cNvPr id="10" name="">
             <a:extLst xmlns:a="http://schemas.openxmlformats.org/drawingml/2006/main">
               <a:ext uri="{FF2B5EF4-FFF2-40B4-BE49-F238E27FC236}">
-                <a16:creationId xmlns:a16="http://schemas.microsoft.com/office/drawing/2014/main" id="{7A107FBB-A28B-44F7-9F6E-3A6557D402EF}"/>
+                <a16:creationId xmlns:a16="http://schemas.microsoft.com/office/drawing/2014/main" id="{3E903594-53E0-4DB8-B516-344AA4C89D48}"/>
               </a:ext>
             </a:extLst>
           </p:cNvPr>
@@ -3855,7 +3922,7 @@
           <p:cNvPr id="11" name="">
             <a:extLst xmlns:a="http://schemas.openxmlformats.org/drawingml/2006/main">
               <a:ext uri="{FF2B5EF4-FFF2-40B4-BE49-F238E27FC236}">
-                <a16:creationId xmlns:a16="http://schemas.microsoft.com/office/drawing/2014/main" id="{39C63379-BFCC-4230-839E-896ABB5B3A54}"/>
+                <a16:creationId xmlns:a16="http://schemas.microsoft.com/office/drawing/2014/main" id="{1BF03A09-D2B0-4EE4-BA6F-1F9FD36AC0B1}"/>
               </a:ext>
             </a:extLst>
           </p:cNvPr>
@@ -3905,7 +3972,7 @@
           <p:cNvPr id="12" name="">
             <a:extLst xmlns:a="http://schemas.openxmlformats.org/drawingml/2006/main">
               <a:ext uri="{FF2B5EF4-FFF2-40B4-BE49-F238E27FC236}">
-                <a16:creationId xmlns:a16="http://schemas.microsoft.com/office/drawing/2014/main" id="{80D450BD-81FC-4649-AE1C-64D4BE2CCD72}"/>
+                <a16:creationId xmlns:a16="http://schemas.microsoft.com/office/drawing/2014/main" id="{EAB62A1F-1B14-42C0-B6BF-C8798896CA8C}"/>
               </a:ext>
             </a:extLst>
           </p:cNvPr>
@@ -3940,7 +4007,7 @@
           <p:cNvPr id="13" name="">
             <a:extLst xmlns:a="http://schemas.openxmlformats.org/drawingml/2006/main">
               <a:ext uri="{FF2B5EF4-FFF2-40B4-BE49-F238E27FC236}">
-                <a16:creationId xmlns:a16="http://schemas.microsoft.com/office/drawing/2014/main" id="{19314A4E-6773-4F1C-9848-A6AA121C739D}"/>
+                <a16:creationId xmlns:a16="http://schemas.microsoft.com/office/drawing/2014/main" id="{05F62B40-8484-4663-830A-82FD13FBDD1A}"/>
               </a:ext>
             </a:extLst>
           </p:cNvPr>
@@ -3990,7 +4057,7 @@
           <p:cNvPr id="14" name="">
             <a:extLst xmlns:a="http://schemas.openxmlformats.org/drawingml/2006/main">
               <a:ext uri="{FF2B5EF4-FFF2-40B4-BE49-F238E27FC236}">
-                <a16:creationId xmlns:a16="http://schemas.microsoft.com/office/drawing/2014/main" id="{EB368F81-475E-41EB-96F5-3DA42FF1814C}"/>
+                <a16:creationId xmlns:a16="http://schemas.microsoft.com/office/drawing/2014/main" id="{BC8F7E22-FB1A-461A-A95E-4791BC350716}"/>
               </a:ext>
             </a:extLst>
           </p:cNvPr>
@@ -4040,7 +4107,7 @@
           <p:cNvPr id="15" name="">
             <a:extLst xmlns:a="http://schemas.openxmlformats.org/drawingml/2006/main">
               <a:ext uri="{FF2B5EF4-FFF2-40B4-BE49-F238E27FC236}">
-                <a16:creationId xmlns:a16="http://schemas.microsoft.com/office/drawing/2014/main" id="{FC5A2E10-55AD-40F4-96FC-C08EA8E7F2F7}"/>
+                <a16:creationId xmlns:a16="http://schemas.microsoft.com/office/drawing/2014/main" id="{049F80B1-DC3B-443B-AD7C-21672AFB74DD}"/>
               </a:ext>
             </a:extLst>
           </p:cNvPr>
@@ -4075,7 +4142,7 @@
           <p:cNvPr id="16" name="">
             <a:extLst xmlns:a="http://schemas.openxmlformats.org/drawingml/2006/main">
               <a:ext uri="{FF2B5EF4-FFF2-40B4-BE49-F238E27FC236}">
-                <a16:creationId xmlns:a16="http://schemas.microsoft.com/office/drawing/2014/main" id="{B4A9570C-9741-4006-AFA1-ABFB5031FF20}"/>
+                <a16:creationId xmlns:a16="http://schemas.microsoft.com/office/drawing/2014/main" id="{D5B1F5B9-A221-46B0-8846-C4D29E323206}"/>
               </a:ext>
             </a:extLst>
           </p:cNvPr>
@@ -4125,7 +4192,7 @@
           <p:cNvPr id="17" name="">
             <a:extLst xmlns:a="http://schemas.openxmlformats.org/drawingml/2006/main">
               <a:ext uri="{FF2B5EF4-FFF2-40B4-BE49-F238E27FC236}">
-                <a16:creationId xmlns:a16="http://schemas.microsoft.com/office/drawing/2014/main" id="{D158FDA3-A673-45DE-A531-6C32501862F6}"/>
+                <a16:creationId xmlns:a16="http://schemas.microsoft.com/office/drawing/2014/main" id="{3BACF66E-0058-48E0-9D93-EC0BE9BDE259}"/>
               </a:ext>
             </a:extLst>
           </p:cNvPr>
@@ -4173,7 +4240,7 @@
     </p:spTree>
     <p:extLst>
       <p:ext uri="{BB962C8B-B14F-4D97-AF65-F5344CB8AC3E}">
-        <p14:creationId xmlns:p14="http://schemas.microsoft.com/office/powerpoint/2010/main" val="1746579245"/>
+        <p14:creationId xmlns:p14="http://schemas.microsoft.com/office/powerpoint/2010/main" val="962586425"/>
       </p:ext>
     </p:extLst>
   </p:cSld>
@@ -4204,7 +4271,7 @@
           <p:cNvPr id="1" name="">
             <a:extLst xmlns:a="http://schemas.openxmlformats.org/drawingml/2006/main">
               <a:ext uri="{FF2B5EF4-FFF2-40B4-BE49-F238E27FC236}">
-                <a16:creationId xmlns:a16="http://schemas.microsoft.com/office/drawing/2014/main" id="{48CDE437-F4D7-440B-9B14-A7C6F723552E}"/>
+                <a16:creationId xmlns:a16="http://schemas.microsoft.com/office/drawing/2014/main" id="{1BC83BC3-87A4-4F92-AA85-EEB5E3F2E825}"/>
               </a:ext>
             </a:extLst>
           </p:cNvPr>
@@ -4254,7 +4321,7 @@
           <p:cNvPr id="2" name="">
             <a:extLst xmlns:a="http://schemas.openxmlformats.org/drawingml/2006/main">
               <a:ext uri="{FF2B5EF4-FFF2-40B4-BE49-F238E27FC236}">
-                <a16:creationId xmlns:a16="http://schemas.microsoft.com/office/drawing/2014/main" id="{C97E4AA1-FB25-4C8E-B4D8-4A57CA1EDC95}"/>
+                <a16:creationId xmlns:a16="http://schemas.microsoft.com/office/drawing/2014/main" id="{66A822C6-4260-4F05-A552-23BF2F9C8E27}"/>
               </a:ext>
             </a:extLst>
           </p:cNvPr>
@@ -4304,7 +4371,7 @@
           <p:cNvPr id="3" name="">
             <a:extLst xmlns:a="http://schemas.openxmlformats.org/drawingml/2006/main">
               <a:ext uri="{FF2B5EF4-FFF2-40B4-BE49-F238E27FC236}">
-                <a16:creationId xmlns:a16="http://schemas.microsoft.com/office/drawing/2014/main" id="{C98EC7D4-0531-4B64-998C-CF2612E78E43}"/>
+                <a16:creationId xmlns:a16="http://schemas.microsoft.com/office/drawing/2014/main" id="{B80B57C8-B8F5-4CD5-969B-51D8D2842AD2}"/>
               </a:ext>
             </a:extLst>
           </p:cNvPr>
@@ -4354,7 +4421,7 @@
           <p:cNvPr id="4" name="">
             <a:extLst xmlns:a="http://schemas.openxmlformats.org/drawingml/2006/main">
               <a:ext uri="{FF2B5EF4-FFF2-40B4-BE49-F238E27FC236}">
-                <a16:creationId xmlns:a16="http://schemas.microsoft.com/office/drawing/2014/main" id="{A7D8B3BE-FD43-4C0C-8375-DB8790CCED1B}"/>
+                <a16:creationId xmlns:a16="http://schemas.microsoft.com/office/drawing/2014/main" id="{F782E23B-56B0-4C70-B9D0-64DCA861CFCA}"/>
               </a:ext>
             </a:extLst>
           </p:cNvPr>
@@ -4404,7 +4471,7 @@
           <p:cNvPr id="5" name="">
             <a:extLst xmlns:a="http://schemas.openxmlformats.org/drawingml/2006/main">
               <a:ext uri="{FF2B5EF4-FFF2-40B4-BE49-F238E27FC236}">
-                <a16:creationId xmlns:a16="http://schemas.microsoft.com/office/drawing/2014/main" id="{D30D35BA-B271-4272-8CD8-A9B01DA9FB05}"/>
+                <a16:creationId xmlns:a16="http://schemas.microsoft.com/office/drawing/2014/main" id="{386CBFA8-68D3-4277-B92D-488AFDCEA79A}"/>
               </a:ext>
             </a:extLst>
           </p:cNvPr>
@@ -4454,7 +4521,7 @@
           <p:cNvPr id="6" name="">
             <a:extLst xmlns:a="http://schemas.openxmlformats.org/drawingml/2006/main">
               <a:ext uri="{FF2B5EF4-FFF2-40B4-BE49-F238E27FC236}">
-                <a16:creationId xmlns:a16="http://schemas.microsoft.com/office/drawing/2014/main" id="{F5BDD595-7569-4D52-84C6-397C012BE1BF}"/>
+                <a16:creationId xmlns:a16="http://schemas.microsoft.com/office/drawing/2014/main" id="{C17A220A-648B-4FFC-B3EB-C894AD9FE1EE}"/>
               </a:ext>
             </a:extLst>
           </p:cNvPr>
@@ -4489,7 +4556,7 @@
           <p:cNvPr id="7" name="">
             <a:extLst xmlns:a="http://schemas.openxmlformats.org/drawingml/2006/main">
               <a:ext uri="{FF2B5EF4-FFF2-40B4-BE49-F238E27FC236}">
-                <a16:creationId xmlns:a16="http://schemas.microsoft.com/office/drawing/2014/main" id="{6F28195B-DEE4-4FBD-A292-460B8659B26E}"/>
+                <a16:creationId xmlns:a16="http://schemas.microsoft.com/office/drawing/2014/main" id="{6727857E-41F8-4491-A042-C3EC022B08A5}"/>
               </a:ext>
             </a:extLst>
           </p:cNvPr>
@@ -4524,7 +4591,7 @@
           <p:cNvPr id="8" name="">
             <a:extLst xmlns:a="http://schemas.openxmlformats.org/drawingml/2006/main">
               <a:ext uri="{FF2B5EF4-FFF2-40B4-BE49-F238E27FC236}">
-                <a16:creationId xmlns:a16="http://schemas.microsoft.com/office/drawing/2014/main" id="{3FD034FB-5599-44D2-8B2E-D761DBC3A629}"/>
+                <a16:creationId xmlns:a16="http://schemas.microsoft.com/office/drawing/2014/main" id="{D58D0C20-3E36-490F-BEB6-88AA5BD1A8AF}"/>
               </a:ext>
             </a:extLst>
           </p:cNvPr>
@@ -4574,7 +4641,7 @@
           <p:cNvPr id="9" name="">
             <a:extLst xmlns:a="http://schemas.openxmlformats.org/drawingml/2006/main">
               <a:ext uri="{FF2B5EF4-FFF2-40B4-BE49-F238E27FC236}">
-                <a16:creationId xmlns:a16="http://schemas.microsoft.com/office/drawing/2014/main" id="{3E30A13B-8562-41BE-97B8-8637DFE5DDAB}"/>
+                <a16:creationId xmlns:a16="http://schemas.microsoft.com/office/drawing/2014/main" id="{ACE1D231-14AF-4EE2-82F5-286834517A3E}"/>
               </a:ext>
             </a:extLst>
           </p:cNvPr>
@@ -4624,7 +4691,7 @@
           <p:cNvPr id="10" name="">
             <a:extLst xmlns:a="http://schemas.openxmlformats.org/drawingml/2006/main">
               <a:ext uri="{FF2B5EF4-FFF2-40B4-BE49-F238E27FC236}">
-                <a16:creationId xmlns:a16="http://schemas.microsoft.com/office/drawing/2014/main" id="{7249A1B2-2800-4204-9336-6842AF5A117A}"/>
+                <a16:creationId xmlns:a16="http://schemas.microsoft.com/office/drawing/2014/main" id="{A7EAAD00-250F-413A-B740-64CEA681C5B1}"/>
               </a:ext>
             </a:extLst>
           </p:cNvPr>
@@ -4674,7 +4741,7 @@
           <p:cNvPr id="11" name="">
             <a:extLst xmlns:a="http://schemas.openxmlformats.org/drawingml/2006/main">
               <a:ext uri="{FF2B5EF4-FFF2-40B4-BE49-F238E27FC236}">
-                <a16:creationId xmlns:a16="http://schemas.microsoft.com/office/drawing/2014/main" id="{3433B1E5-DF94-45C6-92BA-54362BFC08D6}"/>
+                <a16:creationId xmlns:a16="http://schemas.microsoft.com/office/drawing/2014/main" id="{A1A3031A-3FA3-45D4-B0DB-61ACDF6CDBCA}"/>
               </a:ext>
             </a:extLst>
           </p:cNvPr>
@@ -4709,7 +4776,7 @@
           <p:cNvPr id="12" name="">
             <a:extLst xmlns:a="http://schemas.openxmlformats.org/drawingml/2006/main">
               <a:ext uri="{FF2B5EF4-FFF2-40B4-BE49-F238E27FC236}">
-                <a16:creationId xmlns:a16="http://schemas.microsoft.com/office/drawing/2014/main" id="{FA807BE4-388C-4C74-BF73-937BDB1D847D}"/>
+                <a16:creationId xmlns:a16="http://schemas.microsoft.com/office/drawing/2014/main" id="{544D4777-CAA4-4DB2-B05B-5FF9743A1E0C}"/>
               </a:ext>
             </a:extLst>
           </p:cNvPr>
@@ -4744,7 +4811,7 @@
           <p:cNvPr id="13" name="">
             <a:extLst xmlns:a="http://schemas.openxmlformats.org/drawingml/2006/main">
               <a:ext uri="{FF2B5EF4-FFF2-40B4-BE49-F238E27FC236}">
-                <a16:creationId xmlns:a16="http://schemas.microsoft.com/office/drawing/2014/main" id="{5232569C-5286-4B29-B790-624538EE2EAA}"/>
+                <a16:creationId xmlns:a16="http://schemas.microsoft.com/office/drawing/2014/main" id="{70831CD5-9C6D-48A5-B9AB-4EF9AF61D6B1}"/>
               </a:ext>
             </a:extLst>
           </p:cNvPr>
@@ -4794,7 +4861,7 @@
           <p:cNvPr id="14" name="">
             <a:extLst xmlns:a="http://schemas.openxmlformats.org/drawingml/2006/main">
               <a:ext uri="{FF2B5EF4-FFF2-40B4-BE49-F238E27FC236}">
-                <a16:creationId xmlns:a16="http://schemas.microsoft.com/office/drawing/2014/main" id="{DBF83C39-FE26-4315-B19D-CEB7C0873EA1}"/>
+                <a16:creationId xmlns:a16="http://schemas.microsoft.com/office/drawing/2014/main" id="{276B0471-D842-430B-92C2-DCCFAF521023}"/>
               </a:ext>
             </a:extLst>
           </p:cNvPr>
@@ -4844,7 +4911,7 @@
           <p:cNvPr id="15" name="">
             <a:extLst xmlns:a="http://schemas.openxmlformats.org/drawingml/2006/main">
               <a:ext uri="{FF2B5EF4-FFF2-40B4-BE49-F238E27FC236}">
-                <a16:creationId xmlns:a16="http://schemas.microsoft.com/office/drawing/2014/main" id="{A22AFB03-D6A5-4B22-A34B-FAC8AA7D8AA6}"/>
+                <a16:creationId xmlns:a16="http://schemas.microsoft.com/office/drawing/2014/main" id="{D1135ABD-7E7F-46D1-9E6B-D0105848177A}"/>
               </a:ext>
             </a:extLst>
           </p:cNvPr>
@@ -4892,7 +4959,7 @@
     </p:spTree>
     <p:extLst>
       <p:ext uri="{BB962C8B-B14F-4D97-AF65-F5344CB8AC3E}">
-        <p14:creationId xmlns:p14="http://schemas.microsoft.com/office/powerpoint/2010/main" val="1526012729"/>
+        <p14:creationId xmlns:p14="http://schemas.microsoft.com/office/powerpoint/2010/main" val="345532548"/>
       </p:ext>
     </p:extLst>
   </p:cSld>
@@ -4923,7 +4990,7 @@
           <p:cNvPr id="1" name="">
             <a:extLst xmlns:a="http://schemas.openxmlformats.org/drawingml/2006/main">
               <a:ext uri="{FF2B5EF4-FFF2-40B4-BE49-F238E27FC236}">
-                <a16:creationId xmlns:a16="http://schemas.microsoft.com/office/drawing/2014/main" id="{0FF1F2B6-9AAC-46D8-B294-364994CCD76D}"/>
+                <a16:creationId xmlns:a16="http://schemas.microsoft.com/office/drawing/2014/main" id="{329D7DC4-99AD-4FF9-B024-D6EC8C074590}"/>
               </a:ext>
             </a:extLst>
           </p:cNvPr>
@@ -4973,7 +5040,7 @@
           <p:cNvPr id="2" name="">
             <a:extLst xmlns:a="http://schemas.openxmlformats.org/drawingml/2006/main">
               <a:ext uri="{FF2B5EF4-FFF2-40B4-BE49-F238E27FC236}">
-                <a16:creationId xmlns:a16="http://schemas.microsoft.com/office/drawing/2014/main" id="{341C6B46-87D5-4AD3-958F-AAE0DFDF93D7}"/>
+                <a16:creationId xmlns:a16="http://schemas.microsoft.com/office/drawing/2014/main" id="{DCBEA61F-0BDC-427C-B564-605EEA43E71B}"/>
               </a:ext>
             </a:extLst>
           </p:cNvPr>
@@ -5023,7 +5090,7 @@
           <p:cNvPr id="3" name="">
             <a:extLst xmlns:a="http://schemas.openxmlformats.org/drawingml/2006/main">
               <a:ext uri="{FF2B5EF4-FFF2-40B4-BE49-F238E27FC236}">
-                <a16:creationId xmlns:a16="http://schemas.microsoft.com/office/drawing/2014/main" id="{ACACA71A-DE80-47A7-8EF6-6F36D6660071}"/>
+                <a16:creationId xmlns:a16="http://schemas.microsoft.com/office/drawing/2014/main" id="{814BA053-B65C-4076-AD65-12C7F2F95B4B}"/>
               </a:ext>
             </a:extLst>
           </p:cNvPr>
@@ -5073,7 +5140,7 @@
           <p:cNvPr id="4" name="">
             <a:extLst xmlns:a="http://schemas.openxmlformats.org/drawingml/2006/main">
               <a:ext uri="{FF2B5EF4-FFF2-40B4-BE49-F238E27FC236}">
-                <a16:creationId xmlns:a16="http://schemas.microsoft.com/office/drawing/2014/main" id="{9EC66638-675A-4FDF-81F3-29D241B2930A}"/>
+                <a16:creationId xmlns:a16="http://schemas.microsoft.com/office/drawing/2014/main" id="{963E8C6E-4440-4401-AA96-5FE9CC237DFA}"/>
               </a:ext>
             </a:extLst>
           </p:cNvPr>
@@ -5123,7 +5190,7 @@
           <p:cNvPr id="5" name="">
             <a:extLst xmlns:a="http://schemas.openxmlformats.org/drawingml/2006/main">
               <a:ext uri="{FF2B5EF4-FFF2-40B4-BE49-F238E27FC236}">
-                <a16:creationId xmlns:a16="http://schemas.microsoft.com/office/drawing/2014/main" id="{1B8E167A-8D37-4911-BA71-E32DF5CABDBA}"/>
+                <a16:creationId xmlns:a16="http://schemas.microsoft.com/office/drawing/2014/main" id="{59EC45E2-0A04-44AC-A057-4B6165DED886}"/>
               </a:ext>
             </a:extLst>
           </p:cNvPr>
@@ -5173,7 +5240,7 @@
           <p:cNvPr id="6" name="">
             <a:extLst xmlns:a="http://schemas.openxmlformats.org/drawingml/2006/main">
               <a:ext uri="{FF2B5EF4-FFF2-40B4-BE49-F238E27FC236}">
-                <a16:creationId xmlns:a16="http://schemas.microsoft.com/office/drawing/2014/main" id="{B71FBC9C-2132-45E4-B9FD-C681B77BDC69}"/>
+                <a16:creationId xmlns:a16="http://schemas.microsoft.com/office/drawing/2014/main" id="{762B7C12-80F3-4565-966D-A0216DB8D92C}"/>
               </a:ext>
             </a:extLst>
           </p:cNvPr>
@@ -5208,7 +5275,7 @@
           <p:cNvPr id="7" name="">
             <a:extLst xmlns:a="http://schemas.openxmlformats.org/drawingml/2006/main">
               <a:ext uri="{FF2B5EF4-FFF2-40B4-BE49-F238E27FC236}">
-                <a16:creationId xmlns:a16="http://schemas.microsoft.com/office/drawing/2014/main" id="{4ED55AE2-DD39-401B-849E-69E876CA4177}"/>
+                <a16:creationId xmlns:a16="http://schemas.microsoft.com/office/drawing/2014/main" id="{40781EFF-8674-498C-A4AD-357B4257DEA8}"/>
               </a:ext>
             </a:extLst>
           </p:cNvPr>
@@ -5258,7 +5325,7 @@
           <p:cNvPr id="8" name="">
             <a:extLst xmlns:a="http://schemas.openxmlformats.org/drawingml/2006/main">
               <a:ext uri="{FF2B5EF4-FFF2-40B4-BE49-F238E27FC236}">
-                <a16:creationId xmlns:a16="http://schemas.microsoft.com/office/drawing/2014/main" id="{B0E7B3B7-9CC7-4305-9F6F-338FA65111A2}"/>
+                <a16:creationId xmlns:a16="http://schemas.microsoft.com/office/drawing/2014/main" id="{0C0EA390-C69D-4EFD-AEAD-77ECF7D8452A}"/>
               </a:ext>
             </a:extLst>
           </p:cNvPr>
@@ -5308,7 +5375,7 @@
           <p:cNvPr id="9" name="">
             <a:extLst xmlns:a="http://schemas.openxmlformats.org/drawingml/2006/main">
               <a:ext uri="{FF2B5EF4-FFF2-40B4-BE49-F238E27FC236}">
-                <a16:creationId xmlns:a16="http://schemas.microsoft.com/office/drawing/2014/main" id="{7D59210A-DF58-40C0-955C-AE1DB7512975}"/>
+                <a16:creationId xmlns:a16="http://schemas.microsoft.com/office/drawing/2014/main" id="{E4E8F340-557B-46C2-9478-CBC986E82528}"/>
               </a:ext>
             </a:extLst>
           </p:cNvPr>
@@ -5358,7 +5425,7 @@
           <p:cNvPr id="10" name="">
             <a:extLst xmlns:a="http://schemas.openxmlformats.org/drawingml/2006/main">
               <a:ext uri="{FF2B5EF4-FFF2-40B4-BE49-F238E27FC236}">
-                <a16:creationId xmlns:a16="http://schemas.microsoft.com/office/drawing/2014/main" id="{7BF50227-9AE0-4CB1-A67D-208FEEEBE32E}"/>
+                <a16:creationId xmlns:a16="http://schemas.microsoft.com/office/drawing/2014/main" id="{158576E2-4EA9-477F-88F0-28D0C0579A76}"/>
               </a:ext>
             </a:extLst>
           </p:cNvPr>
@@ -5387,7 +5454,7 @@
           <p:cNvPr id="11" name="">
             <a:extLst xmlns:a="http://schemas.openxmlformats.org/drawingml/2006/main">
               <a:ext uri="{FF2B5EF4-FFF2-40B4-BE49-F238E27FC236}">
-                <a16:creationId xmlns:a16="http://schemas.microsoft.com/office/drawing/2014/main" id="{CD22CDDF-174E-4B9B-B3C5-8394565DA6D2}"/>
+                <a16:creationId xmlns:a16="http://schemas.microsoft.com/office/drawing/2014/main" id="{48312F5B-BE0F-4947-9EFA-FA0D6E85BC5F}"/>
               </a:ext>
             </a:extLst>
           </p:cNvPr>
@@ -5442,7 +5509,7 @@
           <p:cNvPr id="13" name="">
             <a:extLst xmlns:a="http://schemas.openxmlformats.org/drawingml/2006/main">
               <a:ext uri="{FF2B5EF4-FFF2-40B4-BE49-F238E27FC236}">
-                <a16:creationId xmlns:a16="http://schemas.microsoft.com/office/drawing/2014/main" id="{CA7AFBC7-6010-46C1-B554-BEC31BDB3D6F}"/>
+                <a16:creationId xmlns:a16="http://schemas.microsoft.com/office/drawing/2014/main" id="{613C711D-390C-4E3E-AF85-4B3C470379C8}"/>
               </a:ext>
             </a:extLst>
           </p:cNvPr>
@@ -5477,7 +5544,7 @@
           <p:cNvPr id="14" name="">
             <a:extLst xmlns:a="http://schemas.openxmlformats.org/drawingml/2006/main">
               <a:ext uri="{FF2B5EF4-FFF2-40B4-BE49-F238E27FC236}">
-                <a16:creationId xmlns:a16="http://schemas.microsoft.com/office/drawing/2014/main" id="{4C69C8BD-44C5-46B0-9C22-12A8E749AF03}"/>
+                <a16:creationId xmlns:a16="http://schemas.microsoft.com/office/drawing/2014/main" id="{808D3158-3A80-4C0A-B5FF-02A4F9EB14A2}"/>
               </a:ext>
             </a:extLst>
           </p:cNvPr>
@@ -5527,7 +5594,7 @@
           <p:cNvPr id="15" name="">
             <a:extLst xmlns:a="http://schemas.openxmlformats.org/drawingml/2006/main">
               <a:ext uri="{FF2B5EF4-FFF2-40B4-BE49-F238E27FC236}">
-                <a16:creationId xmlns:a16="http://schemas.microsoft.com/office/drawing/2014/main" id="{E1E61237-FD67-47F8-B46E-755A0FA8AF71}"/>
+                <a16:creationId xmlns:a16="http://schemas.microsoft.com/office/drawing/2014/main" id="{34CAFBC7-601F-413B-A536-7AD40005F0C1}"/>
               </a:ext>
             </a:extLst>
           </p:cNvPr>
@@ -5577,7 +5644,7 @@
           <p:cNvPr id="16" name="">
             <a:extLst xmlns:a="http://schemas.openxmlformats.org/drawingml/2006/main">
               <a:ext uri="{FF2B5EF4-FFF2-40B4-BE49-F238E27FC236}">
-                <a16:creationId xmlns:a16="http://schemas.microsoft.com/office/drawing/2014/main" id="{28E50310-701C-4BDE-8AF4-CB23D936E25B}"/>
+                <a16:creationId xmlns:a16="http://schemas.microsoft.com/office/drawing/2014/main" id="{D22F7D6D-731D-4A3E-B2B1-6C328B1EB2E1}"/>
               </a:ext>
             </a:extLst>
           </p:cNvPr>
@@ -5627,7 +5694,7 @@
           <p:cNvPr id="17" name="">
             <a:extLst xmlns:a="http://schemas.openxmlformats.org/drawingml/2006/main">
               <a:ext uri="{FF2B5EF4-FFF2-40B4-BE49-F238E27FC236}">
-                <a16:creationId xmlns:a16="http://schemas.microsoft.com/office/drawing/2014/main" id="{73EBDF44-2471-4B68-AA5E-EF53FFA48587}"/>
+                <a16:creationId xmlns:a16="http://schemas.microsoft.com/office/drawing/2014/main" id="{288E4950-D4F8-4222-84ED-6CFFFC27B53C}"/>
               </a:ext>
             </a:extLst>
           </p:cNvPr>
@@ -5656,7 +5723,7 @@
           <p:cNvPr id="18" name="">
             <a:extLst xmlns:a="http://schemas.openxmlformats.org/drawingml/2006/main">
               <a:ext uri="{FF2B5EF4-FFF2-40B4-BE49-F238E27FC236}">
-                <a16:creationId xmlns:a16="http://schemas.microsoft.com/office/drawing/2014/main" id="{CBB91264-9A8D-4998-830B-E8785E0E3187}"/>
+                <a16:creationId xmlns:a16="http://schemas.microsoft.com/office/drawing/2014/main" id="{150D4581-4C07-480E-8CC1-2B315CAF3E32}"/>
               </a:ext>
             </a:extLst>
           </p:cNvPr>
@@ -5711,7 +5778,7 @@
           <p:cNvPr id="20" name="">
             <a:extLst xmlns:a="http://schemas.openxmlformats.org/drawingml/2006/main">
               <a:ext uri="{FF2B5EF4-FFF2-40B4-BE49-F238E27FC236}">
-                <a16:creationId xmlns:a16="http://schemas.microsoft.com/office/drawing/2014/main" id="{46B004FB-65D4-4847-AF21-AF96F382FC90}"/>
+                <a16:creationId xmlns:a16="http://schemas.microsoft.com/office/drawing/2014/main" id="{FA947400-87E0-4BC9-8365-CBC5D10AA4E6}"/>
               </a:ext>
             </a:extLst>
           </p:cNvPr>
@@ -5746,7 +5813,7 @@
           <p:cNvPr id="21" name="">
             <a:extLst xmlns:a="http://schemas.openxmlformats.org/drawingml/2006/main">
               <a:ext uri="{FF2B5EF4-FFF2-40B4-BE49-F238E27FC236}">
-                <a16:creationId xmlns:a16="http://schemas.microsoft.com/office/drawing/2014/main" id="{15CEE482-049F-40BE-8DFB-F36B90755701}"/>
+                <a16:creationId xmlns:a16="http://schemas.microsoft.com/office/drawing/2014/main" id="{1D2DE3ED-186A-4B67-B424-7D415B85E177}"/>
               </a:ext>
             </a:extLst>
           </p:cNvPr>
@@ -5796,7 +5863,7 @@
           <p:cNvPr id="22" name="">
             <a:extLst xmlns:a="http://schemas.openxmlformats.org/drawingml/2006/main">
               <a:ext uri="{FF2B5EF4-FFF2-40B4-BE49-F238E27FC236}">
-                <a16:creationId xmlns:a16="http://schemas.microsoft.com/office/drawing/2014/main" id="{B77B52D4-4662-4F75-94E5-08CC0FB21D6D}"/>
+                <a16:creationId xmlns:a16="http://schemas.microsoft.com/office/drawing/2014/main" id="{6CE3D61A-DA95-4501-BAA3-D020D9EE2FAF}"/>
               </a:ext>
             </a:extLst>
           </p:cNvPr>
@@ -5846,7 +5913,7 @@
           <p:cNvPr id="23" name="">
             <a:extLst xmlns:a="http://schemas.openxmlformats.org/drawingml/2006/main">
               <a:ext uri="{FF2B5EF4-FFF2-40B4-BE49-F238E27FC236}">
-                <a16:creationId xmlns:a16="http://schemas.microsoft.com/office/drawing/2014/main" id="{F075A2FC-77AC-489E-A2DD-BE609505CC58}"/>
+                <a16:creationId xmlns:a16="http://schemas.microsoft.com/office/drawing/2014/main" id="{E9C11474-5C29-4B17-9C54-49D0D20D54B5}"/>
               </a:ext>
             </a:extLst>
           </p:cNvPr>
@@ -5896,7 +5963,7 @@
           <p:cNvPr id="24" name="">
             <a:extLst xmlns:a="http://schemas.openxmlformats.org/drawingml/2006/main">
               <a:ext uri="{FF2B5EF4-FFF2-40B4-BE49-F238E27FC236}">
-                <a16:creationId xmlns:a16="http://schemas.microsoft.com/office/drawing/2014/main" id="{273A1509-A202-4299-847A-58C7DB70439A}"/>
+                <a16:creationId xmlns:a16="http://schemas.microsoft.com/office/drawing/2014/main" id="{AD22273E-8E38-487F-9FC7-4CD608A88658}"/>
               </a:ext>
             </a:extLst>
           </p:cNvPr>
@@ -5925,7 +5992,7 @@
           <p:cNvPr id="25" name="">
             <a:extLst xmlns:a="http://schemas.openxmlformats.org/drawingml/2006/main">
               <a:ext uri="{FF2B5EF4-FFF2-40B4-BE49-F238E27FC236}">
-                <a16:creationId xmlns:a16="http://schemas.microsoft.com/office/drawing/2014/main" id="{CCE84533-C828-4998-8570-B1B157EC8979}"/>
+                <a16:creationId xmlns:a16="http://schemas.microsoft.com/office/drawing/2014/main" id="{0977DC7E-D777-482B-ACC1-1DCE7000BC5B}"/>
               </a:ext>
             </a:extLst>
           </p:cNvPr>
@@ -5980,7 +6047,7 @@
           <p:cNvPr id="27" name="">
             <a:extLst xmlns:a="http://schemas.openxmlformats.org/drawingml/2006/main">
               <a:ext uri="{FF2B5EF4-FFF2-40B4-BE49-F238E27FC236}">
-                <a16:creationId xmlns:a16="http://schemas.microsoft.com/office/drawing/2014/main" id="{5C1282A5-4EAA-4ABD-B610-07F23399AF12}"/>
+                <a16:creationId xmlns:a16="http://schemas.microsoft.com/office/drawing/2014/main" id="{A4BA4B73-66F8-4E06-8FFB-FA912B6B3A21}"/>
               </a:ext>
             </a:extLst>
           </p:cNvPr>
@@ -6015,7 +6082,7 @@
           <p:cNvPr id="28" name="">
             <a:extLst xmlns:a="http://schemas.openxmlformats.org/drawingml/2006/main">
               <a:ext uri="{FF2B5EF4-FFF2-40B4-BE49-F238E27FC236}">
-                <a16:creationId xmlns:a16="http://schemas.microsoft.com/office/drawing/2014/main" id="{65262DEE-1934-45FC-8302-B11DA6BFCF1C}"/>
+                <a16:creationId xmlns:a16="http://schemas.microsoft.com/office/drawing/2014/main" id="{94974CE5-9FB5-48BD-ABF6-99B185C2706B}"/>
               </a:ext>
             </a:extLst>
           </p:cNvPr>
@@ -6065,7 +6132,7 @@
           <p:cNvPr id="29" name="">
             <a:extLst xmlns:a="http://schemas.openxmlformats.org/drawingml/2006/main">
               <a:ext uri="{FF2B5EF4-FFF2-40B4-BE49-F238E27FC236}">
-                <a16:creationId xmlns:a16="http://schemas.microsoft.com/office/drawing/2014/main" id="{1A5C4D56-50B3-4A40-9DCF-3FA1BF4A4480}"/>
+                <a16:creationId xmlns:a16="http://schemas.microsoft.com/office/drawing/2014/main" id="{484AF623-B7CA-476C-8361-D535D1B45781}"/>
               </a:ext>
             </a:extLst>
           </p:cNvPr>
@@ -6115,7 +6182,7 @@
           <p:cNvPr id="30" name="">
             <a:extLst xmlns:a="http://schemas.openxmlformats.org/drawingml/2006/main">
               <a:ext uri="{FF2B5EF4-FFF2-40B4-BE49-F238E27FC236}">
-                <a16:creationId xmlns:a16="http://schemas.microsoft.com/office/drawing/2014/main" id="{A9E86F51-6A02-44EE-9D90-E232BED34137}"/>
+                <a16:creationId xmlns:a16="http://schemas.microsoft.com/office/drawing/2014/main" id="{FDCF3EE1-B9AF-4A76-9DBD-B09DF86FF324}"/>
               </a:ext>
             </a:extLst>
           </p:cNvPr>
@@ -6165,7 +6232,7 @@
           <p:cNvPr id="31" name="">
             <a:extLst xmlns:a="http://schemas.openxmlformats.org/drawingml/2006/main">
               <a:ext uri="{FF2B5EF4-FFF2-40B4-BE49-F238E27FC236}">
-                <a16:creationId xmlns:a16="http://schemas.microsoft.com/office/drawing/2014/main" id="{1D37DB14-01DA-4671-9840-A67C78C05352}"/>
+                <a16:creationId xmlns:a16="http://schemas.microsoft.com/office/drawing/2014/main" id="{66A5A7A3-5EBE-411D-91B1-9338E6552301}"/>
               </a:ext>
             </a:extLst>
           </p:cNvPr>
@@ -6194,7 +6261,7 @@
           <p:cNvPr id="32" name="">
             <a:extLst xmlns:a="http://schemas.openxmlformats.org/drawingml/2006/main">
               <a:ext uri="{FF2B5EF4-FFF2-40B4-BE49-F238E27FC236}">
-                <a16:creationId xmlns:a16="http://schemas.microsoft.com/office/drawing/2014/main" id="{65AB44C4-175C-4D67-A753-7B4A958B261B}"/>
+                <a16:creationId xmlns:a16="http://schemas.microsoft.com/office/drawing/2014/main" id="{EEA09338-969D-4CC4-9EB9-03B913586B09}"/>
               </a:ext>
             </a:extLst>
           </p:cNvPr>
@@ -6249,7 +6316,7 @@
           <p:cNvPr id="34" name="">
             <a:extLst xmlns:a="http://schemas.openxmlformats.org/drawingml/2006/main">
               <a:ext uri="{FF2B5EF4-FFF2-40B4-BE49-F238E27FC236}">
-                <a16:creationId xmlns:a16="http://schemas.microsoft.com/office/drawing/2014/main" id="{60F0C87D-A182-493B-854B-E451A73FA683}"/>
+                <a16:creationId xmlns:a16="http://schemas.microsoft.com/office/drawing/2014/main" id="{C3BBA8D1-3445-47A5-B75C-0744CB1E7463}"/>
               </a:ext>
             </a:extLst>
           </p:cNvPr>
@@ -6284,7 +6351,7 @@
           <p:cNvPr id="35" name="">
             <a:extLst xmlns:a="http://schemas.openxmlformats.org/drawingml/2006/main">
               <a:ext uri="{FF2B5EF4-FFF2-40B4-BE49-F238E27FC236}">
-                <a16:creationId xmlns:a16="http://schemas.microsoft.com/office/drawing/2014/main" id="{6549C0A4-54D9-4920-B10C-D5B7EA24C555}"/>
+                <a16:creationId xmlns:a16="http://schemas.microsoft.com/office/drawing/2014/main" id="{AB13C834-D22A-4EC8-B0E5-02C9DB4A6B30}"/>
               </a:ext>
             </a:extLst>
           </p:cNvPr>
@@ -6334,7 +6401,7 @@
           <p:cNvPr id="36" name="">
             <a:extLst xmlns:a="http://schemas.openxmlformats.org/drawingml/2006/main">
               <a:ext uri="{FF2B5EF4-FFF2-40B4-BE49-F238E27FC236}">
-                <a16:creationId xmlns:a16="http://schemas.microsoft.com/office/drawing/2014/main" id="{25E45EB5-7597-4804-A864-00C850DCD464}"/>
+                <a16:creationId xmlns:a16="http://schemas.microsoft.com/office/drawing/2014/main" id="{7790DA53-209C-4E8A-9666-1B685D73BA10}"/>
               </a:ext>
             </a:extLst>
           </p:cNvPr>
@@ -6384,7 +6451,7 @@
           <p:cNvPr id="37" name="">
             <a:extLst xmlns:a="http://schemas.openxmlformats.org/drawingml/2006/main">
               <a:ext uri="{FF2B5EF4-FFF2-40B4-BE49-F238E27FC236}">
-                <a16:creationId xmlns:a16="http://schemas.microsoft.com/office/drawing/2014/main" id="{CE6E5FD1-6CC1-406B-86AF-20C973EBE7D4}"/>
+                <a16:creationId xmlns:a16="http://schemas.microsoft.com/office/drawing/2014/main" id="{A6858B43-E6D1-4F4C-AD0C-48D16BB4F79E}"/>
               </a:ext>
             </a:extLst>
           </p:cNvPr>
@@ -6432,7 +6499,7 @@
     </p:spTree>
     <p:extLst>
       <p:ext uri="{BB962C8B-B14F-4D97-AF65-F5344CB8AC3E}">
-        <p14:creationId xmlns:p14="http://schemas.microsoft.com/office/powerpoint/2010/main" val="2045525909"/>
+        <p14:creationId xmlns:p14="http://schemas.microsoft.com/office/powerpoint/2010/main" val="728685580"/>
       </p:ext>
     </p:extLst>
   </p:cSld>
@@ -6463,7 +6530,7 @@
           <p:cNvPr id="1" name="">
             <a:extLst xmlns:a="http://schemas.openxmlformats.org/drawingml/2006/main">
               <a:ext uri="{FF2B5EF4-FFF2-40B4-BE49-F238E27FC236}">
-                <a16:creationId xmlns:a16="http://schemas.microsoft.com/office/drawing/2014/main" id="{BFC0E37B-301A-4AF6-92E7-89A2C3B8FACA}"/>
+                <a16:creationId xmlns:a16="http://schemas.microsoft.com/office/drawing/2014/main" id="{5BA789C9-DA1B-4667-BAC9-DE8C24374703}"/>
               </a:ext>
             </a:extLst>
           </p:cNvPr>
@@ -6513,7 +6580,7 @@
           <p:cNvPr id="2" name="">
             <a:extLst xmlns:a="http://schemas.openxmlformats.org/drawingml/2006/main">
               <a:ext uri="{FF2B5EF4-FFF2-40B4-BE49-F238E27FC236}">
-                <a16:creationId xmlns:a16="http://schemas.microsoft.com/office/drawing/2014/main" id="{E3518D00-E1B6-4D6C-BC94-CC094731FDF4}"/>
+                <a16:creationId xmlns:a16="http://schemas.microsoft.com/office/drawing/2014/main" id="{91E64FD9-A823-4B2F-AE13-BDCB4B8CE636}"/>
               </a:ext>
             </a:extLst>
           </p:cNvPr>
@@ -6563,7 +6630,7 @@
           <p:cNvPr id="3" name="">
             <a:extLst xmlns:a="http://schemas.openxmlformats.org/drawingml/2006/main">
               <a:ext uri="{FF2B5EF4-FFF2-40B4-BE49-F238E27FC236}">
-                <a16:creationId xmlns:a16="http://schemas.microsoft.com/office/drawing/2014/main" id="{34820325-91DC-4071-8EFD-4E331A369D8F}"/>
+                <a16:creationId xmlns:a16="http://schemas.microsoft.com/office/drawing/2014/main" id="{3128DECF-D1C9-4436-867D-01667001BC73}"/>
               </a:ext>
             </a:extLst>
           </p:cNvPr>
@@ -6613,7 +6680,7 @@
           <p:cNvPr id="4" name="">
             <a:extLst xmlns:a="http://schemas.openxmlformats.org/drawingml/2006/main">
               <a:ext uri="{FF2B5EF4-FFF2-40B4-BE49-F238E27FC236}">
-                <a16:creationId xmlns:a16="http://schemas.microsoft.com/office/drawing/2014/main" id="{F8CCC8FD-6B8E-4522-8885-18DCA350E3BA}"/>
+                <a16:creationId xmlns:a16="http://schemas.microsoft.com/office/drawing/2014/main" id="{05C2795E-F569-406D-B506-38944DB76FCD}"/>
               </a:ext>
             </a:extLst>
           </p:cNvPr>
@@ -6663,7 +6730,7 @@
           <p:cNvPr id="5" name="">
             <a:extLst xmlns:a="http://schemas.openxmlformats.org/drawingml/2006/main">
               <a:ext uri="{FF2B5EF4-FFF2-40B4-BE49-F238E27FC236}">
-                <a16:creationId xmlns:a16="http://schemas.microsoft.com/office/drawing/2014/main" id="{1578E58B-6F4C-43FA-9660-64D92B9DC26E}"/>
+                <a16:creationId xmlns:a16="http://schemas.microsoft.com/office/drawing/2014/main" id="{E87EABE5-0758-4014-8313-74D5F6D061C5}"/>
               </a:ext>
             </a:extLst>
           </p:cNvPr>
@@ -6713,7 +6780,7 @@
           <p:cNvPr id="6" name="">
             <a:extLst xmlns:a="http://schemas.openxmlformats.org/drawingml/2006/main">
               <a:ext uri="{FF2B5EF4-FFF2-40B4-BE49-F238E27FC236}">
-                <a16:creationId xmlns:a16="http://schemas.microsoft.com/office/drawing/2014/main" id="{8A300299-BED9-46F7-8A74-D9C04CE17F84}"/>
+                <a16:creationId xmlns:a16="http://schemas.microsoft.com/office/drawing/2014/main" id="{9D7060D2-9EF4-4A26-826D-60E51B713945}"/>
               </a:ext>
             </a:extLst>
           </p:cNvPr>
@@ -6748,7 +6815,7 @@
           <p:cNvPr id="7" name="">
             <a:extLst xmlns:a="http://schemas.openxmlformats.org/drawingml/2006/main">
               <a:ext uri="{FF2B5EF4-FFF2-40B4-BE49-F238E27FC236}">
-                <a16:creationId xmlns:a16="http://schemas.microsoft.com/office/drawing/2014/main" id="{AA43B235-51BD-406B-AB34-F8E2BFA153B2}"/>
+                <a16:creationId xmlns:a16="http://schemas.microsoft.com/office/drawing/2014/main" id="{218AED1F-3E17-4CF6-BE67-1B419AE37939}"/>
               </a:ext>
             </a:extLst>
           </p:cNvPr>
@@ -6798,7 +6865,7 @@
           <p:cNvPr id="8" name="">
             <a:extLst xmlns:a="http://schemas.openxmlformats.org/drawingml/2006/main">
               <a:ext uri="{FF2B5EF4-FFF2-40B4-BE49-F238E27FC236}">
-                <a16:creationId xmlns:a16="http://schemas.microsoft.com/office/drawing/2014/main" id="{9DBBEFAD-6D6A-4AAB-9691-2E0412D261DB}"/>
+                <a16:creationId xmlns:a16="http://schemas.microsoft.com/office/drawing/2014/main" id="{937D25F3-4A66-4800-963B-F95BDE7BCD64}"/>
               </a:ext>
             </a:extLst>
           </p:cNvPr>
@@ -6848,7 +6915,7 @@
           <p:cNvPr id="9" name="">
             <a:extLst xmlns:a="http://schemas.openxmlformats.org/drawingml/2006/main">
               <a:ext uri="{FF2B5EF4-FFF2-40B4-BE49-F238E27FC236}">
-                <a16:creationId xmlns:a16="http://schemas.microsoft.com/office/drawing/2014/main" id="{1E0389F3-E108-4606-9143-CEB97CEBF3BD}"/>
+                <a16:creationId xmlns:a16="http://schemas.microsoft.com/office/drawing/2014/main" id="{009BD84C-50ED-4F62-9EFC-1F687DE920CA}"/>
               </a:ext>
             </a:extLst>
           </p:cNvPr>
@@ -6883,7 +6950,7 @@
           <p:cNvPr id="10" name="">
             <a:extLst xmlns:a="http://schemas.openxmlformats.org/drawingml/2006/main">
               <a:ext uri="{FF2B5EF4-FFF2-40B4-BE49-F238E27FC236}">
-                <a16:creationId xmlns:a16="http://schemas.microsoft.com/office/drawing/2014/main" id="{3D522095-B304-4288-86B6-981EA2F3BAFB}"/>
+                <a16:creationId xmlns:a16="http://schemas.microsoft.com/office/drawing/2014/main" id="{8EC715C5-C44A-44D3-8DC5-D96D3DA04155}"/>
               </a:ext>
             </a:extLst>
           </p:cNvPr>
@@ -6933,7 +7000,7 @@
           <p:cNvPr id="11" name="">
             <a:extLst xmlns:a="http://schemas.openxmlformats.org/drawingml/2006/main">
               <a:ext uri="{FF2B5EF4-FFF2-40B4-BE49-F238E27FC236}">
-                <a16:creationId xmlns:a16="http://schemas.microsoft.com/office/drawing/2014/main" id="{295F2E7E-ACD3-4578-8934-72ADC6A38D5D}"/>
+                <a16:creationId xmlns:a16="http://schemas.microsoft.com/office/drawing/2014/main" id="{8D7D2C78-E3E7-4FD2-A797-7E60762511B3}"/>
               </a:ext>
             </a:extLst>
           </p:cNvPr>
@@ -6983,7 +7050,7 @@
           <p:cNvPr id="12" name="">
             <a:extLst xmlns:a="http://schemas.openxmlformats.org/drawingml/2006/main">
               <a:ext uri="{FF2B5EF4-FFF2-40B4-BE49-F238E27FC236}">
-                <a16:creationId xmlns:a16="http://schemas.microsoft.com/office/drawing/2014/main" id="{470E8E0D-7AF1-475E-A184-43582D43DCF7}"/>
+                <a16:creationId xmlns:a16="http://schemas.microsoft.com/office/drawing/2014/main" id="{C3CF9F86-0719-43D7-BE5C-3911F3A10344}"/>
               </a:ext>
             </a:extLst>
           </p:cNvPr>
@@ -7018,7 +7085,7 @@
           <p:cNvPr id="13" name="">
             <a:extLst xmlns:a="http://schemas.openxmlformats.org/drawingml/2006/main">
               <a:ext uri="{FF2B5EF4-FFF2-40B4-BE49-F238E27FC236}">
-                <a16:creationId xmlns:a16="http://schemas.microsoft.com/office/drawing/2014/main" id="{79E8A3ED-59C7-478D-B745-42D4B7980580}"/>
+                <a16:creationId xmlns:a16="http://schemas.microsoft.com/office/drawing/2014/main" id="{7533AD5F-92E2-4755-AD0B-D2B1CE076EA4}"/>
               </a:ext>
             </a:extLst>
           </p:cNvPr>
@@ -7068,7 +7135,7 @@
           <p:cNvPr id="14" name="">
             <a:extLst xmlns:a="http://schemas.openxmlformats.org/drawingml/2006/main">
               <a:ext uri="{FF2B5EF4-FFF2-40B4-BE49-F238E27FC236}">
-                <a16:creationId xmlns:a16="http://schemas.microsoft.com/office/drawing/2014/main" id="{4705AC71-1C4C-4C19-B603-A9FCC720A4D7}"/>
+                <a16:creationId xmlns:a16="http://schemas.microsoft.com/office/drawing/2014/main" id="{7C5E24BA-3CCA-45D3-B8D6-EE06685F0501}"/>
               </a:ext>
             </a:extLst>
           </p:cNvPr>
@@ -7118,7 +7185,7 @@
           <p:cNvPr id="15" name="">
             <a:extLst xmlns:a="http://schemas.openxmlformats.org/drawingml/2006/main">
               <a:ext uri="{FF2B5EF4-FFF2-40B4-BE49-F238E27FC236}">
-                <a16:creationId xmlns:a16="http://schemas.microsoft.com/office/drawing/2014/main" id="{B0CC2962-CFF8-422A-9819-1971C093CA9C}"/>
+                <a16:creationId xmlns:a16="http://schemas.microsoft.com/office/drawing/2014/main" id="{0AF5FEE4-B758-40A8-88D0-C30BDCE9142A}"/>
               </a:ext>
             </a:extLst>
           </p:cNvPr>
@@ -7153,7 +7220,7 @@
           <p:cNvPr id="16" name="">
             <a:extLst xmlns:a="http://schemas.openxmlformats.org/drawingml/2006/main">
               <a:ext uri="{FF2B5EF4-FFF2-40B4-BE49-F238E27FC236}">
-                <a16:creationId xmlns:a16="http://schemas.microsoft.com/office/drawing/2014/main" id="{00A97059-2641-4AD6-9457-FF63A7771C25}"/>
+                <a16:creationId xmlns:a16="http://schemas.microsoft.com/office/drawing/2014/main" id="{CA4A2857-44DE-4D01-B135-42C8533796C3}"/>
               </a:ext>
             </a:extLst>
           </p:cNvPr>
@@ -7203,7 +7270,7 @@
           <p:cNvPr id="17" name="">
             <a:extLst xmlns:a="http://schemas.openxmlformats.org/drawingml/2006/main">
               <a:ext uri="{FF2B5EF4-FFF2-40B4-BE49-F238E27FC236}">
-                <a16:creationId xmlns:a16="http://schemas.microsoft.com/office/drawing/2014/main" id="{56559554-BFB5-4970-AAD7-8E0F714EBB6D}"/>
+                <a16:creationId xmlns:a16="http://schemas.microsoft.com/office/drawing/2014/main" id="{230A8ED0-36A2-4271-A6E0-7AA0FBC7CCF4}"/>
               </a:ext>
             </a:extLst>
           </p:cNvPr>
@@ -7253,7 +7320,7 @@
           <p:cNvPr id="18" name="">
             <a:extLst xmlns:a="http://schemas.openxmlformats.org/drawingml/2006/main">
               <a:ext uri="{FF2B5EF4-FFF2-40B4-BE49-F238E27FC236}">
-                <a16:creationId xmlns:a16="http://schemas.microsoft.com/office/drawing/2014/main" id="{F5062AF1-BFCE-4F90-8563-C86AFFBDFC2E}"/>
+                <a16:creationId xmlns:a16="http://schemas.microsoft.com/office/drawing/2014/main" id="{9EFCE9D8-95B9-489B-BD93-747A792246EE}"/>
               </a:ext>
             </a:extLst>
           </p:cNvPr>
@@ -7288,7 +7355,7 @@
           <p:cNvPr id="19" name="">
             <a:extLst xmlns:a="http://schemas.openxmlformats.org/drawingml/2006/main">
               <a:ext uri="{FF2B5EF4-FFF2-40B4-BE49-F238E27FC236}">
-                <a16:creationId xmlns:a16="http://schemas.microsoft.com/office/drawing/2014/main" id="{C7ECACCB-85D5-4188-9DD9-8B4472BCF0DA}"/>
+                <a16:creationId xmlns:a16="http://schemas.microsoft.com/office/drawing/2014/main" id="{3603E6E9-8796-4A65-8ECA-16B0A04DC29C}"/>
               </a:ext>
             </a:extLst>
           </p:cNvPr>
@@ -7338,7 +7405,7 @@
           <p:cNvPr id="20" name="">
             <a:extLst xmlns:a="http://schemas.openxmlformats.org/drawingml/2006/main">
               <a:ext uri="{FF2B5EF4-FFF2-40B4-BE49-F238E27FC236}">
-                <a16:creationId xmlns:a16="http://schemas.microsoft.com/office/drawing/2014/main" id="{4B731B5D-7E81-446F-B0A4-BE5F22A9915A}"/>
+                <a16:creationId xmlns:a16="http://schemas.microsoft.com/office/drawing/2014/main" id="{C598C5A9-B991-44C5-861A-B94A04B4BCD7}"/>
               </a:ext>
             </a:extLst>
           </p:cNvPr>
@@ -7388,7 +7455,7 @@
           <p:cNvPr id="21" name="">
             <a:extLst xmlns:a="http://schemas.openxmlformats.org/drawingml/2006/main">
               <a:ext uri="{FF2B5EF4-FFF2-40B4-BE49-F238E27FC236}">
-                <a16:creationId xmlns:a16="http://schemas.microsoft.com/office/drawing/2014/main" id="{7A4D2F83-9366-41EB-90E0-7E3A0DC19B07}"/>
+                <a16:creationId xmlns:a16="http://schemas.microsoft.com/office/drawing/2014/main" id="{2C087BDB-1AD3-409E-BE4B-66398FD1A6B8}"/>
               </a:ext>
             </a:extLst>
           </p:cNvPr>
@@ -7423,7 +7490,7 @@
           <p:cNvPr id="22" name="">
             <a:extLst xmlns:a="http://schemas.openxmlformats.org/drawingml/2006/main">
               <a:ext uri="{FF2B5EF4-FFF2-40B4-BE49-F238E27FC236}">
-                <a16:creationId xmlns:a16="http://schemas.microsoft.com/office/drawing/2014/main" id="{8491A363-583B-4097-9899-45BA5D621C34}"/>
+                <a16:creationId xmlns:a16="http://schemas.microsoft.com/office/drawing/2014/main" id="{E59329DC-43F6-43F1-AB98-07C51C799F9F}"/>
               </a:ext>
             </a:extLst>
           </p:cNvPr>
@@ -7473,7 +7540,7 @@
           <p:cNvPr id="23" name="">
             <a:extLst xmlns:a="http://schemas.openxmlformats.org/drawingml/2006/main">
               <a:ext uri="{FF2B5EF4-FFF2-40B4-BE49-F238E27FC236}">
-                <a16:creationId xmlns:a16="http://schemas.microsoft.com/office/drawing/2014/main" id="{53459412-86DE-40BF-818F-FC3C07F0D071}"/>
+                <a16:creationId xmlns:a16="http://schemas.microsoft.com/office/drawing/2014/main" id="{D2581C80-99F8-4591-B03F-07C538AB9813}"/>
               </a:ext>
             </a:extLst>
           </p:cNvPr>
@@ -7523,7 +7590,7 @@
           <p:cNvPr id="24" name="">
             <a:extLst xmlns:a="http://schemas.openxmlformats.org/drawingml/2006/main">
               <a:ext uri="{FF2B5EF4-FFF2-40B4-BE49-F238E27FC236}">
-                <a16:creationId xmlns:a16="http://schemas.microsoft.com/office/drawing/2014/main" id="{2447B409-CFF1-4707-B39C-BDA708AB1A72}"/>
+                <a16:creationId xmlns:a16="http://schemas.microsoft.com/office/drawing/2014/main" id="{D01B7AD4-21F3-40DD-9CD9-0938DD93EDC9}"/>
               </a:ext>
             </a:extLst>
           </p:cNvPr>
@@ -7552,7 +7619,7 @@
           <p:cNvPr id="25" name="">
             <a:extLst xmlns:a="http://schemas.openxmlformats.org/drawingml/2006/main">
               <a:ext uri="{FF2B5EF4-FFF2-40B4-BE49-F238E27FC236}">
-                <a16:creationId xmlns:a16="http://schemas.microsoft.com/office/drawing/2014/main" id="{52B49492-A448-4F3A-869A-44353C47D01A}"/>
+                <a16:creationId xmlns:a16="http://schemas.microsoft.com/office/drawing/2014/main" id="{18BAFE85-4ACF-4C8B-9283-AB7D4133D9A5}"/>
               </a:ext>
             </a:extLst>
           </p:cNvPr>
@@ -7607,7 +7674,7 @@
           <p:cNvPr id="27" name="">
             <a:extLst xmlns:a="http://schemas.openxmlformats.org/drawingml/2006/main">
               <a:ext uri="{FF2B5EF4-FFF2-40B4-BE49-F238E27FC236}">
-                <a16:creationId xmlns:a16="http://schemas.microsoft.com/office/drawing/2014/main" id="{EB298897-1423-4049-910B-BB7F0C92A2E7}"/>
+                <a16:creationId xmlns:a16="http://schemas.microsoft.com/office/drawing/2014/main" id="{3C7B0E24-F8FE-4194-92F5-A1AEB299637C}"/>
               </a:ext>
             </a:extLst>
           </p:cNvPr>
@@ -7636,7 +7703,7 @@
           <p:cNvPr id="28" name="">
             <a:extLst xmlns:a="http://schemas.openxmlformats.org/drawingml/2006/main">
               <a:ext uri="{FF2B5EF4-FFF2-40B4-BE49-F238E27FC236}">
-                <a16:creationId xmlns:a16="http://schemas.microsoft.com/office/drawing/2014/main" id="{891B061C-B06C-4E07-A46C-5B1EC9F17EBE}"/>
+                <a16:creationId xmlns:a16="http://schemas.microsoft.com/office/drawing/2014/main" id="{9C540E92-C1CE-40D8-88AF-D4431E624751}"/>
               </a:ext>
             </a:extLst>
           </p:cNvPr>
@@ -7691,7 +7758,7 @@
           <p:cNvPr id="30" name="">
             <a:extLst xmlns:a="http://schemas.openxmlformats.org/drawingml/2006/main">
               <a:ext uri="{FF2B5EF4-FFF2-40B4-BE49-F238E27FC236}">
-                <a16:creationId xmlns:a16="http://schemas.microsoft.com/office/drawing/2014/main" id="{7CE4DBDC-E7ED-4A7E-A8B0-2663D750C393}"/>
+                <a16:creationId xmlns:a16="http://schemas.microsoft.com/office/drawing/2014/main" id="{0864A3C2-5F4E-4B3C-84AC-D41408A8F550}"/>
               </a:ext>
             </a:extLst>
           </p:cNvPr>
@@ -7720,7 +7787,7 @@
           <p:cNvPr id="31" name="">
             <a:extLst xmlns:a="http://schemas.openxmlformats.org/drawingml/2006/main">
               <a:ext uri="{FF2B5EF4-FFF2-40B4-BE49-F238E27FC236}">
-                <a16:creationId xmlns:a16="http://schemas.microsoft.com/office/drawing/2014/main" id="{8976BBB1-693A-424E-A026-04EE64606B0F}"/>
+                <a16:creationId xmlns:a16="http://schemas.microsoft.com/office/drawing/2014/main" id="{CBA6E41F-C3A8-455A-8227-933FEAF631B0}"/>
               </a:ext>
             </a:extLst>
           </p:cNvPr>
@@ -7775,7 +7842,7 @@
           <p:cNvPr id="33" name="">
             <a:extLst xmlns:a="http://schemas.openxmlformats.org/drawingml/2006/main">
               <a:ext uri="{FF2B5EF4-FFF2-40B4-BE49-F238E27FC236}">
-                <a16:creationId xmlns:a16="http://schemas.microsoft.com/office/drawing/2014/main" id="{8122CBC4-776C-4DAF-90C8-D4E31802DF2E}"/>
+                <a16:creationId xmlns:a16="http://schemas.microsoft.com/office/drawing/2014/main" id="{86C3AF69-DF7D-45C0-B512-1CAAF2EDE2E1}"/>
               </a:ext>
             </a:extLst>
           </p:cNvPr>
@@ -7804,7 +7871,7 @@
           <p:cNvPr id="34" name="">
             <a:extLst xmlns:a="http://schemas.openxmlformats.org/drawingml/2006/main">
               <a:ext uri="{FF2B5EF4-FFF2-40B4-BE49-F238E27FC236}">
-                <a16:creationId xmlns:a16="http://schemas.microsoft.com/office/drawing/2014/main" id="{21FF5913-AFC3-470B-833F-85D7C755992F}"/>
+                <a16:creationId xmlns:a16="http://schemas.microsoft.com/office/drawing/2014/main" id="{D136BA42-3324-43DE-8E53-8A1D41A92894}"/>
               </a:ext>
             </a:extLst>
           </p:cNvPr>
@@ -7859,7 +7926,7 @@
           <p:cNvPr id="36" name="">
             <a:extLst xmlns:a="http://schemas.openxmlformats.org/drawingml/2006/main">
               <a:ext uri="{FF2B5EF4-FFF2-40B4-BE49-F238E27FC236}">
-                <a16:creationId xmlns:a16="http://schemas.microsoft.com/office/drawing/2014/main" id="{3A6060F9-D083-462A-90E7-32150207A706}"/>
+                <a16:creationId xmlns:a16="http://schemas.microsoft.com/office/drawing/2014/main" id="{0A7B6FF0-2E7F-4ABF-BEEE-2224954BE1D2}"/>
               </a:ext>
             </a:extLst>
           </p:cNvPr>
@@ -7888,7 +7955,7 @@
           <p:cNvPr id="37" name="">
             <a:extLst xmlns:a="http://schemas.openxmlformats.org/drawingml/2006/main">
               <a:ext uri="{FF2B5EF4-FFF2-40B4-BE49-F238E27FC236}">
-                <a16:creationId xmlns:a16="http://schemas.microsoft.com/office/drawing/2014/main" id="{EDFA8447-EF55-4714-BF07-207E02473475}"/>
+                <a16:creationId xmlns:a16="http://schemas.microsoft.com/office/drawing/2014/main" id="{8A60B519-C4E7-47B9-9AB6-3ECF715D2176}"/>
               </a:ext>
             </a:extLst>
           </p:cNvPr>
@@ -7941,7 +8008,7 @@
     </p:spTree>
     <p:extLst>
       <p:ext uri="{BB962C8B-B14F-4D97-AF65-F5344CB8AC3E}">
-        <p14:creationId xmlns:p14="http://schemas.microsoft.com/office/powerpoint/2010/main" val="167961426"/>
+        <p14:creationId xmlns:p14="http://schemas.microsoft.com/office/powerpoint/2010/main" val="2147287167"/>
       </p:ext>
     </p:extLst>
   </p:cSld>
@@ -7972,7 +8039,7 @@
           <p:cNvPr id="1" name="">
             <a:extLst xmlns:a="http://schemas.openxmlformats.org/drawingml/2006/main">
               <a:ext uri="{FF2B5EF4-FFF2-40B4-BE49-F238E27FC236}">
-                <a16:creationId xmlns:a16="http://schemas.microsoft.com/office/drawing/2014/main" id="{177F55D0-B986-4C8A-A50B-107812ACE2BC}"/>
+                <a16:creationId xmlns:a16="http://schemas.microsoft.com/office/drawing/2014/main" id="{EB008B1F-7730-46BC-B5E7-0B885877B6C2}"/>
               </a:ext>
             </a:extLst>
           </p:cNvPr>
@@ -8022,7 +8089,7 @@
           <p:cNvPr id="2" name="">
             <a:extLst xmlns:a="http://schemas.openxmlformats.org/drawingml/2006/main">
               <a:ext uri="{FF2B5EF4-FFF2-40B4-BE49-F238E27FC236}">
-                <a16:creationId xmlns:a16="http://schemas.microsoft.com/office/drawing/2014/main" id="{5F4BA5F2-2DF9-4240-B8B5-654480F34D97}"/>
+                <a16:creationId xmlns:a16="http://schemas.microsoft.com/office/drawing/2014/main" id="{8BB8A8FB-3208-4262-A421-8AEC831DBD3C}"/>
               </a:ext>
             </a:extLst>
           </p:cNvPr>
@@ -8072,7 +8139,7 @@
           <p:cNvPr id="3" name="">
             <a:extLst xmlns:a="http://schemas.openxmlformats.org/drawingml/2006/main">
               <a:ext uri="{FF2B5EF4-FFF2-40B4-BE49-F238E27FC236}">
-                <a16:creationId xmlns:a16="http://schemas.microsoft.com/office/drawing/2014/main" id="{16CBE6A2-52B9-48F9-98A8-043441451BF4}"/>
+                <a16:creationId xmlns:a16="http://schemas.microsoft.com/office/drawing/2014/main" id="{6649DB13-B600-4A16-8864-4379E3E76FC4}"/>
               </a:ext>
             </a:extLst>
           </p:cNvPr>
@@ -8122,7 +8189,7 @@
           <p:cNvPr id="4" name="">
             <a:extLst xmlns:a="http://schemas.openxmlformats.org/drawingml/2006/main">
               <a:ext uri="{FF2B5EF4-FFF2-40B4-BE49-F238E27FC236}">
-                <a16:creationId xmlns:a16="http://schemas.microsoft.com/office/drawing/2014/main" id="{382DF4B4-322F-4CE4-9D63-70E6039334C6}"/>
+                <a16:creationId xmlns:a16="http://schemas.microsoft.com/office/drawing/2014/main" id="{24AF16BD-B550-422E-8055-6A68D237FA73}"/>
               </a:ext>
             </a:extLst>
           </p:cNvPr>
@@ -8172,7 +8239,7 @@
           <p:cNvPr id="5" name="">
             <a:extLst xmlns:a="http://schemas.openxmlformats.org/drawingml/2006/main">
               <a:ext uri="{FF2B5EF4-FFF2-40B4-BE49-F238E27FC236}">
-                <a16:creationId xmlns:a16="http://schemas.microsoft.com/office/drawing/2014/main" id="{D86A6EDC-3D2F-4224-8CE7-2797E8B44321}"/>
+                <a16:creationId xmlns:a16="http://schemas.microsoft.com/office/drawing/2014/main" id="{093C306B-C738-43AD-9C44-8F873A3C76E5}"/>
               </a:ext>
             </a:extLst>
           </p:cNvPr>
@@ -8222,7 +8289,7 @@
           <p:cNvPr id="6" name="">
             <a:extLst xmlns:a="http://schemas.openxmlformats.org/drawingml/2006/main">
               <a:ext uri="{FF2B5EF4-FFF2-40B4-BE49-F238E27FC236}">
-                <a16:creationId xmlns:a16="http://schemas.microsoft.com/office/drawing/2014/main" id="{C9E40364-4687-4D96-987E-5DA38BAD0AA5}"/>
+                <a16:creationId xmlns:a16="http://schemas.microsoft.com/office/drawing/2014/main" id="{F7B5008D-8CB8-4723-B934-177F5A410A61}"/>
               </a:ext>
             </a:extLst>
           </p:cNvPr>
@@ -8257,7 +8324,7 @@
           <p:cNvPr id="7" name="">
             <a:extLst xmlns:a="http://schemas.openxmlformats.org/drawingml/2006/main">
               <a:ext uri="{FF2B5EF4-FFF2-40B4-BE49-F238E27FC236}">
-                <a16:creationId xmlns:a16="http://schemas.microsoft.com/office/drawing/2014/main" id="{5D15FB9D-8D29-4364-9A98-60EA71529D02}"/>
+                <a16:creationId xmlns:a16="http://schemas.microsoft.com/office/drawing/2014/main" id="{93F8725F-48F2-4342-A827-50E0EA3728F8}"/>
               </a:ext>
             </a:extLst>
           </p:cNvPr>
@@ -8307,7 +8374,7 @@
           <p:cNvPr id="8" name="">
             <a:extLst xmlns:a="http://schemas.openxmlformats.org/drawingml/2006/main">
               <a:ext uri="{FF2B5EF4-FFF2-40B4-BE49-F238E27FC236}">
-                <a16:creationId xmlns:a16="http://schemas.microsoft.com/office/drawing/2014/main" id="{FFDBBB01-F702-4B2A-9B42-D89355EE1417}"/>
+                <a16:creationId xmlns:a16="http://schemas.microsoft.com/office/drawing/2014/main" id="{46183E8F-5FD9-4B79-B662-E00710D4A44C}"/>
               </a:ext>
             </a:extLst>
           </p:cNvPr>
@@ -8408,7 +8475,7 @@
           <p:cNvPr id="9" name="">
             <a:extLst xmlns:a="http://schemas.openxmlformats.org/drawingml/2006/main">
               <a:ext uri="{FF2B5EF4-FFF2-40B4-BE49-F238E27FC236}">
-                <a16:creationId xmlns:a16="http://schemas.microsoft.com/office/drawing/2014/main" id="{717BE5E3-7965-4DA9-AA38-32A90D0272C0}"/>
+                <a16:creationId xmlns:a16="http://schemas.microsoft.com/office/drawing/2014/main" id="{108EAB98-8DCE-4F4F-B01C-B01B5B47DA2B}"/>
               </a:ext>
             </a:extLst>
           </p:cNvPr>
@@ -8443,7 +8510,7 @@
           <p:cNvPr id="10" name="">
             <a:extLst xmlns:a="http://schemas.openxmlformats.org/drawingml/2006/main">
               <a:ext uri="{FF2B5EF4-FFF2-40B4-BE49-F238E27FC236}">
-                <a16:creationId xmlns:a16="http://schemas.microsoft.com/office/drawing/2014/main" id="{DA23DC49-E257-44B6-9C6D-3BF49D2A0ABA}"/>
+                <a16:creationId xmlns:a16="http://schemas.microsoft.com/office/drawing/2014/main" id="{05A75E52-3188-49AE-958A-FB1124AC1899}"/>
               </a:ext>
             </a:extLst>
           </p:cNvPr>
@@ -8493,7 +8560,7 @@
           <p:cNvPr id="11" name="">
             <a:extLst xmlns:a="http://schemas.openxmlformats.org/drawingml/2006/main">
               <a:ext uri="{FF2B5EF4-FFF2-40B4-BE49-F238E27FC236}">
-                <a16:creationId xmlns:a16="http://schemas.microsoft.com/office/drawing/2014/main" id="{49DFD54F-11AA-499B-987F-A559D6C82746}"/>
+                <a16:creationId xmlns:a16="http://schemas.microsoft.com/office/drawing/2014/main" id="{E9CE5FF0-4FD3-4882-9DFA-DAA1E3E980F9}"/>
               </a:ext>
             </a:extLst>
           </p:cNvPr>
@@ -8577,7 +8644,7 @@
           <p:cNvPr id="12" name="">
             <a:extLst xmlns:a="http://schemas.openxmlformats.org/drawingml/2006/main">
               <a:ext uri="{FF2B5EF4-FFF2-40B4-BE49-F238E27FC236}">
-                <a16:creationId xmlns:a16="http://schemas.microsoft.com/office/drawing/2014/main" id="{5B56C4C9-B3AB-4DF8-A997-7A0CB6E81C6E}"/>
+                <a16:creationId xmlns:a16="http://schemas.microsoft.com/office/drawing/2014/main" id="{C2286A2E-3163-4B55-B10A-53C7AF383510}"/>
               </a:ext>
             </a:extLst>
           </p:cNvPr>
@@ -8612,7 +8679,7 @@
           <p:cNvPr id="13" name="">
             <a:extLst xmlns:a="http://schemas.openxmlformats.org/drawingml/2006/main">
               <a:ext uri="{FF2B5EF4-FFF2-40B4-BE49-F238E27FC236}">
-                <a16:creationId xmlns:a16="http://schemas.microsoft.com/office/drawing/2014/main" id="{65969BC4-5828-4440-88F0-D01886412BAD}"/>
+                <a16:creationId xmlns:a16="http://schemas.microsoft.com/office/drawing/2014/main" id="{86400644-04AF-4F1C-9AC0-30CF18908375}"/>
               </a:ext>
             </a:extLst>
           </p:cNvPr>
@@ -8662,7 +8729,7 @@
           <p:cNvPr id="14" name="">
             <a:extLst xmlns:a="http://schemas.openxmlformats.org/drawingml/2006/main">
               <a:ext uri="{FF2B5EF4-FFF2-40B4-BE49-F238E27FC236}">
-                <a16:creationId xmlns:a16="http://schemas.microsoft.com/office/drawing/2014/main" id="{89C577C5-BC82-4832-8054-EE900B3EAE79}"/>
+                <a16:creationId xmlns:a16="http://schemas.microsoft.com/office/drawing/2014/main" id="{30FBCA31-677D-4C38-A0DE-4B47CE8AB306}"/>
               </a:ext>
             </a:extLst>
           </p:cNvPr>
@@ -8744,7 +8811,7 @@
     </p:spTree>
     <p:extLst>
       <p:ext uri="{BB962C8B-B14F-4D97-AF65-F5344CB8AC3E}">
-        <p14:creationId xmlns:p14="http://schemas.microsoft.com/office/powerpoint/2010/main" val="563179940"/>
+        <p14:creationId xmlns:p14="http://schemas.microsoft.com/office/powerpoint/2010/main" val="240709301"/>
       </p:ext>
     </p:extLst>
   </p:cSld>
@@ -8775,7 +8842,7 @@
           <p:cNvPr id="1" name="">
             <a:extLst xmlns:a="http://schemas.openxmlformats.org/drawingml/2006/main">
               <a:ext uri="{FF2B5EF4-FFF2-40B4-BE49-F238E27FC236}">
-                <a16:creationId xmlns:a16="http://schemas.microsoft.com/office/drawing/2014/main" id="{59AE184B-6E7E-411C-9BB0-1CBA2DD1FD10}"/>
+                <a16:creationId xmlns:a16="http://schemas.microsoft.com/office/drawing/2014/main" id="{A802B781-B318-4930-8C55-D0DFA63A4AC7}"/>
               </a:ext>
             </a:extLst>
           </p:cNvPr>
@@ -8825,7 +8892,7 @@
           <p:cNvPr id="2" name="">
             <a:extLst xmlns:a="http://schemas.openxmlformats.org/drawingml/2006/main">
               <a:ext uri="{FF2B5EF4-FFF2-40B4-BE49-F238E27FC236}">
-                <a16:creationId xmlns:a16="http://schemas.microsoft.com/office/drawing/2014/main" id="{24CE5669-2488-4560-BEFA-F3786CACAF2B}"/>
+                <a16:creationId xmlns:a16="http://schemas.microsoft.com/office/drawing/2014/main" id="{B44D77A6-60EE-4F54-9CB7-935624DDD5AD}"/>
               </a:ext>
             </a:extLst>
           </p:cNvPr>
@@ -8875,7 +8942,7 @@
           <p:cNvPr id="3" name="">
             <a:extLst xmlns:a="http://schemas.openxmlformats.org/drawingml/2006/main">
               <a:ext uri="{FF2B5EF4-FFF2-40B4-BE49-F238E27FC236}">
-                <a16:creationId xmlns:a16="http://schemas.microsoft.com/office/drawing/2014/main" id="{3D275871-BC8A-4652-A217-78A1667D12D4}"/>
+                <a16:creationId xmlns:a16="http://schemas.microsoft.com/office/drawing/2014/main" id="{514AB06B-57AE-4833-AF1F-36F3356B95C6}"/>
               </a:ext>
             </a:extLst>
           </p:cNvPr>
@@ -8925,7 +8992,7 @@
           <p:cNvPr id="4" name="">
             <a:extLst xmlns:a="http://schemas.openxmlformats.org/drawingml/2006/main">
               <a:ext uri="{FF2B5EF4-FFF2-40B4-BE49-F238E27FC236}">
-                <a16:creationId xmlns:a16="http://schemas.microsoft.com/office/drawing/2014/main" id="{BD893BB3-3E50-4646-921F-482B5267CD8F}"/>
+                <a16:creationId xmlns:a16="http://schemas.microsoft.com/office/drawing/2014/main" id="{4CEC787E-4E11-4851-B394-C412A15B56BD}"/>
               </a:ext>
             </a:extLst>
           </p:cNvPr>
@@ -8975,7 +9042,7 @@
           <p:cNvPr id="5" name="">
             <a:extLst xmlns:a="http://schemas.openxmlformats.org/drawingml/2006/main">
               <a:ext uri="{FF2B5EF4-FFF2-40B4-BE49-F238E27FC236}">
-                <a16:creationId xmlns:a16="http://schemas.microsoft.com/office/drawing/2014/main" id="{7F6EA44F-2F81-4510-8CEF-E24B000E6728}"/>
+                <a16:creationId xmlns:a16="http://schemas.microsoft.com/office/drawing/2014/main" id="{2F78EA37-C95E-45CF-A38B-7E1E6858FCAC}"/>
               </a:ext>
             </a:extLst>
           </p:cNvPr>
@@ -9025,7 +9092,7 @@
           <p:cNvPr id="6" name="">
             <a:extLst xmlns:a="http://schemas.openxmlformats.org/drawingml/2006/main">
               <a:ext uri="{FF2B5EF4-FFF2-40B4-BE49-F238E27FC236}">
-                <a16:creationId xmlns:a16="http://schemas.microsoft.com/office/drawing/2014/main" id="{AE5E298A-F3CC-4984-8808-D93A313589CF}"/>
+                <a16:creationId xmlns:a16="http://schemas.microsoft.com/office/drawing/2014/main" id="{0DFC47D1-B5CE-4A14-83A1-3D01561BC908}"/>
               </a:ext>
             </a:extLst>
           </p:cNvPr>
@@ -9060,7 +9127,7 @@
           <p:cNvPr id="7" name="">
             <a:extLst xmlns:a="http://schemas.openxmlformats.org/drawingml/2006/main">
               <a:ext uri="{FF2B5EF4-FFF2-40B4-BE49-F238E27FC236}">
-                <a16:creationId xmlns:a16="http://schemas.microsoft.com/office/drawing/2014/main" id="{AAACC1DB-0BF8-425F-9EA2-9BB2FB898DB6}"/>
+                <a16:creationId xmlns:a16="http://schemas.microsoft.com/office/drawing/2014/main" id="{B165BC54-2510-43D7-AD60-36A176FF94AD}"/>
               </a:ext>
             </a:extLst>
           </p:cNvPr>
@@ -9095,7 +9162,7 @@
           <p:cNvPr id="8" name="">
             <a:extLst xmlns:a="http://schemas.openxmlformats.org/drawingml/2006/main">
               <a:ext uri="{FF2B5EF4-FFF2-40B4-BE49-F238E27FC236}">
-                <a16:creationId xmlns:a16="http://schemas.microsoft.com/office/drawing/2014/main" id="{3139ED99-B73F-45D9-8297-E943FF86BA47}"/>
+                <a16:creationId xmlns:a16="http://schemas.microsoft.com/office/drawing/2014/main" id="{F3889244-1D36-491C-A3D2-708171890B11}"/>
               </a:ext>
             </a:extLst>
           </p:cNvPr>
@@ -9130,7 +9197,7 @@
           <p:cNvPr id="9" name="">
             <a:extLst xmlns:a="http://schemas.openxmlformats.org/drawingml/2006/main">
               <a:ext uri="{FF2B5EF4-FFF2-40B4-BE49-F238E27FC236}">
-                <a16:creationId xmlns:a16="http://schemas.microsoft.com/office/drawing/2014/main" id="{11EA5B97-D7C1-4481-B97F-42898968D9C3}"/>
+                <a16:creationId xmlns:a16="http://schemas.microsoft.com/office/drawing/2014/main" id="{35F63AA8-0EE1-4C4A-AE23-A32DBC4B17A2}"/>
               </a:ext>
             </a:extLst>
           </p:cNvPr>
@@ -9165,7 +9232,7 @@
           <p:cNvPr id="10" name="">
             <a:extLst xmlns:a="http://schemas.openxmlformats.org/drawingml/2006/main">
               <a:ext uri="{FF2B5EF4-FFF2-40B4-BE49-F238E27FC236}">
-                <a16:creationId xmlns:a16="http://schemas.microsoft.com/office/drawing/2014/main" id="{FDA152F7-0097-4937-A239-F972043CA514}"/>
+                <a16:creationId xmlns:a16="http://schemas.microsoft.com/office/drawing/2014/main" id="{A10309F7-23B8-4E0A-AD31-DD5DDDCB2405}"/>
               </a:ext>
             </a:extLst>
           </p:cNvPr>
@@ -9200,7 +9267,7 @@
           <p:cNvPr id="11" name="">
             <a:extLst xmlns:a="http://schemas.openxmlformats.org/drawingml/2006/main">
               <a:ext uri="{FF2B5EF4-FFF2-40B4-BE49-F238E27FC236}">
-                <a16:creationId xmlns:a16="http://schemas.microsoft.com/office/drawing/2014/main" id="{44EC8409-11E2-4111-AE11-3E1D9756AD8B}"/>
+                <a16:creationId xmlns:a16="http://schemas.microsoft.com/office/drawing/2014/main" id="{4C1D0468-04E6-4230-B437-A90E65CB0809}"/>
               </a:ext>
             </a:extLst>
           </p:cNvPr>
@@ -9235,7 +9302,7 @@
           <p:cNvPr id="12" name="">
             <a:extLst xmlns:a="http://schemas.openxmlformats.org/drawingml/2006/main">
               <a:ext uri="{FF2B5EF4-FFF2-40B4-BE49-F238E27FC236}">
-                <a16:creationId xmlns:a16="http://schemas.microsoft.com/office/drawing/2014/main" id="{80267742-2D17-4E55-BBFA-A73D4F508F72}"/>
+                <a16:creationId xmlns:a16="http://schemas.microsoft.com/office/drawing/2014/main" id="{811DC55B-482C-40ED-90DD-565BA7056509}"/>
               </a:ext>
             </a:extLst>
           </p:cNvPr>
@@ -9285,7 +9352,7 @@
           <p:cNvPr id="13" name="">
             <a:extLst xmlns:a="http://schemas.openxmlformats.org/drawingml/2006/main">
               <a:ext uri="{FF2B5EF4-FFF2-40B4-BE49-F238E27FC236}">
-                <a16:creationId xmlns:a16="http://schemas.microsoft.com/office/drawing/2014/main" id="{BE20E20F-7711-42E2-9D94-57A2DC79A3A6}"/>
+                <a16:creationId xmlns:a16="http://schemas.microsoft.com/office/drawing/2014/main" id="{056D2EE8-83EC-4C7E-93ED-FC94FE4FFB60}"/>
               </a:ext>
             </a:extLst>
           </p:cNvPr>
@@ -9320,7 +9387,7 @@
           <p:cNvPr id="14" name="">
             <a:extLst xmlns:a="http://schemas.openxmlformats.org/drawingml/2006/main">
               <a:ext uri="{FF2B5EF4-FFF2-40B4-BE49-F238E27FC236}">
-                <a16:creationId xmlns:a16="http://schemas.microsoft.com/office/drawing/2014/main" id="{EE418D9E-98FB-4BBE-AB96-27C68507F328}"/>
+                <a16:creationId xmlns:a16="http://schemas.microsoft.com/office/drawing/2014/main" id="{4CD86339-0E13-41B8-85B5-90E206819171}"/>
               </a:ext>
             </a:extLst>
           </p:cNvPr>
@@ -9355,7 +9422,7 @@
           <p:cNvPr id="15" name="">
             <a:extLst xmlns:a="http://schemas.openxmlformats.org/drawingml/2006/main">
               <a:ext uri="{FF2B5EF4-FFF2-40B4-BE49-F238E27FC236}">
-                <a16:creationId xmlns:a16="http://schemas.microsoft.com/office/drawing/2014/main" id="{A51C635D-C010-4E18-961B-414952DA9376}"/>
+                <a16:creationId xmlns:a16="http://schemas.microsoft.com/office/drawing/2014/main" id="{87EB8374-A748-4C87-95D0-F869F8B09C3E}"/>
               </a:ext>
             </a:extLst>
           </p:cNvPr>
@@ -9405,7 +9472,7 @@
           <p:cNvPr id="16" name="">
             <a:extLst xmlns:a="http://schemas.openxmlformats.org/drawingml/2006/main">
               <a:ext uri="{FF2B5EF4-FFF2-40B4-BE49-F238E27FC236}">
-                <a16:creationId xmlns:a16="http://schemas.microsoft.com/office/drawing/2014/main" id="{A0E3A001-7002-4ED1-A8F8-9EC8B30AD76D}"/>
+                <a16:creationId xmlns:a16="http://schemas.microsoft.com/office/drawing/2014/main" id="{FAD221AA-4BE7-469C-835E-87F07D3E309F}"/>
               </a:ext>
             </a:extLst>
           </p:cNvPr>
@@ -9455,7 +9522,7 @@
           <p:cNvPr id="17" name="">
             <a:extLst xmlns:a="http://schemas.openxmlformats.org/drawingml/2006/main">
               <a:ext uri="{FF2B5EF4-FFF2-40B4-BE49-F238E27FC236}">
-                <a16:creationId xmlns:a16="http://schemas.microsoft.com/office/drawing/2014/main" id="{9C5824D5-E53C-429B-833F-D2F1A06C5C66}"/>
+                <a16:creationId xmlns:a16="http://schemas.microsoft.com/office/drawing/2014/main" id="{A56FC483-CB7B-4FB2-A932-F1872BC59B1C}"/>
               </a:ext>
             </a:extLst>
           </p:cNvPr>
@@ -9505,7 +9572,7 @@
           <p:cNvPr id="18" name="">
             <a:extLst xmlns:a="http://schemas.openxmlformats.org/drawingml/2006/main">
               <a:ext uri="{FF2B5EF4-FFF2-40B4-BE49-F238E27FC236}">
-                <a16:creationId xmlns:a16="http://schemas.microsoft.com/office/drawing/2014/main" id="{0B64DBCC-3644-4014-91E2-FBF4BFE92EA2}"/>
+                <a16:creationId xmlns:a16="http://schemas.microsoft.com/office/drawing/2014/main" id="{0BCC608F-F814-41C7-8062-532453169310}"/>
               </a:ext>
             </a:extLst>
           </p:cNvPr>
@@ -9540,7 +9607,7 @@
           <p:cNvPr id="19" name="">
             <a:extLst xmlns:a="http://schemas.openxmlformats.org/drawingml/2006/main">
               <a:ext uri="{FF2B5EF4-FFF2-40B4-BE49-F238E27FC236}">
-                <a16:creationId xmlns:a16="http://schemas.microsoft.com/office/drawing/2014/main" id="{06D5B334-89E1-4CFF-B037-9AD92404E708}"/>
+                <a16:creationId xmlns:a16="http://schemas.microsoft.com/office/drawing/2014/main" id="{EEE51B12-B5A3-4176-89A1-89ED854B89AC}"/>
               </a:ext>
             </a:extLst>
           </p:cNvPr>
@@ -9575,7 +9642,7 @@
           <p:cNvPr id="20" name="">
             <a:extLst xmlns:a="http://schemas.openxmlformats.org/drawingml/2006/main">
               <a:ext uri="{FF2B5EF4-FFF2-40B4-BE49-F238E27FC236}">
-                <a16:creationId xmlns:a16="http://schemas.microsoft.com/office/drawing/2014/main" id="{49EC073B-F959-4F7B-9E7F-CFF41FAD2EF3}"/>
+                <a16:creationId xmlns:a16="http://schemas.microsoft.com/office/drawing/2014/main" id="{DFE8ED2A-AEFD-476C-90BC-B529E025340C}"/>
               </a:ext>
             </a:extLst>
           </p:cNvPr>
@@ -9625,7 +9692,7 @@
           <p:cNvPr id="21" name="">
             <a:extLst xmlns:a="http://schemas.openxmlformats.org/drawingml/2006/main">
               <a:ext uri="{FF2B5EF4-FFF2-40B4-BE49-F238E27FC236}">
-                <a16:creationId xmlns:a16="http://schemas.microsoft.com/office/drawing/2014/main" id="{ED8B779A-A6D7-43CC-B34F-9CFB585D840F}"/>
+                <a16:creationId xmlns:a16="http://schemas.microsoft.com/office/drawing/2014/main" id="{C22D42E5-8DE7-44A8-826A-17E82482B33F}"/>
               </a:ext>
             </a:extLst>
           </p:cNvPr>
@@ -9675,7 +9742,7 @@
           <p:cNvPr id="22" name="">
             <a:extLst xmlns:a="http://schemas.openxmlformats.org/drawingml/2006/main">
               <a:ext uri="{FF2B5EF4-FFF2-40B4-BE49-F238E27FC236}">
-                <a16:creationId xmlns:a16="http://schemas.microsoft.com/office/drawing/2014/main" id="{50A1B4F2-70EF-4D52-A63D-8AA13449DE55}"/>
+                <a16:creationId xmlns:a16="http://schemas.microsoft.com/office/drawing/2014/main" id="{6305078B-9D71-438A-9DDE-AF7A3DD1B70F}"/>
               </a:ext>
             </a:extLst>
           </p:cNvPr>
@@ -9725,7 +9792,7 @@
           <p:cNvPr id="23" name="">
             <a:extLst xmlns:a="http://schemas.openxmlformats.org/drawingml/2006/main">
               <a:ext uri="{FF2B5EF4-FFF2-40B4-BE49-F238E27FC236}">
-                <a16:creationId xmlns:a16="http://schemas.microsoft.com/office/drawing/2014/main" id="{7715BCBC-2A62-4AB3-AE3C-E4A5ACEE3986}"/>
+                <a16:creationId xmlns:a16="http://schemas.microsoft.com/office/drawing/2014/main" id="{23D4B489-2416-4D05-B3E5-FDD439CB8C9D}"/>
               </a:ext>
             </a:extLst>
           </p:cNvPr>
@@ -9760,7 +9827,7 @@
           <p:cNvPr id="24" name="">
             <a:extLst xmlns:a="http://schemas.openxmlformats.org/drawingml/2006/main">
               <a:ext uri="{FF2B5EF4-FFF2-40B4-BE49-F238E27FC236}">
-                <a16:creationId xmlns:a16="http://schemas.microsoft.com/office/drawing/2014/main" id="{EB9EE573-4760-49A0-BD37-CC593F2A9C57}"/>
+                <a16:creationId xmlns:a16="http://schemas.microsoft.com/office/drawing/2014/main" id="{D8B71DC0-5D51-41B7-9E61-64B8F12AEF7E}"/>
               </a:ext>
             </a:extLst>
           </p:cNvPr>
@@ -9795,7 +9862,7 @@
           <p:cNvPr id="25" name="">
             <a:extLst xmlns:a="http://schemas.openxmlformats.org/drawingml/2006/main">
               <a:ext uri="{FF2B5EF4-FFF2-40B4-BE49-F238E27FC236}">
-                <a16:creationId xmlns:a16="http://schemas.microsoft.com/office/drawing/2014/main" id="{7BF9859E-D8DA-4AB3-BE20-D60B0C23077E}"/>
+                <a16:creationId xmlns:a16="http://schemas.microsoft.com/office/drawing/2014/main" id="{29829853-B7CB-423A-8E3E-EAD4AF98E6E1}"/>
               </a:ext>
             </a:extLst>
           </p:cNvPr>
@@ -9845,7 +9912,7 @@
           <p:cNvPr id="26" name="">
             <a:extLst xmlns:a="http://schemas.openxmlformats.org/drawingml/2006/main">
               <a:ext uri="{FF2B5EF4-FFF2-40B4-BE49-F238E27FC236}">
-                <a16:creationId xmlns:a16="http://schemas.microsoft.com/office/drawing/2014/main" id="{EB0CB0D7-8B10-4556-BA49-A462AEF3E3D0}"/>
+                <a16:creationId xmlns:a16="http://schemas.microsoft.com/office/drawing/2014/main" id="{B8646D83-3D1F-4211-8838-9085CC4B9509}"/>
               </a:ext>
             </a:extLst>
           </p:cNvPr>
@@ -9895,7 +9962,7 @@
           <p:cNvPr id="27" name="">
             <a:extLst xmlns:a="http://schemas.openxmlformats.org/drawingml/2006/main">
               <a:ext uri="{FF2B5EF4-FFF2-40B4-BE49-F238E27FC236}">
-                <a16:creationId xmlns:a16="http://schemas.microsoft.com/office/drawing/2014/main" id="{62334F37-24C0-4399-931C-EF01925B4F79}"/>
+                <a16:creationId xmlns:a16="http://schemas.microsoft.com/office/drawing/2014/main" id="{1661DA63-923C-422D-9130-006E3092099F}"/>
               </a:ext>
             </a:extLst>
           </p:cNvPr>
@@ -9945,7 +10012,7 @@
           <p:cNvPr id="28" name="">
             <a:extLst xmlns:a="http://schemas.openxmlformats.org/drawingml/2006/main">
               <a:ext uri="{FF2B5EF4-FFF2-40B4-BE49-F238E27FC236}">
-                <a16:creationId xmlns:a16="http://schemas.microsoft.com/office/drawing/2014/main" id="{75DC38D8-401F-4953-B583-0444D5B604EC}"/>
+                <a16:creationId xmlns:a16="http://schemas.microsoft.com/office/drawing/2014/main" id="{F279FE57-F7CE-4672-82BD-3A83015399A8}"/>
               </a:ext>
             </a:extLst>
           </p:cNvPr>
@@ -9980,7 +10047,7 @@
           <p:cNvPr id="29" name="">
             <a:extLst xmlns:a="http://schemas.openxmlformats.org/drawingml/2006/main">
               <a:ext uri="{FF2B5EF4-FFF2-40B4-BE49-F238E27FC236}">
-                <a16:creationId xmlns:a16="http://schemas.microsoft.com/office/drawing/2014/main" id="{5093E4B8-21F7-4D05-930B-29BE096500C7}"/>
+                <a16:creationId xmlns:a16="http://schemas.microsoft.com/office/drawing/2014/main" id="{DF23A4B6-0620-4146-B788-DAB1E228B55C}"/>
               </a:ext>
             </a:extLst>
           </p:cNvPr>
@@ -10015,7 +10082,7 @@
           <p:cNvPr id="30" name="">
             <a:extLst xmlns:a="http://schemas.openxmlformats.org/drawingml/2006/main">
               <a:ext uri="{FF2B5EF4-FFF2-40B4-BE49-F238E27FC236}">
-                <a16:creationId xmlns:a16="http://schemas.microsoft.com/office/drawing/2014/main" id="{23641BC4-1C3B-459B-8A28-AE0B7E46C905}"/>
+                <a16:creationId xmlns:a16="http://schemas.microsoft.com/office/drawing/2014/main" id="{75050A20-1FDE-482D-B318-B726AA426109}"/>
               </a:ext>
             </a:extLst>
           </p:cNvPr>
@@ -10065,7 +10132,7 @@
           <p:cNvPr id="31" name="">
             <a:extLst xmlns:a="http://schemas.openxmlformats.org/drawingml/2006/main">
               <a:ext uri="{FF2B5EF4-FFF2-40B4-BE49-F238E27FC236}">
-                <a16:creationId xmlns:a16="http://schemas.microsoft.com/office/drawing/2014/main" id="{82C98DC6-7A0D-4DE9-A836-1AC85BB0B644}"/>
+                <a16:creationId xmlns:a16="http://schemas.microsoft.com/office/drawing/2014/main" id="{8A547969-FB52-414B-AA01-172816C74870}"/>
               </a:ext>
             </a:extLst>
           </p:cNvPr>
@@ -10115,7 +10182,7 @@
           <p:cNvPr id="32" name="">
             <a:extLst xmlns:a="http://schemas.openxmlformats.org/drawingml/2006/main">
               <a:ext uri="{FF2B5EF4-FFF2-40B4-BE49-F238E27FC236}">
-                <a16:creationId xmlns:a16="http://schemas.microsoft.com/office/drawing/2014/main" id="{F92515B7-A497-4772-A1A4-0485E93F2FA0}"/>
+                <a16:creationId xmlns:a16="http://schemas.microsoft.com/office/drawing/2014/main" id="{93B973EC-B955-453D-8368-9FBCC6F9E2EC}"/>
               </a:ext>
             </a:extLst>
           </p:cNvPr>
@@ -10165,7 +10232,7 @@
           <p:cNvPr id="33" name="">
             <a:extLst xmlns:a="http://schemas.openxmlformats.org/drawingml/2006/main">
               <a:ext uri="{FF2B5EF4-FFF2-40B4-BE49-F238E27FC236}">
-                <a16:creationId xmlns:a16="http://schemas.microsoft.com/office/drawing/2014/main" id="{3EC8FAB1-B45A-4977-84FC-8377431E9FF3}"/>
+                <a16:creationId xmlns:a16="http://schemas.microsoft.com/office/drawing/2014/main" id="{9E289F13-C85E-4116-98A7-5DDDD4400C67}"/>
               </a:ext>
             </a:extLst>
           </p:cNvPr>
@@ -10213,7 +10280,961 @@
     </p:spTree>
     <p:extLst>
       <p:ext uri="{BB962C8B-B14F-4D97-AF65-F5344CB8AC3E}">
-        <p14:creationId xmlns:p14="http://schemas.microsoft.com/office/powerpoint/2010/main" val="993715744"/>
+        <p14:creationId xmlns:p14="http://schemas.microsoft.com/office/powerpoint/2010/main" val="1012007323"/>
+      </p:ext>
+    </p:extLst>
+  </p:cSld>
+</p:sld>
+</file>
+
+<file path=ppt/slides/slide9.xml><?xml version="1.0" encoding="utf-8"?>
+<p:sld xmlns:p="http://schemas.openxmlformats.org/presentationml/2006/main">
+  <p:cSld>
+    <p:bg>
+      <p:bgPr>
+        <a:solidFill xmlns:a="http://schemas.openxmlformats.org/drawingml/2006/main">
+          <a:srgbClr val="FEFEFE"/>
+        </a:solidFill>
+      </p:bgPr>
+    </p:bg>
+    <p:spTree>
+      <p:nvGrpSpPr>
+        <p:cNvPr id="1" name=""/>
+        <p:cNvGrpSpPr/>
+        <p:nvPr/>
+      </p:nvGrpSpPr>
+      <p:grpSpPr>
+        <a:xfrm xmlns:a="http://schemas.openxmlformats.org/drawingml/2006/main"/>
+      </p:grpSpPr>
+      <p:sp>
+        <p:nvSpPr>
+          <p:cNvPr id="1" name="">
+            <a:extLst xmlns:a="http://schemas.openxmlformats.org/drawingml/2006/main">
+              <a:ext uri="{FF2B5EF4-FFF2-40B4-BE49-F238E27FC236}">
+                <a16:creationId xmlns:a16="http://schemas.microsoft.com/office/drawing/2014/main" id="{4C301C1A-9EED-49C3-BA74-8801AA816607}"/>
+              </a:ext>
+            </a:extLst>
+          </p:cNvPr>
+          <p:cNvSpPr>
+            <a:spLocks xmlns:a="http://schemas.openxmlformats.org/drawingml/2006/main" noGrp="1"/>
+          </p:cNvSpPr>
+          <p:nvPr/>
+        </p:nvSpPr>
+        <p:spPr>
+          <a:xfrm xmlns:a="http://schemas.openxmlformats.org/drawingml/2006/main">
+            <a:off x="704850" y="428625"/>
+            <a:ext cx="1714500" cy="247650"/>
+          </a:xfrm>
+          <a:prstGeom xmlns:a="http://schemas.openxmlformats.org/drawingml/2006/main" prst="rect">
+            <a:avLst/>
+          </a:prstGeom>
+          <a:noFill xmlns:a="http://schemas.openxmlformats.org/drawingml/2006/main"/>
+          <a:ln xmlns:a="http://schemas.openxmlformats.org/drawingml/2006/main" w="0">
+            <a:noFill/>
+            <a:prstDash val="solid"/>
+          </a:ln>
+        </p:spPr>
+        <p:txBody>
+          <a:bodyPr xmlns:a="http://schemas.openxmlformats.org/drawingml/2006/main"/>
+          <a:lstStyle xmlns:a="http://schemas.openxmlformats.org/drawingml/2006/main"/>
+          <a:p xmlns:a="http://schemas.openxmlformats.org/drawingml/2006/main">
+            <a:pPr algn="l">
+              <a:defRPr sz="1500" b="1">
+                <a:solidFill>
+                  <a:srgbClr val="111111"/>
+                </a:solidFill>
+              </a:defRPr>
+            </a:pPr>
+            <a:r>
+              <a:rPr sz="1500" b="1">
+                <a:solidFill>
+                  <a:srgbClr val="111111"/>
+                </a:solidFill>
+              </a:rPr>
+              <a:t>GhostFix</a:t>
+            </a:r>
+          </a:p>
+        </p:txBody>
+      </p:sp>
+      <p:sp>
+        <p:nvSpPr>
+          <p:cNvPr id="2" name="">
+            <a:extLst xmlns:a="http://schemas.openxmlformats.org/drawingml/2006/main">
+              <a:ext uri="{FF2B5EF4-FFF2-40B4-BE49-F238E27FC236}">
+                <a16:creationId xmlns:a16="http://schemas.microsoft.com/office/drawing/2014/main" id="{9CC1A1B1-0D83-4E0B-96BC-BF9DF6412D2F}"/>
+              </a:ext>
+            </a:extLst>
+          </p:cNvPr>
+          <p:cNvSpPr>
+            <a:spLocks xmlns:a="http://schemas.openxmlformats.org/drawingml/2006/main" noGrp="1"/>
+          </p:cNvSpPr>
+          <p:nvPr/>
+        </p:nvSpPr>
+        <p:spPr>
+          <a:xfrm xmlns:a="http://schemas.openxmlformats.org/drawingml/2006/main">
+            <a:off x="8810625" y="457200"/>
+            <a:ext cx="2667000" cy="209550"/>
+          </a:xfrm>
+          <a:prstGeom xmlns:a="http://schemas.openxmlformats.org/drawingml/2006/main" prst="rect">
+            <a:avLst/>
+          </a:prstGeom>
+          <a:noFill xmlns:a="http://schemas.openxmlformats.org/drawingml/2006/main"/>
+          <a:ln xmlns:a="http://schemas.openxmlformats.org/drawingml/2006/main" w="0">
+            <a:noFill/>
+            <a:prstDash val="solid"/>
+          </a:ln>
+        </p:spPr>
+        <p:txBody>
+          <a:bodyPr xmlns:a="http://schemas.openxmlformats.org/drawingml/2006/main"/>
+          <a:lstStyle xmlns:a="http://schemas.openxmlformats.org/drawingml/2006/main"/>
+          <a:p xmlns:a="http://schemas.openxmlformats.org/drawingml/2006/main">
+            <a:pPr algn="r">
+              <a:defRPr sz="1050" b="1">
+                <a:solidFill>
+                  <a:srgbClr val="7A7A7A"/>
+                </a:solidFill>
+              </a:defRPr>
+            </a:pPr>
+            <a:r>
+              <a:rPr sz="1050" b="1">
+                <a:solidFill>
+                  <a:srgbClr val="7A7A7A"/>
+                </a:solidFill>
+              </a:rPr>
+              <a:t>RESOURCES</a:t>
+            </a:r>
+          </a:p>
+        </p:txBody>
+      </p:sp>
+      <p:sp>
+        <p:nvSpPr>
+          <p:cNvPr id="3" name="">
+            <a:extLst xmlns:a="http://schemas.openxmlformats.org/drawingml/2006/main">
+              <a:ext uri="{FF2B5EF4-FFF2-40B4-BE49-F238E27FC236}">
+                <a16:creationId xmlns:a16="http://schemas.microsoft.com/office/drawing/2014/main" id="{32F0295F-D2F6-498D-A2DA-97B781E875EE}"/>
+              </a:ext>
+            </a:extLst>
+          </p:cNvPr>
+          <p:cNvSpPr>
+            <a:spLocks xmlns:a="http://schemas.openxmlformats.org/drawingml/2006/main" noGrp="1"/>
+          </p:cNvSpPr>
+          <p:nvPr/>
+        </p:nvSpPr>
+        <p:spPr>
+          <a:xfrm xmlns:a="http://schemas.openxmlformats.org/drawingml/2006/main">
+            <a:off x="704850" y="990600"/>
+            <a:ext cx="7905750" cy="1123950"/>
+          </a:xfrm>
+          <a:prstGeom xmlns:a="http://schemas.openxmlformats.org/drawingml/2006/main" prst="rect">
+            <a:avLst/>
+          </a:prstGeom>
+          <a:noFill xmlns:a="http://schemas.openxmlformats.org/drawingml/2006/main"/>
+          <a:ln xmlns:a="http://schemas.openxmlformats.org/drawingml/2006/main" w="0">
+            <a:noFill/>
+            <a:prstDash val="solid"/>
+          </a:ln>
+        </p:spPr>
+        <p:txBody>
+          <a:bodyPr xmlns:a="http://schemas.openxmlformats.org/drawingml/2006/main"/>
+          <a:lstStyle xmlns:a="http://schemas.openxmlformats.org/drawingml/2006/main"/>
+          <a:p xmlns:a="http://schemas.openxmlformats.org/drawingml/2006/main">
+            <a:pPr algn="l">
+              <a:defRPr sz="3000" b="1">
+                <a:solidFill>
+                  <a:srgbClr val="111111"/>
+                </a:solidFill>
+              </a:defRPr>
+            </a:pPr>
+            <a:r>
+              <a:rPr sz="3000" b="1">
+                <a:solidFill>
+                  <a:srgbClr val="111111"/>
+                </a:solidFill>
+              </a:rPr>
+              <a:t>How this was made</a:t>
+            </a:r>
+          </a:p>
+        </p:txBody>
+      </p:sp>
+      <p:sp>
+        <p:nvSpPr>
+          <p:cNvPr id="4" name="">
+            <a:extLst xmlns:a="http://schemas.openxmlformats.org/drawingml/2006/main">
+              <a:ext uri="{FF2B5EF4-FFF2-40B4-BE49-F238E27FC236}">
+                <a16:creationId xmlns:a16="http://schemas.microsoft.com/office/drawing/2014/main" id="{230C60D8-4A44-4C6F-A3B3-0BF188AB4CFD}"/>
+              </a:ext>
+            </a:extLst>
+          </p:cNvPr>
+          <p:cNvSpPr>
+            <a:spLocks xmlns:a="http://schemas.openxmlformats.org/drawingml/2006/main" noGrp="1"/>
+          </p:cNvSpPr>
+          <p:nvPr/>
+        </p:nvSpPr>
+        <p:spPr>
+          <a:xfrm xmlns:a="http://schemas.openxmlformats.org/drawingml/2006/main">
+            <a:off x="723900" y="2114550"/>
+            <a:ext cx="7239000" cy="628650"/>
+          </a:xfrm>
+          <a:prstGeom xmlns:a="http://schemas.openxmlformats.org/drawingml/2006/main" prst="rect">
+            <a:avLst/>
+          </a:prstGeom>
+          <a:noFill xmlns:a="http://schemas.openxmlformats.org/drawingml/2006/main"/>
+          <a:ln xmlns:a="http://schemas.openxmlformats.org/drawingml/2006/main" w="0">
+            <a:noFill/>
+            <a:prstDash val="solid"/>
+          </a:ln>
+        </p:spPr>
+        <p:txBody>
+          <a:bodyPr xmlns:a="http://schemas.openxmlformats.org/drawingml/2006/main"/>
+          <a:lstStyle xmlns:a="http://schemas.openxmlformats.org/drawingml/2006/main"/>
+          <a:p xmlns:a="http://schemas.openxmlformats.org/drawingml/2006/main">
+            <a:pPr algn="l">
+              <a:defRPr sz="1500" b="0">
+                <a:solidFill>
+                  <a:srgbClr val="7A7A7A"/>
+                </a:solidFill>
+              </a:defRPr>
+            </a:pPr>
+            <a:r>
+              <a:rPr sz="1500" b="0">
+                <a:solidFill>
+                  <a:srgbClr val="7A7A7A"/>
+                </a:solidFill>
+              </a:rPr>
+              <a:t>GhostFix came together as a lightweight AI-assisted build, with each tool owning a clear part of the stack.</a:t>
+            </a:r>
+          </a:p>
+        </p:txBody>
+      </p:sp>
+      <p:sp>
+        <p:nvSpPr>
+          <p:cNvPr id="5" name="">
+            <a:extLst xmlns:a="http://schemas.openxmlformats.org/drawingml/2006/main">
+              <a:ext uri="{FF2B5EF4-FFF2-40B4-BE49-F238E27FC236}">
+                <a16:creationId xmlns:a16="http://schemas.microsoft.com/office/drawing/2014/main" id="{410907CD-F7E1-4C13-929C-E1441C2853C2}"/>
+              </a:ext>
+            </a:extLst>
+          </p:cNvPr>
+          <p:cNvSpPr>
+            <a:spLocks xmlns:a="http://schemas.openxmlformats.org/drawingml/2006/main" noGrp="1"/>
+          </p:cNvSpPr>
+          <p:nvPr/>
+        </p:nvSpPr>
+        <p:spPr>
+          <a:xfrm xmlns:a="http://schemas.openxmlformats.org/drawingml/2006/main">
+            <a:off x="10953750" y="6153150"/>
+            <a:ext cx="571500" cy="190500"/>
+          </a:xfrm>
+          <a:prstGeom xmlns:a="http://schemas.openxmlformats.org/drawingml/2006/main" prst="rect">
+            <a:avLst/>
+          </a:prstGeom>
+          <a:noFill xmlns:a="http://schemas.openxmlformats.org/drawingml/2006/main"/>
+          <a:ln xmlns:a="http://schemas.openxmlformats.org/drawingml/2006/main" w="0">
+            <a:noFill/>
+            <a:prstDash val="solid"/>
+          </a:ln>
+        </p:spPr>
+        <p:txBody>
+          <a:bodyPr xmlns:a="http://schemas.openxmlformats.org/drawingml/2006/main"/>
+          <a:lstStyle xmlns:a="http://schemas.openxmlformats.org/drawingml/2006/main"/>
+          <a:p xmlns:a="http://schemas.openxmlformats.org/drawingml/2006/main">
+            <a:pPr algn="r">
+              <a:defRPr sz="975" b="0">
+                <a:solidFill>
+                  <a:srgbClr val="7A7A7A"/>
+                </a:solidFill>
+              </a:defRPr>
+            </a:pPr>
+            <a:r>
+              <a:rPr sz="975" b="0">
+                <a:solidFill>
+                  <a:srgbClr val="7A7A7A"/>
+                </a:solidFill>
+              </a:rPr>
+              <a:t>09</a:t>
+            </a:r>
+          </a:p>
+        </p:txBody>
+      </p:sp>
+      <p:sp>
+        <p:nvSpPr>
+          <p:cNvPr id="6" name="">
+            <a:extLst xmlns:a="http://schemas.openxmlformats.org/drawingml/2006/main">
+              <a:ext uri="{FF2B5EF4-FFF2-40B4-BE49-F238E27FC236}">
+                <a16:creationId xmlns:a16="http://schemas.microsoft.com/office/drawing/2014/main" id="{6F5AFB0D-2A63-4668-BEF2-89AA6A6F3787}"/>
+              </a:ext>
+            </a:extLst>
+          </p:cNvPr>
+          <p:cNvSpPr>
+            <a:spLocks xmlns:a="http://schemas.openxmlformats.org/drawingml/2006/main" noGrp="1"/>
+          </p:cNvSpPr>
+          <p:nvPr/>
+        </p:nvSpPr>
+        <p:spPr>
+          <a:xfrm xmlns:a="http://schemas.openxmlformats.org/drawingml/2006/main">
+            <a:off x="819150" y="3028950"/>
+            <a:ext cx="4762500" cy="952500"/>
+          </a:xfrm>
+          <a:prstGeom xmlns:a="http://schemas.openxmlformats.org/drawingml/2006/main" prst="roundRect">
+            <a:avLst>
+              <a:gd name="adj" fmla="val 16000"/>
+            </a:avLst>
+          </a:prstGeom>
+          <a:solidFill xmlns:a="http://schemas.openxmlformats.org/drawingml/2006/main">
+            <a:srgbClr val="FDF4F8"/>
+          </a:solidFill>
+          <a:ln xmlns:a="http://schemas.openxmlformats.org/drawingml/2006/main" w="13335">
+            <a:solidFill>
+              <a:srgbClr val="F4A8CB"/>
+            </a:solidFill>
+            <a:prstDash val="solid"/>
+          </a:ln>
+        </p:spPr>
+      </p:sp>
+      <p:sp>
+        <p:nvSpPr>
+          <p:cNvPr id="7" name="">
+            <a:extLst xmlns:a="http://schemas.openxmlformats.org/drawingml/2006/main">
+              <a:ext uri="{FF2B5EF4-FFF2-40B4-BE49-F238E27FC236}">
+                <a16:creationId xmlns:a16="http://schemas.microsoft.com/office/drawing/2014/main" id="{2B474CAD-4F55-4DC0-BE89-A44FD5752A91}"/>
+              </a:ext>
+            </a:extLst>
+          </p:cNvPr>
+          <p:cNvSpPr>
+            <a:spLocks xmlns:a="http://schemas.openxmlformats.org/drawingml/2006/main" noGrp="1"/>
+          </p:cNvSpPr>
+          <p:nvPr/>
+        </p:nvSpPr>
+        <p:spPr>
+          <a:xfrm xmlns:a="http://schemas.openxmlformats.org/drawingml/2006/main">
+            <a:off x="1085850" y="3219450"/>
+            <a:ext cx="1809750" cy="285750"/>
+          </a:xfrm>
+          <a:prstGeom xmlns:a="http://schemas.openxmlformats.org/drawingml/2006/main" prst="rect">
+            <a:avLst/>
+          </a:prstGeom>
+          <a:noFill xmlns:a="http://schemas.openxmlformats.org/drawingml/2006/main"/>
+          <a:ln xmlns:a="http://schemas.openxmlformats.org/drawingml/2006/main" w="0">
+            <a:noFill/>
+            <a:prstDash val="solid"/>
+          </a:ln>
+        </p:spPr>
+        <p:txBody>
+          <a:bodyPr xmlns:a="http://schemas.openxmlformats.org/drawingml/2006/main"/>
+          <a:lstStyle xmlns:a="http://schemas.openxmlformats.org/drawingml/2006/main"/>
+          <a:p xmlns:a="http://schemas.openxmlformats.org/drawingml/2006/main">
+            <a:pPr algn="l">
+              <a:defRPr sz="1950" b="1">
+                <a:solidFill>
+                  <a:srgbClr val="111111"/>
+                </a:solidFill>
+              </a:defRPr>
+            </a:pPr>
+            <a:r>
+              <a:rPr sz="1950" b="1">
+                <a:solidFill>
+                  <a:srgbClr val="111111"/>
+                </a:solidFill>
+              </a:rPr>
+              <a:t>Codex</a:t>
+            </a:r>
+          </a:p>
+        </p:txBody>
+      </p:sp>
+      <p:sp>
+        <p:nvSpPr>
+          <p:cNvPr id="8" name="">
+            <a:extLst xmlns:a="http://schemas.openxmlformats.org/drawingml/2006/main">
+              <a:ext uri="{FF2B5EF4-FFF2-40B4-BE49-F238E27FC236}">
+                <a16:creationId xmlns:a16="http://schemas.microsoft.com/office/drawing/2014/main" id="{6353F906-0D7B-4EEF-B0E9-AB87B76C6CDD}"/>
+              </a:ext>
+            </a:extLst>
+          </p:cNvPr>
+          <p:cNvSpPr>
+            <a:spLocks xmlns:a="http://schemas.openxmlformats.org/drawingml/2006/main" noGrp="1"/>
+          </p:cNvSpPr>
+          <p:nvPr/>
+        </p:nvSpPr>
+        <p:spPr>
+          <a:xfrm xmlns:a="http://schemas.openxmlformats.org/drawingml/2006/main">
+            <a:off x="1085850" y="3581400"/>
+            <a:ext cx="3905250" cy="266700"/>
+          </a:xfrm>
+          <a:prstGeom xmlns:a="http://schemas.openxmlformats.org/drawingml/2006/main" prst="rect">
+            <a:avLst/>
+          </a:prstGeom>
+          <a:noFill xmlns:a="http://schemas.openxmlformats.org/drawingml/2006/main"/>
+          <a:ln xmlns:a="http://schemas.openxmlformats.org/drawingml/2006/main" w="0">
+            <a:noFill/>
+            <a:prstDash val="solid"/>
+          </a:ln>
+        </p:spPr>
+        <p:txBody>
+          <a:bodyPr xmlns:a="http://schemas.openxmlformats.org/drawingml/2006/main"/>
+          <a:lstStyle xmlns:a="http://schemas.openxmlformats.org/drawingml/2006/main"/>
+          <a:p xmlns:a="http://schemas.openxmlformats.org/drawingml/2006/main">
+            <a:pPr algn="l">
+              <a:defRPr sz="1125" b="0">
+                <a:solidFill>
+                  <a:srgbClr val="7A7A7A"/>
+                </a:solidFill>
+              </a:defRPr>
+            </a:pPr>
+            <a:r>
+              <a:rPr sz="1125" b="0">
+                <a:solidFill>
+                  <a:srgbClr val="7A7A7A"/>
+                </a:solidFill>
+              </a:rPr>
+              <a:t>Built and iterated the app, demo site, deck, and Git workflow.</a:t>
+            </a:r>
+          </a:p>
+        </p:txBody>
+      </p:sp>
+      <p:sp>
+        <p:nvSpPr>
+          <p:cNvPr id="9" name="">
+            <a:extLst xmlns:a="http://schemas.openxmlformats.org/drawingml/2006/main">
+              <a:ext uri="{FF2B5EF4-FFF2-40B4-BE49-F238E27FC236}">
+                <a16:creationId xmlns:a16="http://schemas.microsoft.com/office/drawing/2014/main" id="{84D46141-494B-45A0-81E9-D024CE0D34C9}"/>
+              </a:ext>
+            </a:extLst>
+          </p:cNvPr>
+          <p:cNvSpPr>
+            <a:spLocks xmlns:a="http://schemas.openxmlformats.org/drawingml/2006/main" noGrp="1"/>
+          </p:cNvSpPr>
+          <p:nvPr/>
+        </p:nvSpPr>
+        <p:spPr>
+          <a:xfrm xmlns:a="http://schemas.openxmlformats.org/drawingml/2006/main">
+            <a:off x="6134100" y="3028950"/>
+            <a:ext cx="4762500" cy="952500"/>
+          </a:xfrm>
+          <a:prstGeom xmlns:a="http://schemas.openxmlformats.org/drawingml/2006/main" prst="roundRect">
+            <a:avLst>
+              <a:gd name="adj" fmla="val 16000"/>
+            </a:avLst>
+          </a:prstGeom>
+          <a:solidFill xmlns:a="http://schemas.openxmlformats.org/drawingml/2006/main">
+            <a:srgbClr val="111111"/>
+          </a:solidFill>
+          <a:ln xmlns:a="http://schemas.openxmlformats.org/drawingml/2006/main" w="13335">
+            <a:solidFill>
+              <a:srgbClr val="FCE8F1"/>
+            </a:solidFill>
+            <a:prstDash val="solid"/>
+          </a:ln>
+        </p:spPr>
+      </p:sp>
+      <p:sp>
+        <p:nvSpPr>
+          <p:cNvPr id="10" name="">
+            <a:extLst xmlns:a="http://schemas.openxmlformats.org/drawingml/2006/main">
+              <a:ext uri="{FF2B5EF4-FFF2-40B4-BE49-F238E27FC236}">
+                <a16:creationId xmlns:a16="http://schemas.microsoft.com/office/drawing/2014/main" id="{00207B32-BCD4-40B6-BA26-88F52DF8A690}"/>
+              </a:ext>
+            </a:extLst>
+          </p:cNvPr>
+          <p:cNvSpPr>
+            <a:spLocks xmlns:a="http://schemas.openxmlformats.org/drawingml/2006/main" noGrp="1"/>
+          </p:cNvSpPr>
+          <p:nvPr/>
+        </p:nvSpPr>
+        <p:spPr>
+          <a:xfrm xmlns:a="http://schemas.openxmlformats.org/drawingml/2006/main">
+            <a:off x="6400800" y="3219450"/>
+            <a:ext cx="1809750" cy="285750"/>
+          </a:xfrm>
+          <a:prstGeom xmlns:a="http://schemas.openxmlformats.org/drawingml/2006/main" prst="rect">
+            <a:avLst/>
+          </a:prstGeom>
+          <a:noFill xmlns:a="http://schemas.openxmlformats.org/drawingml/2006/main"/>
+          <a:ln xmlns:a="http://schemas.openxmlformats.org/drawingml/2006/main" w="0">
+            <a:noFill/>
+            <a:prstDash val="solid"/>
+          </a:ln>
+        </p:spPr>
+        <p:txBody>
+          <a:bodyPr xmlns:a="http://schemas.openxmlformats.org/drawingml/2006/main"/>
+          <a:lstStyle xmlns:a="http://schemas.openxmlformats.org/drawingml/2006/main"/>
+          <a:p xmlns:a="http://schemas.openxmlformats.org/drawingml/2006/main">
+            <a:pPr algn="l">
+              <a:defRPr sz="1950" b="1">
+                <a:solidFill>
+                  <a:srgbClr val="FFFFFF"/>
+                </a:solidFill>
+              </a:defRPr>
+            </a:pPr>
+            <a:r>
+              <a:rPr sz="1950" b="1">
+                <a:solidFill>
+                  <a:srgbClr val="FFFFFF"/>
+                </a:solidFill>
+              </a:rPr>
+              <a:t>Claude</a:t>
+            </a:r>
+          </a:p>
+        </p:txBody>
+      </p:sp>
+      <p:sp>
+        <p:nvSpPr>
+          <p:cNvPr id="11" name="">
+            <a:extLst xmlns:a="http://schemas.openxmlformats.org/drawingml/2006/main">
+              <a:ext uri="{FF2B5EF4-FFF2-40B4-BE49-F238E27FC236}">
+                <a16:creationId xmlns:a16="http://schemas.microsoft.com/office/drawing/2014/main" id="{4C869324-5023-4A36-B5E0-D7739DF50D21}"/>
+              </a:ext>
+            </a:extLst>
+          </p:cNvPr>
+          <p:cNvSpPr>
+            <a:spLocks xmlns:a="http://schemas.openxmlformats.org/drawingml/2006/main" noGrp="1"/>
+          </p:cNvSpPr>
+          <p:nvPr/>
+        </p:nvSpPr>
+        <p:spPr>
+          <a:xfrm xmlns:a="http://schemas.openxmlformats.org/drawingml/2006/main">
+            <a:off x="6400800" y="3581400"/>
+            <a:ext cx="3905250" cy="266700"/>
+          </a:xfrm>
+          <a:prstGeom xmlns:a="http://schemas.openxmlformats.org/drawingml/2006/main" prst="rect">
+            <a:avLst/>
+          </a:prstGeom>
+          <a:noFill xmlns:a="http://schemas.openxmlformats.org/drawingml/2006/main"/>
+          <a:ln xmlns:a="http://schemas.openxmlformats.org/drawingml/2006/main" w="0">
+            <a:noFill/>
+            <a:prstDash val="solid"/>
+          </a:ln>
+        </p:spPr>
+        <p:txBody>
+          <a:bodyPr xmlns:a="http://schemas.openxmlformats.org/drawingml/2006/main"/>
+          <a:lstStyle xmlns:a="http://schemas.openxmlformats.org/drawingml/2006/main"/>
+          <a:p xmlns:a="http://schemas.openxmlformats.org/drawingml/2006/main">
+            <a:pPr algn="l">
+              <a:defRPr sz="1125" b="0">
+                <a:solidFill>
+                  <a:srgbClr val="F9D0E3"/>
+                </a:solidFill>
+              </a:defRPr>
+            </a:pPr>
+            <a:r>
+              <a:rPr sz="1125" b="0">
+                <a:solidFill>
+                  <a:srgbClr val="F9D0E3"/>
+                </a:solidFill>
+              </a:rPr>
+              <a:t>Generated repair drafts and content strategy outputs.</a:t>
+            </a:r>
+          </a:p>
+        </p:txBody>
+      </p:sp>
+      <p:sp>
+        <p:nvSpPr>
+          <p:cNvPr id="12" name="">
+            <a:extLst xmlns:a="http://schemas.openxmlformats.org/drawingml/2006/main">
+              <a:ext uri="{FF2B5EF4-FFF2-40B4-BE49-F238E27FC236}">
+                <a16:creationId xmlns:a16="http://schemas.microsoft.com/office/drawing/2014/main" id="{C1403616-AE0A-4055-BE58-4585BA18E37A}"/>
+              </a:ext>
+            </a:extLst>
+          </p:cNvPr>
+          <p:cNvSpPr>
+            <a:spLocks xmlns:a="http://schemas.openxmlformats.org/drawingml/2006/main" noGrp="1"/>
+          </p:cNvSpPr>
+          <p:nvPr/>
+        </p:nvSpPr>
+        <p:spPr>
+          <a:xfrm xmlns:a="http://schemas.openxmlformats.org/drawingml/2006/main">
+            <a:off x="819150" y="4324350"/>
+            <a:ext cx="4762500" cy="952500"/>
+          </a:xfrm>
+          <a:prstGeom xmlns:a="http://schemas.openxmlformats.org/drawingml/2006/main" prst="roundRect">
+            <a:avLst>
+              <a:gd name="adj" fmla="val 16000"/>
+            </a:avLst>
+          </a:prstGeom>
+          <a:solidFill xmlns:a="http://schemas.openxmlformats.org/drawingml/2006/main">
+            <a:srgbClr val="FFFFFF"/>
+          </a:solidFill>
+          <a:ln xmlns:a="http://schemas.openxmlformats.org/drawingml/2006/main" w="13335">
+            <a:solidFill>
+              <a:srgbClr val="FCE8F1"/>
+            </a:solidFill>
+            <a:prstDash val="solid"/>
+          </a:ln>
+        </p:spPr>
+      </p:sp>
+      <p:sp>
+        <p:nvSpPr>
+          <p:cNvPr id="13" name="">
+            <a:extLst xmlns:a="http://schemas.openxmlformats.org/drawingml/2006/main">
+              <a:ext uri="{FF2B5EF4-FFF2-40B4-BE49-F238E27FC236}">
+                <a16:creationId xmlns:a16="http://schemas.microsoft.com/office/drawing/2014/main" id="{729D901A-DF09-448C-A0B6-5E5EA49961BB}"/>
+              </a:ext>
+            </a:extLst>
+          </p:cNvPr>
+          <p:cNvSpPr>
+            <a:spLocks xmlns:a="http://schemas.openxmlformats.org/drawingml/2006/main" noGrp="1"/>
+          </p:cNvSpPr>
+          <p:nvPr/>
+        </p:nvSpPr>
+        <p:spPr>
+          <a:xfrm xmlns:a="http://schemas.openxmlformats.org/drawingml/2006/main">
+            <a:off x="1085850" y="4514850"/>
+            <a:ext cx="1809750" cy="285750"/>
+          </a:xfrm>
+          <a:prstGeom xmlns:a="http://schemas.openxmlformats.org/drawingml/2006/main" prst="rect">
+            <a:avLst/>
+          </a:prstGeom>
+          <a:noFill xmlns:a="http://schemas.openxmlformats.org/drawingml/2006/main"/>
+          <a:ln xmlns:a="http://schemas.openxmlformats.org/drawingml/2006/main" w="0">
+            <a:noFill/>
+            <a:prstDash val="solid"/>
+          </a:ln>
+        </p:spPr>
+        <p:txBody>
+          <a:bodyPr xmlns:a="http://schemas.openxmlformats.org/drawingml/2006/main"/>
+          <a:lstStyle xmlns:a="http://schemas.openxmlformats.org/drawingml/2006/main"/>
+          <a:p xmlns:a="http://schemas.openxmlformats.org/drawingml/2006/main">
+            <a:pPr algn="l">
+              <a:defRPr sz="1950" b="1">
+                <a:solidFill>
+                  <a:srgbClr val="111111"/>
+                </a:solidFill>
+              </a:defRPr>
+            </a:pPr>
+            <a:r>
+              <a:rPr sz="1950" b="1">
+                <a:solidFill>
+                  <a:srgbClr val="111111"/>
+                </a:solidFill>
+              </a:rPr>
+              <a:t>Supabase</a:t>
+            </a:r>
+          </a:p>
+        </p:txBody>
+      </p:sp>
+      <p:sp>
+        <p:nvSpPr>
+          <p:cNvPr id="14" name="">
+            <a:extLst xmlns:a="http://schemas.openxmlformats.org/drawingml/2006/main">
+              <a:ext uri="{FF2B5EF4-FFF2-40B4-BE49-F238E27FC236}">
+                <a16:creationId xmlns:a16="http://schemas.microsoft.com/office/drawing/2014/main" id="{B5E4706E-8CBF-43CC-96A2-A7F7156E170F}"/>
+              </a:ext>
+            </a:extLst>
+          </p:cNvPr>
+          <p:cNvSpPr>
+            <a:spLocks xmlns:a="http://schemas.openxmlformats.org/drawingml/2006/main" noGrp="1"/>
+          </p:cNvSpPr>
+          <p:nvPr/>
+        </p:nvSpPr>
+        <p:spPr>
+          <a:xfrm xmlns:a="http://schemas.openxmlformats.org/drawingml/2006/main">
+            <a:off x="1085850" y="4876800"/>
+            <a:ext cx="3905250" cy="266700"/>
+          </a:xfrm>
+          <a:prstGeom xmlns:a="http://schemas.openxmlformats.org/drawingml/2006/main" prst="rect">
+            <a:avLst/>
+          </a:prstGeom>
+          <a:noFill xmlns:a="http://schemas.openxmlformats.org/drawingml/2006/main"/>
+          <a:ln xmlns:a="http://schemas.openxmlformats.org/drawingml/2006/main" w="0">
+            <a:noFill/>
+            <a:prstDash val="solid"/>
+          </a:ln>
+        </p:spPr>
+        <p:txBody>
+          <a:bodyPr xmlns:a="http://schemas.openxmlformats.org/drawingml/2006/main"/>
+          <a:lstStyle xmlns:a="http://schemas.openxmlformats.org/drawingml/2006/main"/>
+          <a:p xmlns:a="http://schemas.openxmlformats.org/drawingml/2006/main">
+            <a:pPr algn="l">
+              <a:defRPr sz="1125" b="0">
+                <a:solidFill>
+                  <a:srgbClr val="7A7A7A"/>
+                </a:solidFill>
+              </a:defRPr>
+            </a:pPr>
+            <a:r>
+              <a:rPr sz="1125" b="0">
+                <a:solidFill>
+                  <a:srgbClr val="7A7A7A"/>
+                </a:solidFill>
+              </a:rPr>
+              <a:t>Stores analysis results, score breakdowns, and generated fixes.</a:t>
+            </a:r>
+          </a:p>
+        </p:txBody>
+      </p:sp>
+      <p:sp>
+        <p:nvSpPr>
+          <p:cNvPr id="15" name="">
+            <a:extLst xmlns:a="http://schemas.openxmlformats.org/drawingml/2006/main">
+              <a:ext uri="{FF2B5EF4-FFF2-40B4-BE49-F238E27FC236}">
+                <a16:creationId xmlns:a16="http://schemas.microsoft.com/office/drawing/2014/main" id="{C199738E-1E7F-439F-AEBB-DC02D100FB0A}"/>
+              </a:ext>
+            </a:extLst>
+          </p:cNvPr>
+          <p:cNvSpPr>
+            <a:spLocks xmlns:a="http://schemas.openxmlformats.org/drawingml/2006/main" noGrp="1"/>
+          </p:cNvSpPr>
+          <p:nvPr/>
+        </p:nvSpPr>
+        <p:spPr>
+          <a:xfrm xmlns:a="http://schemas.openxmlformats.org/drawingml/2006/main">
+            <a:off x="6134100" y="4324350"/>
+            <a:ext cx="4762500" cy="952500"/>
+          </a:xfrm>
+          <a:prstGeom xmlns:a="http://schemas.openxmlformats.org/drawingml/2006/main" prst="roundRect">
+            <a:avLst>
+              <a:gd name="adj" fmla="val 16000"/>
+            </a:avLst>
+          </a:prstGeom>
+          <a:solidFill xmlns:a="http://schemas.openxmlformats.org/drawingml/2006/main">
+            <a:srgbClr val="FFFFFF"/>
+          </a:solidFill>
+          <a:ln xmlns:a="http://schemas.openxmlformats.org/drawingml/2006/main" w="13335">
+            <a:solidFill>
+              <a:srgbClr val="FCE8F1"/>
+            </a:solidFill>
+            <a:prstDash val="solid"/>
+          </a:ln>
+        </p:spPr>
+      </p:sp>
+      <p:sp>
+        <p:nvSpPr>
+          <p:cNvPr id="16" name="">
+            <a:extLst xmlns:a="http://schemas.openxmlformats.org/drawingml/2006/main">
+              <a:ext uri="{FF2B5EF4-FFF2-40B4-BE49-F238E27FC236}">
+                <a16:creationId xmlns:a16="http://schemas.microsoft.com/office/drawing/2014/main" id="{7757EE1B-916C-41FD-A078-AD99A53FC7DC}"/>
+              </a:ext>
+            </a:extLst>
+          </p:cNvPr>
+          <p:cNvSpPr>
+            <a:spLocks xmlns:a="http://schemas.openxmlformats.org/drawingml/2006/main" noGrp="1"/>
+          </p:cNvSpPr>
+          <p:nvPr/>
+        </p:nvSpPr>
+        <p:spPr>
+          <a:xfrm xmlns:a="http://schemas.openxmlformats.org/drawingml/2006/main">
+            <a:off x="6400800" y="4514850"/>
+            <a:ext cx="1809750" cy="285750"/>
+          </a:xfrm>
+          <a:prstGeom xmlns:a="http://schemas.openxmlformats.org/drawingml/2006/main" prst="rect">
+            <a:avLst/>
+          </a:prstGeom>
+          <a:noFill xmlns:a="http://schemas.openxmlformats.org/drawingml/2006/main"/>
+          <a:ln xmlns:a="http://schemas.openxmlformats.org/drawingml/2006/main" w="0">
+            <a:noFill/>
+            <a:prstDash val="solid"/>
+          </a:ln>
+        </p:spPr>
+        <p:txBody>
+          <a:bodyPr xmlns:a="http://schemas.openxmlformats.org/drawingml/2006/main"/>
+          <a:lstStyle xmlns:a="http://schemas.openxmlformats.org/drawingml/2006/main"/>
+          <a:p xmlns:a="http://schemas.openxmlformats.org/drawingml/2006/main">
+            <a:pPr algn="l">
+              <a:defRPr sz="1950" b="1">
+                <a:solidFill>
+                  <a:srgbClr val="111111"/>
+                </a:solidFill>
+              </a:defRPr>
+            </a:pPr>
+            <a:r>
+              <a:rPr sz="1950" b="1">
+                <a:solidFill>
+                  <a:srgbClr val="111111"/>
+                </a:solidFill>
+              </a:rPr>
+              <a:t>Kiro</a:t>
+            </a:r>
+          </a:p>
+        </p:txBody>
+      </p:sp>
+      <p:sp>
+        <p:nvSpPr>
+          <p:cNvPr id="17" name="">
+            <a:extLst xmlns:a="http://schemas.openxmlformats.org/drawingml/2006/main">
+              <a:ext uri="{FF2B5EF4-FFF2-40B4-BE49-F238E27FC236}">
+                <a16:creationId xmlns:a16="http://schemas.microsoft.com/office/drawing/2014/main" id="{A0CCAD91-CBD0-4DC6-ADF4-4E2B499CF747}"/>
+              </a:ext>
+            </a:extLst>
+          </p:cNvPr>
+          <p:cNvSpPr>
+            <a:spLocks xmlns:a="http://schemas.openxmlformats.org/drawingml/2006/main" noGrp="1"/>
+          </p:cNvSpPr>
+          <p:nvPr/>
+        </p:nvSpPr>
+        <p:spPr>
+          <a:xfrm xmlns:a="http://schemas.openxmlformats.org/drawingml/2006/main">
+            <a:off x="6400800" y="4876800"/>
+            <a:ext cx="3905250" cy="266700"/>
+          </a:xfrm>
+          <a:prstGeom xmlns:a="http://schemas.openxmlformats.org/drawingml/2006/main" prst="rect">
+            <a:avLst/>
+          </a:prstGeom>
+          <a:noFill xmlns:a="http://schemas.openxmlformats.org/drawingml/2006/main"/>
+          <a:ln xmlns:a="http://schemas.openxmlformats.org/drawingml/2006/main" w="0">
+            <a:noFill/>
+            <a:prstDash val="solid"/>
+          </a:ln>
+        </p:spPr>
+        <p:txBody>
+          <a:bodyPr xmlns:a="http://schemas.openxmlformats.org/drawingml/2006/main"/>
+          <a:lstStyle xmlns:a="http://schemas.openxmlformats.org/drawingml/2006/main"/>
+          <a:p xmlns:a="http://schemas.openxmlformats.org/drawingml/2006/main">
+            <a:pPr algn="l">
+              <a:defRPr sz="1125" b="0">
+                <a:solidFill>
+                  <a:srgbClr val="7A7A7A"/>
+                </a:solidFill>
+              </a:defRPr>
+            </a:pPr>
+            <a:r>
+              <a:rPr sz="1125" b="0">
+                <a:solidFill>
+                  <a:srgbClr val="7A7A7A"/>
+                </a:solidFill>
+              </a:rPr>
+              <a:t>Used for planning, product shaping, and implementation support.</a:t>
+            </a:r>
+          </a:p>
+        </p:txBody>
+      </p:sp>
+      <p:sp>
+        <p:nvSpPr>
+          <p:cNvPr id="18" name="">
+            <a:extLst xmlns:a="http://schemas.openxmlformats.org/drawingml/2006/main">
+              <a:ext uri="{FF2B5EF4-FFF2-40B4-BE49-F238E27FC236}">
+                <a16:creationId xmlns:a16="http://schemas.microsoft.com/office/drawing/2014/main" id="{C7D2AF90-92AB-412B-8DBA-CBFFFA30D388}"/>
+              </a:ext>
+            </a:extLst>
+          </p:cNvPr>
+          <p:cNvSpPr>
+            <a:spLocks xmlns:a="http://schemas.openxmlformats.org/drawingml/2006/main" noGrp="1"/>
+          </p:cNvSpPr>
+          <p:nvPr/>
+        </p:nvSpPr>
+        <p:spPr>
+          <a:xfrm xmlns:a="http://schemas.openxmlformats.org/drawingml/2006/main">
+            <a:off x="819150" y="5562600"/>
+            <a:ext cx="1866900" cy="285750"/>
+          </a:xfrm>
+          <a:prstGeom xmlns:a="http://schemas.openxmlformats.org/drawingml/2006/main" prst="roundRect">
+            <a:avLst>
+              <a:gd name="adj" fmla="val 50000"/>
+            </a:avLst>
+          </a:prstGeom>
+          <a:solidFill xmlns:a="http://schemas.openxmlformats.org/drawingml/2006/main">
+            <a:srgbClr val="E04D8A"/>
+          </a:solidFill>
+          <a:ln xmlns:a="http://schemas.openxmlformats.org/drawingml/2006/main" w="13335">
+            <a:solidFill>
+              <a:srgbClr val="E04D8A"/>
+            </a:solidFill>
+            <a:prstDash val="solid"/>
+          </a:ln>
+        </p:spPr>
+      </p:sp>
+      <p:sp>
+        <p:nvSpPr>
+          <p:cNvPr id="19" name="">
+            <a:extLst xmlns:a="http://schemas.openxmlformats.org/drawingml/2006/main">
+              <a:ext uri="{FF2B5EF4-FFF2-40B4-BE49-F238E27FC236}">
+                <a16:creationId xmlns:a16="http://schemas.microsoft.com/office/drawing/2014/main" id="{0D55D738-E333-4DBC-8A46-074CD388E70A}"/>
+              </a:ext>
+            </a:extLst>
+          </p:cNvPr>
+          <p:cNvSpPr>
+            <a:spLocks xmlns:a="http://schemas.openxmlformats.org/drawingml/2006/main" noGrp="1"/>
+          </p:cNvSpPr>
+          <p:nvPr/>
+        </p:nvSpPr>
+        <p:spPr>
+          <a:xfrm xmlns:a="http://schemas.openxmlformats.org/drawingml/2006/main">
+            <a:off x="819150" y="5610225"/>
+            <a:ext cx="1866900" cy="171450"/>
+          </a:xfrm>
+          <a:prstGeom xmlns:a="http://schemas.openxmlformats.org/drawingml/2006/main" prst="rect">
+            <a:avLst/>
+          </a:prstGeom>
+          <a:noFill xmlns:a="http://schemas.openxmlformats.org/drawingml/2006/main"/>
+          <a:ln xmlns:a="http://schemas.openxmlformats.org/drawingml/2006/main" w="0">
+            <a:noFill/>
+            <a:prstDash val="solid"/>
+          </a:ln>
+        </p:spPr>
+        <p:txBody>
+          <a:bodyPr xmlns:a="http://schemas.openxmlformats.org/drawingml/2006/main"/>
+          <a:lstStyle xmlns:a="http://schemas.openxmlformats.org/drawingml/2006/main"/>
+          <a:p xmlns:a="http://schemas.openxmlformats.org/drawingml/2006/main">
+            <a:pPr algn="ctr">
+              <a:defRPr sz="975" b="1">
+                <a:solidFill>
+                  <a:srgbClr val="FFFFFF"/>
+                </a:solidFill>
+              </a:defRPr>
+            </a:pPr>
+            <a:r>
+              <a:rPr sz="975" b="1">
+                <a:solidFill>
+                  <a:srgbClr val="FFFFFF"/>
+                </a:solidFill>
+              </a:rPr>
+              <a:t>AI + INFRA + WORKFLOW</a:t>
+            </a:r>
+          </a:p>
+        </p:txBody>
+      </p:sp>
+      <p:sp>
+        <p:nvSpPr>
+          <p:cNvPr id="20" name="">
+            <a:extLst xmlns:a="http://schemas.openxmlformats.org/drawingml/2006/main">
+              <a:ext uri="{FF2B5EF4-FFF2-40B4-BE49-F238E27FC236}">
+                <a16:creationId xmlns:a16="http://schemas.microsoft.com/office/drawing/2014/main" id="{BC007B67-B696-4DAD-8B47-80176BCDCC2F}"/>
+              </a:ext>
+            </a:extLst>
+          </p:cNvPr>
+          <p:cNvSpPr>
+            <a:spLocks xmlns:a="http://schemas.openxmlformats.org/drawingml/2006/main" noGrp="1"/>
+          </p:cNvSpPr>
+          <p:nvPr/>
+        </p:nvSpPr>
+        <p:spPr>
+          <a:xfrm xmlns:a="http://schemas.openxmlformats.org/drawingml/2006/main">
+            <a:off x="2914650" y="5600700"/>
+            <a:ext cx="6858000" cy="228600"/>
+          </a:xfrm>
+          <a:prstGeom xmlns:a="http://schemas.openxmlformats.org/drawingml/2006/main" prst="rect">
+            <a:avLst/>
+          </a:prstGeom>
+          <a:noFill xmlns:a="http://schemas.openxmlformats.org/drawingml/2006/main"/>
+          <a:ln xmlns:a="http://schemas.openxmlformats.org/drawingml/2006/main" w="0">
+            <a:noFill/>
+            <a:prstDash val="solid"/>
+          </a:ln>
+        </p:spPr>
+        <p:txBody>
+          <a:bodyPr xmlns:a="http://schemas.openxmlformats.org/drawingml/2006/main"/>
+          <a:lstStyle xmlns:a="http://schemas.openxmlformats.org/drawingml/2006/main"/>
+          <a:p xmlns:a="http://schemas.openxmlformats.org/drawingml/2006/main">
+            <a:pPr algn="l">
+              <a:defRPr sz="1425" b="1">
+                <a:solidFill>
+                  <a:srgbClr val="3D3D3D"/>
+                </a:solidFill>
+              </a:defRPr>
+            </a:pPr>
+            <a:r>
+              <a:rPr sz="1425" b="1">
+                <a:solidFill>
+                  <a:srgbClr val="3D3D3D"/>
+                </a:solidFill>
+              </a:rPr>
+              <a:t>The goal: ship a review-gated workflow for AI visibility, not another static SEO report.</a:t>
+            </a:r>
+          </a:p>
+        </p:txBody>
+      </p:sp>
+    </p:spTree>
+    <p:extLst>
+      <p:ext uri="{BB962C8B-B14F-4D97-AF65-F5344CB8AC3E}">
+        <p14:creationId xmlns:p14="http://schemas.microsoft.com/office/powerpoint/2010/main" val="865906690"/>
       </p:ext>
     </p:extLst>
   </p:cSld>
